--- a/deliverables/proposal_2026_06_03/PromoMind_proposal_slides_zh.pptx
+++ b/deliverables/proposal_2026_06_03/PromoMind_proposal_slides_zh.pptx
@@ -2,22 +2,22 @@
 <file path=ppt/presentation.xml><?xml version="1.0" encoding="utf-8"?>
 <p:presentation xmlns:p="http://schemas.openxmlformats.org/presentationml/2006/main">
   <p:sldMasterIdLst>
-    <p:sldMasterId xmlns:r="http://schemas.openxmlformats.org/officeDocument/2006/relationships" id="2147483648" r:id="Rb019341c9a5b4d8b"/>
+    <p:sldMasterId xmlns:r="http://schemas.openxmlformats.org/officeDocument/2006/relationships" id="2147483648" r:id="Rb8807933ce0c4f0c"/>
   </p:sldMasterIdLst>
   <p:notesMasterIdLst>
-    <p:notesMasterId xmlns:r="http://schemas.openxmlformats.org/officeDocument/2006/relationships" r:id="R89b1064e216547d5"/>
+    <p:notesMasterId xmlns:r="http://schemas.openxmlformats.org/officeDocument/2006/relationships" r:id="Rf1df337b759340f7"/>
   </p:notesMasterIdLst>
   <p:sldIdLst>
-    <p:sldId xmlns:r="http://schemas.openxmlformats.org/officeDocument/2006/relationships" id="256" r:id="R5e03492fa7e54220"/>
-    <p:sldId xmlns:r="http://schemas.openxmlformats.org/officeDocument/2006/relationships" id="257" r:id="R0cb5b4cdb71d49fd"/>
-    <p:sldId xmlns:r="http://schemas.openxmlformats.org/officeDocument/2006/relationships" id="258" r:id="Rf08e880c01be4ab1"/>
-    <p:sldId xmlns:r="http://schemas.openxmlformats.org/officeDocument/2006/relationships" id="259" r:id="R22c5a8f7ea1f4b0a"/>
-    <p:sldId xmlns:r="http://schemas.openxmlformats.org/officeDocument/2006/relationships" id="260" r:id="R103ed9c0d3c74290"/>
-    <p:sldId xmlns:r="http://schemas.openxmlformats.org/officeDocument/2006/relationships" id="261" r:id="R4bf228e63dce4f10"/>
-    <p:sldId xmlns:r="http://schemas.openxmlformats.org/officeDocument/2006/relationships" id="262" r:id="R7ed9479126074c7c"/>
-    <p:sldId xmlns:r="http://schemas.openxmlformats.org/officeDocument/2006/relationships" id="263" r:id="Re2de5f9ad0af4439"/>
-    <p:sldId xmlns:r="http://schemas.openxmlformats.org/officeDocument/2006/relationships" id="264" r:id="R8dd836cadc4244c8"/>
-    <p:sldId xmlns:r="http://schemas.openxmlformats.org/officeDocument/2006/relationships" id="265" r:id="Re90c2d9271654e7d"/>
+    <p:sldId xmlns:r="http://schemas.openxmlformats.org/officeDocument/2006/relationships" id="256" r:id="Ref68c98d3ba6440c"/>
+    <p:sldId xmlns:r="http://schemas.openxmlformats.org/officeDocument/2006/relationships" id="257" r:id="Rc262ba980ec44c1e"/>
+    <p:sldId xmlns:r="http://schemas.openxmlformats.org/officeDocument/2006/relationships" id="258" r:id="Rc0dbb74f2841496a"/>
+    <p:sldId xmlns:r="http://schemas.openxmlformats.org/officeDocument/2006/relationships" id="259" r:id="Re65f793e5a7a4094"/>
+    <p:sldId xmlns:r="http://schemas.openxmlformats.org/officeDocument/2006/relationships" id="260" r:id="R4e3d4226ea5b475d"/>
+    <p:sldId xmlns:r="http://schemas.openxmlformats.org/officeDocument/2006/relationships" id="261" r:id="R53c36dfec5104e4d"/>
+    <p:sldId xmlns:r="http://schemas.openxmlformats.org/officeDocument/2006/relationships" id="262" r:id="R2914e21a37cd46a0"/>
+    <p:sldId xmlns:r="http://schemas.openxmlformats.org/officeDocument/2006/relationships" id="263" r:id="Rcc3bc53c70c94a9d"/>
+    <p:sldId xmlns:r="http://schemas.openxmlformats.org/officeDocument/2006/relationships" id="264" r:id="R25704ddbb4c7440c"/>
+    <p:sldId xmlns:r="http://schemas.openxmlformats.org/officeDocument/2006/relationships" id="265" r:id="R747c3fcd236041ae"/>
   </p:sldIdLst>
   <p:sldSz cx="12192000" cy="6858000"/>
   <p:notesSz cx="6858000" cy="9144000"/>
@@ -1158,7 +1158,7 @@
   </p:cSld>
   <p:clrMap bg1="lt1" tx1="dk1" bg2="lt2" tx2="dk2" accent1="accent1" accent2="accent2" accent3="accent3" accent4="accent4" accent5="accent5" accent6="accent6" hlink="hlink" folHlink="folHlink"/>
   <p:sldLayoutIdLst>
-    <p:sldLayoutId xmlns:r="http://schemas.openxmlformats.org/officeDocument/2006/relationships" id="2147483649" r:id="Ra880739e8899464e"/>
+    <p:sldLayoutId xmlns:r="http://schemas.openxmlformats.org/officeDocument/2006/relationships" id="2147483649" r:id="Re980dd6c94324652"/>
   </p:sldLayoutIdLst>
   <p:txStyles>
     <p:titleStyle>
@@ -1656,7 +1656,7 @@
           <p:cNvPr id="1" name="">
             <a:extLst xmlns:a="http://schemas.openxmlformats.org/drawingml/2006/main">
               <a:ext uri="{FF2B5EF4-FFF2-40B4-BE49-F238E27FC236}">
-                <a16:creationId xmlns:a16="http://schemas.microsoft.com/office/drawing/2014/main" id="{446DD566-E5AE-4142-A070-71462D110218}"/>
+                <a16:creationId xmlns:a16="http://schemas.microsoft.com/office/drawing/2014/main" id="{154A0F42-B85A-4496-9E67-14C4F8EB9527}"/>
               </a:ext>
             </a:extLst>
           </p:cNvPr>
@@ -1691,7 +1691,7 @@
           <p:cNvPr id="2" name="">
             <a:extLst xmlns:a="http://schemas.openxmlformats.org/drawingml/2006/main">
               <a:ext uri="{FF2B5EF4-FFF2-40B4-BE49-F238E27FC236}">
-                <a16:creationId xmlns:a16="http://schemas.microsoft.com/office/drawing/2014/main" id="{BBFE53B7-C104-460F-BA3E-FC09336F9425}"/>
+                <a16:creationId xmlns:a16="http://schemas.microsoft.com/office/drawing/2014/main" id="{EBDB276A-B916-4D03-BF60-61E9076F589C}"/>
               </a:ext>
             </a:extLst>
           </p:cNvPr>
@@ -1726,7 +1726,7 @@
           <p:cNvPr id="3" name="">
             <a:extLst xmlns:a="http://schemas.openxmlformats.org/drawingml/2006/main">
               <a:ext uri="{FF2B5EF4-FFF2-40B4-BE49-F238E27FC236}">
-                <a16:creationId xmlns:a16="http://schemas.microsoft.com/office/drawing/2014/main" id="{7BB80872-3678-4312-851A-91AA2A966E49}"/>
+                <a16:creationId xmlns:a16="http://schemas.microsoft.com/office/drawing/2014/main" id="{DC1D19BF-48F7-46E3-9237-C1EF39E0BA96}"/>
               </a:ext>
             </a:extLst>
           </p:cNvPr>
@@ -1759,7 +1759,7 @@
           <p:cNvPr id="4" name="">
             <a:extLst xmlns:a="http://schemas.openxmlformats.org/drawingml/2006/main">
               <a:ext uri="{FF2B5EF4-FFF2-40B4-BE49-F238E27FC236}">
-                <a16:creationId xmlns:a16="http://schemas.microsoft.com/office/drawing/2014/main" id="{9987DD58-C191-42A4-9A73-BA31F7CF48E8}"/>
+                <a16:creationId xmlns:a16="http://schemas.microsoft.com/office/drawing/2014/main" id="{3D32A162-4CB6-4277-B22A-3E9E2DBAB3E1}"/>
               </a:ext>
             </a:extLst>
           </p:cNvPr>
@@ -1823,7 +1823,7 @@
           <p:cNvPr id="5" name="">
             <a:extLst xmlns:a="http://schemas.openxmlformats.org/drawingml/2006/main">
               <a:ext uri="{FF2B5EF4-FFF2-40B4-BE49-F238E27FC236}">
-                <a16:creationId xmlns:a16="http://schemas.microsoft.com/office/drawing/2014/main" id="{4C681D8F-6CB8-4A89-86B2-A9E97DB02640}"/>
+                <a16:creationId xmlns:a16="http://schemas.microsoft.com/office/drawing/2014/main" id="{1D7E60AB-6E80-4C25-915B-A742BD0133CD}"/>
               </a:ext>
             </a:extLst>
           </p:cNvPr>
@@ -1887,7 +1887,7 @@
           <p:cNvPr id="6" name="">
             <a:extLst xmlns:a="http://schemas.openxmlformats.org/drawingml/2006/main">
               <a:ext uri="{FF2B5EF4-FFF2-40B4-BE49-F238E27FC236}">
-                <a16:creationId xmlns:a16="http://schemas.microsoft.com/office/drawing/2014/main" id="{D8D49154-4C9F-4282-86AB-6F42A96F69AC}"/>
+                <a16:creationId xmlns:a16="http://schemas.microsoft.com/office/drawing/2014/main" id="{0A5847DB-F152-4506-8915-214F901E560D}"/>
               </a:ext>
             </a:extLst>
           </p:cNvPr>
@@ -1951,7 +1951,7 @@
           <p:cNvPr id="7" name="">
             <a:extLst xmlns:a="http://schemas.openxmlformats.org/drawingml/2006/main">
               <a:ext uri="{FF2B5EF4-FFF2-40B4-BE49-F238E27FC236}">
-                <a16:creationId xmlns:a16="http://schemas.microsoft.com/office/drawing/2014/main" id="{7E6C4C63-FA9C-419A-9926-9EE94C73064F}"/>
+                <a16:creationId xmlns:a16="http://schemas.microsoft.com/office/drawing/2014/main" id="{3F8CEADC-AD09-413F-A5DA-6870B8510226}"/>
               </a:ext>
             </a:extLst>
           </p:cNvPr>
@@ -2015,7 +2015,7 @@
           <p:cNvPr id="8" name="">
             <a:extLst xmlns:a="http://schemas.openxmlformats.org/drawingml/2006/main">
               <a:ext uri="{FF2B5EF4-FFF2-40B4-BE49-F238E27FC236}">
-                <a16:creationId xmlns:a16="http://schemas.microsoft.com/office/drawing/2014/main" id="{829FC166-41E4-47E0-95F4-BABEA9EE17A1}"/>
+                <a16:creationId xmlns:a16="http://schemas.microsoft.com/office/drawing/2014/main" id="{10BA5B16-A53F-4CD1-9E05-E38C2F3586B8}"/>
               </a:ext>
             </a:extLst>
           </p:cNvPr>
@@ -2048,7 +2048,7 @@
           <p:cNvPr id="9" name="">
             <a:extLst xmlns:a="http://schemas.openxmlformats.org/drawingml/2006/main">
               <a:ext uri="{FF2B5EF4-FFF2-40B4-BE49-F238E27FC236}">
-                <a16:creationId xmlns:a16="http://schemas.microsoft.com/office/drawing/2014/main" id="{0FE05059-205E-47C9-9A6A-8CE95AF9FCC5}"/>
+                <a16:creationId xmlns:a16="http://schemas.microsoft.com/office/drawing/2014/main" id="{4AD792F4-3725-44DB-8597-29338CD17C5A}"/>
               </a:ext>
             </a:extLst>
           </p:cNvPr>
@@ -2112,7 +2112,7 @@
           <p:cNvPr id="10" name="">
             <a:extLst xmlns:a="http://schemas.openxmlformats.org/drawingml/2006/main">
               <a:ext uri="{FF2B5EF4-FFF2-40B4-BE49-F238E27FC236}">
-                <a16:creationId xmlns:a16="http://schemas.microsoft.com/office/drawing/2014/main" id="{DEA60175-F41F-4943-8602-B685B03D7F41}"/>
+                <a16:creationId xmlns:a16="http://schemas.microsoft.com/office/drawing/2014/main" id="{EF1CB747-DA98-40EA-BA51-FD236EEFEAE0}"/>
               </a:ext>
             </a:extLst>
           </p:cNvPr>
@@ -2176,7 +2176,7 @@
           <p:cNvPr id="11" name="">
             <a:extLst xmlns:a="http://schemas.openxmlformats.org/drawingml/2006/main">
               <a:ext uri="{FF2B5EF4-FFF2-40B4-BE49-F238E27FC236}">
-                <a16:creationId xmlns:a16="http://schemas.microsoft.com/office/drawing/2014/main" id="{D77A942F-6ED3-4057-A85A-4FB38815B404}"/>
+                <a16:creationId xmlns:a16="http://schemas.microsoft.com/office/drawing/2014/main" id="{D74632C7-DEA5-4BFD-9585-B52BFA6B396E}"/>
               </a:ext>
             </a:extLst>
           </p:cNvPr>
@@ -2240,7 +2240,7 @@
           <p:cNvPr id="12" name="">
             <a:extLst xmlns:a="http://schemas.openxmlformats.org/drawingml/2006/main">
               <a:ext uri="{FF2B5EF4-FFF2-40B4-BE49-F238E27FC236}">
-                <a16:creationId xmlns:a16="http://schemas.microsoft.com/office/drawing/2014/main" id="{20C9AE4E-DC56-4D2D-94BB-189544ABAC23}"/>
+                <a16:creationId xmlns:a16="http://schemas.microsoft.com/office/drawing/2014/main" id="{76FC78EB-C74C-4C1D-AAC1-3784ABDB2241}"/>
               </a:ext>
             </a:extLst>
           </p:cNvPr>
@@ -2273,7 +2273,7 @@
           <p:cNvPr id="13" name="">
             <a:extLst xmlns:a="http://schemas.openxmlformats.org/drawingml/2006/main">
               <a:ext uri="{FF2B5EF4-FFF2-40B4-BE49-F238E27FC236}">
-                <a16:creationId xmlns:a16="http://schemas.microsoft.com/office/drawing/2014/main" id="{9EAE01FE-AC34-42F8-8DA0-4EDF94F74087}"/>
+                <a16:creationId xmlns:a16="http://schemas.microsoft.com/office/drawing/2014/main" id="{E821D888-337B-4F76-9EE5-E6E9A9F4F397}"/>
               </a:ext>
             </a:extLst>
           </p:cNvPr>
@@ -2337,7 +2337,7 @@
           <p:cNvPr id="14" name="">
             <a:extLst xmlns:a="http://schemas.openxmlformats.org/drawingml/2006/main">
               <a:ext uri="{FF2B5EF4-FFF2-40B4-BE49-F238E27FC236}">
-                <a16:creationId xmlns:a16="http://schemas.microsoft.com/office/drawing/2014/main" id="{31794478-CA40-4F15-9ABA-23B97B07B05F}"/>
+                <a16:creationId xmlns:a16="http://schemas.microsoft.com/office/drawing/2014/main" id="{3AE8D4AC-B5BF-40BF-9EA0-1FD851F4C543}"/>
               </a:ext>
             </a:extLst>
           </p:cNvPr>
@@ -2401,7 +2401,7 @@
           <p:cNvPr id="15" name="">
             <a:extLst xmlns:a="http://schemas.openxmlformats.org/drawingml/2006/main">
               <a:ext uri="{FF2B5EF4-FFF2-40B4-BE49-F238E27FC236}">
-                <a16:creationId xmlns:a16="http://schemas.microsoft.com/office/drawing/2014/main" id="{E0AD05D4-D4CC-4D56-B12E-744F26D131FB}"/>
+                <a16:creationId xmlns:a16="http://schemas.microsoft.com/office/drawing/2014/main" id="{565B1885-CC94-4D1E-904D-26FDDEF2F1F3}"/>
               </a:ext>
             </a:extLst>
           </p:cNvPr>
@@ -2465,7 +2465,7 @@
           <p:cNvPr id="16" name="">
             <a:extLst xmlns:a="http://schemas.openxmlformats.org/drawingml/2006/main">
               <a:ext uri="{FF2B5EF4-FFF2-40B4-BE49-F238E27FC236}">
-                <a16:creationId xmlns:a16="http://schemas.microsoft.com/office/drawing/2014/main" id="{7B6E0E43-9EDC-4575-A06A-4C9EE357E168}"/>
+                <a16:creationId xmlns:a16="http://schemas.microsoft.com/office/drawing/2014/main" id="{A744DB96-9034-4D0B-81DD-299F26C79902}"/>
               </a:ext>
             </a:extLst>
           </p:cNvPr>
@@ -2498,7 +2498,7 @@
           <p:cNvPr id="17" name="">
             <a:extLst xmlns:a="http://schemas.openxmlformats.org/drawingml/2006/main">
               <a:ext uri="{FF2B5EF4-FFF2-40B4-BE49-F238E27FC236}">
-                <a16:creationId xmlns:a16="http://schemas.microsoft.com/office/drawing/2014/main" id="{C49A87C8-0A3D-45EE-B834-249B57A7CFB2}"/>
+                <a16:creationId xmlns:a16="http://schemas.microsoft.com/office/drawing/2014/main" id="{4D212423-4174-4FB0-A315-2D449C1F9DA2}"/>
               </a:ext>
             </a:extLst>
           </p:cNvPr>
@@ -2562,7 +2562,7 @@
           <p:cNvPr id="18" name="">
             <a:extLst xmlns:a="http://schemas.openxmlformats.org/drawingml/2006/main">
               <a:ext uri="{FF2B5EF4-FFF2-40B4-BE49-F238E27FC236}">
-                <a16:creationId xmlns:a16="http://schemas.microsoft.com/office/drawing/2014/main" id="{37CE09D7-1CAE-435C-BFFD-E820736ADFE6}"/>
+                <a16:creationId xmlns:a16="http://schemas.microsoft.com/office/drawing/2014/main" id="{AB76431F-BCF7-4ECB-B918-8714B7DEDB28}"/>
               </a:ext>
             </a:extLst>
           </p:cNvPr>
@@ -2626,7 +2626,7 @@
           <p:cNvPr id="19" name="">
             <a:extLst xmlns:a="http://schemas.openxmlformats.org/drawingml/2006/main">
               <a:ext uri="{FF2B5EF4-FFF2-40B4-BE49-F238E27FC236}">
-                <a16:creationId xmlns:a16="http://schemas.microsoft.com/office/drawing/2014/main" id="{35D34496-120D-4F63-A87C-9743F2134DC6}"/>
+                <a16:creationId xmlns:a16="http://schemas.microsoft.com/office/drawing/2014/main" id="{9E25736A-7242-44C5-B773-92D937265D6F}"/>
               </a:ext>
             </a:extLst>
           </p:cNvPr>
@@ -2690,7 +2690,7 @@
           <p:cNvPr id="20" name="">
             <a:extLst xmlns:a="http://schemas.openxmlformats.org/drawingml/2006/main">
               <a:ext uri="{FF2B5EF4-FFF2-40B4-BE49-F238E27FC236}">
-                <a16:creationId xmlns:a16="http://schemas.microsoft.com/office/drawing/2014/main" id="{753B7D2B-3A5F-4997-88B0-96EFB9B763CB}"/>
+                <a16:creationId xmlns:a16="http://schemas.microsoft.com/office/drawing/2014/main" id="{6DFC38FA-8A91-400E-8E81-BCE891FAFB90}"/>
               </a:ext>
             </a:extLst>
           </p:cNvPr>
@@ -2723,7 +2723,7 @@
           <p:cNvPr id="21" name="">
             <a:extLst xmlns:a="http://schemas.openxmlformats.org/drawingml/2006/main">
               <a:ext uri="{FF2B5EF4-FFF2-40B4-BE49-F238E27FC236}">
-                <a16:creationId xmlns:a16="http://schemas.microsoft.com/office/drawing/2014/main" id="{A700961F-7745-4385-BF19-1E67F985A26C}"/>
+                <a16:creationId xmlns:a16="http://schemas.microsoft.com/office/drawing/2014/main" id="{E004DC61-E55E-4D75-BAF0-24503E6C0E3B}"/>
               </a:ext>
             </a:extLst>
           </p:cNvPr>
@@ -2787,7 +2787,7 @@
           <p:cNvPr id="22" name="">
             <a:extLst xmlns:a="http://schemas.openxmlformats.org/drawingml/2006/main">
               <a:ext uri="{FF2B5EF4-FFF2-40B4-BE49-F238E27FC236}">
-                <a16:creationId xmlns:a16="http://schemas.microsoft.com/office/drawing/2014/main" id="{94DE46B8-8030-46F9-B012-5F8726948195}"/>
+                <a16:creationId xmlns:a16="http://schemas.microsoft.com/office/drawing/2014/main" id="{BB3ADBFC-DA8A-41A7-A97B-25F00F33F8BB}"/>
               </a:ext>
             </a:extLst>
           </p:cNvPr>
@@ -2851,7 +2851,7 @@
           <p:cNvPr id="23" name="">
             <a:extLst xmlns:a="http://schemas.openxmlformats.org/drawingml/2006/main">
               <a:ext uri="{FF2B5EF4-FFF2-40B4-BE49-F238E27FC236}">
-                <a16:creationId xmlns:a16="http://schemas.microsoft.com/office/drawing/2014/main" id="{2962F451-F893-4A87-B555-1FE48E4AAA9B}"/>
+                <a16:creationId xmlns:a16="http://schemas.microsoft.com/office/drawing/2014/main" id="{5AE6E756-F87F-4EAC-B1FB-E80A54F501D5}"/>
               </a:ext>
             </a:extLst>
           </p:cNvPr>
@@ -2915,7 +2915,7 @@
           <p:cNvPr id="24" name="">
             <a:extLst xmlns:a="http://schemas.openxmlformats.org/drawingml/2006/main">
               <a:ext uri="{FF2B5EF4-FFF2-40B4-BE49-F238E27FC236}">
-                <a16:creationId xmlns:a16="http://schemas.microsoft.com/office/drawing/2014/main" id="{A417D4DB-D0DF-4A4B-874E-7FA5BCDC4C58}"/>
+                <a16:creationId xmlns:a16="http://schemas.microsoft.com/office/drawing/2014/main" id="{B79A3D8D-6615-404A-9061-5B13EED7769E}"/>
               </a:ext>
             </a:extLst>
           </p:cNvPr>
@@ -2927,7 +2927,7 @@
         <p:spPr>
           <a:xfrm xmlns:a="http://schemas.openxmlformats.org/drawingml/2006/main">
             <a:off x="609600" y="5619750"/>
-            <a:ext cx="8572500" cy="228600"/>
+            <a:ext cx="9334500" cy="228600"/>
           </a:xfrm>
           <a:prstGeom xmlns:a="http://schemas.openxmlformats.org/drawingml/2006/main" prst="rect">
             <a:avLst/>
@@ -2969,7 +2969,7 @@
                 <a:ea typeface="Aptos"/>
                 <a:cs typeface="Aptos"/>
               </a:rPr>
-              <a:t>汇报分工：P1 数据集/问题/系统流程 | P2 方法/重排序/实验/demo</a:t>
+              <a:t>数据集：The Complete Journey | 任务：下一阶段 Top-K 超市商品推荐 | 亮点：商业感知重排序</a:t>
             </a:r>
           </a:p>
         </p:txBody>
@@ -2979,7 +2979,7 @@
           <p:cNvPr id="25" name="">
             <a:extLst xmlns:a="http://schemas.openxmlformats.org/drawingml/2006/main">
               <a:ext uri="{FF2B5EF4-FFF2-40B4-BE49-F238E27FC236}">
-                <a16:creationId xmlns:a16="http://schemas.microsoft.com/office/drawing/2014/main" id="{04A2BF21-6D94-4A2E-9829-5566A158776C}"/>
+                <a16:creationId xmlns:a16="http://schemas.microsoft.com/office/drawing/2014/main" id="{312885E2-F8B5-4E93-BCF8-517DB9541628}"/>
               </a:ext>
             </a:extLst>
           </p:cNvPr>
@@ -3014,7 +3014,7 @@
           <p:cNvPr id="26" name="">
             <a:extLst xmlns:a="http://schemas.openxmlformats.org/drawingml/2006/main">
               <a:ext uri="{FF2B5EF4-FFF2-40B4-BE49-F238E27FC236}">
-                <a16:creationId xmlns:a16="http://schemas.microsoft.com/office/drawing/2014/main" id="{B0BD242C-8768-4140-A233-1552A104B62F}"/>
+                <a16:creationId xmlns:a16="http://schemas.microsoft.com/office/drawing/2014/main" id="{431C6842-0634-4F1E-A55A-9520A886A1ED}"/>
               </a:ext>
             </a:extLst>
           </p:cNvPr>
@@ -3078,7 +3078,7 @@
           <p:cNvPr id="27" name="">
             <a:extLst xmlns:a="http://schemas.openxmlformats.org/drawingml/2006/main">
               <a:ext uri="{FF2B5EF4-FFF2-40B4-BE49-F238E27FC236}">
-                <a16:creationId xmlns:a16="http://schemas.microsoft.com/office/drawing/2014/main" id="{7D66AEAE-ECAB-4C34-A036-16FC770A7BE3}"/>
+                <a16:creationId xmlns:a16="http://schemas.microsoft.com/office/drawing/2014/main" id="{58836131-1987-45EE-8749-D631C0B881EE}"/>
               </a:ext>
             </a:extLst>
           </p:cNvPr>
@@ -3140,7 +3140,7 @@
     </p:spTree>
     <p:extLst>
       <p:ext uri="{BB962C8B-B14F-4D97-AF65-F5344CB8AC3E}">
-        <p14:creationId xmlns:p14="http://schemas.microsoft.com/office/powerpoint/2010/main" val="1592741720"/>
+        <p14:creationId xmlns:p14="http://schemas.microsoft.com/office/powerpoint/2010/main" val="78014007"/>
       </p:ext>
     </p:extLst>
   </p:cSld>
@@ -3164,7 +3164,7 @@
           <p:cNvPr id="1" name="">
             <a:extLst xmlns:a="http://schemas.openxmlformats.org/drawingml/2006/main">
               <a:ext uri="{FF2B5EF4-FFF2-40B4-BE49-F238E27FC236}">
-                <a16:creationId xmlns:a16="http://schemas.microsoft.com/office/drawing/2014/main" id="{65DA1769-2558-4C68-876C-4092BF8034E2}"/>
+                <a16:creationId xmlns:a16="http://schemas.microsoft.com/office/drawing/2014/main" id="{284C28D2-118D-4AD0-B3B9-9286788F5B24}"/>
               </a:ext>
             </a:extLst>
           </p:cNvPr>
@@ -3199,7 +3199,7 @@
           <p:cNvPr id="2" name="">
             <a:extLst xmlns:a="http://schemas.openxmlformats.org/drawingml/2006/main">
               <a:ext uri="{FF2B5EF4-FFF2-40B4-BE49-F238E27FC236}">
-                <a16:creationId xmlns:a16="http://schemas.microsoft.com/office/drawing/2014/main" id="{DD55A51A-1DBC-4622-AD56-7E3DD0C09A2B}"/>
+                <a16:creationId xmlns:a16="http://schemas.microsoft.com/office/drawing/2014/main" id="{DD512F64-0D1A-4E7A-824E-0F03349D3CF5}"/>
               </a:ext>
             </a:extLst>
           </p:cNvPr>
@@ -3234,7 +3234,7 @@
           <p:cNvPr id="3" name="">
             <a:extLst xmlns:a="http://schemas.openxmlformats.org/drawingml/2006/main">
               <a:ext uri="{FF2B5EF4-FFF2-40B4-BE49-F238E27FC236}">
-                <a16:creationId xmlns:a16="http://schemas.microsoft.com/office/drawing/2014/main" id="{5EE507DB-A12B-483B-B052-0D96635F5EE4}"/>
+                <a16:creationId xmlns:a16="http://schemas.microsoft.com/office/drawing/2014/main" id="{0517710B-33D7-4BFD-BB92-D1D11B250F30}"/>
               </a:ext>
             </a:extLst>
           </p:cNvPr>
@@ -3288,7 +3288,7 @@
                 <a:ea typeface="Aptos"/>
                 <a:cs typeface="Aptos"/>
               </a:rPr>
-              <a:t>计划与分工</a:t>
+              <a:t>可行性与风险控制</a:t>
             </a:r>
           </a:p>
         </p:txBody>
@@ -3298,7 +3298,7 @@
           <p:cNvPr id="4" name="">
             <a:extLst xmlns:a="http://schemas.openxmlformats.org/drawingml/2006/main">
               <a:ext uri="{FF2B5EF4-FFF2-40B4-BE49-F238E27FC236}">
-                <a16:creationId xmlns:a16="http://schemas.microsoft.com/office/drawing/2014/main" id="{AC44496E-FA57-405A-A212-2492599E5928}"/>
+                <a16:creationId xmlns:a16="http://schemas.microsoft.com/office/drawing/2014/main" id="{25811844-CFAD-49A8-850F-8F09E1F26540}"/>
               </a:ext>
             </a:extLst>
           </p:cNvPr>
@@ -3352,7 +3352,7 @@
                 <a:ea typeface="Aptos Display"/>
                 <a:cs typeface="Aptos Display"/>
               </a:rPr>
-              <a:t>主线可完成；bonus 模型不影响项目完整性。</a:t>
+              <a:t>项目有稳定主线，也有清晰扩展方向。</a:t>
             </a:r>
           </a:p>
         </p:txBody>
@@ -3362,7 +3362,7 @@
           <p:cNvPr id="5" name="">
             <a:extLst xmlns:a="http://schemas.openxmlformats.org/drawingml/2006/main">
               <a:ext uri="{FF2B5EF4-FFF2-40B4-BE49-F238E27FC236}">
-                <a16:creationId xmlns:a16="http://schemas.microsoft.com/office/drawing/2014/main" id="{D505B7A9-9FB1-432E-9EDD-3EDD1B850BC3}"/>
+                <a16:creationId xmlns:a16="http://schemas.microsoft.com/office/drawing/2014/main" id="{D09535C0-EED3-4D9A-931D-8419E6861C48}"/>
               </a:ext>
             </a:extLst>
           </p:cNvPr>
@@ -3374,7 +3374,7 @@
         <p:spPr>
           <a:xfrm xmlns:a="http://schemas.openxmlformats.org/drawingml/2006/main">
             <a:off x="609600" y="1695450"/>
-            <a:ext cx="8096250" cy="533400"/>
+            <a:ext cx="9334500" cy="533400"/>
           </a:xfrm>
           <a:prstGeom xmlns:a="http://schemas.openxmlformats.org/drawingml/2006/main" prst="rect">
             <a:avLst/>
@@ -3416,7 +3416,7 @@
                 <a:ea typeface="Aptos"/>
                 <a:cs typeface="Aptos"/>
               </a:rPr>
-              <a:t>两位汇报人分工清晰，线上会议可以直接集中问问题。</a:t>
+              <a:t>最终汇报会展示确定数据集、模型比较、重排序消融、可运行 demo、限制讨论和未来工作。</a:t>
             </a:r>
           </a:p>
         </p:txBody>
@@ -3426,19 +3426,19 @@
           <p:cNvPr id="6" name="">
             <a:extLst xmlns:a="http://schemas.openxmlformats.org/drawingml/2006/main">
               <a:ext uri="{FF2B5EF4-FFF2-40B4-BE49-F238E27FC236}">
-                <a16:creationId xmlns:a16="http://schemas.microsoft.com/office/drawing/2014/main" id="{B736CBBA-8086-41B5-BDCF-B60DDDB04500}"/>
-              </a:ext>
-            </a:extLst>
-          </p:cNvPr>
-          <p:cNvSpPr>
-            <a:spLocks xmlns:a="http://schemas.openxmlformats.org/drawingml/2006/main" noGrp="1"/>
-          </p:cNvSpPr>
-          <p:nvPr/>
-        </p:nvSpPr>
-        <p:spPr>
-          <a:xfrm xmlns:a="http://schemas.openxmlformats.org/drawingml/2006/main">
-            <a:off x="666750" y="2266950"/>
-            <a:ext cx="5143500" cy="1352550"/>
+                <a16:creationId xmlns:a16="http://schemas.microsoft.com/office/drawing/2014/main" id="{B012BD1E-B4E9-4863-AC75-110ECD12DB13}"/>
+              </a:ext>
+            </a:extLst>
+          </p:cNvPr>
+          <p:cNvSpPr>
+            <a:spLocks xmlns:a="http://schemas.openxmlformats.org/drawingml/2006/main" noGrp="1"/>
+          </p:cNvSpPr>
+          <p:nvPr/>
+        </p:nvSpPr>
+        <p:spPr>
+          <a:xfrm xmlns:a="http://schemas.openxmlformats.org/drawingml/2006/main">
+            <a:off x="666750" y="2333625"/>
+            <a:ext cx="3238500" cy="1905000"/>
           </a:xfrm>
           <a:prstGeom xmlns:a="http://schemas.openxmlformats.org/drawingml/2006/main" prst="rect">
             <a:avLst/>
@@ -3459,19 +3459,19 @@
           <p:cNvPr id="7" name="">
             <a:extLst xmlns:a="http://schemas.openxmlformats.org/drawingml/2006/main">
               <a:ext uri="{FF2B5EF4-FFF2-40B4-BE49-F238E27FC236}">
-                <a16:creationId xmlns:a16="http://schemas.microsoft.com/office/drawing/2014/main" id="{1799B434-38CD-46F9-A138-66B8CC090CD3}"/>
-              </a:ext>
-            </a:extLst>
-          </p:cNvPr>
-          <p:cNvSpPr>
-            <a:spLocks xmlns:a="http://schemas.openxmlformats.org/drawingml/2006/main" noGrp="1"/>
-          </p:cNvSpPr>
-          <p:nvPr/>
-        </p:nvSpPr>
-        <p:spPr>
-          <a:xfrm xmlns:a="http://schemas.openxmlformats.org/drawingml/2006/main">
-            <a:off x="876300" y="2476500"/>
-            <a:ext cx="2095500" cy="228600"/>
+                <a16:creationId xmlns:a16="http://schemas.microsoft.com/office/drawing/2014/main" id="{8764293D-F866-443D-9D8D-5359FD9398B4}"/>
+              </a:ext>
+            </a:extLst>
+          </p:cNvPr>
+          <p:cNvSpPr>
+            <a:spLocks xmlns:a="http://schemas.openxmlformats.org/drawingml/2006/main" noGrp="1"/>
+          </p:cNvSpPr>
+          <p:nvPr/>
+        </p:nvSpPr>
+        <p:spPr>
+          <a:xfrm xmlns:a="http://schemas.openxmlformats.org/drawingml/2006/main">
+            <a:off x="876300" y="2562225"/>
+            <a:ext cx="2571750" cy="228600"/>
           </a:xfrm>
           <a:prstGeom xmlns:a="http://schemas.openxmlformats.org/drawingml/2006/main" prst="rect">
             <a:avLst/>
@@ -3495,7 +3495,7 @@
           <a:lstStyle xmlns:a="http://schemas.openxmlformats.org/drawingml/2006/main"/>
           <a:p xmlns:a="http://schemas.openxmlformats.org/drawingml/2006/main">
             <a:pPr algn="l">
-              <a:defRPr sz="1500" b="1">
+              <a:defRPr sz="1350" b="1">
                 <a:solidFill>
                   <a:srgbClr val="146B4D"/>
                 </a:solidFill>
@@ -3505,7 +3505,7 @@
               </a:defRPr>
             </a:pPr>
             <a:r>
-              <a:rPr sz="1500" b="1">
+              <a:rPr sz="1350" b="1">
                 <a:solidFill>
                   <a:srgbClr val="146B4D"/>
                 </a:solidFill>
@@ -3513,7 +3513,7 @@
                 <a:ea typeface="Aptos"/>
                 <a:cs typeface="Aptos"/>
               </a:rPr>
-              <a:t>Presenter 1</a:t>
+              <a:t>最低完整主线</a:t>
             </a:r>
           </a:p>
         </p:txBody>
@@ -3523,19 +3523,54 @@
           <p:cNvPr id="8" name="">
             <a:extLst xmlns:a="http://schemas.openxmlformats.org/drawingml/2006/main">
               <a:ext uri="{FF2B5EF4-FFF2-40B4-BE49-F238E27FC236}">
-                <a16:creationId xmlns:a16="http://schemas.microsoft.com/office/drawing/2014/main" id="{C59A7916-CBD7-452A-B3F2-ADBB75E0E154}"/>
-              </a:ext>
-            </a:extLst>
-          </p:cNvPr>
-          <p:cNvSpPr>
-            <a:spLocks xmlns:a="http://schemas.openxmlformats.org/drawingml/2006/main" noGrp="1"/>
-          </p:cNvSpPr>
-          <p:nvPr/>
-        </p:nvSpPr>
-        <p:spPr>
-          <a:xfrm xmlns:a="http://schemas.openxmlformats.org/drawingml/2006/main">
-            <a:off x="876300" y="2914650"/>
-            <a:ext cx="4476750" cy="514350"/>
+                <a16:creationId xmlns:a16="http://schemas.microsoft.com/office/drawing/2014/main" id="{7DB5C9FC-D9C0-448F-9FA1-9C201ACD6044}"/>
+              </a:ext>
+            </a:extLst>
+          </p:cNvPr>
+          <p:cNvSpPr>
+            <a:spLocks xmlns:a="http://schemas.openxmlformats.org/drawingml/2006/main" noGrp="1"/>
+          </p:cNvSpPr>
+          <p:nvPr/>
+        </p:nvSpPr>
+        <p:spPr>
+          <a:xfrm xmlns:a="http://schemas.openxmlformats.org/drawingml/2006/main">
+            <a:off x="895350" y="3076575"/>
+            <a:ext cx="57150" cy="57150"/>
+          </a:xfrm>
+          <a:prstGeom xmlns:a="http://schemas.openxmlformats.org/drawingml/2006/main" prst="rect">
+            <a:avLst/>
+          </a:prstGeom>
+          <a:solidFill xmlns:a="http://schemas.openxmlformats.org/drawingml/2006/main">
+            <a:srgbClr val="146B4D"/>
+          </a:solidFill>
+          <a:ln xmlns:a="http://schemas.openxmlformats.org/drawingml/2006/main" w="0">
+            <a:solidFill>
+              <a:srgbClr val="000000">
+                <a:alpha val="0"/>
+              </a:srgbClr>
+            </a:solidFill>
+            <a:prstDash val="solid"/>
+          </a:ln>
+        </p:spPr>
+      </p:sp>
+      <p:sp>
+        <p:nvSpPr>
+          <p:cNvPr id="9" name="">
+            <a:extLst xmlns:a="http://schemas.openxmlformats.org/drawingml/2006/main">
+              <a:ext uri="{FF2B5EF4-FFF2-40B4-BE49-F238E27FC236}">
+                <a16:creationId xmlns:a16="http://schemas.microsoft.com/office/drawing/2014/main" id="{54AE0711-E509-4331-9A62-DFBE5DCE6890}"/>
+              </a:ext>
+            </a:extLst>
+          </p:cNvPr>
+          <p:cNvSpPr>
+            <a:spLocks xmlns:a="http://schemas.openxmlformats.org/drawingml/2006/main" noGrp="1"/>
+          </p:cNvSpPr>
+          <p:nvPr/>
+        </p:nvSpPr>
+        <p:spPr>
+          <a:xfrm xmlns:a="http://schemas.openxmlformats.org/drawingml/2006/main">
+            <a:off x="1066800" y="3000375"/>
+            <a:ext cx="2638425" cy="200025"/>
           </a:xfrm>
           <a:prstGeom xmlns:a="http://schemas.openxmlformats.org/drawingml/2006/main" prst="rect">
             <a:avLst/>
@@ -3559,7 +3594,7 @@
           <a:lstStyle xmlns:a="http://schemas.openxmlformats.org/drawingml/2006/main"/>
           <a:p xmlns:a="http://schemas.openxmlformats.org/drawingml/2006/main">
             <a:pPr algn="l">
-              <a:defRPr sz="1125" b="0">
+              <a:defRPr sz="1050" b="0">
                 <a:solidFill>
                   <a:srgbClr val="18201B"/>
                 </a:solidFill>
@@ -3569,7 +3604,7 @@
               </a:defRPr>
             </a:pPr>
             <a:r>
-              <a:rPr sz="1125" b="0">
+              <a:rPr sz="1050" b="0">
                 <a:solidFill>
                   <a:srgbClr val="18201B"/>
                 </a:solidFill>
@@ -3577,29 +3612,425 @@
                 <a:ea typeface="Aptos"/>
                 <a:cs typeface="Aptos"/>
               </a:rPr>
-              <a:t>Slides 1-5：动机、数据集选择、字段例子、推荐任务、时间切分、系统流程</a:t>
-            </a:r>
-          </a:p>
-        </p:txBody>
-      </p:sp>
-      <p:sp>
-        <p:nvSpPr>
-          <p:cNvPr id="9" name="">
-            <a:extLst xmlns:a="http://schemas.openxmlformats.org/drawingml/2006/main">
-              <a:ext uri="{FF2B5EF4-FFF2-40B4-BE49-F238E27FC236}">
-                <a16:creationId xmlns:a16="http://schemas.microsoft.com/office/drawing/2014/main" id="{9AFF4B05-3611-40D7-A0B2-3CA1DB81D6B3}"/>
-              </a:ext>
-            </a:extLst>
-          </p:cNvPr>
-          <p:cNvSpPr>
-            <a:spLocks xmlns:a="http://schemas.openxmlformats.org/drawingml/2006/main" noGrp="1"/>
-          </p:cNvSpPr>
-          <p:nvPr/>
-        </p:nvSpPr>
-        <p:spPr>
-          <a:xfrm xmlns:a="http://schemas.openxmlformats.org/drawingml/2006/main">
-            <a:off x="6191250" y="2266950"/>
-            <a:ext cx="5143500" cy="1352550"/>
+              <a:t>Chronological split</a:t>
+            </a:r>
+          </a:p>
+        </p:txBody>
+      </p:sp>
+      <p:sp>
+        <p:nvSpPr>
+          <p:cNvPr id="10" name="">
+            <a:extLst xmlns:a="http://schemas.openxmlformats.org/drawingml/2006/main">
+              <a:ext uri="{FF2B5EF4-FFF2-40B4-BE49-F238E27FC236}">
+                <a16:creationId xmlns:a16="http://schemas.microsoft.com/office/drawing/2014/main" id="{A80C97B2-B725-4F2E-B34A-B0633A5FD696}"/>
+              </a:ext>
+            </a:extLst>
+          </p:cNvPr>
+          <p:cNvSpPr>
+            <a:spLocks xmlns:a="http://schemas.openxmlformats.org/drawingml/2006/main" noGrp="1"/>
+          </p:cNvSpPr>
+          <p:nvPr/>
+        </p:nvSpPr>
+        <p:spPr>
+          <a:xfrm xmlns:a="http://schemas.openxmlformats.org/drawingml/2006/main">
+            <a:off x="895350" y="3286125"/>
+            <a:ext cx="57150" cy="57150"/>
+          </a:xfrm>
+          <a:prstGeom xmlns:a="http://schemas.openxmlformats.org/drawingml/2006/main" prst="rect">
+            <a:avLst/>
+          </a:prstGeom>
+          <a:solidFill xmlns:a="http://schemas.openxmlformats.org/drawingml/2006/main">
+            <a:srgbClr val="146B4D"/>
+          </a:solidFill>
+          <a:ln xmlns:a="http://schemas.openxmlformats.org/drawingml/2006/main" w="0">
+            <a:solidFill>
+              <a:srgbClr val="000000">
+                <a:alpha val="0"/>
+              </a:srgbClr>
+            </a:solidFill>
+            <a:prstDash val="solid"/>
+          </a:ln>
+        </p:spPr>
+      </p:sp>
+      <p:sp>
+        <p:nvSpPr>
+          <p:cNvPr id="11" name="">
+            <a:extLst xmlns:a="http://schemas.openxmlformats.org/drawingml/2006/main">
+              <a:ext uri="{FF2B5EF4-FFF2-40B4-BE49-F238E27FC236}">
+                <a16:creationId xmlns:a16="http://schemas.microsoft.com/office/drawing/2014/main" id="{FC9E3805-01DA-4570-9585-ABD012D2DDC9}"/>
+              </a:ext>
+            </a:extLst>
+          </p:cNvPr>
+          <p:cNvSpPr>
+            <a:spLocks xmlns:a="http://schemas.openxmlformats.org/drawingml/2006/main" noGrp="1"/>
+          </p:cNvSpPr>
+          <p:nvPr/>
+        </p:nvSpPr>
+        <p:spPr>
+          <a:xfrm xmlns:a="http://schemas.openxmlformats.org/drawingml/2006/main">
+            <a:off x="1066800" y="3209925"/>
+            <a:ext cx="2638425" cy="200025"/>
+          </a:xfrm>
+          <a:prstGeom xmlns:a="http://schemas.openxmlformats.org/drawingml/2006/main" prst="rect">
+            <a:avLst/>
+          </a:prstGeom>
+          <a:solidFill xmlns:a="http://schemas.openxmlformats.org/drawingml/2006/main">
+            <a:srgbClr val="000000">
+              <a:alpha val="0"/>
+            </a:srgbClr>
+          </a:solidFill>
+          <a:ln xmlns:a="http://schemas.openxmlformats.org/drawingml/2006/main" w="0">
+            <a:solidFill>
+              <a:srgbClr val="000000">
+                <a:alpha val="0"/>
+              </a:srgbClr>
+            </a:solidFill>
+            <a:prstDash val="solid"/>
+          </a:ln>
+        </p:spPr>
+        <p:txBody>
+          <a:bodyPr xmlns:a="http://schemas.openxmlformats.org/drawingml/2006/main" lIns="0" tIns="0" rIns="0" bIns="0" anchor="t"/>
+          <a:lstStyle xmlns:a="http://schemas.openxmlformats.org/drawingml/2006/main"/>
+          <a:p xmlns:a="http://schemas.openxmlformats.org/drawingml/2006/main">
+            <a:pPr algn="l">
+              <a:defRPr sz="1050" b="0">
+                <a:solidFill>
+                  <a:srgbClr val="18201B"/>
+                </a:solidFill>
+                <a:latin typeface="Aptos"/>
+                <a:ea typeface="Aptos"/>
+                <a:cs typeface="Aptos"/>
+              </a:defRPr>
+            </a:pPr>
+            <a:r>
+              <a:rPr sz="1050" b="0">
+                <a:solidFill>
+                  <a:srgbClr val="18201B"/>
+                </a:solidFill>
+                <a:latin typeface="Aptos"/>
+                <a:ea typeface="Aptos"/>
+                <a:cs typeface="Aptos"/>
+              </a:rPr>
+              <a:t>Popularity + ALS</a:t>
+            </a:r>
+          </a:p>
+        </p:txBody>
+      </p:sp>
+      <p:sp>
+        <p:nvSpPr>
+          <p:cNvPr id="12" name="">
+            <a:extLst xmlns:a="http://schemas.openxmlformats.org/drawingml/2006/main">
+              <a:ext uri="{FF2B5EF4-FFF2-40B4-BE49-F238E27FC236}">
+                <a16:creationId xmlns:a16="http://schemas.microsoft.com/office/drawing/2014/main" id="{A8419401-25E2-4F99-A842-105ECC923843}"/>
+              </a:ext>
+            </a:extLst>
+          </p:cNvPr>
+          <p:cNvSpPr>
+            <a:spLocks xmlns:a="http://schemas.openxmlformats.org/drawingml/2006/main" noGrp="1"/>
+          </p:cNvSpPr>
+          <p:nvPr/>
+        </p:nvSpPr>
+        <p:spPr>
+          <a:xfrm xmlns:a="http://schemas.openxmlformats.org/drawingml/2006/main">
+            <a:off x="895350" y="3495675"/>
+            <a:ext cx="57150" cy="57150"/>
+          </a:xfrm>
+          <a:prstGeom xmlns:a="http://schemas.openxmlformats.org/drawingml/2006/main" prst="rect">
+            <a:avLst/>
+          </a:prstGeom>
+          <a:solidFill xmlns:a="http://schemas.openxmlformats.org/drawingml/2006/main">
+            <a:srgbClr val="146B4D"/>
+          </a:solidFill>
+          <a:ln xmlns:a="http://schemas.openxmlformats.org/drawingml/2006/main" w="0">
+            <a:solidFill>
+              <a:srgbClr val="000000">
+                <a:alpha val="0"/>
+              </a:srgbClr>
+            </a:solidFill>
+            <a:prstDash val="solid"/>
+          </a:ln>
+        </p:spPr>
+      </p:sp>
+      <p:sp>
+        <p:nvSpPr>
+          <p:cNvPr id="13" name="">
+            <a:extLst xmlns:a="http://schemas.openxmlformats.org/drawingml/2006/main">
+              <a:ext uri="{FF2B5EF4-FFF2-40B4-BE49-F238E27FC236}">
+                <a16:creationId xmlns:a16="http://schemas.microsoft.com/office/drawing/2014/main" id="{D7C0ABE6-2619-41A3-8965-7BA06521C166}"/>
+              </a:ext>
+            </a:extLst>
+          </p:cNvPr>
+          <p:cNvSpPr>
+            <a:spLocks xmlns:a="http://schemas.openxmlformats.org/drawingml/2006/main" noGrp="1"/>
+          </p:cNvSpPr>
+          <p:nvPr/>
+        </p:nvSpPr>
+        <p:spPr>
+          <a:xfrm xmlns:a="http://schemas.openxmlformats.org/drawingml/2006/main">
+            <a:off x="1066800" y="3419475"/>
+            <a:ext cx="2638425" cy="200025"/>
+          </a:xfrm>
+          <a:prstGeom xmlns:a="http://schemas.openxmlformats.org/drawingml/2006/main" prst="rect">
+            <a:avLst/>
+          </a:prstGeom>
+          <a:solidFill xmlns:a="http://schemas.openxmlformats.org/drawingml/2006/main">
+            <a:srgbClr val="000000">
+              <a:alpha val="0"/>
+            </a:srgbClr>
+          </a:solidFill>
+          <a:ln xmlns:a="http://schemas.openxmlformats.org/drawingml/2006/main" w="0">
+            <a:solidFill>
+              <a:srgbClr val="000000">
+                <a:alpha val="0"/>
+              </a:srgbClr>
+            </a:solidFill>
+            <a:prstDash val="solid"/>
+          </a:ln>
+        </p:spPr>
+        <p:txBody>
+          <a:bodyPr xmlns:a="http://schemas.openxmlformats.org/drawingml/2006/main" lIns="0" tIns="0" rIns="0" bIns="0" anchor="t"/>
+          <a:lstStyle xmlns:a="http://schemas.openxmlformats.org/drawingml/2006/main"/>
+          <a:p xmlns:a="http://schemas.openxmlformats.org/drawingml/2006/main">
+            <a:pPr algn="l">
+              <a:defRPr sz="1050" b="0">
+                <a:solidFill>
+                  <a:srgbClr val="18201B"/>
+                </a:solidFill>
+                <a:latin typeface="Aptos"/>
+                <a:ea typeface="Aptos"/>
+                <a:cs typeface="Aptos"/>
+              </a:defRPr>
+            </a:pPr>
+            <a:r>
+              <a:rPr sz="1050" b="0">
+                <a:solidFill>
+                  <a:srgbClr val="18201B"/>
+                </a:solidFill>
+                <a:latin typeface="Aptos"/>
+                <a:ea typeface="Aptos"/>
+                <a:cs typeface="Aptos"/>
+              </a:rPr>
+              <a:t>Promotion-aware reranking</a:t>
+            </a:r>
+          </a:p>
+        </p:txBody>
+      </p:sp>
+      <p:sp>
+        <p:nvSpPr>
+          <p:cNvPr id="14" name="">
+            <a:extLst xmlns:a="http://schemas.openxmlformats.org/drawingml/2006/main">
+              <a:ext uri="{FF2B5EF4-FFF2-40B4-BE49-F238E27FC236}">
+                <a16:creationId xmlns:a16="http://schemas.microsoft.com/office/drawing/2014/main" id="{31B0CBAC-F32F-44E8-A698-6EC01B8B3524}"/>
+              </a:ext>
+            </a:extLst>
+          </p:cNvPr>
+          <p:cNvSpPr>
+            <a:spLocks xmlns:a="http://schemas.openxmlformats.org/drawingml/2006/main" noGrp="1"/>
+          </p:cNvSpPr>
+          <p:nvPr/>
+        </p:nvSpPr>
+        <p:spPr>
+          <a:xfrm xmlns:a="http://schemas.openxmlformats.org/drawingml/2006/main">
+            <a:off x="895350" y="3705225"/>
+            <a:ext cx="57150" cy="57150"/>
+          </a:xfrm>
+          <a:prstGeom xmlns:a="http://schemas.openxmlformats.org/drawingml/2006/main" prst="rect">
+            <a:avLst/>
+          </a:prstGeom>
+          <a:solidFill xmlns:a="http://schemas.openxmlformats.org/drawingml/2006/main">
+            <a:srgbClr val="146B4D"/>
+          </a:solidFill>
+          <a:ln xmlns:a="http://schemas.openxmlformats.org/drawingml/2006/main" w="0">
+            <a:solidFill>
+              <a:srgbClr val="000000">
+                <a:alpha val="0"/>
+              </a:srgbClr>
+            </a:solidFill>
+            <a:prstDash val="solid"/>
+          </a:ln>
+        </p:spPr>
+      </p:sp>
+      <p:sp>
+        <p:nvSpPr>
+          <p:cNvPr id="15" name="">
+            <a:extLst xmlns:a="http://schemas.openxmlformats.org/drawingml/2006/main">
+              <a:ext uri="{FF2B5EF4-FFF2-40B4-BE49-F238E27FC236}">
+                <a16:creationId xmlns:a16="http://schemas.microsoft.com/office/drawing/2014/main" id="{00AF3606-4E87-4A9C-8834-14FB9D0ABCBE}"/>
+              </a:ext>
+            </a:extLst>
+          </p:cNvPr>
+          <p:cNvSpPr>
+            <a:spLocks xmlns:a="http://schemas.openxmlformats.org/drawingml/2006/main" noGrp="1"/>
+          </p:cNvSpPr>
+          <p:nvPr/>
+        </p:nvSpPr>
+        <p:spPr>
+          <a:xfrm xmlns:a="http://schemas.openxmlformats.org/drawingml/2006/main">
+            <a:off x="1066800" y="3629025"/>
+            <a:ext cx="2638425" cy="200025"/>
+          </a:xfrm>
+          <a:prstGeom xmlns:a="http://schemas.openxmlformats.org/drawingml/2006/main" prst="rect">
+            <a:avLst/>
+          </a:prstGeom>
+          <a:solidFill xmlns:a="http://schemas.openxmlformats.org/drawingml/2006/main">
+            <a:srgbClr val="000000">
+              <a:alpha val="0"/>
+            </a:srgbClr>
+          </a:solidFill>
+          <a:ln xmlns:a="http://schemas.openxmlformats.org/drawingml/2006/main" w="0">
+            <a:solidFill>
+              <a:srgbClr val="000000">
+                <a:alpha val="0"/>
+              </a:srgbClr>
+            </a:solidFill>
+            <a:prstDash val="solid"/>
+          </a:ln>
+        </p:spPr>
+        <p:txBody>
+          <a:bodyPr xmlns:a="http://schemas.openxmlformats.org/drawingml/2006/main" lIns="0" tIns="0" rIns="0" bIns="0" anchor="t"/>
+          <a:lstStyle xmlns:a="http://schemas.openxmlformats.org/drawingml/2006/main"/>
+          <a:p xmlns:a="http://schemas.openxmlformats.org/drawingml/2006/main">
+            <a:pPr algn="l">
+              <a:defRPr sz="1050" b="0">
+                <a:solidFill>
+                  <a:srgbClr val="18201B"/>
+                </a:solidFill>
+                <a:latin typeface="Aptos"/>
+                <a:ea typeface="Aptos"/>
+                <a:cs typeface="Aptos"/>
+              </a:defRPr>
+            </a:pPr>
+            <a:r>
+              <a:rPr sz="1050" b="0">
+                <a:solidFill>
+                  <a:srgbClr val="18201B"/>
+                </a:solidFill>
+                <a:latin typeface="Aptos"/>
+                <a:ea typeface="Aptos"/>
+                <a:cs typeface="Aptos"/>
+              </a:rPr>
+              <a:t>Business Utility@K</a:t>
+            </a:r>
+          </a:p>
+        </p:txBody>
+      </p:sp>
+      <p:sp>
+        <p:nvSpPr>
+          <p:cNvPr id="16" name="">
+            <a:extLst xmlns:a="http://schemas.openxmlformats.org/drawingml/2006/main">
+              <a:ext uri="{FF2B5EF4-FFF2-40B4-BE49-F238E27FC236}">
+                <a16:creationId xmlns:a16="http://schemas.microsoft.com/office/drawing/2014/main" id="{45773E02-F3D5-4A61-9407-0E873933C4E8}"/>
+              </a:ext>
+            </a:extLst>
+          </p:cNvPr>
+          <p:cNvSpPr>
+            <a:spLocks xmlns:a="http://schemas.openxmlformats.org/drawingml/2006/main" noGrp="1"/>
+          </p:cNvSpPr>
+          <p:nvPr/>
+        </p:nvSpPr>
+        <p:spPr>
+          <a:xfrm xmlns:a="http://schemas.openxmlformats.org/drawingml/2006/main">
+            <a:off x="895350" y="3914775"/>
+            <a:ext cx="57150" cy="57150"/>
+          </a:xfrm>
+          <a:prstGeom xmlns:a="http://schemas.openxmlformats.org/drawingml/2006/main" prst="rect">
+            <a:avLst/>
+          </a:prstGeom>
+          <a:solidFill xmlns:a="http://schemas.openxmlformats.org/drawingml/2006/main">
+            <a:srgbClr val="146B4D"/>
+          </a:solidFill>
+          <a:ln xmlns:a="http://schemas.openxmlformats.org/drawingml/2006/main" w="0">
+            <a:solidFill>
+              <a:srgbClr val="000000">
+                <a:alpha val="0"/>
+              </a:srgbClr>
+            </a:solidFill>
+            <a:prstDash val="solid"/>
+          </a:ln>
+        </p:spPr>
+      </p:sp>
+      <p:sp>
+        <p:nvSpPr>
+          <p:cNvPr id="17" name="">
+            <a:extLst xmlns:a="http://schemas.openxmlformats.org/drawingml/2006/main">
+              <a:ext uri="{FF2B5EF4-FFF2-40B4-BE49-F238E27FC236}">
+                <a16:creationId xmlns:a16="http://schemas.microsoft.com/office/drawing/2014/main" id="{54EE624F-97EF-459A-89DB-71466657B2CC}"/>
+              </a:ext>
+            </a:extLst>
+          </p:cNvPr>
+          <p:cNvSpPr>
+            <a:spLocks xmlns:a="http://schemas.openxmlformats.org/drawingml/2006/main" noGrp="1"/>
+          </p:cNvSpPr>
+          <p:nvPr/>
+        </p:nvSpPr>
+        <p:spPr>
+          <a:xfrm xmlns:a="http://schemas.openxmlformats.org/drawingml/2006/main">
+            <a:off x="1066800" y="3838575"/>
+            <a:ext cx="2638425" cy="200025"/>
+          </a:xfrm>
+          <a:prstGeom xmlns:a="http://schemas.openxmlformats.org/drawingml/2006/main" prst="rect">
+            <a:avLst/>
+          </a:prstGeom>
+          <a:solidFill xmlns:a="http://schemas.openxmlformats.org/drawingml/2006/main">
+            <a:srgbClr val="000000">
+              <a:alpha val="0"/>
+            </a:srgbClr>
+          </a:solidFill>
+          <a:ln xmlns:a="http://schemas.openxmlformats.org/drawingml/2006/main" w="0">
+            <a:solidFill>
+              <a:srgbClr val="000000">
+                <a:alpha val="0"/>
+              </a:srgbClr>
+            </a:solidFill>
+            <a:prstDash val="solid"/>
+          </a:ln>
+        </p:spPr>
+        <p:txBody>
+          <a:bodyPr xmlns:a="http://schemas.openxmlformats.org/drawingml/2006/main" lIns="0" tIns="0" rIns="0" bIns="0" anchor="t"/>
+          <a:lstStyle xmlns:a="http://schemas.openxmlformats.org/drawingml/2006/main"/>
+          <a:p xmlns:a="http://schemas.openxmlformats.org/drawingml/2006/main">
+            <a:pPr algn="l">
+              <a:defRPr sz="1050" b="0">
+                <a:solidFill>
+                  <a:srgbClr val="18201B"/>
+                </a:solidFill>
+                <a:latin typeface="Aptos"/>
+                <a:ea typeface="Aptos"/>
+                <a:cs typeface="Aptos"/>
+              </a:defRPr>
+            </a:pPr>
+            <a:r>
+              <a:rPr sz="1050" b="0">
+                <a:solidFill>
+                  <a:srgbClr val="18201B"/>
+                </a:solidFill>
+                <a:latin typeface="Aptos"/>
+                <a:ea typeface="Aptos"/>
+                <a:cs typeface="Aptos"/>
+              </a:rPr>
+              <a:t>Streamlit demo</a:t>
+            </a:r>
+          </a:p>
+        </p:txBody>
+      </p:sp>
+      <p:sp>
+        <p:nvSpPr>
+          <p:cNvPr id="18" name="">
+            <a:extLst xmlns:a="http://schemas.openxmlformats.org/drawingml/2006/main">
+              <a:ext uri="{FF2B5EF4-FFF2-40B4-BE49-F238E27FC236}">
+                <a16:creationId xmlns:a16="http://schemas.microsoft.com/office/drawing/2014/main" id="{30FB2E32-D886-4D30-A605-0592BA0B73E5}"/>
+              </a:ext>
+            </a:extLst>
+          </p:cNvPr>
+          <p:cNvSpPr>
+            <a:spLocks xmlns:a="http://schemas.openxmlformats.org/drawingml/2006/main" noGrp="1"/>
+          </p:cNvSpPr>
+          <p:nvPr/>
+        </p:nvSpPr>
+        <p:spPr>
+          <a:xfrm xmlns:a="http://schemas.openxmlformats.org/drawingml/2006/main">
+            <a:off x="4381500" y="2333625"/>
+            <a:ext cx="3238500" cy="1905000"/>
           </a:xfrm>
           <a:prstGeom xmlns:a="http://schemas.openxmlformats.org/drawingml/2006/main" prst="rect">
             <a:avLst/>
@@ -3617,22 +4048,22 @@
       </p:sp>
       <p:sp>
         <p:nvSpPr>
-          <p:cNvPr id="10" name="">
-            <a:extLst xmlns:a="http://schemas.openxmlformats.org/drawingml/2006/main">
-              <a:ext uri="{FF2B5EF4-FFF2-40B4-BE49-F238E27FC236}">
-                <a16:creationId xmlns:a16="http://schemas.microsoft.com/office/drawing/2014/main" id="{37570C4F-FC7D-43A5-B895-6EB370655FBC}"/>
-              </a:ext>
-            </a:extLst>
-          </p:cNvPr>
-          <p:cNvSpPr>
-            <a:spLocks xmlns:a="http://schemas.openxmlformats.org/drawingml/2006/main" noGrp="1"/>
-          </p:cNvSpPr>
-          <p:nvPr/>
-        </p:nvSpPr>
-        <p:spPr>
-          <a:xfrm xmlns:a="http://schemas.openxmlformats.org/drawingml/2006/main">
-            <a:off x="6400800" y="2476500"/>
-            <a:ext cx="2095500" cy="228600"/>
+          <p:cNvPr id="19" name="">
+            <a:extLst xmlns:a="http://schemas.openxmlformats.org/drawingml/2006/main">
+              <a:ext uri="{FF2B5EF4-FFF2-40B4-BE49-F238E27FC236}">
+                <a16:creationId xmlns:a16="http://schemas.microsoft.com/office/drawing/2014/main" id="{B62F706F-EFBC-4EF8-8D63-D42C2D5E0E57}"/>
+              </a:ext>
+            </a:extLst>
+          </p:cNvPr>
+          <p:cNvSpPr>
+            <a:spLocks xmlns:a="http://schemas.openxmlformats.org/drawingml/2006/main" noGrp="1"/>
+          </p:cNvSpPr>
+          <p:nvPr/>
+        </p:nvSpPr>
+        <p:spPr>
+          <a:xfrm xmlns:a="http://schemas.openxmlformats.org/drawingml/2006/main">
+            <a:off x="4591050" y="2562225"/>
+            <a:ext cx="2571750" cy="228600"/>
           </a:xfrm>
           <a:prstGeom xmlns:a="http://schemas.openxmlformats.org/drawingml/2006/main" prst="rect">
             <a:avLst/>
@@ -3656,7 +4087,7 @@
           <a:lstStyle xmlns:a="http://schemas.openxmlformats.org/drawingml/2006/main"/>
           <a:p xmlns:a="http://schemas.openxmlformats.org/drawingml/2006/main">
             <a:pPr algn="l">
-              <a:defRPr sz="1500" b="1">
+              <a:defRPr sz="1350" b="1">
                 <a:solidFill>
                   <a:srgbClr val="2B5C9E"/>
                 </a:solidFill>
@@ -3666,7 +4097,7 @@
               </a:defRPr>
             </a:pPr>
             <a:r>
-              <a:rPr sz="1500" b="1">
+              <a:rPr sz="1350" b="1">
                 <a:solidFill>
                   <a:srgbClr val="2B5C9E"/>
                 </a:solidFill>
@@ -3674,29 +4105,64 @@
                 <a:ea typeface="Aptos"/>
                 <a:cs typeface="Aptos"/>
               </a:rPr>
-              <a:t>Presenter 2</a:t>
-            </a:r>
-          </a:p>
-        </p:txBody>
-      </p:sp>
-      <p:sp>
-        <p:nvSpPr>
-          <p:cNvPr id="11" name="">
-            <a:extLst xmlns:a="http://schemas.openxmlformats.org/drawingml/2006/main">
-              <a:ext uri="{FF2B5EF4-FFF2-40B4-BE49-F238E27FC236}">
-                <a16:creationId xmlns:a16="http://schemas.microsoft.com/office/drawing/2014/main" id="{BBC61CFA-1A35-4DDD-91A1-853052B104D0}"/>
-              </a:ext>
-            </a:extLst>
-          </p:cNvPr>
-          <p:cNvSpPr>
-            <a:spLocks xmlns:a="http://schemas.openxmlformats.org/drawingml/2006/main" noGrp="1"/>
-          </p:cNvSpPr>
-          <p:nvPr/>
-        </p:nvSpPr>
-        <p:spPr>
-          <a:xfrm xmlns:a="http://schemas.openxmlformats.org/drawingml/2006/main">
-            <a:off x="6400800" y="2914650"/>
-            <a:ext cx="4476750" cy="514350"/>
+              <a:t>实验包</a:t>
+            </a:r>
+          </a:p>
+        </p:txBody>
+      </p:sp>
+      <p:sp>
+        <p:nvSpPr>
+          <p:cNvPr id="20" name="">
+            <a:extLst xmlns:a="http://schemas.openxmlformats.org/drawingml/2006/main">
+              <a:ext uri="{FF2B5EF4-FFF2-40B4-BE49-F238E27FC236}">
+                <a16:creationId xmlns:a16="http://schemas.microsoft.com/office/drawing/2014/main" id="{6A237514-DB65-43EF-888C-50E20F0F6ABE}"/>
+              </a:ext>
+            </a:extLst>
+          </p:cNvPr>
+          <p:cNvSpPr>
+            <a:spLocks xmlns:a="http://schemas.openxmlformats.org/drawingml/2006/main" noGrp="1"/>
+          </p:cNvSpPr>
+          <p:nvPr/>
+        </p:nvSpPr>
+        <p:spPr>
+          <a:xfrm xmlns:a="http://schemas.openxmlformats.org/drawingml/2006/main">
+            <a:off x="4610100" y="3076575"/>
+            <a:ext cx="57150" cy="57150"/>
+          </a:xfrm>
+          <a:prstGeom xmlns:a="http://schemas.openxmlformats.org/drawingml/2006/main" prst="rect">
+            <a:avLst/>
+          </a:prstGeom>
+          <a:solidFill xmlns:a="http://schemas.openxmlformats.org/drawingml/2006/main">
+            <a:srgbClr val="2B5C9E"/>
+          </a:solidFill>
+          <a:ln xmlns:a="http://schemas.openxmlformats.org/drawingml/2006/main" w="0">
+            <a:solidFill>
+              <a:srgbClr val="000000">
+                <a:alpha val="0"/>
+              </a:srgbClr>
+            </a:solidFill>
+            <a:prstDash val="solid"/>
+          </a:ln>
+        </p:spPr>
+      </p:sp>
+      <p:sp>
+        <p:nvSpPr>
+          <p:cNvPr id="21" name="">
+            <a:extLst xmlns:a="http://schemas.openxmlformats.org/drawingml/2006/main">
+              <a:ext uri="{FF2B5EF4-FFF2-40B4-BE49-F238E27FC236}">
+                <a16:creationId xmlns:a16="http://schemas.microsoft.com/office/drawing/2014/main" id="{26EF6EA4-B846-4FB9-A755-E54B31A6D647}"/>
+              </a:ext>
+            </a:extLst>
+          </p:cNvPr>
+          <p:cNvSpPr>
+            <a:spLocks xmlns:a="http://schemas.openxmlformats.org/drawingml/2006/main" noGrp="1"/>
+          </p:cNvSpPr>
+          <p:nvPr/>
+        </p:nvSpPr>
+        <p:spPr>
+          <a:xfrm xmlns:a="http://schemas.openxmlformats.org/drawingml/2006/main">
+            <a:off x="4781550" y="3000375"/>
+            <a:ext cx="2638425" cy="200025"/>
           </a:xfrm>
           <a:prstGeom xmlns:a="http://schemas.openxmlformats.org/drawingml/2006/main" prst="rect">
             <a:avLst/>
@@ -3720,7 +4186,7 @@
           <a:lstStyle xmlns:a="http://schemas.openxmlformats.org/drawingml/2006/main"/>
           <a:p xmlns:a="http://schemas.openxmlformats.org/drawingml/2006/main">
             <a:pPr algn="l">
-              <a:defRPr sz="1125" b="0">
+              <a:defRPr sz="1050" b="0">
                 <a:solidFill>
                   <a:srgbClr val="18201B"/>
                 </a:solidFill>
@@ -3730,7 +4196,7 @@
               </a:defRPr>
             </a:pPr>
             <a:r>
-              <a:rPr sz="1125" b="0">
+              <a:rPr sz="1050" b="0">
                 <a:solidFill>
                   <a:srgbClr val="18201B"/>
                 </a:solidFill>
@@ -3738,29 +4204,819 @@
                 <a:ea typeface="Aptos"/>
                 <a:cs typeface="Aptos"/>
               </a:rPr>
-              <a:t>Slides 6-10：模型、外部库说明、重排序设计、实验、demo、风险</a:t>
-            </a:r>
-          </a:p>
-        </p:txBody>
-      </p:sp>
-      <p:sp>
-        <p:nvSpPr>
-          <p:cNvPr id="12" name="">
-            <a:extLst xmlns:a="http://schemas.openxmlformats.org/drawingml/2006/main">
-              <a:ext uri="{FF2B5EF4-FFF2-40B4-BE49-F238E27FC236}">
-                <a16:creationId xmlns:a16="http://schemas.microsoft.com/office/drawing/2014/main" id="{402555D3-9DCC-437A-98DA-1901E6C87318}"/>
-              </a:ext>
-            </a:extLst>
-          </p:cNvPr>
-          <p:cNvSpPr>
-            <a:spLocks xmlns:a="http://schemas.openxmlformats.org/drawingml/2006/main" noGrp="1"/>
-          </p:cNvSpPr>
-          <p:nvPr/>
-        </p:nvSpPr>
-        <p:spPr>
-          <a:xfrm xmlns:a="http://schemas.openxmlformats.org/drawingml/2006/main">
-            <a:off x="666750" y="3857625"/>
-            <a:ext cx="5143500" cy="1952625"/>
+              <a:t>Recall/NDCG</a:t>
+            </a:r>
+          </a:p>
+        </p:txBody>
+      </p:sp>
+      <p:sp>
+        <p:nvSpPr>
+          <p:cNvPr id="22" name="">
+            <a:extLst xmlns:a="http://schemas.openxmlformats.org/drawingml/2006/main">
+              <a:ext uri="{FF2B5EF4-FFF2-40B4-BE49-F238E27FC236}">
+                <a16:creationId xmlns:a16="http://schemas.microsoft.com/office/drawing/2014/main" id="{88A458F5-6008-49C8-8A9C-65FFBA45251D}"/>
+              </a:ext>
+            </a:extLst>
+          </p:cNvPr>
+          <p:cNvSpPr>
+            <a:spLocks xmlns:a="http://schemas.openxmlformats.org/drawingml/2006/main" noGrp="1"/>
+          </p:cNvSpPr>
+          <p:nvPr/>
+        </p:nvSpPr>
+        <p:spPr>
+          <a:xfrm xmlns:a="http://schemas.openxmlformats.org/drawingml/2006/main">
+            <a:off x="4610100" y="3286125"/>
+            <a:ext cx="57150" cy="57150"/>
+          </a:xfrm>
+          <a:prstGeom xmlns:a="http://schemas.openxmlformats.org/drawingml/2006/main" prst="rect">
+            <a:avLst/>
+          </a:prstGeom>
+          <a:solidFill xmlns:a="http://schemas.openxmlformats.org/drawingml/2006/main">
+            <a:srgbClr val="2B5C9E"/>
+          </a:solidFill>
+          <a:ln xmlns:a="http://schemas.openxmlformats.org/drawingml/2006/main" w="0">
+            <a:solidFill>
+              <a:srgbClr val="000000">
+                <a:alpha val="0"/>
+              </a:srgbClr>
+            </a:solidFill>
+            <a:prstDash val="solid"/>
+          </a:ln>
+        </p:spPr>
+      </p:sp>
+      <p:sp>
+        <p:nvSpPr>
+          <p:cNvPr id="23" name="">
+            <a:extLst xmlns:a="http://schemas.openxmlformats.org/drawingml/2006/main">
+              <a:ext uri="{FF2B5EF4-FFF2-40B4-BE49-F238E27FC236}">
+                <a16:creationId xmlns:a16="http://schemas.microsoft.com/office/drawing/2014/main" id="{8CBF3FA0-8791-49F7-B8E8-6D41DE8CB916}"/>
+              </a:ext>
+            </a:extLst>
+          </p:cNvPr>
+          <p:cNvSpPr>
+            <a:spLocks xmlns:a="http://schemas.openxmlformats.org/drawingml/2006/main" noGrp="1"/>
+          </p:cNvSpPr>
+          <p:nvPr/>
+        </p:nvSpPr>
+        <p:spPr>
+          <a:xfrm xmlns:a="http://schemas.openxmlformats.org/drawingml/2006/main">
+            <a:off x="4781550" y="3209925"/>
+            <a:ext cx="2638425" cy="200025"/>
+          </a:xfrm>
+          <a:prstGeom xmlns:a="http://schemas.openxmlformats.org/drawingml/2006/main" prst="rect">
+            <a:avLst/>
+          </a:prstGeom>
+          <a:solidFill xmlns:a="http://schemas.openxmlformats.org/drawingml/2006/main">
+            <a:srgbClr val="000000">
+              <a:alpha val="0"/>
+            </a:srgbClr>
+          </a:solidFill>
+          <a:ln xmlns:a="http://schemas.openxmlformats.org/drawingml/2006/main" w="0">
+            <a:solidFill>
+              <a:srgbClr val="000000">
+                <a:alpha val="0"/>
+              </a:srgbClr>
+            </a:solidFill>
+            <a:prstDash val="solid"/>
+          </a:ln>
+        </p:spPr>
+        <p:txBody>
+          <a:bodyPr xmlns:a="http://schemas.openxmlformats.org/drawingml/2006/main" lIns="0" tIns="0" rIns="0" bIns="0" anchor="t"/>
+          <a:lstStyle xmlns:a="http://schemas.openxmlformats.org/drawingml/2006/main"/>
+          <a:p xmlns:a="http://schemas.openxmlformats.org/drawingml/2006/main">
+            <a:pPr algn="l">
+              <a:defRPr sz="1050" b="0">
+                <a:solidFill>
+                  <a:srgbClr val="18201B"/>
+                </a:solidFill>
+                <a:latin typeface="Aptos"/>
+                <a:ea typeface="Aptos"/>
+                <a:cs typeface="Aptos"/>
+              </a:defRPr>
+            </a:pPr>
+            <a:r>
+              <a:rPr sz="1050" b="0">
+                <a:solidFill>
+                  <a:srgbClr val="18201B"/>
+                </a:solidFill>
+                <a:latin typeface="Aptos"/>
+                <a:ea typeface="Aptos"/>
+                <a:cs typeface="Aptos"/>
+              </a:rPr>
+              <a:t>Coverage/diversity/novelty</a:t>
+            </a:r>
+          </a:p>
+        </p:txBody>
+      </p:sp>
+      <p:sp>
+        <p:nvSpPr>
+          <p:cNvPr id="24" name="">
+            <a:extLst xmlns:a="http://schemas.openxmlformats.org/drawingml/2006/main">
+              <a:ext uri="{FF2B5EF4-FFF2-40B4-BE49-F238E27FC236}">
+                <a16:creationId xmlns:a16="http://schemas.microsoft.com/office/drawing/2014/main" id="{F0878703-AC93-493C-A21C-A0B325A07A35}"/>
+              </a:ext>
+            </a:extLst>
+          </p:cNvPr>
+          <p:cNvSpPr>
+            <a:spLocks xmlns:a="http://schemas.openxmlformats.org/drawingml/2006/main" noGrp="1"/>
+          </p:cNvSpPr>
+          <p:nvPr/>
+        </p:nvSpPr>
+        <p:spPr>
+          <a:xfrm xmlns:a="http://schemas.openxmlformats.org/drawingml/2006/main">
+            <a:off x="4610100" y="3495675"/>
+            <a:ext cx="57150" cy="57150"/>
+          </a:xfrm>
+          <a:prstGeom xmlns:a="http://schemas.openxmlformats.org/drawingml/2006/main" prst="rect">
+            <a:avLst/>
+          </a:prstGeom>
+          <a:solidFill xmlns:a="http://schemas.openxmlformats.org/drawingml/2006/main">
+            <a:srgbClr val="2B5C9E"/>
+          </a:solidFill>
+          <a:ln xmlns:a="http://schemas.openxmlformats.org/drawingml/2006/main" w="0">
+            <a:solidFill>
+              <a:srgbClr val="000000">
+                <a:alpha val="0"/>
+              </a:srgbClr>
+            </a:solidFill>
+            <a:prstDash val="solid"/>
+          </a:ln>
+        </p:spPr>
+      </p:sp>
+      <p:sp>
+        <p:nvSpPr>
+          <p:cNvPr id="25" name="">
+            <a:extLst xmlns:a="http://schemas.openxmlformats.org/drawingml/2006/main">
+              <a:ext uri="{FF2B5EF4-FFF2-40B4-BE49-F238E27FC236}">
+                <a16:creationId xmlns:a16="http://schemas.microsoft.com/office/drawing/2014/main" id="{8F08C9B4-4CF2-42CD-A2E3-2BF72D52864D}"/>
+              </a:ext>
+            </a:extLst>
+          </p:cNvPr>
+          <p:cNvSpPr>
+            <a:spLocks xmlns:a="http://schemas.openxmlformats.org/drawingml/2006/main" noGrp="1"/>
+          </p:cNvSpPr>
+          <p:nvPr/>
+        </p:nvSpPr>
+        <p:spPr>
+          <a:xfrm xmlns:a="http://schemas.openxmlformats.org/drawingml/2006/main">
+            <a:off x="4781550" y="3419475"/>
+            <a:ext cx="2638425" cy="200025"/>
+          </a:xfrm>
+          <a:prstGeom xmlns:a="http://schemas.openxmlformats.org/drawingml/2006/main" prst="rect">
+            <a:avLst/>
+          </a:prstGeom>
+          <a:solidFill xmlns:a="http://schemas.openxmlformats.org/drawingml/2006/main">
+            <a:srgbClr val="000000">
+              <a:alpha val="0"/>
+            </a:srgbClr>
+          </a:solidFill>
+          <a:ln xmlns:a="http://schemas.openxmlformats.org/drawingml/2006/main" w="0">
+            <a:solidFill>
+              <a:srgbClr val="000000">
+                <a:alpha val="0"/>
+              </a:srgbClr>
+            </a:solidFill>
+            <a:prstDash val="solid"/>
+          </a:ln>
+        </p:spPr>
+        <p:txBody>
+          <a:bodyPr xmlns:a="http://schemas.openxmlformats.org/drawingml/2006/main" lIns="0" tIns="0" rIns="0" bIns="0" anchor="t"/>
+          <a:lstStyle xmlns:a="http://schemas.openxmlformats.org/drawingml/2006/main"/>
+          <a:p xmlns:a="http://schemas.openxmlformats.org/drawingml/2006/main">
+            <a:pPr algn="l">
+              <a:defRPr sz="1050" b="0">
+                <a:solidFill>
+                  <a:srgbClr val="18201B"/>
+                </a:solidFill>
+                <a:latin typeface="Aptos"/>
+                <a:ea typeface="Aptos"/>
+                <a:cs typeface="Aptos"/>
+              </a:defRPr>
+            </a:pPr>
+            <a:r>
+              <a:rPr sz="1050" b="0">
+                <a:solidFill>
+                  <a:srgbClr val="18201B"/>
+                </a:solidFill>
+                <a:latin typeface="Aptos"/>
+                <a:ea typeface="Aptos"/>
+                <a:cs typeface="Aptos"/>
+              </a:rPr>
+              <a:t>Reranking ablations</a:t>
+            </a:r>
+          </a:p>
+        </p:txBody>
+      </p:sp>
+      <p:sp>
+        <p:nvSpPr>
+          <p:cNvPr id="26" name="">
+            <a:extLst xmlns:a="http://schemas.openxmlformats.org/drawingml/2006/main">
+              <a:ext uri="{FF2B5EF4-FFF2-40B4-BE49-F238E27FC236}">
+                <a16:creationId xmlns:a16="http://schemas.microsoft.com/office/drawing/2014/main" id="{36BE52C2-B2E5-4A50-B161-2890E799C47B}"/>
+              </a:ext>
+            </a:extLst>
+          </p:cNvPr>
+          <p:cNvSpPr>
+            <a:spLocks xmlns:a="http://schemas.openxmlformats.org/drawingml/2006/main" noGrp="1"/>
+          </p:cNvSpPr>
+          <p:nvPr/>
+        </p:nvSpPr>
+        <p:spPr>
+          <a:xfrm xmlns:a="http://schemas.openxmlformats.org/drawingml/2006/main">
+            <a:off x="4610100" y="3705225"/>
+            <a:ext cx="57150" cy="57150"/>
+          </a:xfrm>
+          <a:prstGeom xmlns:a="http://schemas.openxmlformats.org/drawingml/2006/main" prst="rect">
+            <a:avLst/>
+          </a:prstGeom>
+          <a:solidFill xmlns:a="http://schemas.openxmlformats.org/drawingml/2006/main">
+            <a:srgbClr val="2B5C9E"/>
+          </a:solidFill>
+          <a:ln xmlns:a="http://schemas.openxmlformats.org/drawingml/2006/main" w="0">
+            <a:solidFill>
+              <a:srgbClr val="000000">
+                <a:alpha val="0"/>
+              </a:srgbClr>
+            </a:solidFill>
+            <a:prstDash val="solid"/>
+          </a:ln>
+        </p:spPr>
+      </p:sp>
+      <p:sp>
+        <p:nvSpPr>
+          <p:cNvPr id="27" name="">
+            <a:extLst xmlns:a="http://schemas.openxmlformats.org/drawingml/2006/main">
+              <a:ext uri="{FF2B5EF4-FFF2-40B4-BE49-F238E27FC236}">
+                <a16:creationId xmlns:a16="http://schemas.microsoft.com/office/drawing/2014/main" id="{E7667827-51A3-4EB3-AD4B-046E07EFA42D}"/>
+              </a:ext>
+            </a:extLst>
+          </p:cNvPr>
+          <p:cNvSpPr>
+            <a:spLocks xmlns:a="http://schemas.openxmlformats.org/drawingml/2006/main" noGrp="1"/>
+          </p:cNvSpPr>
+          <p:nvPr/>
+        </p:nvSpPr>
+        <p:spPr>
+          <a:xfrm xmlns:a="http://schemas.openxmlformats.org/drawingml/2006/main">
+            <a:off x="4781550" y="3629025"/>
+            <a:ext cx="2638425" cy="200025"/>
+          </a:xfrm>
+          <a:prstGeom xmlns:a="http://schemas.openxmlformats.org/drawingml/2006/main" prst="rect">
+            <a:avLst/>
+          </a:prstGeom>
+          <a:solidFill xmlns:a="http://schemas.openxmlformats.org/drawingml/2006/main">
+            <a:srgbClr val="000000">
+              <a:alpha val="0"/>
+            </a:srgbClr>
+          </a:solidFill>
+          <a:ln xmlns:a="http://schemas.openxmlformats.org/drawingml/2006/main" w="0">
+            <a:solidFill>
+              <a:srgbClr val="000000">
+                <a:alpha val="0"/>
+              </a:srgbClr>
+            </a:solidFill>
+            <a:prstDash val="solid"/>
+          </a:ln>
+        </p:spPr>
+        <p:txBody>
+          <a:bodyPr xmlns:a="http://schemas.openxmlformats.org/drawingml/2006/main" lIns="0" tIns="0" rIns="0" bIns="0" anchor="t"/>
+          <a:lstStyle xmlns:a="http://schemas.openxmlformats.org/drawingml/2006/main"/>
+          <a:p xmlns:a="http://schemas.openxmlformats.org/drawingml/2006/main">
+            <a:pPr algn="l">
+              <a:defRPr sz="1050" b="0">
+                <a:solidFill>
+                  <a:srgbClr val="18201B"/>
+                </a:solidFill>
+                <a:latin typeface="Aptos"/>
+                <a:ea typeface="Aptos"/>
+                <a:cs typeface="Aptos"/>
+              </a:defRPr>
+            </a:pPr>
+            <a:r>
+              <a:rPr sz="1050" b="0">
+                <a:solidFill>
+                  <a:srgbClr val="18201B"/>
+                </a:solidFill>
+                <a:latin typeface="Aptos"/>
+                <a:ea typeface="Aptos"/>
+                <a:cs typeface="Aptos"/>
+              </a:rPr>
+              <a:t>Budget sensitivity</a:t>
+            </a:r>
+          </a:p>
+        </p:txBody>
+      </p:sp>
+      <p:sp>
+        <p:nvSpPr>
+          <p:cNvPr id="28" name="">
+            <a:extLst xmlns:a="http://schemas.openxmlformats.org/drawingml/2006/main">
+              <a:ext uri="{FF2B5EF4-FFF2-40B4-BE49-F238E27FC236}">
+                <a16:creationId xmlns:a16="http://schemas.microsoft.com/office/drawing/2014/main" id="{C240F537-A6DF-4C8C-8230-0AD12162DA0D}"/>
+              </a:ext>
+            </a:extLst>
+          </p:cNvPr>
+          <p:cNvSpPr>
+            <a:spLocks xmlns:a="http://schemas.openxmlformats.org/drawingml/2006/main" noGrp="1"/>
+          </p:cNvSpPr>
+          <p:nvPr/>
+        </p:nvSpPr>
+        <p:spPr>
+          <a:xfrm xmlns:a="http://schemas.openxmlformats.org/drawingml/2006/main">
+            <a:off x="8096250" y="2333625"/>
+            <a:ext cx="3238500" cy="1905000"/>
+          </a:xfrm>
+          <a:prstGeom xmlns:a="http://schemas.openxmlformats.org/drawingml/2006/main" prst="rect">
+            <a:avLst/>
+          </a:prstGeom>
+          <a:solidFill xmlns:a="http://schemas.openxmlformats.org/drawingml/2006/main">
+            <a:srgbClr val="F5E7D2"/>
+          </a:solidFill>
+          <a:ln xmlns:a="http://schemas.openxmlformats.org/drawingml/2006/main" w="9525">
+            <a:solidFill>
+              <a:srgbClr val="B96F13"/>
+            </a:solidFill>
+            <a:prstDash val="solid"/>
+          </a:ln>
+        </p:spPr>
+      </p:sp>
+      <p:sp>
+        <p:nvSpPr>
+          <p:cNvPr id="29" name="">
+            <a:extLst xmlns:a="http://schemas.openxmlformats.org/drawingml/2006/main">
+              <a:ext uri="{FF2B5EF4-FFF2-40B4-BE49-F238E27FC236}">
+                <a16:creationId xmlns:a16="http://schemas.microsoft.com/office/drawing/2014/main" id="{75635123-467B-4808-BE37-DCA89FF41035}"/>
+              </a:ext>
+            </a:extLst>
+          </p:cNvPr>
+          <p:cNvSpPr>
+            <a:spLocks xmlns:a="http://schemas.openxmlformats.org/drawingml/2006/main" noGrp="1"/>
+          </p:cNvSpPr>
+          <p:nvPr/>
+        </p:nvSpPr>
+        <p:spPr>
+          <a:xfrm xmlns:a="http://schemas.openxmlformats.org/drawingml/2006/main">
+            <a:off x="8305800" y="2562225"/>
+            <a:ext cx="2571750" cy="228600"/>
+          </a:xfrm>
+          <a:prstGeom xmlns:a="http://schemas.openxmlformats.org/drawingml/2006/main" prst="rect">
+            <a:avLst/>
+          </a:prstGeom>
+          <a:solidFill xmlns:a="http://schemas.openxmlformats.org/drawingml/2006/main">
+            <a:srgbClr val="000000">
+              <a:alpha val="0"/>
+            </a:srgbClr>
+          </a:solidFill>
+          <a:ln xmlns:a="http://schemas.openxmlformats.org/drawingml/2006/main" w="0">
+            <a:solidFill>
+              <a:srgbClr val="000000">
+                <a:alpha val="0"/>
+              </a:srgbClr>
+            </a:solidFill>
+            <a:prstDash val="solid"/>
+          </a:ln>
+        </p:spPr>
+        <p:txBody>
+          <a:bodyPr xmlns:a="http://schemas.openxmlformats.org/drawingml/2006/main" lIns="0" tIns="0" rIns="0" bIns="0" anchor="t"/>
+          <a:lstStyle xmlns:a="http://schemas.openxmlformats.org/drawingml/2006/main"/>
+          <a:p xmlns:a="http://schemas.openxmlformats.org/drawingml/2006/main">
+            <a:pPr algn="l">
+              <a:defRPr sz="1350" b="1">
+                <a:solidFill>
+                  <a:srgbClr val="B96F13"/>
+                </a:solidFill>
+                <a:latin typeface="Aptos"/>
+                <a:ea typeface="Aptos"/>
+                <a:cs typeface="Aptos"/>
+              </a:defRPr>
+            </a:pPr>
+            <a:r>
+              <a:rPr sz="1350" b="1">
+                <a:solidFill>
+                  <a:srgbClr val="B96F13"/>
+                </a:solidFill>
+                <a:latin typeface="Aptos"/>
+                <a:ea typeface="Aptos"/>
+                <a:cs typeface="Aptos"/>
+              </a:rPr>
+              <a:t>扩展方向</a:t>
+            </a:r>
+          </a:p>
+        </p:txBody>
+      </p:sp>
+      <p:sp>
+        <p:nvSpPr>
+          <p:cNvPr id="30" name="">
+            <a:extLst xmlns:a="http://schemas.openxmlformats.org/drawingml/2006/main">
+              <a:ext uri="{FF2B5EF4-FFF2-40B4-BE49-F238E27FC236}">
+                <a16:creationId xmlns:a16="http://schemas.microsoft.com/office/drawing/2014/main" id="{D4886D62-F0B0-49A8-B01C-9D8F28428E74}"/>
+              </a:ext>
+            </a:extLst>
+          </p:cNvPr>
+          <p:cNvSpPr>
+            <a:spLocks xmlns:a="http://schemas.openxmlformats.org/drawingml/2006/main" noGrp="1"/>
+          </p:cNvSpPr>
+          <p:nvPr/>
+        </p:nvSpPr>
+        <p:spPr>
+          <a:xfrm xmlns:a="http://schemas.openxmlformats.org/drawingml/2006/main">
+            <a:off x="8324850" y="3076575"/>
+            <a:ext cx="57150" cy="57150"/>
+          </a:xfrm>
+          <a:prstGeom xmlns:a="http://schemas.openxmlformats.org/drawingml/2006/main" prst="rect">
+            <a:avLst/>
+          </a:prstGeom>
+          <a:solidFill xmlns:a="http://schemas.openxmlformats.org/drawingml/2006/main">
+            <a:srgbClr val="B96F13"/>
+          </a:solidFill>
+          <a:ln xmlns:a="http://schemas.openxmlformats.org/drawingml/2006/main" w="0">
+            <a:solidFill>
+              <a:srgbClr val="000000">
+                <a:alpha val="0"/>
+              </a:srgbClr>
+            </a:solidFill>
+            <a:prstDash val="solid"/>
+          </a:ln>
+        </p:spPr>
+      </p:sp>
+      <p:sp>
+        <p:nvSpPr>
+          <p:cNvPr id="31" name="">
+            <a:extLst xmlns:a="http://schemas.openxmlformats.org/drawingml/2006/main">
+              <a:ext uri="{FF2B5EF4-FFF2-40B4-BE49-F238E27FC236}">
+                <a16:creationId xmlns:a16="http://schemas.microsoft.com/office/drawing/2014/main" id="{383B1D97-9923-4737-87B5-8C1F766BE494}"/>
+              </a:ext>
+            </a:extLst>
+          </p:cNvPr>
+          <p:cNvSpPr>
+            <a:spLocks xmlns:a="http://schemas.openxmlformats.org/drawingml/2006/main" noGrp="1"/>
+          </p:cNvSpPr>
+          <p:nvPr/>
+        </p:nvSpPr>
+        <p:spPr>
+          <a:xfrm xmlns:a="http://schemas.openxmlformats.org/drawingml/2006/main">
+            <a:off x="8496300" y="3000375"/>
+            <a:ext cx="2638425" cy="200025"/>
+          </a:xfrm>
+          <a:prstGeom xmlns:a="http://schemas.openxmlformats.org/drawingml/2006/main" prst="rect">
+            <a:avLst/>
+          </a:prstGeom>
+          <a:solidFill xmlns:a="http://schemas.openxmlformats.org/drawingml/2006/main">
+            <a:srgbClr val="000000">
+              <a:alpha val="0"/>
+            </a:srgbClr>
+          </a:solidFill>
+          <a:ln xmlns:a="http://schemas.openxmlformats.org/drawingml/2006/main" w="0">
+            <a:solidFill>
+              <a:srgbClr val="000000">
+                <a:alpha val="0"/>
+              </a:srgbClr>
+            </a:solidFill>
+            <a:prstDash val="solid"/>
+          </a:ln>
+        </p:spPr>
+        <p:txBody>
+          <a:bodyPr xmlns:a="http://schemas.openxmlformats.org/drawingml/2006/main" lIns="0" tIns="0" rIns="0" bIns="0" anchor="t"/>
+          <a:lstStyle xmlns:a="http://schemas.openxmlformats.org/drawingml/2006/main"/>
+          <a:p xmlns:a="http://schemas.openxmlformats.org/drawingml/2006/main">
+            <a:pPr algn="l">
+              <a:defRPr sz="1050" b="0">
+                <a:solidFill>
+                  <a:srgbClr val="18201B"/>
+                </a:solidFill>
+                <a:latin typeface="Aptos"/>
+                <a:ea typeface="Aptos"/>
+                <a:cs typeface="Aptos"/>
+              </a:defRPr>
+            </a:pPr>
+            <a:r>
+              <a:rPr sz="1050" b="0">
+                <a:solidFill>
+                  <a:srgbClr val="18201B"/>
+                </a:solidFill>
+                <a:latin typeface="Aptos"/>
+                <a:ea typeface="Aptos"/>
+                <a:cs typeface="Aptos"/>
+              </a:rPr>
+              <a:t>ItemKNN + BPR</a:t>
+            </a:r>
+          </a:p>
+        </p:txBody>
+      </p:sp>
+      <p:sp>
+        <p:nvSpPr>
+          <p:cNvPr id="32" name="">
+            <a:extLst xmlns:a="http://schemas.openxmlformats.org/drawingml/2006/main">
+              <a:ext uri="{FF2B5EF4-FFF2-40B4-BE49-F238E27FC236}">
+                <a16:creationId xmlns:a16="http://schemas.microsoft.com/office/drawing/2014/main" id="{9568993B-7FDD-4283-8579-936E22A4E425}"/>
+              </a:ext>
+            </a:extLst>
+          </p:cNvPr>
+          <p:cNvSpPr>
+            <a:spLocks xmlns:a="http://schemas.openxmlformats.org/drawingml/2006/main" noGrp="1"/>
+          </p:cNvSpPr>
+          <p:nvPr/>
+        </p:nvSpPr>
+        <p:spPr>
+          <a:xfrm xmlns:a="http://schemas.openxmlformats.org/drawingml/2006/main">
+            <a:off x="8324850" y="3286125"/>
+            <a:ext cx="57150" cy="57150"/>
+          </a:xfrm>
+          <a:prstGeom xmlns:a="http://schemas.openxmlformats.org/drawingml/2006/main" prst="rect">
+            <a:avLst/>
+          </a:prstGeom>
+          <a:solidFill xmlns:a="http://schemas.openxmlformats.org/drawingml/2006/main">
+            <a:srgbClr val="B96F13"/>
+          </a:solidFill>
+          <a:ln xmlns:a="http://schemas.openxmlformats.org/drawingml/2006/main" w="0">
+            <a:solidFill>
+              <a:srgbClr val="000000">
+                <a:alpha val="0"/>
+              </a:srgbClr>
+            </a:solidFill>
+            <a:prstDash val="solid"/>
+          </a:ln>
+        </p:spPr>
+      </p:sp>
+      <p:sp>
+        <p:nvSpPr>
+          <p:cNvPr id="33" name="">
+            <a:extLst xmlns:a="http://schemas.openxmlformats.org/drawingml/2006/main">
+              <a:ext uri="{FF2B5EF4-FFF2-40B4-BE49-F238E27FC236}">
+                <a16:creationId xmlns:a16="http://schemas.microsoft.com/office/drawing/2014/main" id="{BAFCB5D8-8F20-4974-9E2D-DE83D069B9DF}"/>
+              </a:ext>
+            </a:extLst>
+          </p:cNvPr>
+          <p:cNvSpPr>
+            <a:spLocks xmlns:a="http://schemas.openxmlformats.org/drawingml/2006/main" noGrp="1"/>
+          </p:cNvSpPr>
+          <p:nvPr/>
+        </p:nvSpPr>
+        <p:spPr>
+          <a:xfrm xmlns:a="http://schemas.openxmlformats.org/drawingml/2006/main">
+            <a:off x="8496300" y="3209925"/>
+            <a:ext cx="2638425" cy="200025"/>
+          </a:xfrm>
+          <a:prstGeom xmlns:a="http://schemas.openxmlformats.org/drawingml/2006/main" prst="rect">
+            <a:avLst/>
+          </a:prstGeom>
+          <a:solidFill xmlns:a="http://schemas.openxmlformats.org/drawingml/2006/main">
+            <a:srgbClr val="000000">
+              <a:alpha val="0"/>
+            </a:srgbClr>
+          </a:solidFill>
+          <a:ln xmlns:a="http://schemas.openxmlformats.org/drawingml/2006/main" w="0">
+            <a:solidFill>
+              <a:srgbClr val="000000">
+                <a:alpha val="0"/>
+              </a:srgbClr>
+            </a:solidFill>
+            <a:prstDash val="solid"/>
+          </a:ln>
+        </p:spPr>
+        <p:txBody>
+          <a:bodyPr xmlns:a="http://schemas.openxmlformats.org/drawingml/2006/main" lIns="0" tIns="0" rIns="0" bIns="0" anchor="t"/>
+          <a:lstStyle xmlns:a="http://schemas.openxmlformats.org/drawingml/2006/main"/>
+          <a:p xmlns:a="http://schemas.openxmlformats.org/drawingml/2006/main">
+            <a:pPr algn="l">
+              <a:defRPr sz="1050" b="0">
+                <a:solidFill>
+                  <a:srgbClr val="18201B"/>
+                </a:solidFill>
+                <a:latin typeface="Aptos"/>
+                <a:ea typeface="Aptos"/>
+                <a:cs typeface="Aptos"/>
+              </a:defRPr>
+            </a:pPr>
+            <a:r>
+              <a:rPr sz="1050" b="0">
+                <a:solidFill>
+                  <a:srgbClr val="18201B"/>
+                </a:solidFill>
+                <a:latin typeface="Aptos"/>
+                <a:ea typeface="Aptos"/>
+                <a:cs typeface="Aptos"/>
+              </a:rPr>
+              <a:t>RecBole LightGCN</a:t>
+            </a:r>
+          </a:p>
+        </p:txBody>
+      </p:sp>
+      <p:sp>
+        <p:nvSpPr>
+          <p:cNvPr id="34" name="">
+            <a:extLst xmlns:a="http://schemas.openxmlformats.org/drawingml/2006/main">
+              <a:ext uri="{FF2B5EF4-FFF2-40B4-BE49-F238E27FC236}">
+                <a16:creationId xmlns:a16="http://schemas.microsoft.com/office/drawing/2014/main" id="{195E5CB5-B223-45D5-87EA-FBB568B14B33}"/>
+              </a:ext>
+            </a:extLst>
+          </p:cNvPr>
+          <p:cNvSpPr>
+            <a:spLocks xmlns:a="http://schemas.openxmlformats.org/drawingml/2006/main" noGrp="1"/>
+          </p:cNvSpPr>
+          <p:nvPr/>
+        </p:nvSpPr>
+        <p:spPr>
+          <a:xfrm xmlns:a="http://schemas.openxmlformats.org/drawingml/2006/main">
+            <a:off x="8324850" y="3495675"/>
+            <a:ext cx="57150" cy="57150"/>
+          </a:xfrm>
+          <a:prstGeom xmlns:a="http://schemas.openxmlformats.org/drawingml/2006/main" prst="rect">
+            <a:avLst/>
+          </a:prstGeom>
+          <a:solidFill xmlns:a="http://schemas.openxmlformats.org/drawingml/2006/main">
+            <a:srgbClr val="B96F13"/>
+          </a:solidFill>
+          <a:ln xmlns:a="http://schemas.openxmlformats.org/drawingml/2006/main" w="0">
+            <a:solidFill>
+              <a:srgbClr val="000000">
+                <a:alpha val="0"/>
+              </a:srgbClr>
+            </a:solidFill>
+            <a:prstDash val="solid"/>
+          </a:ln>
+        </p:spPr>
+      </p:sp>
+      <p:sp>
+        <p:nvSpPr>
+          <p:cNvPr id="35" name="">
+            <a:extLst xmlns:a="http://schemas.openxmlformats.org/drawingml/2006/main">
+              <a:ext uri="{FF2B5EF4-FFF2-40B4-BE49-F238E27FC236}">
+                <a16:creationId xmlns:a16="http://schemas.microsoft.com/office/drawing/2014/main" id="{AE1794D5-E20C-4180-8A02-EE5A8960BDBD}"/>
+              </a:ext>
+            </a:extLst>
+          </p:cNvPr>
+          <p:cNvSpPr>
+            <a:spLocks xmlns:a="http://schemas.openxmlformats.org/drawingml/2006/main" noGrp="1"/>
+          </p:cNvSpPr>
+          <p:nvPr/>
+        </p:nvSpPr>
+        <p:spPr>
+          <a:xfrm xmlns:a="http://schemas.openxmlformats.org/drawingml/2006/main">
+            <a:off x="8496300" y="3419475"/>
+            <a:ext cx="2638425" cy="200025"/>
+          </a:xfrm>
+          <a:prstGeom xmlns:a="http://schemas.openxmlformats.org/drawingml/2006/main" prst="rect">
+            <a:avLst/>
+          </a:prstGeom>
+          <a:solidFill xmlns:a="http://schemas.openxmlformats.org/drawingml/2006/main">
+            <a:srgbClr val="000000">
+              <a:alpha val="0"/>
+            </a:srgbClr>
+          </a:solidFill>
+          <a:ln xmlns:a="http://schemas.openxmlformats.org/drawingml/2006/main" w="0">
+            <a:solidFill>
+              <a:srgbClr val="000000">
+                <a:alpha val="0"/>
+              </a:srgbClr>
+            </a:solidFill>
+            <a:prstDash val="solid"/>
+          </a:ln>
+        </p:spPr>
+        <p:txBody>
+          <a:bodyPr xmlns:a="http://schemas.openxmlformats.org/drawingml/2006/main" lIns="0" tIns="0" rIns="0" bIns="0" anchor="t"/>
+          <a:lstStyle xmlns:a="http://schemas.openxmlformats.org/drawingml/2006/main"/>
+          <a:p xmlns:a="http://schemas.openxmlformats.org/drawingml/2006/main">
+            <a:pPr algn="l">
+              <a:defRPr sz="1050" b="0">
+                <a:solidFill>
+                  <a:srgbClr val="18201B"/>
+                </a:solidFill>
+                <a:latin typeface="Aptos"/>
+                <a:ea typeface="Aptos"/>
+                <a:cs typeface="Aptos"/>
+              </a:defRPr>
+            </a:pPr>
+            <a:r>
+              <a:rPr sz="1050" b="0">
+                <a:solidFill>
+                  <a:srgbClr val="18201B"/>
+                </a:solidFill>
+                <a:latin typeface="Aptos"/>
+                <a:ea typeface="Aptos"/>
+                <a:cs typeface="Aptos"/>
+              </a:rPr>
+              <a:t>Demographic subgroup view</a:t>
+            </a:r>
+          </a:p>
+        </p:txBody>
+      </p:sp>
+      <p:sp>
+        <p:nvSpPr>
+          <p:cNvPr id="36" name="">
+            <a:extLst xmlns:a="http://schemas.openxmlformats.org/drawingml/2006/main">
+              <a:ext uri="{FF2B5EF4-FFF2-40B4-BE49-F238E27FC236}">
+                <a16:creationId xmlns:a16="http://schemas.microsoft.com/office/drawing/2014/main" id="{C939AD65-BBF1-43F3-8ADF-40728F15E84F}"/>
+              </a:ext>
+            </a:extLst>
+          </p:cNvPr>
+          <p:cNvSpPr>
+            <a:spLocks xmlns:a="http://schemas.openxmlformats.org/drawingml/2006/main" noGrp="1"/>
+          </p:cNvSpPr>
+          <p:nvPr/>
+        </p:nvSpPr>
+        <p:spPr>
+          <a:xfrm xmlns:a="http://schemas.openxmlformats.org/drawingml/2006/main">
+            <a:off x="8324850" y="3705225"/>
+            <a:ext cx="57150" cy="57150"/>
+          </a:xfrm>
+          <a:prstGeom xmlns:a="http://schemas.openxmlformats.org/drawingml/2006/main" prst="rect">
+            <a:avLst/>
+          </a:prstGeom>
+          <a:solidFill xmlns:a="http://schemas.openxmlformats.org/drawingml/2006/main">
+            <a:srgbClr val="B96F13"/>
+          </a:solidFill>
+          <a:ln xmlns:a="http://schemas.openxmlformats.org/drawingml/2006/main" w="0">
+            <a:solidFill>
+              <a:srgbClr val="000000">
+                <a:alpha val="0"/>
+              </a:srgbClr>
+            </a:solidFill>
+            <a:prstDash val="solid"/>
+          </a:ln>
+        </p:spPr>
+      </p:sp>
+      <p:sp>
+        <p:nvSpPr>
+          <p:cNvPr id="37" name="">
+            <a:extLst xmlns:a="http://schemas.openxmlformats.org/drawingml/2006/main">
+              <a:ext uri="{FF2B5EF4-FFF2-40B4-BE49-F238E27FC236}">
+                <a16:creationId xmlns:a16="http://schemas.microsoft.com/office/drawing/2014/main" id="{7535BCF2-25C7-4E81-89DC-A29EBB46523F}"/>
+              </a:ext>
+            </a:extLst>
+          </p:cNvPr>
+          <p:cNvSpPr>
+            <a:spLocks xmlns:a="http://schemas.openxmlformats.org/drawingml/2006/main" noGrp="1"/>
+          </p:cNvSpPr>
+          <p:nvPr/>
+        </p:nvSpPr>
+        <p:spPr>
+          <a:xfrm xmlns:a="http://schemas.openxmlformats.org/drawingml/2006/main">
+            <a:off x="8496300" y="3629025"/>
+            <a:ext cx="2638425" cy="200025"/>
+          </a:xfrm>
+          <a:prstGeom xmlns:a="http://schemas.openxmlformats.org/drawingml/2006/main" prst="rect">
+            <a:avLst/>
+          </a:prstGeom>
+          <a:solidFill xmlns:a="http://schemas.openxmlformats.org/drawingml/2006/main">
+            <a:srgbClr val="000000">
+              <a:alpha val="0"/>
+            </a:srgbClr>
+          </a:solidFill>
+          <a:ln xmlns:a="http://schemas.openxmlformats.org/drawingml/2006/main" w="0">
+            <a:solidFill>
+              <a:srgbClr val="000000">
+                <a:alpha val="0"/>
+              </a:srgbClr>
+            </a:solidFill>
+            <a:prstDash val="solid"/>
+          </a:ln>
+        </p:spPr>
+        <p:txBody>
+          <a:bodyPr xmlns:a="http://schemas.openxmlformats.org/drawingml/2006/main" lIns="0" tIns="0" rIns="0" bIns="0" anchor="t"/>
+          <a:lstStyle xmlns:a="http://schemas.openxmlformats.org/drawingml/2006/main"/>
+          <a:p xmlns:a="http://schemas.openxmlformats.org/drawingml/2006/main">
+            <a:pPr algn="l">
+              <a:defRPr sz="1050" b="0">
+                <a:solidFill>
+                  <a:srgbClr val="18201B"/>
+                </a:solidFill>
+                <a:latin typeface="Aptos"/>
+                <a:ea typeface="Aptos"/>
+                <a:cs typeface="Aptos"/>
+              </a:defRPr>
+            </a:pPr>
+            <a:r>
+              <a:rPr sz="1050" b="0">
+                <a:solidFill>
+                  <a:srgbClr val="18201B"/>
+                </a:solidFill>
+                <a:latin typeface="Aptos"/>
+                <a:ea typeface="Aptos"/>
+                <a:cs typeface="Aptos"/>
+              </a:rPr>
+              <a:t>Future causal uplift framing</a:t>
+            </a:r>
+          </a:p>
+        </p:txBody>
+      </p:sp>
+      <p:sp>
+        <p:nvSpPr>
+          <p:cNvPr id="38" name="">
+            <a:extLst xmlns:a="http://schemas.openxmlformats.org/drawingml/2006/main">
+              <a:ext uri="{FF2B5EF4-FFF2-40B4-BE49-F238E27FC236}">
+                <a16:creationId xmlns:a16="http://schemas.microsoft.com/office/drawing/2014/main" id="{0CB08E76-DDAF-40D7-8915-F101DA00A28F}"/>
+              </a:ext>
+            </a:extLst>
+          </p:cNvPr>
+          <p:cNvSpPr>
+            <a:spLocks xmlns:a="http://schemas.openxmlformats.org/drawingml/2006/main" noGrp="1"/>
+          </p:cNvSpPr>
+          <p:nvPr/>
+        </p:nvSpPr>
+        <p:spPr>
+          <a:xfrm xmlns:a="http://schemas.openxmlformats.org/drawingml/2006/main">
+            <a:off x="666750" y="4286250"/>
+            <a:ext cx="5143500" cy="1476375"/>
           </a:xfrm>
           <a:prstGeom xmlns:a="http://schemas.openxmlformats.org/drawingml/2006/main" prst="rect">
             <a:avLst/>
@@ -3778,28 +5034,28 @@
       </p:sp>
       <p:sp>
         <p:nvSpPr>
-          <p:cNvPr id="13" name="">
-            <a:extLst xmlns:a="http://schemas.openxmlformats.org/drawingml/2006/main">
-              <a:ext uri="{FF2B5EF4-FFF2-40B4-BE49-F238E27FC236}">
-                <a16:creationId xmlns:a16="http://schemas.microsoft.com/office/drawing/2014/main" id="{F9EAD00B-E993-40AC-92B9-32FFD58F709B}"/>
-              </a:ext>
-            </a:extLst>
-          </p:cNvPr>
-          <p:cNvSpPr>
-            <a:spLocks xmlns:a="http://schemas.openxmlformats.org/drawingml/2006/main" noGrp="1"/>
-          </p:cNvSpPr>
-          <p:nvPr/>
-        </p:nvSpPr>
-        <p:spPr>
-          <a:xfrm xmlns:a="http://schemas.openxmlformats.org/drawingml/2006/main">
-            <a:off x="914400" y="4086225"/>
-            <a:ext cx="1905000" cy="285750"/>
-          </a:xfrm>
-          <a:prstGeom xmlns:a="http://schemas.openxmlformats.org/drawingml/2006/main" prst="rect">
-            <a:avLst/>
-          </a:prstGeom>
-          <a:solidFill xmlns:a="http://schemas.openxmlformats.org/drawingml/2006/main">
-            <a:srgbClr val="111815"/>
+          <p:cNvPr id="39" name="">
+            <a:extLst xmlns:a="http://schemas.openxmlformats.org/drawingml/2006/main">
+              <a:ext uri="{FF2B5EF4-FFF2-40B4-BE49-F238E27FC236}">
+                <a16:creationId xmlns:a16="http://schemas.microsoft.com/office/drawing/2014/main" id="{DC90057A-540B-420F-86E1-CCE2BE0F8515}"/>
+              </a:ext>
+            </a:extLst>
+          </p:cNvPr>
+          <p:cNvSpPr>
+            <a:spLocks xmlns:a="http://schemas.openxmlformats.org/drawingml/2006/main" noGrp="1"/>
+          </p:cNvSpPr>
+          <p:nvPr/>
+        </p:nvSpPr>
+        <p:spPr>
+          <a:xfrm xmlns:a="http://schemas.openxmlformats.org/drawingml/2006/main">
+            <a:off x="914400" y="4495800"/>
+            <a:ext cx="1143000" cy="285750"/>
+          </a:xfrm>
+          <a:prstGeom xmlns:a="http://schemas.openxmlformats.org/drawingml/2006/main" prst="rect">
+            <a:avLst/>
+          </a:prstGeom>
+          <a:solidFill xmlns:a="http://schemas.openxmlformats.org/drawingml/2006/main">
+            <a:srgbClr val="9C3B38"/>
           </a:solidFill>
           <a:ln xmlns:a="http://schemas.openxmlformats.org/drawingml/2006/main" w="9525">
             <a:solidFill>
@@ -3811,22 +5067,22 @@
       </p:sp>
       <p:sp>
         <p:nvSpPr>
-          <p:cNvPr id="14" name="">
-            <a:extLst xmlns:a="http://schemas.openxmlformats.org/drawingml/2006/main">
-              <a:ext uri="{FF2B5EF4-FFF2-40B4-BE49-F238E27FC236}">
-                <a16:creationId xmlns:a16="http://schemas.microsoft.com/office/drawing/2014/main" id="{5EECF7FC-9D0F-42AB-9614-BA900638B459}"/>
-              </a:ext>
-            </a:extLst>
-          </p:cNvPr>
-          <p:cNvSpPr>
-            <a:spLocks xmlns:a="http://schemas.openxmlformats.org/drawingml/2006/main" noGrp="1"/>
-          </p:cNvSpPr>
-          <p:nvPr/>
-        </p:nvSpPr>
-        <p:spPr>
-          <a:xfrm xmlns:a="http://schemas.openxmlformats.org/drawingml/2006/main">
-            <a:off x="1028700" y="4152900"/>
-            <a:ext cx="1676400" cy="171450"/>
+          <p:cNvPr id="40" name="">
+            <a:extLst xmlns:a="http://schemas.openxmlformats.org/drawingml/2006/main">
+              <a:ext uri="{FF2B5EF4-FFF2-40B4-BE49-F238E27FC236}">
+                <a16:creationId xmlns:a16="http://schemas.microsoft.com/office/drawing/2014/main" id="{28E80A56-73F8-4F32-AEBE-2EE5C7C3CE0E}"/>
+              </a:ext>
+            </a:extLst>
+          </p:cNvPr>
+          <p:cNvSpPr>
+            <a:spLocks xmlns:a="http://schemas.openxmlformats.org/drawingml/2006/main" noGrp="1"/>
+          </p:cNvSpPr>
+          <p:nvPr/>
+        </p:nvSpPr>
+        <p:spPr>
+          <a:xfrm xmlns:a="http://schemas.openxmlformats.org/drawingml/2006/main">
+            <a:off x="1028700" y="4562475"/>
+            <a:ext cx="914400" cy="171450"/>
           </a:xfrm>
           <a:prstGeom xmlns:a="http://schemas.openxmlformats.org/drawingml/2006/main" prst="rect">
             <a:avLst/>
@@ -3868,64 +5124,64 @@
                 <a:ea typeface="Aptos"/>
                 <a:cs typeface="Aptos"/>
               </a:rPr>
-              <a:t>Minimum delivery line</a:t>
-            </a:r>
-          </a:p>
-        </p:txBody>
-      </p:sp>
-      <p:sp>
-        <p:nvSpPr>
-          <p:cNvPr id="15" name="">
-            <a:extLst xmlns:a="http://schemas.openxmlformats.org/drawingml/2006/main">
-              <a:ext uri="{FF2B5EF4-FFF2-40B4-BE49-F238E27FC236}">
-                <a16:creationId xmlns:a16="http://schemas.microsoft.com/office/drawing/2014/main" id="{12E709C6-43A2-45DA-9E2E-B56BE522A3D9}"/>
-              </a:ext>
-            </a:extLst>
-          </p:cNvPr>
-          <p:cNvSpPr>
-            <a:spLocks xmlns:a="http://schemas.openxmlformats.org/drawingml/2006/main" noGrp="1"/>
-          </p:cNvSpPr>
-          <p:nvPr/>
-        </p:nvSpPr>
-        <p:spPr>
-          <a:xfrm xmlns:a="http://schemas.openxmlformats.org/drawingml/2006/main">
-            <a:off x="952500" y="4610100"/>
+              <a:t>风险控制</a:t>
+            </a:r>
+          </a:p>
+        </p:txBody>
+      </p:sp>
+      <p:sp>
+        <p:nvSpPr>
+          <p:cNvPr id="41" name="">
+            <a:extLst xmlns:a="http://schemas.openxmlformats.org/drawingml/2006/main">
+              <a:ext uri="{FF2B5EF4-FFF2-40B4-BE49-F238E27FC236}">
+                <a16:creationId xmlns:a16="http://schemas.microsoft.com/office/drawing/2014/main" id="{BBBB6EBC-6ADD-4D2F-914D-FB83E00003BD}"/>
+              </a:ext>
+            </a:extLst>
+          </p:cNvPr>
+          <p:cNvSpPr>
+            <a:spLocks xmlns:a="http://schemas.openxmlformats.org/drawingml/2006/main" noGrp="1"/>
+          </p:cNvSpPr>
+          <p:nvPr/>
+        </p:nvSpPr>
+        <p:spPr>
+          <a:xfrm xmlns:a="http://schemas.openxmlformats.org/drawingml/2006/main">
+            <a:off x="952500" y="4981575"/>
             <a:ext cx="57150" cy="57150"/>
           </a:xfrm>
           <a:prstGeom xmlns:a="http://schemas.openxmlformats.org/drawingml/2006/main" prst="rect">
             <a:avLst/>
           </a:prstGeom>
           <a:solidFill xmlns:a="http://schemas.openxmlformats.org/drawingml/2006/main">
-            <a:srgbClr val="146B4D"/>
-          </a:solidFill>
-          <a:ln xmlns:a="http://schemas.openxmlformats.org/drawingml/2006/main" w="0">
-            <a:solidFill>
-              <a:srgbClr val="000000">
-                <a:alpha val="0"/>
-              </a:srgbClr>
-            </a:solidFill>
-            <a:prstDash val="solid"/>
-          </a:ln>
-        </p:spPr>
-      </p:sp>
-      <p:sp>
-        <p:nvSpPr>
-          <p:cNvPr id="16" name="">
-            <a:extLst xmlns:a="http://schemas.openxmlformats.org/drawingml/2006/main">
-              <a:ext uri="{FF2B5EF4-FFF2-40B4-BE49-F238E27FC236}">
-                <a16:creationId xmlns:a16="http://schemas.microsoft.com/office/drawing/2014/main" id="{CC2E93DD-258E-4DD3-B001-A90F8351F593}"/>
-              </a:ext>
-            </a:extLst>
-          </p:cNvPr>
-          <p:cNvSpPr>
-            <a:spLocks xmlns:a="http://schemas.openxmlformats.org/drawingml/2006/main" noGrp="1"/>
-          </p:cNvSpPr>
-          <p:nvPr/>
-        </p:nvSpPr>
-        <p:spPr>
-          <a:xfrm xmlns:a="http://schemas.openxmlformats.org/drawingml/2006/main">
-            <a:off x="1123950" y="4533900"/>
-            <a:ext cx="4210050" cy="219075"/>
+            <a:srgbClr val="9C3B38"/>
+          </a:solidFill>
+          <a:ln xmlns:a="http://schemas.openxmlformats.org/drawingml/2006/main" w="0">
+            <a:solidFill>
+              <a:srgbClr val="000000">
+                <a:alpha val="0"/>
+              </a:srgbClr>
+            </a:solidFill>
+            <a:prstDash val="solid"/>
+          </a:ln>
+        </p:spPr>
+      </p:sp>
+      <p:sp>
+        <p:nvSpPr>
+          <p:cNvPr id="42" name="">
+            <a:extLst xmlns:a="http://schemas.openxmlformats.org/drawingml/2006/main">
+              <a:ext uri="{FF2B5EF4-FFF2-40B4-BE49-F238E27FC236}">
+                <a16:creationId xmlns:a16="http://schemas.microsoft.com/office/drawing/2014/main" id="{6F1824D4-AED5-4FED-B887-976FF60ECBC8}"/>
+              </a:ext>
+            </a:extLst>
+          </p:cNvPr>
+          <p:cNvSpPr>
+            <a:spLocks xmlns:a="http://schemas.openxmlformats.org/drawingml/2006/main" noGrp="1"/>
+          </p:cNvSpPr>
+          <p:nvPr/>
+        </p:nvSpPr>
+        <p:spPr>
+          <a:xfrm xmlns:a="http://schemas.openxmlformats.org/drawingml/2006/main">
+            <a:off x="1123950" y="4905375"/>
+            <a:ext cx="4305300" cy="200025"/>
           </a:xfrm>
           <a:prstGeom xmlns:a="http://schemas.openxmlformats.org/drawingml/2006/main" prst="rect">
             <a:avLst/>
@@ -3949,7 +5205,7 @@
           <a:lstStyle xmlns:a="http://schemas.openxmlformats.org/drawingml/2006/main"/>
           <a:p xmlns:a="http://schemas.openxmlformats.org/drawingml/2006/main">
             <a:pPr algn="l">
-              <a:defRPr sz="1125" b="0">
+              <a:defRPr sz="1050" b="0">
                 <a:solidFill>
                   <a:srgbClr val="18201B"/>
                 </a:solidFill>
@@ -3959,7 +5215,7 @@
               </a:defRPr>
             </a:pPr>
             <a:r>
-              <a:rPr sz="1125" b="0">
+              <a:rPr sz="1050" b="0">
                 <a:solidFill>
                   <a:srgbClr val="18201B"/>
                 </a:solidFill>
@@ -3967,64 +5223,64 @@
                 <a:ea typeface="Aptos"/>
                 <a:cs typeface="Aptos"/>
               </a:rPr>
-              <a:t>Chronological data split</a:t>
-            </a:r>
-          </a:p>
-        </p:txBody>
-      </p:sp>
-      <p:sp>
-        <p:nvSpPr>
-          <p:cNvPr id="17" name="">
-            <a:extLst xmlns:a="http://schemas.openxmlformats.org/drawingml/2006/main">
-              <a:ext uri="{FF2B5EF4-FFF2-40B4-BE49-F238E27FC236}">
-                <a16:creationId xmlns:a16="http://schemas.microsoft.com/office/drawing/2014/main" id="{0DB3352D-B1C2-433A-994E-0298DFA5BE0B}"/>
-              </a:ext>
-            </a:extLst>
-          </p:cNvPr>
-          <p:cNvSpPr>
-            <a:spLocks xmlns:a="http://schemas.openxmlformats.org/drawingml/2006/main" noGrp="1"/>
-          </p:cNvSpPr>
-          <p:nvPr/>
-        </p:nvSpPr>
-        <p:spPr>
-          <a:xfrm xmlns:a="http://schemas.openxmlformats.org/drawingml/2006/main">
-            <a:off x="952500" y="4838700"/>
+              <a:t>coupon redemption 稀疏：只作辅助信号</a:t>
+            </a:r>
+          </a:p>
+        </p:txBody>
+      </p:sp>
+      <p:sp>
+        <p:nvSpPr>
+          <p:cNvPr id="43" name="">
+            <a:extLst xmlns:a="http://schemas.openxmlformats.org/drawingml/2006/main">
+              <a:ext uri="{FF2B5EF4-FFF2-40B4-BE49-F238E27FC236}">
+                <a16:creationId xmlns:a16="http://schemas.microsoft.com/office/drawing/2014/main" id="{B6CB109D-B2F1-4435-843F-D1164F89EFDB}"/>
+              </a:ext>
+            </a:extLst>
+          </p:cNvPr>
+          <p:cNvSpPr>
+            <a:spLocks xmlns:a="http://schemas.openxmlformats.org/drawingml/2006/main" noGrp="1"/>
+          </p:cNvSpPr>
+          <p:nvPr/>
+        </p:nvSpPr>
+        <p:spPr>
+          <a:xfrm xmlns:a="http://schemas.openxmlformats.org/drawingml/2006/main">
+            <a:off x="952500" y="5191125"/>
             <a:ext cx="57150" cy="57150"/>
           </a:xfrm>
           <a:prstGeom xmlns:a="http://schemas.openxmlformats.org/drawingml/2006/main" prst="rect">
             <a:avLst/>
           </a:prstGeom>
           <a:solidFill xmlns:a="http://schemas.openxmlformats.org/drawingml/2006/main">
-            <a:srgbClr val="146B4D"/>
-          </a:solidFill>
-          <a:ln xmlns:a="http://schemas.openxmlformats.org/drawingml/2006/main" w="0">
-            <a:solidFill>
-              <a:srgbClr val="000000">
-                <a:alpha val="0"/>
-              </a:srgbClr>
-            </a:solidFill>
-            <a:prstDash val="solid"/>
-          </a:ln>
-        </p:spPr>
-      </p:sp>
-      <p:sp>
-        <p:nvSpPr>
-          <p:cNvPr id="18" name="">
-            <a:extLst xmlns:a="http://schemas.openxmlformats.org/drawingml/2006/main">
-              <a:ext uri="{FF2B5EF4-FFF2-40B4-BE49-F238E27FC236}">
-                <a16:creationId xmlns:a16="http://schemas.microsoft.com/office/drawing/2014/main" id="{00E34E66-1085-4BC4-A94B-182BBB72FF08}"/>
-              </a:ext>
-            </a:extLst>
-          </p:cNvPr>
-          <p:cNvSpPr>
-            <a:spLocks xmlns:a="http://schemas.openxmlformats.org/drawingml/2006/main" noGrp="1"/>
-          </p:cNvSpPr>
-          <p:nvPr/>
-        </p:nvSpPr>
-        <p:spPr>
-          <a:xfrm xmlns:a="http://schemas.openxmlformats.org/drawingml/2006/main">
-            <a:off x="1123950" y="4762500"/>
-            <a:ext cx="4210050" cy="219075"/>
+            <a:srgbClr val="9C3B38"/>
+          </a:solidFill>
+          <a:ln xmlns:a="http://schemas.openxmlformats.org/drawingml/2006/main" w="0">
+            <a:solidFill>
+              <a:srgbClr val="000000">
+                <a:alpha val="0"/>
+              </a:srgbClr>
+            </a:solidFill>
+            <a:prstDash val="solid"/>
+          </a:ln>
+        </p:spPr>
+      </p:sp>
+      <p:sp>
+        <p:nvSpPr>
+          <p:cNvPr id="44" name="">
+            <a:extLst xmlns:a="http://schemas.openxmlformats.org/drawingml/2006/main">
+              <a:ext uri="{FF2B5EF4-FFF2-40B4-BE49-F238E27FC236}">
+                <a16:creationId xmlns:a16="http://schemas.microsoft.com/office/drawing/2014/main" id="{4C1CAD40-C2C5-49DF-87CE-96976EF13C81}"/>
+              </a:ext>
+            </a:extLst>
+          </p:cNvPr>
+          <p:cNvSpPr>
+            <a:spLocks xmlns:a="http://schemas.openxmlformats.org/drawingml/2006/main" noGrp="1"/>
+          </p:cNvSpPr>
+          <p:nvPr/>
+        </p:nvSpPr>
+        <p:spPr>
+          <a:xfrm xmlns:a="http://schemas.openxmlformats.org/drawingml/2006/main">
+            <a:off x="1123950" y="5114925"/>
+            <a:ext cx="4305300" cy="200025"/>
           </a:xfrm>
           <a:prstGeom xmlns:a="http://schemas.openxmlformats.org/drawingml/2006/main" prst="rect">
             <a:avLst/>
@@ -4048,7 +5304,7 @@
           <a:lstStyle xmlns:a="http://schemas.openxmlformats.org/drawingml/2006/main"/>
           <a:p xmlns:a="http://schemas.openxmlformats.org/drawingml/2006/main">
             <a:pPr algn="l">
-              <a:defRPr sz="1125" b="0">
+              <a:defRPr sz="1050" b="0">
                 <a:solidFill>
                   <a:srgbClr val="18201B"/>
                 </a:solidFill>
@@ -4058,7 +5314,7 @@
               </a:defRPr>
             </a:pPr>
             <a:r>
-              <a:rPr sz="1125" b="0">
+              <a:rPr sz="1050" b="0">
                 <a:solidFill>
                   <a:srgbClr val="18201B"/>
                 </a:solidFill>
@@ -4066,64 +5322,64 @@
                 <a:ea typeface="Aptos"/>
                 <a:cs typeface="Aptos"/>
               </a:rPr>
-              <a:t>Popularity + ALS</a:t>
-            </a:r>
-          </a:p>
-        </p:txBody>
-      </p:sp>
-      <p:sp>
-        <p:nvSpPr>
-          <p:cNvPr id="19" name="">
-            <a:extLst xmlns:a="http://schemas.openxmlformats.org/drawingml/2006/main">
-              <a:ext uri="{FF2B5EF4-FFF2-40B4-BE49-F238E27FC236}">
-                <a16:creationId xmlns:a16="http://schemas.microsoft.com/office/drawing/2014/main" id="{56D5C69A-809E-4E34-AC17-BC57B9741BFC}"/>
-              </a:ext>
-            </a:extLst>
-          </p:cNvPr>
-          <p:cNvSpPr>
-            <a:spLocks xmlns:a="http://schemas.openxmlformats.org/drawingml/2006/main" noGrp="1"/>
-          </p:cNvSpPr>
-          <p:nvPr/>
-        </p:nvSpPr>
-        <p:spPr>
-          <a:xfrm xmlns:a="http://schemas.openxmlformats.org/drawingml/2006/main">
-            <a:off x="952500" y="5067300"/>
+              <a:t>demographics 部分覆盖：可选分析/demo</a:t>
+            </a:r>
+          </a:p>
+        </p:txBody>
+      </p:sp>
+      <p:sp>
+        <p:nvSpPr>
+          <p:cNvPr id="45" name="">
+            <a:extLst xmlns:a="http://schemas.openxmlformats.org/drawingml/2006/main">
+              <a:ext uri="{FF2B5EF4-FFF2-40B4-BE49-F238E27FC236}">
+                <a16:creationId xmlns:a16="http://schemas.microsoft.com/office/drawing/2014/main" id="{BA0E2550-3F4D-4ABB-B76D-EC1A469FCE4C}"/>
+              </a:ext>
+            </a:extLst>
+          </p:cNvPr>
+          <p:cNvSpPr>
+            <a:spLocks xmlns:a="http://schemas.openxmlformats.org/drawingml/2006/main" noGrp="1"/>
+          </p:cNvSpPr>
+          <p:nvPr/>
+        </p:nvSpPr>
+        <p:spPr>
+          <a:xfrm xmlns:a="http://schemas.openxmlformats.org/drawingml/2006/main">
+            <a:off x="952500" y="5400675"/>
             <a:ext cx="57150" cy="57150"/>
           </a:xfrm>
           <a:prstGeom xmlns:a="http://schemas.openxmlformats.org/drawingml/2006/main" prst="rect">
             <a:avLst/>
           </a:prstGeom>
           <a:solidFill xmlns:a="http://schemas.openxmlformats.org/drawingml/2006/main">
-            <a:srgbClr val="146B4D"/>
-          </a:solidFill>
-          <a:ln xmlns:a="http://schemas.openxmlformats.org/drawingml/2006/main" w="0">
-            <a:solidFill>
-              <a:srgbClr val="000000">
-                <a:alpha val="0"/>
-              </a:srgbClr>
-            </a:solidFill>
-            <a:prstDash val="solid"/>
-          </a:ln>
-        </p:spPr>
-      </p:sp>
-      <p:sp>
-        <p:nvSpPr>
-          <p:cNvPr id="20" name="">
-            <a:extLst xmlns:a="http://schemas.openxmlformats.org/drawingml/2006/main">
-              <a:ext uri="{FF2B5EF4-FFF2-40B4-BE49-F238E27FC236}">
-                <a16:creationId xmlns:a16="http://schemas.microsoft.com/office/drawing/2014/main" id="{D5E3E360-2DF8-42AE-B566-33D9A60736E5}"/>
-              </a:ext>
-            </a:extLst>
-          </p:cNvPr>
-          <p:cNvSpPr>
-            <a:spLocks xmlns:a="http://schemas.openxmlformats.org/drawingml/2006/main" noGrp="1"/>
-          </p:cNvSpPr>
-          <p:nvPr/>
-        </p:nvSpPr>
-        <p:spPr>
-          <a:xfrm xmlns:a="http://schemas.openxmlformats.org/drawingml/2006/main">
-            <a:off x="1123950" y="4991100"/>
-            <a:ext cx="4210050" cy="219075"/>
+            <a:srgbClr val="9C3B38"/>
+          </a:solidFill>
+          <a:ln xmlns:a="http://schemas.openxmlformats.org/drawingml/2006/main" w="0">
+            <a:solidFill>
+              <a:srgbClr val="000000">
+                <a:alpha val="0"/>
+              </a:srgbClr>
+            </a:solidFill>
+            <a:prstDash val="solid"/>
+          </a:ln>
+        </p:spPr>
+      </p:sp>
+      <p:sp>
+        <p:nvSpPr>
+          <p:cNvPr id="46" name="">
+            <a:extLst xmlns:a="http://schemas.openxmlformats.org/drawingml/2006/main">
+              <a:ext uri="{FF2B5EF4-FFF2-40B4-BE49-F238E27FC236}">
+                <a16:creationId xmlns:a16="http://schemas.microsoft.com/office/drawing/2014/main" id="{B9664D34-DA2D-4C20-868C-66E0B13BCD0D}"/>
+              </a:ext>
+            </a:extLst>
+          </p:cNvPr>
+          <p:cNvSpPr>
+            <a:spLocks xmlns:a="http://schemas.openxmlformats.org/drawingml/2006/main" noGrp="1"/>
+          </p:cNvSpPr>
+          <p:nvPr/>
+        </p:nvSpPr>
+        <p:spPr>
+          <a:xfrm xmlns:a="http://schemas.openxmlformats.org/drawingml/2006/main">
+            <a:off x="1123950" y="5324475"/>
+            <a:ext cx="4305300" cy="200025"/>
           </a:xfrm>
           <a:prstGeom xmlns:a="http://schemas.openxmlformats.org/drawingml/2006/main" prst="rect">
             <a:avLst/>
@@ -4147,7 +5403,7 @@
           <a:lstStyle xmlns:a="http://schemas.openxmlformats.org/drawingml/2006/main"/>
           <a:p xmlns:a="http://schemas.openxmlformats.org/drawingml/2006/main">
             <a:pPr algn="l">
-              <a:defRPr sz="1125" b="0">
+              <a:defRPr sz="1050" b="0">
                 <a:solidFill>
                   <a:srgbClr val="18201B"/>
                 </a:solidFill>
@@ -4157,7 +5413,7 @@
               </a:defRPr>
             </a:pPr>
             <a:r>
-              <a:rPr sz="1125" b="0">
+              <a:rPr sz="1050" b="0">
                 <a:solidFill>
                   <a:srgbClr val="18201B"/>
                 </a:solidFill>
@@ -4165,227 +5421,29 @@
                 <a:ea typeface="Aptos"/>
                 <a:cs typeface="Aptos"/>
               </a:rPr>
-              <a:t>Promotion-aware reranking</a:t>
-            </a:r>
-          </a:p>
-        </p:txBody>
-      </p:sp>
-      <p:sp>
-        <p:nvSpPr>
-          <p:cNvPr id="21" name="">
-            <a:extLst xmlns:a="http://schemas.openxmlformats.org/drawingml/2006/main">
-              <a:ext uri="{FF2B5EF4-FFF2-40B4-BE49-F238E27FC236}">
-                <a16:creationId xmlns:a16="http://schemas.microsoft.com/office/drawing/2014/main" id="{903EA9D7-6C4C-487E-8133-88F89658DB24}"/>
-              </a:ext>
-            </a:extLst>
-          </p:cNvPr>
-          <p:cNvSpPr>
-            <a:spLocks xmlns:a="http://schemas.openxmlformats.org/drawingml/2006/main" noGrp="1"/>
-          </p:cNvSpPr>
-          <p:nvPr/>
-        </p:nvSpPr>
-        <p:spPr>
-          <a:xfrm xmlns:a="http://schemas.openxmlformats.org/drawingml/2006/main">
-            <a:off x="952500" y="5295900"/>
-            <a:ext cx="57150" cy="57150"/>
-          </a:xfrm>
-          <a:prstGeom xmlns:a="http://schemas.openxmlformats.org/drawingml/2006/main" prst="rect">
-            <a:avLst/>
-          </a:prstGeom>
-          <a:solidFill xmlns:a="http://schemas.openxmlformats.org/drawingml/2006/main">
-            <a:srgbClr val="146B4D"/>
-          </a:solidFill>
-          <a:ln xmlns:a="http://schemas.openxmlformats.org/drawingml/2006/main" w="0">
-            <a:solidFill>
-              <a:srgbClr val="000000">
-                <a:alpha val="0"/>
-              </a:srgbClr>
-            </a:solidFill>
-            <a:prstDash val="solid"/>
-          </a:ln>
-        </p:spPr>
-      </p:sp>
-      <p:sp>
-        <p:nvSpPr>
-          <p:cNvPr id="22" name="">
-            <a:extLst xmlns:a="http://schemas.openxmlformats.org/drawingml/2006/main">
-              <a:ext uri="{FF2B5EF4-FFF2-40B4-BE49-F238E27FC236}">
-                <a16:creationId xmlns:a16="http://schemas.microsoft.com/office/drawing/2014/main" id="{6723A0E5-31F9-4E70-A7DA-068687898421}"/>
-              </a:ext>
-            </a:extLst>
-          </p:cNvPr>
-          <p:cNvSpPr>
-            <a:spLocks xmlns:a="http://schemas.openxmlformats.org/drawingml/2006/main" noGrp="1"/>
-          </p:cNvSpPr>
-          <p:nvPr/>
-        </p:nvSpPr>
-        <p:spPr>
-          <a:xfrm xmlns:a="http://schemas.openxmlformats.org/drawingml/2006/main">
-            <a:off x="1123950" y="5219700"/>
-            <a:ext cx="4210050" cy="219075"/>
-          </a:xfrm>
-          <a:prstGeom xmlns:a="http://schemas.openxmlformats.org/drawingml/2006/main" prst="rect">
-            <a:avLst/>
-          </a:prstGeom>
-          <a:solidFill xmlns:a="http://schemas.openxmlformats.org/drawingml/2006/main">
-            <a:srgbClr val="000000">
-              <a:alpha val="0"/>
-            </a:srgbClr>
-          </a:solidFill>
-          <a:ln xmlns:a="http://schemas.openxmlformats.org/drawingml/2006/main" w="0">
-            <a:solidFill>
-              <a:srgbClr val="000000">
-                <a:alpha val="0"/>
-              </a:srgbClr>
-            </a:solidFill>
-            <a:prstDash val="solid"/>
-          </a:ln>
-        </p:spPr>
-        <p:txBody>
-          <a:bodyPr xmlns:a="http://schemas.openxmlformats.org/drawingml/2006/main" lIns="0" tIns="0" rIns="0" bIns="0" anchor="t"/>
-          <a:lstStyle xmlns:a="http://schemas.openxmlformats.org/drawingml/2006/main"/>
-          <a:p xmlns:a="http://schemas.openxmlformats.org/drawingml/2006/main">
-            <a:pPr algn="l">
-              <a:defRPr sz="1125" b="0">
-                <a:solidFill>
-                  <a:srgbClr val="18201B"/>
-                </a:solidFill>
-                <a:latin typeface="Aptos"/>
-                <a:ea typeface="Aptos"/>
-                <a:cs typeface="Aptos"/>
-              </a:defRPr>
-            </a:pPr>
-            <a:r>
-              <a:rPr sz="1125" b="0">
-                <a:solidFill>
-                  <a:srgbClr val="18201B"/>
-                </a:solidFill>
-                <a:latin typeface="Aptos"/>
-                <a:ea typeface="Aptos"/>
-                <a:cs typeface="Aptos"/>
-              </a:rPr>
-              <a:t>Business Utility@K</a:t>
-            </a:r>
-          </a:p>
-        </p:txBody>
-      </p:sp>
-      <p:sp>
-        <p:nvSpPr>
-          <p:cNvPr id="23" name="">
-            <a:extLst xmlns:a="http://schemas.openxmlformats.org/drawingml/2006/main">
-              <a:ext uri="{FF2B5EF4-FFF2-40B4-BE49-F238E27FC236}">
-                <a16:creationId xmlns:a16="http://schemas.microsoft.com/office/drawing/2014/main" id="{4552099B-D7CF-443D-B620-146F68DF656E}"/>
-              </a:ext>
-            </a:extLst>
-          </p:cNvPr>
-          <p:cNvSpPr>
-            <a:spLocks xmlns:a="http://schemas.openxmlformats.org/drawingml/2006/main" noGrp="1"/>
-          </p:cNvSpPr>
-          <p:nvPr/>
-        </p:nvSpPr>
-        <p:spPr>
-          <a:xfrm xmlns:a="http://schemas.openxmlformats.org/drawingml/2006/main">
-            <a:off x="952500" y="5524500"/>
-            <a:ext cx="57150" cy="57150"/>
-          </a:xfrm>
-          <a:prstGeom xmlns:a="http://schemas.openxmlformats.org/drawingml/2006/main" prst="rect">
-            <a:avLst/>
-          </a:prstGeom>
-          <a:solidFill xmlns:a="http://schemas.openxmlformats.org/drawingml/2006/main">
-            <a:srgbClr val="146B4D"/>
-          </a:solidFill>
-          <a:ln xmlns:a="http://schemas.openxmlformats.org/drawingml/2006/main" w="0">
-            <a:solidFill>
-              <a:srgbClr val="000000">
-                <a:alpha val="0"/>
-              </a:srgbClr>
-            </a:solidFill>
-            <a:prstDash val="solid"/>
-          </a:ln>
-        </p:spPr>
-      </p:sp>
-      <p:sp>
-        <p:nvSpPr>
-          <p:cNvPr id="24" name="">
-            <a:extLst xmlns:a="http://schemas.openxmlformats.org/drawingml/2006/main">
-              <a:ext uri="{FF2B5EF4-FFF2-40B4-BE49-F238E27FC236}">
-                <a16:creationId xmlns:a16="http://schemas.microsoft.com/office/drawing/2014/main" id="{D5EED9F4-B23C-41FC-8E5B-5993CA843658}"/>
-              </a:ext>
-            </a:extLst>
-          </p:cNvPr>
-          <p:cNvSpPr>
-            <a:spLocks xmlns:a="http://schemas.openxmlformats.org/drawingml/2006/main" noGrp="1"/>
-          </p:cNvSpPr>
-          <p:nvPr/>
-        </p:nvSpPr>
-        <p:spPr>
-          <a:xfrm xmlns:a="http://schemas.openxmlformats.org/drawingml/2006/main">
-            <a:off x="1123950" y="5448300"/>
-            <a:ext cx="4210050" cy="219075"/>
-          </a:xfrm>
-          <a:prstGeom xmlns:a="http://schemas.openxmlformats.org/drawingml/2006/main" prst="rect">
-            <a:avLst/>
-          </a:prstGeom>
-          <a:solidFill xmlns:a="http://schemas.openxmlformats.org/drawingml/2006/main">
-            <a:srgbClr val="000000">
-              <a:alpha val="0"/>
-            </a:srgbClr>
-          </a:solidFill>
-          <a:ln xmlns:a="http://schemas.openxmlformats.org/drawingml/2006/main" w="0">
-            <a:solidFill>
-              <a:srgbClr val="000000">
-                <a:alpha val="0"/>
-              </a:srgbClr>
-            </a:solidFill>
-            <a:prstDash val="solid"/>
-          </a:ln>
-        </p:spPr>
-        <p:txBody>
-          <a:bodyPr xmlns:a="http://schemas.openxmlformats.org/drawingml/2006/main" lIns="0" tIns="0" rIns="0" bIns="0" anchor="t"/>
-          <a:lstStyle xmlns:a="http://schemas.openxmlformats.org/drawingml/2006/main"/>
-          <a:p xmlns:a="http://schemas.openxmlformats.org/drawingml/2006/main">
-            <a:pPr algn="l">
-              <a:defRPr sz="1125" b="0">
-                <a:solidFill>
-                  <a:srgbClr val="18201B"/>
-                </a:solidFill>
-                <a:latin typeface="Aptos"/>
-                <a:ea typeface="Aptos"/>
-                <a:cs typeface="Aptos"/>
-              </a:defRPr>
-            </a:pPr>
-            <a:r>
-              <a:rPr sz="1125" b="0">
-                <a:solidFill>
-                  <a:srgbClr val="18201B"/>
-                </a:solidFill>
-                <a:latin typeface="Aptos"/>
-                <a:ea typeface="Aptos"/>
-                <a:cs typeface="Aptos"/>
-              </a:rPr>
-              <a:t>Streamlit demo</a:t>
-            </a:r>
-          </a:p>
-        </p:txBody>
-      </p:sp>
-      <p:sp>
-        <p:nvSpPr>
-          <p:cNvPr id="25" name="">
-            <a:extLst xmlns:a="http://schemas.openxmlformats.org/drawingml/2006/main">
-              <a:ext uri="{FF2B5EF4-FFF2-40B4-BE49-F238E27FC236}">
-                <a16:creationId xmlns:a16="http://schemas.microsoft.com/office/drawing/2014/main" id="{B976225E-CFED-4DEF-8983-90F65CA91E49}"/>
-              </a:ext>
-            </a:extLst>
-          </p:cNvPr>
-          <p:cNvSpPr>
-            <a:spLocks xmlns:a="http://schemas.openxmlformats.org/drawingml/2006/main" noGrp="1"/>
-          </p:cNvSpPr>
-          <p:nvPr/>
-        </p:nvSpPr>
-        <p:spPr>
-          <a:xfrm xmlns:a="http://schemas.openxmlformats.org/drawingml/2006/main">
-            <a:off x="6191250" y="3857625"/>
-            <a:ext cx="5143500" cy="1952625"/>
+              <a:t>没有 margin data：用 proxy，不说 profit</a:t>
+            </a:r>
+          </a:p>
+        </p:txBody>
+      </p:sp>
+      <p:sp>
+        <p:nvSpPr>
+          <p:cNvPr id="47" name="">
+            <a:extLst xmlns:a="http://schemas.openxmlformats.org/drawingml/2006/main">
+              <a:ext uri="{FF2B5EF4-FFF2-40B4-BE49-F238E27FC236}">
+                <a16:creationId xmlns:a16="http://schemas.microsoft.com/office/drawing/2014/main" id="{8FED0508-F42E-4AC1-A19F-47655F8C148C}"/>
+              </a:ext>
+            </a:extLst>
+          </p:cNvPr>
+          <p:cNvSpPr>
+            <a:spLocks xmlns:a="http://schemas.openxmlformats.org/drawingml/2006/main" noGrp="1"/>
+          </p:cNvSpPr>
+          <p:nvPr/>
+        </p:nvSpPr>
+        <p:spPr>
+          <a:xfrm xmlns:a="http://schemas.openxmlformats.org/drawingml/2006/main">
+            <a:off x="6191250" y="4286250"/>
+            <a:ext cx="5143500" cy="1476375"/>
           </a:xfrm>
           <a:prstGeom xmlns:a="http://schemas.openxmlformats.org/drawingml/2006/main" prst="rect">
             <a:avLst/>
@@ -4403,28 +5461,28 @@
       </p:sp>
       <p:sp>
         <p:nvSpPr>
-          <p:cNvPr id="26" name="">
-            <a:extLst xmlns:a="http://schemas.openxmlformats.org/drawingml/2006/main">
-              <a:ext uri="{FF2B5EF4-FFF2-40B4-BE49-F238E27FC236}">
-                <a16:creationId xmlns:a16="http://schemas.microsoft.com/office/drawing/2014/main" id="{DA7F3D3D-42E6-4712-8F14-9ABCE467EF13}"/>
-              </a:ext>
-            </a:extLst>
-          </p:cNvPr>
-          <p:cNvSpPr>
-            <a:spLocks xmlns:a="http://schemas.openxmlformats.org/drawingml/2006/main" noGrp="1"/>
-          </p:cNvSpPr>
-          <p:nvPr/>
-        </p:nvSpPr>
-        <p:spPr>
-          <a:xfrm xmlns:a="http://schemas.openxmlformats.org/drawingml/2006/main">
-            <a:off x="6438900" y="4086225"/>
-            <a:ext cx="1524000" cy="285750"/>
-          </a:xfrm>
-          <a:prstGeom xmlns:a="http://schemas.openxmlformats.org/drawingml/2006/main" prst="rect">
-            <a:avLst/>
-          </a:prstGeom>
-          <a:solidFill xmlns:a="http://schemas.openxmlformats.org/drawingml/2006/main">
-            <a:srgbClr val="9C3B38"/>
+          <p:cNvPr id="48" name="">
+            <a:extLst xmlns:a="http://schemas.openxmlformats.org/drawingml/2006/main">
+              <a:ext uri="{FF2B5EF4-FFF2-40B4-BE49-F238E27FC236}">
+                <a16:creationId xmlns:a16="http://schemas.microsoft.com/office/drawing/2014/main" id="{5057B3D3-D035-4DDA-BC83-4EBC71C67F15}"/>
+              </a:ext>
+            </a:extLst>
+          </p:cNvPr>
+          <p:cNvSpPr>
+            <a:spLocks xmlns:a="http://schemas.openxmlformats.org/drawingml/2006/main" noGrp="1"/>
+          </p:cNvSpPr>
+          <p:nvPr/>
+        </p:nvSpPr>
+        <p:spPr>
+          <a:xfrm xmlns:a="http://schemas.openxmlformats.org/drawingml/2006/main">
+            <a:off x="6438900" y="4495800"/>
+            <a:ext cx="1143000" cy="285750"/>
+          </a:xfrm>
+          <a:prstGeom xmlns:a="http://schemas.openxmlformats.org/drawingml/2006/main" prst="rect">
+            <a:avLst/>
+          </a:prstGeom>
+          <a:solidFill xmlns:a="http://schemas.openxmlformats.org/drawingml/2006/main">
+            <a:srgbClr val="111815"/>
           </a:solidFill>
           <a:ln xmlns:a="http://schemas.openxmlformats.org/drawingml/2006/main" w="9525">
             <a:solidFill>
@@ -4436,22 +5494,22 @@
       </p:sp>
       <p:sp>
         <p:nvSpPr>
-          <p:cNvPr id="27" name="">
-            <a:extLst xmlns:a="http://schemas.openxmlformats.org/drawingml/2006/main">
-              <a:ext uri="{FF2B5EF4-FFF2-40B4-BE49-F238E27FC236}">
-                <a16:creationId xmlns:a16="http://schemas.microsoft.com/office/drawing/2014/main" id="{B3BAD329-BC06-41DD-8C5A-1F528273EDE2}"/>
-              </a:ext>
-            </a:extLst>
-          </p:cNvPr>
-          <p:cNvSpPr>
-            <a:spLocks xmlns:a="http://schemas.openxmlformats.org/drawingml/2006/main" noGrp="1"/>
-          </p:cNvSpPr>
-          <p:nvPr/>
-        </p:nvSpPr>
-        <p:spPr>
-          <a:xfrm xmlns:a="http://schemas.openxmlformats.org/drawingml/2006/main">
-            <a:off x="6553200" y="4152900"/>
-            <a:ext cx="1295400" cy="171450"/>
+          <p:cNvPr id="49" name="">
+            <a:extLst xmlns:a="http://schemas.openxmlformats.org/drawingml/2006/main">
+              <a:ext uri="{FF2B5EF4-FFF2-40B4-BE49-F238E27FC236}">
+                <a16:creationId xmlns:a16="http://schemas.microsoft.com/office/drawing/2014/main" id="{7F01BED2-1ACC-46AE-85CD-B54AEC01F58D}"/>
+              </a:ext>
+            </a:extLst>
+          </p:cNvPr>
+          <p:cNvSpPr>
+            <a:spLocks xmlns:a="http://schemas.openxmlformats.org/drawingml/2006/main" noGrp="1"/>
+          </p:cNvSpPr>
+          <p:nvPr/>
+        </p:nvSpPr>
+        <p:spPr>
+          <a:xfrm xmlns:a="http://schemas.openxmlformats.org/drawingml/2006/main">
+            <a:off x="6553200" y="4562475"/>
+            <a:ext cx="914400" cy="171450"/>
           </a:xfrm>
           <a:prstGeom xmlns:a="http://schemas.openxmlformats.org/drawingml/2006/main" prst="rect">
             <a:avLst/>
@@ -4493,64 +5551,64 @@
                 <a:ea typeface="Aptos"/>
                 <a:cs typeface="Aptos"/>
               </a:rPr>
-              <a:t>Risks controlled</a:t>
-            </a:r>
-          </a:p>
-        </p:txBody>
-      </p:sp>
-      <p:sp>
-        <p:nvSpPr>
-          <p:cNvPr id="28" name="">
-            <a:extLst xmlns:a="http://schemas.openxmlformats.org/drawingml/2006/main">
-              <a:ext uri="{FF2B5EF4-FFF2-40B4-BE49-F238E27FC236}">
-                <a16:creationId xmlns:a16="http://schemas.microsoft.com/office/drawing/2014/main" id="{593AB6BE-959B-4845-9F76-0BA8865A6D1E}"/>
-              </a:ext>
-            </a:extLst>
-          </p:cNvPr>
-          <p:cNvSpPr>
-            <a:spLocks xmlns:a="http://schemas.openxmlformats.org/drawingml/2006/main" noGrp="1"/>
-          </p:cNvSpPr>
-          <p:nvPr/>
-        </p:nvSpPr>
-        <p:spPr>
-          <a:xfrm xmlns:a="http://schemas.openxmlformats.org/drawingml/2006/main">
-            <a:off x="6477000" y="4610100"/>
+              <a:t>最终证据</a:t>
+            </a:r>
+          </a:p>
+        </p:txBody>
+      </p:sp>
+      <p:sp>
+        <p:nvSpPr>
+          <p:cNvPr id="50" name="">
+            <a:extLst xmlns:a="http://schemas.openxmlformats.org/drawingml/2006/main">
+              <a:ext uri="{FF2B5EF4-FFF2-40B4-BE49-F238E27FC236}">
+                <a16:creationId xmlns:a16="http://schemas.microsoft.com/office/drawing/2014/main" id="{7385CDE7-20EC-4B79-A7CD-CD3B56B01B87}"/>
+              </a:ext>
+            </a:extLst>
+          </p:cNvPr>
+          <p:cNvSpPr>
+            <a:spLocks xmlns:a="http://schemas.openxmlformats.org/drawingml/2006/main" noGrp="1"/>
+          </p:cNvSpPr>
+          <p:nvPr/>
+        </p:nvSpPr>
+        <p:spPr>
+          <a:xfrm xmlns:a="http://schemas.openxmlformats.org/drawingml/2006/main">
+            <a:off x="6477000" y="4981575"/>
             <a:ext cx="57150" cy="57150"/>
           </a:xfrm>
           <a:prstGeom xmlns:a="http://schemas.openxmlformats.org/drawingml/2006/main" prst="rect">
             <a:avLst/>
           </a:prstGeom>
           <a:solidFill xmlns:a="http://schemas.openxmlformats.org/drawingml/2006/main">
-            <a:srgbClr val="9C3B38"/>
-          </a:solidFill>
-          <a:ln xmlns:a="http://schemas.openxmlformats.org/drawingml/2006/main" w="0">
-            <a:solidFill>
-              <a:srgbClr val="000000">
-                <a:alpha val="0"/>
-              </a:srgbClr>
-            </a:solidFill>
-            <a:prstDash val="solid"/>
-          </a:ln>
-        </p:spPr>
-      </p:sp>
-      <p:sp>
-        <p:nvSpPr>
-          <p:cNvPr id="29" name="">
-            <a:extLst xmlns:a="http://schemas.openxmlformats.org/drawingml/2006/main">
-              <a:ext uri="{FF2B5EF4-FFF2-40B4-BE49-F238E27FC236}">
-                <a16:creationId xmlns:a16="http://schemas.microsoft.com/office/drawing/2014/main" id="{CBE2180C-C053-4885-8E20-E7D70D48FE46}"/>
-              </a:ext>
-            </a:extLst>
-          </p:cNvPr>
-          <p:cNvSpPr>
-            <a:spLocks xmlns:a="http://schemas.openxmlformats.org/drawingml/2006/main" noGrp="1"/>
-          </p:cNvSpPr>
-          <p:nvPr/>
-        </p:nvSpPr>
-        <p:spPr>
-          <a:xfrm xmlns:a="http://schemas.openxmlformats.org/drawingml/2006/main">
-            <a:off x="6648450" y="4533900"/>
-            <a:ext cx="4305300" cy="219075"/>
+            <a:srgbClr val="146B4D"/>
+          </a:solidFill>
+          <a:ln xmlns:a="http://schemas.openxmlformats.org/drawingml/2006/main" w="0">
+            <a:solidFill>
+              <a:srgbClr val="000000">
+                <a:alpha val="0"/>
+              </a:srgbClr>
+            </a:solidFill>
+            <a:prstDash val="solid"/>
+          </a:ln>
+        </p:spPr>
+      </p:sp>
+      <p:sp>
+        <p:nvSpPr>
+          <p:cNvPr id="51" name="">
+            <a:extLst xmlns:a="http://schemas.openxmlformats.org/drawingml/2006/main">
+              <a:ext uri="{FF2B5EF4-FFF2-40B4-BE49-F238E27FC236}">
+                <a16:creationId xmlns:a16="http://schemas.microsoft.com/office/drawing/2014/main" id="{77BBF616-C267-447C-B7AE-0593263DCB1A}"/>
+              </a:ext>
+            </a:extLst>
+          </p:cNvPr>
+          <p:cNvSpPr>
+            <a:spLocks xmlns:a="http://schemas.openxmlformats.org/drawingml/2006/main" noGrp="1"/>
+          </p:cNvSpPr>
+          <p:nvPr/>
+        </p:nvSpPr>
+        <p:spPr>
+          <a:xfrm xmlns:a="http://schemas.openxmlformats.org/drawingml/2006/main">
+            <a:off x="6648450" y="4905375"/>
+            <a:ext cx="4305300" cy="200025"/>
           </a:xfrm>
           <a:prstGeom xmlns:a="http://schemas.openxmlformats.org/drawingml/2006/main" prst="rect">
             <a:avLst/>
@@ -4574,7 +5632,7 @@
           <a:lstStyle xmlns:a="http://schemas.openxmlformats.org/drawingml/2006/main"/>
           <a:p xmlns:a="http://schemas.openxmlformats.org/drawingml/2006/main">
             <a:pPr algn="l">
-              <a:defRPr sz="1125" b="0">
+              <a:defRPr sz="1050" b="0">
                 <a:solidFill>
                   <a:srgbClr val="18201B"/>
                 </a:solidFill>
@@ -4584,7 +5642,7 @@
               </a:defRPr>
             </a:pPr>
             <a:r>
-              <a:rPr sz="1125" b="0">
+              <a:rPr sz="1050" b="0">
                 <a:solidFill>
                   <a:srgbClr val="18201B"/>
                 </a:solidFill>
@@ -4592,64 +5650,64 @@
                 <a:ea typeface="Aptos"/>
                 <a:cs typeface="Aptos"/>
               </a:rPr>
-              <a:t>Coupon redemption 稀疏：只作辅助信号</a:t>
-            </a:r>
-          </a:p>
-        </p:txBody>
-      </p:sp>
-      <p:sp>
-        <p:nvSpPr>
-          <p:cNvPr id="30" name="">
-            <a:extLst xmlns:a="http://schemas.openxmlformats.org/drawingml/2006/main">
-              <a:ext uri="{FF2B5EF4-FFF2-40B4-BE49-F238E27FC236}">
-                <a16:creationId xmlns:a16="http://schemas.microsoft.com/office/drawing/2014/main" id="{F7846C5F-B90A-40AB-BB49-CCB92C279A00}"/>
-              </a:ext>
-            </a:extLst>
-          </p:cNvPr>
-          <p:cNvSpPr>
-            <a:spLocks xmlns:a="http://schemas.openxmlformats.org/drawingml/2006/main" noGrp="1"/>
-          </p:cNvSpPr>
-          <p:nvPr/>
-        </p:nvSpPr>
-        <p:spPr>
-          <a:xfrm xmlns:a="http://schemas.openxmlformats.org/drawingml/2006/main">
-            <a:off x="6477000" y="4838700"/>
+              <a:t>基于时间切分的离线评估</a:t>
+            </a:r>
+          </a:p>
+        </p:txBody>
+      </p:sp>
+      <p:sp>
+        <p:nvSpPr>
+          <p:cNvPr id="52" name="">
+            <a:extLst xmlns:a="http://schemas.openxmlformats.org/drawingml/2006/main">
+              <a:ext uri="{FF2B5EF4-FFF2-40B4-BE49-F238E27FC236}">
+                <a16:creationId xmlns:a16="http://schemas.microsoft.com/office/drawing/2014/main" id="{20965403-85CB-4244-A9A6-236ADFCBEE4E}"/>
+              </a:ext>
+            </a:extLst>
+          </p:cNvPr>
+          <p:cNvSpPr>
+            <a:spLocks xmlns:a="http://schemas.openxmlformats.org/drawingml/2006/main" noGrp="1"/>
+          </p:cNvSpPr>
+          <p:nvPr/>
+        </p:nvSpPr>
+        <p:spPr>
+          <a:xfrm xmlns:a="http://schemas.openxmlformats.org/drawingml/2006/main">
+            <a:off x="6477000" y="5191125"/>
             <a:ext cx="57150" cy="57150"/>
           </a:xfrm>
           <a:prstGeom xmlns:a="http://schemas.openxmlformats.org/drawingml/2006/main" prst="rect">
             <a:avLst/>
           </a:prstGeom>
           <a:solidFill xmlns:a="http://schemas.openxmlformats.org/drawingml/2006/main">
-            <a:srgbClr val="9C3B38"/>
-          </a:solidFill>
-          <a:ln xmlns:a="http://schemas.openxmlformats.org/drawingml/2006/main" w="0">
-            <a:solidFill>
-              <a:srgbClr val="000000">
-                <a:alpha val="0"/>
-              </a:srgbClr>
-            </a:solidFill>
-            <a:prstDash val="solid"/>
-          </a:ln>
-        </p:spPr>
-      </p:sp>
-      <p:sp>
-        <p:nvSpPr>
-          <p:cNvPr id="31" name="">
-            <a:extLst xmlns:a="http://schemas.openxmlformats.org/drawingml/2006/main">
-              <a:ext uri="{FF2B5EF4-FFF2-40B4-BE49-F238E27FC236}">
-                <a16:creationId xmlns:a16="http://schemas.microsoft.com/office/drawing/2014/main" id="{261D3F10-5F5D-4F20-9BDD-92C0C26213B9}"/>
-              </a:ext>
-            </a:extLst>
-          </p:cNvPr>
-          <p:cNvSpPr>
-            <a:spLocks xmlns:a="http://schemas.openxmlformats.org/drawingml/2006/main" noGrp="1"/>
-          </p:cNvSpPr>
-          <p:nvPr/>
-        </p:nvSpPr>
-        <p:spPr>
-          <a:xfrm xmlns:a="http://schemas.openxmlformats.org/drawingml/2006/main">
-            <a:off x="6648450" y="4762500"/>
-            <a:ext cx="4305300" cy="219075"/>
+            <a:srgbClr val="146B4D"/>
+          </a:solidFill>
+          <a:ln xmlns:a="http://schemas.openxmlformats.org/drawingml/2006/main" w="0">
+            <a:solidFill>
+              <a:srgbClr val="000000">
+                <a:alpha val="0"/>
+              </a:srgbClr>
+            </a:solidFill>
+            <a:prstDash val="solid"/>
+          </a:ln>
+        </p:spPr>
+      </p:sp>
+      <p:sp>
+        <p:nvSpPr>
+          <p:cNvPr id="53" name="">
+            <a:extLst xmlns:a="http://schemas.openxmlformats.org/drawingml/2006/main">
+              <a:ext uri="{FF2B5EF4-FFF2-40B4-BE49-F238E27FC236}">
+                <a16:creationId xmlns:a16="http://schemas.microsoft.com/office/drawing/2014/main" id="{A81AB3DC-482D-4D95-B863-A83F873FB49D}"/>
+              </a:ext>
+            </a:extLst>
+          </p:cNvPr>
+          <p:cNvSpPr>
+            <a:spLocks xmlns:a="http://schemas.openxmlformats.org/drawingml/2006/main" noGrp="1"/>
+          </p:cNvSpPr>
+          <p:nvPr/>
+        </p:nvSpPr>
+        <p:spPr>
+          <a:xfrm xmlns:a="http://schemas.openxmlformats.org/drawingml/2006/main">
+            <a:off x="6648450" y="5114925"/>
+            <a:ext cx="4305300" cy="200025"/>
           </a:xfrm>
           <a:prstGeom xmlns:a="http://schemas.openxmlformats.org/drawingml/2006/main" prst="rect">
             <a:avLst/>
@@ -4673,7 +5731,7 @@
           <a:lstStyle xmlns:a="http://schemas.openxmlformats.org/drawingml/2006/main"/>
           <a:p xmlns:a="http://schemas.openxmlformats.org/drawingml/2006/main">
             <a:pPr algn="l">
-              <a:defRPr sz="1125" b="0">
+              <a:defRPr sz="1050" b="0">
                 <a:solidFill>
                   <a:srgbClr val="18201B"/>
                 </a:solidFill>
@@ -4683,7 +5741,7 @@
               </a:defRPr>
             </a:pPr>
             <a:r>
-              <a:rPr sz="1125" b="0">
+              <a:rPr sz="1050" b="0">
                 <a:solidFill>
                   <a:srgbClr val="18201B"/>
                 </a:solidFill>
@@ -4691,64 +5749,64 @@
                 <a:ea typeface="Aptos"/>
                 <a:cs typeface="Aptos"/>
               </a:rPr>
-              <a:t>Demographics 部分覆盖：可选分析/demo</a:t>
-            </a:r>
-          </a:p>
-        </p:txBody>
-      </p:sp>
-      <p:sp>
-        <p:nvSpPr>
-          <p:cNvPr id="32" name="">
-            <a:extLst xmlns:a="http://schemas.openxmlformats.org/drawingml/2006/main">
-              <a:ext uri="{FF2B5EF4-FFF2-40B4-BE49-F238E27FC236}">
-                <a16:creationId xmlns:a16="http://schemas.microsoft.com/office/drawing/2014/main" id="{581DB2DB-4C08-4845-85C8-E6C50F1D3617}"/>
-              </a:ext>
-            </a:extLst>
-          </p:cNvPr>
-          <p:cNvSpPr>
-            <a:spLocks xmlns:a="http://schemas.openxmlformats.org/drawingml/2006/main" noGrp="1"/>
-          </p:cNvSpPr>
-          <p:nvPr/>
-        </p:nvSpPr>
-        <p:spPr>
-          <a:xfrm xmlns:a="http://schemas.openxmlformats.org/drawingml/2006/main">
-            <a:off x="6477000" y="5067300"/>
+              <a:t>准确率 + list-health 指标</a:t>
+            </a:r>
+          </a:p>
+        </p:txBody>
+      </p:sp>
+      <p:sp>
+        <p:nvSpPr>
+          <p:cNvPr id="54" name="">
+            <a:extLst xmlns:a="http://schemas.openxmlformats.org/drawingml/2006/main">
+              <a:ext uri="{FF2B5EF4-FFF2-40B4-BE49-F238E27FC236}">
+                <a16:creationId xmlns:a16="http://schemas.microsoft.com/office/drawing/2014/main" id="{C1A309BA-3F5C-4B3B-AFF7-FE51C627D0CB}"/>
+              </a:ext>
+            </a:extLst>
+          </p:cNvPr>
+          <p:cNvSpPr>
+            <a:spLocks xmlns:a="http://schemas.openxmlformats.org/drawingml/2006/main" noGrp="1"/>
+          </p:cNvSpPr>
+          <p:nvPr/>
+        </p:nvSpPr>
+        <p:spPr>
+          <a:xfrm xmlns:a="http://schemas.openxmlformats.org/drawingml/2006/main">
+            <a:off x="6477000" y="5400675"/>
             <a:ext cx="57150" cy="57150"/>
           </a:xfrm>
           <a:prstGeom xmlns:a="http://schemas.openxmlformats.org/drawingml/2006/main" prst="rect">
             <a:avLst/>
           </a:prstGeom>
           <a:solidFill xmlns:a="http://schemas.openxmlformats.org/drawingml/2006/main">
-            <a:srgbClr val="9C3B38"/>
-          </a:solidFill>
-          <a:ln xmlns:a="http://schemas.openxmlformats.org/drawingml/2006/main" w="0">
-            <a:solidFill>
-              <a:srgbClr val="000000">
-                <a:alpha val="0"/>
-              </a:srgbClr>
-            </a:solidFill>
-            <a:prstDash val="solid"/>
-          </a:ln>
-        </p:spPr>
-      </p:sp>
-      <p:sp>
-        <p:nvSpPr>
-          <p:cNvPr id="33" name="">
-            <a:extLst xmlns:a="http://schemas.openxmlformats.org/drawingml/2006/main">
-              <a:ext uri="{FF2B5EF4-FFF2-40B4-BE49-F238E27FC236}">
-                <a16:creationId xmlns:a16="http://schemas.microsoft.com/office/drawing/2014/main" id="{D46BF33C-280E-4788-9A4B-33B1B7CC20DA}"/>
-              </a:ext>
-            </a:extLst>
-          </p:cNvPr>
-          <p:cNvSpPr>
-            <a:spLocks xmlns:a="http://schemas.openxmlformats.org/drawingml/2006/main" noGrp="1"/>
-          </p:cNvSpPr>
-          <p:nvPr/>
-        </p:nvSpPr>
-        <p:spPr>
-          <a:xfrm xmlns:a="http://schemas.openxmlformats.org/drawingml/2006/main">
-            <a:off x="6648450" y="4991100"/>
-            <a:ext cx="4305300" cy="219075"/>
+            <a:srgbClr val="146B4D"/>
+          </a:solidFill>
+          <a:ln xmlns:a="http://schemas.openxmlformats.org/drawingml/2006/main" w="0">
+            <a:solidFill>
+              <a:srgbClr val="000000">
+                <a:alpha val="0"/>
+              </a:srgbClr>
+            </a:solidFill>
+            <a:prstDash val="solid"/>
+          </a:ln>
+        </p:spPr>
+      </p:sp>
+      <p:sp>
+        <p:nvSpPr>
+          <p:cNvPr id="55" name="">
+            <a:extLst xmlns:a="http://schemas.openxmlformats.org/drawingml/2006/main">
+              <a:ext uri="{FF2B5EF4-FFF2-40B4-BE49-F238E27FC236}">
+                <a16:creationId xmlns:a16="http://schemas.microsoft.com/office/drawing/2014/main" id="{10BA7931-A28D-4598-959A-FFF139A9C15E}"/>
+              </a:ext>
+            </a:extLst>
+          </p:cNvPr>
+          <p:cNvSpPr>
+            <a:spLocks xmlns:a="http://schemas.openxmlformats.org/drawingml/2006/main" noGrp="1"/>
+          </p:cNvSpPr>
+          <p:nvPr/>
+        </p:nvSpPr>
+        <p:spPr>
+          <a:xfrm xmlns:a="http://schemas.openxmlformats.org/drawingml/2006/main">
+            <a:off x="6648450" y="5324475"/>
+            <a:ext cx="4305300" cy="200025"/>
           </a:xfrm>
           <a:prstGeom xmlns:a="http://schemas.openxmlformats.org/drawingml/2006/main" prst="rect">
             <a:avLst/>
@@ -4772,7 +5830,7 @@
           <a:lstStyle xmlns:a="http://schemas.openxmlformats.org/drawingml/2006/main"/>
           <a:p xmlns:a="http://schemas.openxmlformats.org/drawingml/2006/main">
             <a:pPr algn="l">
-              <a:defRPr sz="1125" b="0">
+              <a:defRPr sz="1050" b="0">
                 <a:solidFill>
                   <a:srgbClr val="18201B"/>
                 </a:solidFill>
@@ -4782,7 +5840,7 @@
               </a:defRPr>
             </a:pPr>
             <a:r>
-              <a:rPr sz="1125" b="0">
+              <a:rPr sz="1050" b="0">
                 <a:solidFill>
                   <a:srgbClr val="18201B"/>
                 </a:solidFill>
@@ -4790,64 +5848,29 @@
                 <a:ea typeface="Aptos"/>
                 <a:cs typeface="Aptos"/>
               </a:rPr>
-              <a:t>没有 margin data：使用 proxy，不说 profit</a:t>
-            </a:r>
-          </a:p>
-        </p:txBody>
-      </p:sp>
-      <p:sp>
-        <p:nvSpPr>
-          <p:cNvPr id="34" name="">
-            <a:extLst xmlns:a="http://schemas.openxmlformats.org/drawingml/2006/main">
-              <a:ext uri="{FF2B5EF4-FFF2-40B4-BE49-F238E27FC236}">
-                <a16:creationId xmlns:a16="http://schemas.microsoft.com/office/drawing/2014/main" id="{D82A56FE-1CE9-48FC-9DD7-0643FCBEE716}"/>
-              </a:ext>
-            </a:extLst>
-          </p:cNvPr>
-          <p:cNvSpPr>
-            <a:spLocks xmlns:a="http://schemas.openxmlformats.org/drawingml/2006/main" noGrp="1"/>
-          </p:cNvSpPr>
-          <p:nvPr/>
-        </p:nvSpPr>
-        <p:spPr>
-          <a:xfrm xmlns:a="http://schemas.openxmlformats.org/drawingml/2006/main">
-            <a:off x="6477000" y="5295900"/>
-            <a:ext cx="57150" cy="57150"/>
-          </a:xfrm>
-          <a:prstGeom xmlns:a="http://schemas.openxmlformats.org/drawingml/2006/main" prst="rect">
-            <a:avLst/>
-          </a:prstGeom>
-          <a:solidFill xmlns:a="http://schemas.openxmlformats.org/drawingml/2006/main">
-            <a:srgbClr val="9C3B38"/>
-          </a:solidFill>
-          <a:ln xmlns:a="http://schemas.openxmlformats.org/drawingml/2006/main" w="0">
-            <a:solidFill>
-              <a:srgbClr val="000000">
-                <a:alpha val="0"/>
-              </a:srgbClr>
-            </a:solidFill>
-            <a:prstDash val="solid"/>
-          </a:ln>
-        </p:spPr>
-      </p:sp>
-      <p:sp>
-        <p:nvSpPr>
-          <p:cNvPr id="35" name="">
-            <a:extLst xmlns:a="http://schemas.openxmlformats.org/drawingml/2006/main">
-              <a:ext uri="{FF2B5EF4-FFF2-40B4-BE49-F238E27FC236}">
-                <a16:creationId xmlns:a16="http://schemas.microsoft.com/office/drawing/2014/main" id="{AC179C5B-7FDA-4ECA-AD17-73071C838CFC}"/>
-              </a:ext>
-            </a:extLst>
-          </p:cNvPr>
-          <p:cNvSpPr>
-            <a:spLocks xmlns:a="http://schemas.openxmlformats.org/drawingml/2006/main" noGrp="1"/>
-          </p:cNvSpPr>
-          <p:nvPr/>
-        </p:nvSpPr>
-        <p:spPr>
-          <a:xfrm xmlns:a="http://schemas.openxmlformats.org/drawingml/2006/main">
-            <a:off x="6648450" y="5219700"/>
-            <a:ext cx="4305300" cy="219075"/>
+              <a:t>Demo 解释权衡；指标提供证据</a:t>
+            </a:r>
+          </a:p>
+        </p:txBody>
+      </p:sp>
+      <p:sp>
+        <p:nvSpPr>
+          <p:cNvPr id="56" name="">
+            <a:extLst xmlns:a="http://schemas.openxmlformats.org/drawingml/2006/main">
+              <a:ext uri="{FF2B5EF4-FFF2-40B4-BE49-F238E27FC236}">
+                <a16:creationId xmlns:a16="http://schemas.microsoft.com/office/drawing/2014/main" id="{A1F902D7-3BA0-4992-8A9E-59A8A7B77CFF}"/>
+              </a:ext>
+            </a:extLst>
+          </p:cNvPr>
+          <p:cNvSpPr>
+            <a:spLocks xmlns:a="http://schemas.openxmlformats.org/drawingml/2006/main" noGrp="1"/>
+          </p:cNvSpPr>
+          <p:nvPr/>
+        </p:nvSpPr>
+        <p:spPr>
+          <a:xfrm xmlns:a="http://schemas.openxmlformats.org/drawingml/2006/main">
+            <a:off x="666750" y="5943600"/>
+            <a:ext cx="9906000" cy="266700"/>
           </a:xfrm>
           <a:prstGeom xmlns:a="http://schemas.openxmlformats.org/drawingml/2006/main" prst="rect">
             <a:avLst/>
@@ -4871,7 +5894,7 @@
           <a:lstStyle xmlns:a="http://schemas.openxmlformats.org/drawingml/2006/main"/>
           <a:p xmlns:a="http://schemas.openxmlformats.org/drawingml/2006/main">
             <a:pPr algn="l">
-              <a:defRPr sz="1125" b="0">
+              <a:defRPr sz="1350" b="1">
                 <a:solidFill>
                   <a:srgbClr val="18201B"/>
                 </a:solidFill>
@@ -4881,7 +5904,7 @@
               </a:defRPr>
             </a:pPr>
             <a:r>
-              <a:rPr sz="1125" b="0">
+              <a:rPr sz="1350" b="1">
                 <a:solidFill>
                   <a:srgbClr val="18201B"/>
                 </a:solidFill>
@@ -4889,81 +5912,17 @@
                 <a:ea typeface="Aptos"/>
                 <a:cs typeface="Aptos"/>
               </a:rPr>
-              <a:t>LightGCN 是 bonus，不是 blocker</a:t>
-            </a:r>
-          </a:p>
-        </p:txBody>
-      </p:sp>
-      <p:sp>
-        <p:nvSpPr>
-          <p:cNvPr id="36" name="">
-            <a:extLst xmlns:a="http://schemas.openxmlformats.org/drawingml/2006/main">
-              <a:ext uri="{FF2B5EF4-FFF2-40B4-BE49-F238E27FC236}">
-                <a16:creationId xmlns:a16="http://schemas.microsoft.com/office/drawing/2014/main" id="{87531E75-F66B-4166-BE0A-92002147A6D9}"/>
-              </a:ext>
-            </a:extLst>
-          </p:cNvPr>
-          <p:cNvSpPr>
-            <a:spLocks xmlns:a="http://schemas.openxmlformats.org/drawingml/2006/main" noGrp="1"/>
-          </p:cNvSpPr>
-          <p:nvPr/>
-        </p:nvSpPr>
-        <p:spPr>
-          <a:xfrm xmlns:a="http://schemas.openxmlformats.org/drawingml/2006/main">
-            <a:off x="666750" y="5962650"/>
-            <a:ext cx="9525000" cy="266700"/>
-          </a:xfrm>
-          <a:prstGeom xmlns:a="http://schemas.openxmlformats.org/drawingml/2006/main" prst="rect">
-            <a:avLst/>
-          </a:prstGeom>
-          <a:solidFill xmlns:a="http://schemas.openxmlformats.org/drawingml/2006/main">
-            <a:srgbClr val="000000">
-              <a:alpha val="0"/>
-            </a:srgbClr>
-          </a:solidFill>
-          <a:ln xmlns:a="http://schemas.openxmlformats.org/drawingml/2006/main" w="0">
-            <a:solidFill>
-              <a:srgbClr val="000000">
-                <a:alpha val="0"/>
-              </a:srgbClr>
-            </a:solidFill>
-            <a:prstDash val="solid"/>
-          </a:ln>
-        </p:spPr>
-        <p:txBody>
-          <a:bodyPr xmlns:a="http://schemas.openxmlformats.org/drawingml/2006/main" lIns="0" tIns="0" rIns="0" bIns="0" anchor="t"/>
-          <a:lstStyle xmlns:a="http://schemas.openxmlformats.org/drawingml/2006/main"/>
-          <a:p xmlns:a="http://schemas.openxmlformats.org/drawingml/2006/main">
-            <a:pPr algn="l">
-              <a:defRPr sz="1500" b="1">
-                <a:solidFill>
-                  <a:srgbClr val="18201B"/>
-                </a:solidFill>
-                <a:latin typeface="Aptos"/>
-                <a:ea typeface="Aptos"/>
-                <a:cs typeface="Aptos"/>
-              </a:defRPr>
-            </a:pPr>
-            <a:r>
-              <a:rPr sz="1500" b="1">
-                <a:solidFill>
-                  <a:srgbClr val="18201B"/>
-                </a:solidFill>
-                <a:latin typeface="Aptos"/>
-                <a:ea typeface="Aptos"/>
-                <a:cs typeface="Aptos"/>
-              </a:rPr>
-              <a:t>希望获得反馈：chronological split、reranking proxy、evaluation scope。</a:t>
-            </a:r>
-          </a:p>
-        </p:txBody>
-      </p:sp>
-      <p:sp>
-        <p:nvSpPr>
-          <p:cNvPr id="37" name="">
-            <a:extLst xmlns:a="http://schemas.openxmlformats.org/drawingml/2006/main">
-              <a:ext uri="{FF2B5EF4-FFF2-40B4-BE49-F238E27FC236}">
-                <a16:creationId xmlns:a16="http://schemas.microsoft.com/office/drawing/2014/main" id="{221776FA-E691-4341-987D-71F539975F70}"/>
+              <a:t>核心主张：PromoMind 把超市推荐作为零售决策问题研究，而不只是购买预测。</a:t>
+            </a:r>
+          </a:p>
+        </p:txBody>
+      </p:sp>
+      <p:sp>
+        <p:nvSpPr>
+          <p:cNvPr id="57" name="">
+            <a:extLst xmlns:a="http://schemas.openxmlformats.org/drawingml/2006/main">
+              <a:ext uri="{FF2B5EF4-FFF2-40B4-BE49-F238E27FC236}">
+                <a16:creationId xmlns:a16="http://schemas.microsoft.com/office/drawing/2014/main" id="{D54254F2-E402-44D5-8EC5-825EBE544009}"/>
               </a:ext>
             </a:extLst>
           </p:cNvPr>
@@ -4995,10 +5954,10 @@
       </p:sp>
       <p:sp>
         <p:nvSpPr>
-          <p:cNvPr id="38" name="">
-            <a:extLst xmlns:a="http://schemas.openxmlformats.org/drawingml/2006/main">
-              <a:ext uri="{FF2B5EF4-FFF2-40B4-BE49-F238E27FC236}">
-                <a16:creationId xmlns:a16="http://schemas.microsoft.com/office/drawing/2014/main" id="{333EE3EC-4A86-471A-BF7F-330EA04ACAEF}"/>
+          <p:cNvPr id="58" name="">
+            <a:extLst xmlns:a="http://schemas.openxmlformats.org/drawingml/2006/main">
+              <a:ext uri="{FF2B5EF4-FFF2-40B4-BE49-F238E27FC236}">
+                <a16:creationId xmlns:a16="http://schemas.microsoft.com/office/drawing/2014/main" id="{F41E15E3-5FAF-48F5-802D-CAE02144859F}"/>
               </a:ext>
             </a:extLst>
           </p:cNvPr>
@@ -5059,10 +6018,10 @@
       </p:sp>
       <p:sp>
         <p:nvSpPr>
-          <p:cNvPr id="39" name="">
-            <a:extLst xmlns:a="http://schemas.openxmlformats.org/drawingml/2006/main">
-              <a:ext uri="{FF2B5EF4-FFF2-40B4-BE49-F238E27FC236}">
-                <a16:creationId xmlns:a16="http://schemas.microsoft.com/office/drawing/2014/main" id="{94EB955E-F477-4288-991D-17A8F16C1227}"/>
+          <p:cNvPr id="59" name="">
+            <a:extLst xmlns:a="http://schemas.openxmlformats.org/drawingml/2006/main">
+              <a:ext uri="{FF2B5EF4-FFF2-40B4-BE49-F238E27FC236}">
+                <a16:creationId xmlns:a16="http://schemas.microsoft.com/office/drawing/2014/main" id="{C6E3BC06-CE66-4D8B-802C-6EF2A08AB9C0}"/>
               </a:ext>
             </a:extLst>
           </p:cNvPr>
@@ -5124,7 +6083,7 @@
     </p:spTree>
     <p:extLst>
       <p:ext uri="{BB962C8B-B14F-4D97-AF65-F5344CB8AC3E}">
-        <p14:creationId xmlns:p14="http://schemas.microsoft.com/office/powerpoint/2010/main" val="1484118869"/>
+        <p14:creationId xmlns:p14="http://schemas.microsoft.com/office/powerpoint/2010/main" val="1300325606"/>
       </p:ext>
     </p:extLst>
   </p:cSld>
@@ -5148,7 +6107,7 @@
           <p:cNvPr id="1" name="">
             <a:extLst xmlns:a="http://schemas.openxmlformats.org/drawingml/2006/main">
               <a:ext uri="{FF2B5EF4-FFF2-40B4-BE49-F238E27FC236}">
-                <a16:creationId xmlns:a16="http://schemas.microsoft.com/office/drawing/2014/main" id="{80E7D2C3-7C57-40F7-8377-258C3FC02E5E}"/>
+                <a16:creationId xmlns:a16="http://schemas.microsoft.com/office/drawing/2014/main" id="{825B5089-7B9B-46BD-A967-5F978D9F7BA3}"/>
               </a:ext>
             </a:extLst>
           </p:cNvPr>
@@ -5183,7 +6142,7 @@
           <p:cNvPr id="2" name="">
             <a:extLst xmlns:a="http://schemas.openxmlformats.org/drawingml/2006/main">
               <a:ext uri="{FF2B5EF4-FFF2-40B4-BE49-F238E27FC236}">
-                <a16:creationId xmlns:a16="http://schemas.microsoft.com/office/drawing/2014/main" id="{760DAB21-AD9C-49FB-8657-110371CE38EF}"/>
+                <a16:creationId xmlns:a16="http://schemas.microsoft.com/office/drawing/2014/main" id="{69699DE3-B8B1-4096-90E5-F8AACAC6D0AC}"/>
               </a:ext>
             </a:extLst>
           </p:cNvPr>
@@ -5218,7 +6177,7 @@
           <p:cNvPr id="3" name="">
             <a:extLst xmlns:a="http://schemas.openxmlformats.org/drawingml/2006/main">
               <a:ext uri="{FF2B5EF4-FFF2-40B4-BE49-F238E27FC236}">
-                <a16:creationId xmlns:a16="http://schemas.microsoft.com/office/drawing/2014/main" id="{4352A7A5-83C9-4277-86C7-E034B2D6208C}"/>
+                <a16:creationId xmlns:a16="http://schemas.microsoft.com/office/drawing/2014/main" id="{AACC86C9-A972-40F3-9D02-7A27CA13A503}"/>
               </a:ext>
             </a:extLst>
           </p:cNvPr>
@@ -5282,7 +6241,7 @@
           <p:cNvPr id="4" name="">
             <a:extLst xmlns:a="http://schemas.openxmlformats.org/drawingml/2006/main">
               <a:ext uri="{FF2B5EF4-FFF2-40B4-BE49-F238E27FC236}">
-                <a16:creationId xmlns:a16="http://schemas.microsoft.com/office/drawing/2014/main" id="{EED5B263-13A1-4AE1-9BA4-4267E4D5BA3D}"/>
+                <a16:creationId xmlns:a16="http://schemas.microsoft.com/office/drawing/2014/main" id="{3091AA8F-E993-43C4-84D2-9C792D2623B8}"/>
               </a:ext>
             </a:extLst>
           </p:cNvPr>
@@ -5346,7 +6305,7 @@
           <p:cNvPr id="5" name="">
             <a:extLst xmlns:a="http://schemas.openxmlformats.org/drawingml/2006/main">
               <a:ext uri="{FF2B5EF4-FFF2-40B4-BE49-F238E27FC236}">
-                <a16:creationId xmlns:a16="http://schemas.microsoft.com/office/drawing/2014/main" id="{54C327D0-FA53-471E-9269-32C48EF9F0A3}"/>
+                <a16:creationId xmlns:a16="http://schemas.microsoft.com/office/drawing/2014/main" id="{BE18FCD7-5CBF-4682-888F-9576C5B71DA8}"/>
               </a:ext>
             </a:extLst>
           </p:cNvPr>
@@ -5410,7 +6369,7 @@
           <p:cNvPr id="6" name="">
             <a:extLst xmlns:a="http://schemas.openxmlformats.org/drawingml/2006/main">
               <a:ext uri="{FF2B5EF4-FFF2-40B4-BE49-F238E27FC236}">
-                <a16:creationId xmlns:a16="http://schemas.microsoft.com/office/drawing/2014/main" id="{AC8A323B-14EA-4F4F-9E35-5048F608C0F7}"/>
+                <a16:creationId xmlns:a16="http://schemas.microsoft.com/office/drawing/2014/main" id="{69A758C0-49A5-48F9-82C0-DE59327F834A}"/>
               </a:ext>
             </a:extLst>
           </p:cNvPr>
@@ -5443,7 +6402,7 @@
           <p:cNvPr id="7" name="">
             <a:extLst xmlns:a="http://schemas.openxmlformats.org/drawingml/2006/main">
               <a:ext uri="{FF2B5EF4-FFF2-40B4-BE49-F238E27FC236}">
-                <a16:creationId xmlns:a16="http://schemas.microsoft.com/office/drawing/2014/main" id="{65221400-71D5-4F1C-847B-D1AB6368A58D}"/>
+                <a16:creationId xmlns:a16="http://schemas.microsoft.com/office/drawing/2014/main" id="{58AA8354-C341-4950-A3C7-4BE5C84A9F3E}"/>
               </a:ext>
             </a:extLst>
           </p:cNvPr>
@@ -5507,7 +6466,7 @@
           <p:cNvPr id="8" name="">
             <a:extLst xmlns:a="http://schemas.openxmlformats.org/drawingml/2006/main">
               <a:ext uri="{FF2B5EF4-FFF2-40B4-BE49-F238E27FC236}">
-                <a16:creationId xmlns:a16="http://schemas.microsoft.com/office/drawing/2014/main" id="{78A00162-8A63-4FD2-8E2B-CD12EDEF74C2}"/>
+                <a16:creationId xmlns:a16="http://schemas.microsoft.com/office/drawing/2014/main" id="{74A49957-C0C2-40FC-8DFA-2A865FA35D22}"/>
               </a:ext>
             </a:extLst>
           </p:cNvPr>
@@ -5571,7 +6530,7 @@
           <p:cNvPr id="9" name="">
             <a:extLst xmlns:a="http://schemas.openxmlformats.org/drawingml/2006/main">
               <a:ext uri="{FF2B5EF4-FFF2-40B4-BE49-F238E27FC236}">
-                <a16:creationId xmlns:a16="http://schemas.microsoft.com/office/drawing/2014/main" id="{371CD70D-87F7-4944-A0CC-FEAEBA13755F}"/>
+                <a16:creationId xmlns:a16="http://schemas.microsoft.com/office/drawing/2014/main" id="{5987EB89-CECB-4408-9CDB-47A8EF9907B1}"/>
               </a:ext>
             </a:extLst>
           </p:cNvPr>
@@ -5604,7 +6563,7 @@
           <p:cNvPr id="10" name="">
             <a:extLst xmlns:a="http://schemas.openxmlformats.org/drawingml/2006/main">
               <a:ext uri="{FF2B5EF4-FFF2-40B4-BE49-F238E27FC236}">
-                <a16:creationId xmlns:a16="http://schemas.microsoft.com/office/drawing/2014/main" id="{02FF7D4A-C643-4F98-A96C-81CE5F96E280}"/>
+                <a16:creationId xmlns:a16="http://schemas.microsoft.com/office/drawing/2014/main" id="{E70DD9DA-34DA-4C3F-8064-B9ACEE1E42C9}"/>
               </a:ext>
             </a:extLst>
           </p:cNvPr>
@@ -5668,7 +6627,7 @@
           <p:cNvPr id="11" name="">
             <a:extLst xmlns:a="http://schemas.openxmlformats.org/drawingml/2006/main">
               <a:ext uri="{FF2B5EF4-FFF2-40B4-BE49-F238E27FC236}">
-                <a16:creationId xmlns:a16="http://schemas.microsoft.com/office/drawing/2014/main" id="{4F2031B2-346B-4B79-8AD8-4722E545046D}"/>
+                <a16:creationId xmlns:a16="http://schemas.microsoft.com/office/drawing/2014/main" id="{3D16AD08-79AA-42E6-9AFE-3D93281080E4}"/>
               </a:ext>
             </a:extLst>
           </p:cNvPr>
@@ -5732,7 +6691,7 @@
           <p:cNvPr id="12" name="">
             <a:extLst xmlns:a="http://schemas.openxmlformats.org/drawingml/2006/main">
               <a:ext uri="{FF2B5EF4-FFF2-40B4-BE49-F238E27FC236}">
-                <a16:creationId xmlns:a16="http://schemas.microsoft.com/office/drawing/2014/main" id="{719A6A64-16E1-4D93-828E-5A6106317E37}"/>
+                <a16:creationId xmlns:a16="http://schemas.microsoft.com/office/drawing/2014/main" id="{50E85C10-D890-4578-AFF4-D5DFE0BA0D74}"/>
               </a:ext>
             </a:extLst>
           </p:cNvPr>
@@ -5765,7 +6724,7 @@
           <p:cNvPr id="13" name="">
             <a:extLst xmlns:a="http://schemas.openxmlformats.org/drawingml/2006/main">
               <a:ext uri="{FF2B5EF4-FFF2-40B4-BE49-F238E27FC236}">
-                <a16:creationId xmlns:a16="http://schemas.microsoft.com/office/drawing/2014/main" id="{BADAB642-7779-4C96-8250-0945A78881BC}"/>
+                <a16:creationId xmlns:a16="http://schemas.microsoft.com/office/drawing/2014/main" id="{ACB2E3D6-89BD-4811-BD0E-09E267F7AF3C}"/>
               </a:ext>
             </a:extLst>
           </p:cNvPr>
@@ -5829,7 +6788,7 @@
           <p:cNvPr id="14" name="">
             <a:extLst xmlns:a="http://schemas.openxmlformats.org/drawingml/2006/main">
               <a:ext uri="{FF2B5EF4-FFF2-40B4-BE49-F238E27FC236}">
-                <a16:creationId xmlns:a16="http://schemas.microsoft.com/office/drawing/2014/main" id="{A0812FE7-5E35-40BD-A151-DC9E198CD2C8}"/>
+                <a16:creationId xmlns:a16="http://schemas.microsoft.com/office/drawing/2014/main" id="{CB0EF320-E122-47D4-9D4C-543FBA80C2AB}"/>
               </a:ext>
             </a:extLst>
           </p:cNvPr>
@@ -5893,7 +6852,7 @@
           <p:cNvPr id="15" name="">
             <a:extLst xmlns:a="http://schemas.openxmlformats.org/drawingml/2006/main">
               <a:ext uri="{FF2B5EF4-FFF2-40B4-BE49-F238E27FC236}">
-                <a16:creationId xmlns:a16="http://schemas.microsoft.com/office/drawing/2014/main" id="{479C30BA-3DD0-4599-9900-836D044C3169}"/>
+                <a16:creationId xmlns:a16="http://schemas.microsoft.com/office/drawing/2014/main" id="{12E05D67-80D5-4A45-805D-A4410367445A}"/>
               </a:ext>
             </a:extLst>
           </p:cNvPr>
@@ -5926,7 +6885,7 @@
           <p:cNvPr id="16" name="">
             <a:extLst xmlns:a="http://schemas.openxmlformats.org/drawingml/2006/main">
               <a:ext uri="{FF2B5EF4-FFF2-40B4-BE49-F238E27FC236}">
-                <a16:creationId xmlns:a16="http://schemas.microsoft.com/office/drawing/2014/main" id="{3A63AAA1-DDC5-4557-9BFD-EC182380F47E}"/>
+                <a16:creationId xmlns:a16="http://schemas.microsoft.com/office/drawing/2014/main" id="{16089084-EF53-425A-9D86-5EF527DF3303}"/>
               </a:ext>
             </a:extLst>
           </p:cNvPr>
@@ -5990,7 +6949,7 @@
           <p:cNvPr id="17" name="">
             <a:extLst xmlns:a="http://schemas.openxmlformats.org/drawingml/2006/main">
               <a:ext uri="{FF2B5EF4-FFF2-40B4-BE49-F238E27FC236}">
-                <a16:creationId xmlns:a16="http://schemas.microsoft.com/office/drawing/2014/main" id="{84C0F257-59A8-43CB-A89E-325A697A1C3D}"/>
+                <a16:creationId xmlns:a16="http://schemas.microsoft.com/office/drawing/2014/main" id="{3ED5FD67-F940-4240-9D11-7A143AD548F9}"/>
               </a:ext>
             </a:extLst>
           </p:cNvPr>
@@ -6054,7 +7013,7 @@
           <p:cNvPr id="18" name="">
             <a:extLst xmlns:a="http://schemas.openxmlformats.org/drawingml/2006/main">
               <a:ext uri="{FF2B5EF4-FFF2-40B4-BE49-F238E27FC236}">
-                <a16:creationId xmlns:a16="http://schemas.microsoft.com/office/drawing/2014/main" id="{EC489B94-5FBC-40B2-954D-E19BE8C75B7D}"/>
+                <a16:creationId xmlns:a16="http://schemas.microsoft.com/office/drawing/2014/main" id="{D72C9181-22E3-41F2-BF41-D46DCBCBB309}"/>
               </a:ext>
             </a:extLst>
           </p:cNvPr>
@@ -6089,7 +7048,7 @@
           <p:cNvPr id="19" name="">
             <a:extLst xmlns:a="http://schemas.openxmlformats.org/drawingml/2006/main">
               <a:ext uri="{FF2B5EF4-FFF2-40B4-BE49-F238E27FC236}">
-                <a16:creationId xmlns:a16="http://schemas.microsoft.com/office/drawing/2014/main" id="{42056A0A-0386-4417-A746-7D5EEBEF6F83}"/>
+                <a16:creationId xmlns:a16="http://schemas.microsoft.com/office/drawing/2014/main" id="{C3C74255-58CE-44C7-8D27-012920D5BF4D}"/>
               </a:ext>
             </a:extLst>
           </p:cNvPr>
@@ -6153,7 +7112,7 @@
           <p:cNvPr id="20" name="">
             <a:extLst xmlns:a="http://schemas.openxmlformats.org/drawingml/2006/main">
               <a:ext uri="{FF2B5EF4-FFF2-40B4-BE49-F238E27FC236}">
-                <a16:creationId xmlns:a16="http://schemas.microsoft.com/office/drawing/2014/main" id="{FDBEB2E1-80FB-4255-94B9-10EB0F1A505E}"/>
+                <a16:creationId xmlns:a16="http://schemas.microsoft.com/office/drawing/2014/main" id="{5CAC0A2C-A0F6-4D66-80B0-C41A055E82CD}"/>
               </a:ext>
             </a:extLst>
           </p:cNvPr>
@@ -6215,7 +7174,7 @@
     </p:spTree>
     <p:extLst>
       <p:ext uri="{BB962C8B-B14F-4D97-AF65-F5344CB8AC3E}">
-        <p14:creationId xmlns:p14="http://schemas.microsoft.com/office/powerpoint/2010/main" val="651150048"/>
+        <p14:creationId xmlns:p14="http://schemas.microsoft.com/office/powerpoint/2010/main" val="1574197442"/>
       </p:ext>
     </p:extLst>
   </p:cSld>
@@ -6239,7 +7198,7 @@
           <p:cNvPr id="1" name="">
             <a:extLst xmlns:a="http://schemas.openxmlformats.org/drawingml/2006/main">
               <a:ext uri="{FF2B5EF4-FFF2-40B4-BE49-F238E27FC236}">
-                <a16:creationId xmlns:a16="http://schemas.microsoft.com/office/drawing/2014/main" id="{DE38F85C-1698-41C9-A96F-DFAE44D2AA21}"/>
+                <a16:creationId xmlns:a16="http://schemas.microsoft.com/office/drawing/2014/main" id="{09123167-A41D-4F55-AF2A-E147294B26E9}"/>
               </a:ext>
             </a:extLst>
           </p:cNvPr>
@@ -6274,7 +7233,7 @@
           <p:cNvPr id="2" name="">
             <a:extLst xmlns:a="http://schemas.openxmlformats.org/drawingml/2006/main">
               <a:ext uri="{FF2B5EF4-FFF2-40B4-BE49-F238E27FC236}">
-                <a16:creationId xmlns:a16="http://schemas.microsoft.com/office/drawing/2014/main" id="{ECF58736-8188-4212-8E4E-4AAB908BAD3B}"/>
+                <a16:creationId xmlns:a16="http://schemas.microsoft.com/office/drawing/2014/main" id="{FD2BD74F-8950-482F-B3C8-B3FB2E7FD17A}"/>
               </a:ext>
             </a:extLst>
           </p:cNvPr>
@@ -6309,7 +7268,7 @@
           <p:cNvPr id="3" name="">
             <a:extLst xmlns:a="http://schemas.openxmlformats.org/drawingml/2006/main">
               <a:ext uri="{FF2B5EF4-FFF2-40B4-BE49-F238E27FC236}">
-                <a16:creationId xmlns:a16="http://schemas.microsoft.com/office/drawing/2014/main" id="{C23F5A37-71AC-48C9-832C-410F4A48D509}"/>
+                <a16:creationId xmlns:a16="http://schemas.microsoft.com/office/drawing/2014/main" id="{E4FD720A-750C-49E5-AD44-52E7798AA548}"/>
               </a:ext>
             </a:extLst>
           </p:cNvPr>
@@ -6373,7 +7332,7 @@
           <p:cNvPr id="4" name="">
             <a:extLst xmlns:a="http://schemas.openxmlformats.org/drawingml/2006/main">
               <a:ext uri="{FF2B5EF4-FFF2-40B4-BE49-F238E27FC236}">
-                <a16:creationId xmlns:a16="http://schemas.microsoft.com/office/drawing/2014/main" id="{D0C18A16-CD20-444D-B014-79529E1A0203}"/>
+                <a16:creationId xmlns:a16="http://schemas.microsoft.com/office/drawing/2014/main" id="{E918EB6D-4587-429F-BEEB-66D6573CD40F}"/>
               </a:ext>
             </a:extLst>
           </p:cNvPr>
@@ -6437,7 +7396,7 @@
           <p:cNvPr id="5" name="">
             <a:extLst xmlns:a="http://schemas.openxmlformats.org/drawingml/2006/main">
               <a:ext uri="{FF2B5EF4-FFF2-40B4-BE49-F238E27FC236}">
-                <a16:creationId xmlns:a16="http://schemas.microsoft.com/office/drawing/2014/main" id="{5370DB49-5C9E-4733-A3B8-92935BE057E8}"/>
+                <a16:creationId xmlns:a16="http://schemas.microsoft.com/office/drawing/2014/main" id="{6B67F32C-8B1A-4A07-BA75-564D7E75D55F}"/>
               </a:ext>
             </a:extLst>
           </p:cNvPr>
@@ -6501,7 +7460,7 @@
           <p:cNvPr id="6" name="">
             <a:extLst xmlns:a="http://schemas.openxmlformats.org/drawingml/2006/main">
               <a:ext uri="{FF2B5EF4-FFF2-40B4-BE49-F238E27FC236}">
-                <a16:creationId xmlns:a16="http://schemas.microsoft.com/office/drawing/2014/main" id="{88360E3A-5331-44F6-931F-2303A9D04066}"/>
+                <a16:creationId xmlns:a16="http://schemas.microsoft.com/office/drawing/2014/main" id="{9A1E0795-5B35-4C6D-8B6E-32BD1C852D6A}"/>
               </a:ext>
             </a:extLst>
           </p:cNvPr>
@@ -6534,7 +7493,7 @@
           <p:cNvPr id="7" name="">
             <a:extLst xmlns:a="http://schemas.openxmlformats.org/drawingml/2006/main">
               <a:ext uri="{FF2B5EF4-FFF2-40B4-BE49-F238E27FC236}">
-                <a16:creationId xmlns:a16="http://schemas.microsoft.com/office/drawing/2014/main" id="{02CBC50F-FF15-4DB1-BE43-F5D214687551}"/>
+                <a16:creationId xmlns:a16="http://schemas.microsoft.com/office/drawing/2014/main" id="{DDC27570-F434-4798-BC51-49A40C0B9F1D}"/>
               </a:ext>
             </a:extLst>
           </p:cNvPr>
@@ -6598,7 +7557,7 @@
           <p:cNvPr id="8" name="">
             <a:extLst xmlns:a="http://schemas.openxmlformats.org/drawingml/2006/main">
               <a:ext uri="{FF2B5EF4-FFF2-40B4-BE49-F238E27FC236}">
-                <a16:creationId xmlns:a16="http://schemas.microsoft.com/office/drawing/2014/main" id="{CA244A77-3F84-4599-A590-9683B184C53A}"/>
+                <a16:creationId xmlns:a16="http://schemas.microsoft.com/office/drawing/2014/main" id="{AFB9296D-8E7D-4CDA-8459-5E06543D3D14}"/>
               </a:ext>
             </a:extLst>
           </p:cNvPr>
@@ -6662,7 +7621,7 @@
           <p:cNvPr id="9" name="">
             <a:extLst xmlns:a="http://schemas.openxmlformats.org/drawingml/2006/main">
               <a:ext uri="{FF2B5EF4-FFF2-40B4-BE49-F238E27FC236}">
-                <a16:creationId xmlns:a16="http://schemas.microsoft.com/office/drawing/2014/main" id="{74A1E118-114E-4AAC-9E96-AEACFE3B9A35}"/>
+                <a16:creationId xmlns:a16="http://schemas.microsoft.com/office/drawing/2014/main" id="{B17F9B77-5BD2-4F8C-A434-DFFB32D5925C}"/>
               </a:ext>
             </a:extLst>
           </p:cNvPr>
@@ -6726,7 +7685,7 @@
           <p:cNvPr id="10" name="">
             <a:extLst xmlns:a="http://schemas.openxmlformats.org/drawingml/2006/main">
               <a:ext uri="{FF2B5EF4-FFF2-40B4-BE49-F238E27FC236}">
-                <a16:creationId xmlns:a16="http://schemas.microsoft.com/office/drawing/2014/main" id="{7C0A958D-F702-4771-95DE-11A04DB5F994}"/>
+                <a16:creationId xmlns:a16="http://schemas.microsoft.com/office/drawing/2014/main" id="{57E4AD86-BAE4-4781-A592-C1B286560C14}"/>
               </a:ext>
             </a:extLst>
           </p:cNvPr>
@@ -6759,7 +7718,7 @@
           <p:cNvPr id="11" name="">
             <a:extLst xmlns:a="http://schemas.openxmlformats.org/drawingml/2006/main">
               <a:ext uri="{FF2B5EF4-FFF2-40B4-BE49-F238E27FC236}">
-                <a16:creationId xmlns:a16="http://schemas.microsoft.com/office/drawing/2014/main" id="{D7881D1A-FA98-4E1A-A852-683A0C5311FA}"/>
+                <a16:creationId xmlns:a16="http://schemas.microsoft.com/office/drawing/2014/main" id="{C6085DC4-E627-4AE2-8FA1-39C37953B5FD}"/>
               </a:ext>
             </a:extLst>
           </p:cNvPr>
@@ -6823,7 +7782,7 @@
           <p:cNvPr id="12" name="">
             <a:extLst xmlns:a="http://schemas.openxmlformats.org/drawingml/2006/main">
               <a:ext uri="{FF2B5EF4-FFF2-40B4-BE49-F238E27FC236}">
-                <a16:creationId xmlns:a16="http://schemas.microsoft.com/office/drawing/2014/main" id="{93EB5681-9323-4575-8FE8-C0F220982187}"/>
+                <a16:creationId xmlns:a16="http://schemas.microsoft.com/office/drawing/2014/main" id="{D76DC496-17E6-4437-BB5A-C7A2ADA019F2}"/>
               </a:ext>
             </a:extLst>
           </p:cNvPr>
@@ -6887,7 +7846,7 @@
           <p:cNvPr id="13" name="">
             <a:extLst xmlns:a="http://schemas.openxmlformats.org/drawingml/2006/main">
               <a:ext uri="{FF2B5EF4-FFF2-40B4-BE49-F238E27FC236}">
-                <a16:creationId xmlns:a16="http://schemas.microsoft.com/office/drawing/2014/main" id="{D9FDFC7D-55AB-4914-A417-C6450E13C954}"/>
+                <a16:creationId xmlns:a16="http://schemas.microsoft.com/office/drawing/2014/main" id="{68DD2149-102E-424A-84F4-ABA282E8C800}"/>
               </a:ext>
             </a:extLst>
           </p:cNvPr>
@@ -6951,7 +7910,7 @@
           <p:cNvPr id="14" name="">
             <a:extLst xmlns:a="http://schemas.openxmlformats.org/drawingml/2006/main">
               <a:ext uri="{FF2B5EF4-FFF2-40B4-BE49-F238E27FC236}">
-                <a16:creationId xmlns:a16="http://schemas.microsoft.com/office/drawing/2014/main" id="{D3EB409F-59D8-43FA-A8B5-2E9CF925E9D2}"/>
+                <a16:creationId xmlns:a16="http://schemas.microsoft.com/office/drawing/2014/main" id="{132CE7B4-2F79-4EC8-A753-00DA7F4DB445}"/>
               </a:ext>
             </a:extLst>
           </p:cNvPr>
@@ -6984,7 +7943,7 @@
           <p:cNvPr id="15" name="">
             <a:extLst xmlns:a="http://schemas.openxmlformats.org/drawingml/2006/main">
               <a:ext uri="{FF2B5EF4-FFF2-40B4-BE49-F238E27FC236}">
-                <a16:creationId xmlns:a16="http://schemas.microsoft.com/office/drawing/2014/main" id="{CCC27F62-69C6-46B2-881C-1A239D5B6905}"/>
+                <a16:creationId xmlns:a16="http://schemas.microsoft.com/office/drawing/2014/main" id="{9BFD1DF6-7EEE-44F0-BD85-72D474EADBC0}"/>
               </a:ext>
             </a:extLst>
           </p:cNvPr>
@@ -7048,7 +8007,7 @@
           <p:cNvPr id="16" name="">
             <a:extLst xmlns:a="http://schemas.openxmlformats.org/drawingml/2006/main">
               <a:ext uri="{FF2B5EF4-FFF2-40B4-BE49-F238E27FC236}">
-                <a16:creationId xmlns:a16="http://schemas.microsoft.com/office/drawing/2014/main" id="{F12AADE4-0F58-4831-9008-11DFCD635BFD}"/>
+                <a16:creationId xmlns:a16="http://schemas.microsoft.com/office/drawing/2014/main" id="{A1C90F11-1B14-4E55-B4C2-83CCDD95D7EE}"/>
               </a:ext>
             </a:extLst>
           </p:cNvPr>
@@ -7112,7 +8071,7 @@
           <p:cNvPr id="17" name="">
             <a:extLst xmlns:a="http://schemas.openxmlformats.org/drawingml/2006/main">
               <a:ext uri="{FF2B5EF4-FFF2-40B4-BE49-F238E27FC236}">
-                <a16:creationId xmlns:a16="http://schemas.microsoft.com/office/drawing/2014/main" id="{C6E4F203-D4E0-40C2-8DF1-2FEBDA6712F5}"/>
+                <a16:creationId xmlns:a16="http://schemas.microsoft.com/office/drawing/2014/main" id="{FFB3BB9C-2120-4B39-9914-46467FBC734A}"/>
               </a:ext>
             </a:extLst>
           </p:cNvPr>
@@ -7176,7 +8135,7 @@
           <p:cNvPr id="18" name="">
             <a:extLst xmlns:a="http://schemas.openxmlformats.org/drawingml/2006/main">
               <a:ext uri="{FF2B5EF4-FFF2-40B4-BE49-F238E27FC236}">
-                <a16:creationId xmlns:a16="http://schemas.microsoft.com/office/drawing/2014/main" id="{EDE1D4DE-20A4-4DBD-9266-23765AEBAAF9}"/>
+                <a16:creationId xmlns:a16="http://schemas.microsoft.com/office/drawing/2014/main" id="{408C1363-9557-4CAA-9611-1666940FAD1F}"/>
               </a:ext>
             </a:extLst>
           </p:cNvPr>
@@ -7209,7 +8168,7 @@
           <p:cNvPr id="19" name="">
             <a:extLst xmlns:a="http://schemas.openxmlformats.org/drawingml/2006/main">
               <a:ext uri="{FF2B5EF4-FFF2-40B4-BE49-F238E27FC236}">
-                <a16:creationId xmlns:a16="http://schemas.microsoft.com/office/drawing/2014/main" id="{515BB274-7501-4189-B62F-51CE65956292}"/>
+                <a16:creationId xmlns:a16="http://schemas.microsoft.com/office/drawing/2014/main" id="{B70E0D8A-9B8F-4556-9A2D-510B6908AD82}"/>
               </a:ext>
             </a:extLst>
           </p:cNvPr>
@@ -7273,7 +8232,7 @@
           <p:cNvPr id="20" name="">
             <a:extLst xmlns:a="http://schemas.openxmlformats.org/drawingml/2006/main">
               <a:ext uri="{FF2B5EF4-FFF2-40B4-BE49-F238E27FC236}">
-                <a16:creationId xmlns:a16="http://schemas.microsoft.com/office/drawing/2014/main" id="{57B5615E-752B-4167-98E6-8F0912C62288}"/>
+                <a16:creationId xmlns:a16="http://schemas.microsoft.com/office/drawing/2014/main" id="{815FB243-4057-42B8-8631-0A90405EE754}"/>
               </a:ext>
             </a:extLst>
           </p:cNvPr>
@@ -7337,7 +8296,7 @@
           <p:cNvPr id="21" name="">
             <a:extLst xmlns:a="http://schemas.openxmlformats.org/drawingml/2006/main">
               <a:ext uri="{FF2B5EF4-FFF2-40B4-BE49-F238E27FC236}">
-                <a16:creationId xmlns:a16="http://schemas.microsoft.com/office/drawing/2014/main" id="{66EE661A-B291-4A1E-A8EB-EAE67168A759}"/>
+                <a16:creationId xmlns:a16="http://schemas.microsoft.com/office/drawing/2014/main" id="{1EE8ACA1-3E41-4F08-82C8-2C5A3B56276C}"/>
               </a:ext>
             </a:extLst>
           </p:cNvPr>
@@ -7401,7 +8360,7 @@
           <p:cNvPr id="22" name="">
             <a:extLst xmlns:a="http://schemas.openxmlformats.org/drawingml/2006/main">
               <a:ext uri="{FF2B5EF4-FFF2-40B4-BE49-F238E27FC236}">
-                <a16:creationId xmlns:a16="http://schemas.microsoft.com/office/drawing/2014/main" id="{DC1A6086-3FF1-40DE-8E28-A77DD7020F3F}"/>
+                <a16:creationId xmlns:a16="http://schemas.microsoft.com/office/drawing/2014/main" id="{4F2E9F1B-E73E-41C5-8DA8-EA244D0CA8ED}"/>
               </a:ext>
             </a:extLst>
           </p:cNvPr>
@@ -7434,7 +8393,7 @@
           <p:cNvPr id="23" name="">
             <a:extLst xmlns:a="http://schemas.openxmlformats.org/drawingml/2006/main">
               <a:ext uri="{FF2B5EF4-FFF2-40B4-BE49-F238E27FC236}">
-                <a16:creationId xmlns:a16="http://schemas.microsoft.com/office/drawing/2014/main" id="{F426A780-F0D2-46E0-AAA7-DCF6350E7A8C}"/>
+                <a16:creationId xmlns:a16="http://schemas.microsoft.com/office/drawing/2014/main" id="{AC13E5FE-4BD5-452A-954F-8E284C7037AF}"/>
               </a:ext>
             </a:extLst>
           </p:cNvPr>
@@ -7498,7 +8457,7 @@
           <p:cNvPr id="24" name="">
             <a:extLst xmlns:a="http://schemas.openxmlformats.org/drawingml/2006/main">
               <a:ext uri="{FF2B5EF4-FFF2-40B4-BE49-F238E27FC236}">
-                <a16:creationId xmlns:a16="http://schemas.microsoft.com/office/drawing/2014/main" id="{FB84350C-4622-4596-8142-9AD203605509}"/>
+                <a16:creationId xmlns:a16="http://schemas.microsoft.com/office/drawing/2014/main" id="{83007BFD-6DFB-4285-BB95-E6BFBD7602C0}"/>
               </a:ext>
             </a:extLst>
           </p:cNvPr>
@@ -7562,7 +8521,7 @@
           <p:cNvPr id="25" name="">
             <a:extLst xmlns:a="http://schemas.openxmlformats.org/drawingml/2006/main">
               <a:ext uri="{FF2B5EF4-FFF2-40B4-BE49-F238E27FC236}">
-                <a16:creationId xmlns:a16="http://schemas.microsoft.com/office/drawing/2014/main" id="{783E8413-E150-4199-BB74-07134116F601}"/>
+                <a16:creationId xmlns:a16="http://schemas.microsoft.com/office/drawing/2014/main" id="{CC7EB87D-ABF2-4D9E-9F14-8589FC2FE350}"/>
               </a:ext>
             </a:extLst>
           </p:cNvPr>
@@ -7626,7 +8585,7 @@
           <p:cNvPr id="26" name="">
             <a:extLst xmlns:a="http://schemas.openxmlformats.org/drawingml/2006/main">
               <a:ext uri="{FF2B5EF4-FFF2-40B4-BE49-F238E27FC236}">
-                <a16:creationId xmlns:a16="http://schemas.microsoft.com/office/drawing/2014/main" id="{6AFFFA99-B85B-4660-9C82-3294AE6585F2}"/>
+                <a16:creationId xmlns:a16="http://schemas.microsoft.com/office/drawing/2014/main" id="{D848DD00-5A0F-4718-87C9-22F13F9672E8}"/>
               </a:ext>
             </a:extLst>
           </p:cNvPr>
@@ -7659,7 +8618,7 @@
           <p:cNvPr id="27" name="">
             <a:extLst xmlns:a="http://schemas.openxmlformats.org/drawingml/2006/main">
               <a:ext uri="{FF2B5EF4-FFF2-40B4-BE49-F238E27FC236}">
-                <a16:creationId xmlns:a16="http://schemas.microsoft.com/office/drawing/2014/main" id="{336C488A-4E3B-427B-962D-102AD47BB056}"/>
+                <a16:creationId xmlns:a16="http://schemas.microsoft.com/office/drawing/2014/main" id="{184450F5-ACF1-4643-B303-8E7E0DEEB551}"/>
               </a:ext>
             </a:extLst>
           </p:cNvPr>
@@ -7692,7 +8651,7 @@
           <p:cNvPr id="28" name="">
             <a:extLst xmlns:a="http://schemas.openxmlformats.org/drawingml/2006/main">
               <a:ext uri="{FF2B5EF4-FFF2-40B4-BE49-F238E27FC236}">
-                <a16:creationId xmlns:a16="http://schemas.microsoft.com/office/drawing/2014/main" id="{3CE369B3-8951-4555-ACCF-1A8151011AA3}"/>
+                <a16:creationId xmlns:a16="http://schemas.microsoft.com/office/drawing/2014/main" id="{CFFC94DC-8424-4BF6-9FF1-C13FE034828F}"/>
               </a:ext>
             </a:extLst>
           </p:cNvPr>
@@ -7756,7 +8715,7 @@
           <p:cNvPr id="29" name="">
             <a:extLst xmlns:a="http://schemas.openxmlformats.org/drawingml/2006/main">
               <a:ext uri="{FF2B5EF4-FFF2-40B4-BE49-F238E27FC236}">
-                <a16:creationId xmlns:a16="http://schemas.microsoft.com/office/drawing/2014/main" id="{3C269B3B-0986-430F-912A-12088E6A462D}"/>
+                <a16:creationId xmlns:a16="http://schemas.microsoft.com/office/drawing/2014/main" id="{5694B3FF-A941-46F9-9DBE-5A405C354498}"/>
               </a:ext>
             </a:extLst>
           </p:cNvPr>
@@ -7820,7 +8779,7 @@
           <p:cNvPr id="30" name="">
             <a:extLst xmlns:a="http://schemas.openxmlformats.org/drawingml/2006/main">
               <a:ext uri="{FF2B5EF4-FFF2-40B4-BE49-F238E27FC236}">
-                <a16:creationId xmlns:a16="http://schemas.microsoft.com/office/drawing/2014/main" id="{0837E4CD-3324-4608-BFDA-9A4E021258FC}"/>
+                <a16:creationId xmlns:a16="http://schemas.microsoft.com/office/drawing/2014/main" id="{70E6BEBD-12D2-4ED9-B3E3-378991E605BA}"/>
               </a:ext>
             </a:extLst>
           </p:cNvPr>
@@ -7884,7 +8843,7 @@
           <p:cNvPr id="31" name="">
             <a:extLst xmlns:a="http://schemas.openxmlformats.org/drawingml/2006/main">
               <a:ext uri="{FF2B5EF4-FFF2-40B4-BE49-F238E27FC236}">
-                <a16:creationId xmlns:a16="http://schemas.microsoft.com/office/drawing/2014/main" id="{B1D2CCB2-71E7-4F61-814C-29BB600E3115}"/>
+                <a16:creationId xmlns:a16="http://schemas.microsoft.com/office/drawing/2014/main" id="{78E6EFFC-9E52-4B19-9DAE-F7DED4E3D208}"/>
               </a:ext>
             </a:extLst>
           </p:cNvPr>
@@ -7948,7 +8907,7 @@
           <p:cNvPr id="32" name="">
             <a:extLst xmlns:a="http://schemas.openxmlformats.org/drawingml/2006/main">
               <a:ext uri="{FF2B5EF4-FFF2-40B4-BE49-F238E27FC236}">
-                <a16:creationId xmlns:a16="http://schemas.microsoft.com/office/drawing/2014/main" id="{F75DC7D1-CE61-48D5-B5E5-F4EDB86570E6}"/>
+                <a16:creationId xmlns:a16="http://schemas.microsoft.com/office/drawing/2014/main" id="{25B84C4C-932C-4AF8-B676-948396627467}"/>
               </a:ext>
             </a:extLst>
           </p:cNvPr>
@@ -7983,7 +8942,7 @@
           <p:cNvPr id="33" name="">
             <a:extLst xmlns:a="http://schemas.openxmlformats.org/drawingml/2006/main">
               <a:ext uri="{FF2B5EF4-FFF2-40B4-BE49-F238E27FC236}">
-                <a16:creationId xmlns:a16="http://schemas.microsoft.com/office/drawing/2014/main" id="{502DB2E5-4B79-4AE2-8D56-A1025D572121}"/>
+                <a16:creationId xmlns:a16="http://schemas.microsoft.com/office/drawing/2014/main" id="{1AEB1131-ADAA-44C9-9421-AB112C0643B4}"/>
               </a:ext>
             </a:extLst>
           </p:cNvPr>
@@ -8047,7 +9006,7 @@
           <p:cNvPr id="34" name="">
             <a:extLst xmlns:a="http://schemas.openxmlformats.org/drawingml/2006/main">
               <a:ext uri="{FF2B5EF4-FFF2-40B4-BE49-F238E27FC236}">
-                <a16:creationId xmlns:a16="http://schemas.microsoft.com/office/drawing/2014/main" id="{07ABAC8C-4A80-4C22-B950-2894246A8C87}"/>
+                <a16:creationId xmlns:a16="http://schemas.microsoft.com/office/drawing/2014/main" id="{A0368B9D-F184-4800-B5FA-BD0FDB680B86}"/>
               </a:ext>
             </a:extLst>
           </p:cNvPr>
@@ -8109,7 +9068,7 @@
     </p:spTree>
     <p:extLst>
       <p:ext uri="{BB962C8B-B14F-4D97-AF65-F5344CB8AC3E}">
-        <p14:creationId xmlns:p14="http://schemas.microsoft.com/office/powerpoint/2010/main" val="225426154"/>
+        <p14:creationId xmlns:p14="http://schemas.microsoft.com/office/powerpoint/2010/main" val="2129414734"/>
       </p:ext>
     </p:extLst>
   </p:cSld>
@@ -8133,7 +9092,7 @@
           <p:cNvPr id="1" name="">
             <a:extLst xmlns:a="http://schemas.openxmlformats.org/drawingml/2006/main">
               <a:ext uri="{FF2B5EF4-FFF2-40B4-BE49-F238E27FC236}">
-                <a16:creationId xmlns:a16="http://schemas.microsoft.com/office/drawing/2014/main" id="{0EECAEAB-242E-43F8-B639-2CFFC423930F}"/>
+                <a16:creationId xmlns:a16="http://schemas.microsoft.com/office/drawing/2014/main" id="{E903758D-5F15-4265-AC3F-BBD344CF3DD1}"/>
               </a:ext>
             </a:extLst>
           </p:cNvPr>
@@ -8168,7 +9127,7 @@
           <p:cNvPr id="2" name="">
             <a:extLst xmlns:a="http://schemas.openxmlformats.org/drawingml/2006/main">
               <a:ext uri="{FF2B5EF4-FFF2-40B4-BE49-F238E27FC236}">
-                <a16:creationId xmlns:a16="http://schemas.microsoft.com/office/drawing/2014/main" id="{BA23D16E-AAAD-419E-917D-839E3FBD3BF5}"/>
+                <a16:creationId xmlns:a16="http://schemas.microsoft.com/office/drawing/2014/main" id="{1D6220E3-EB35-4B08-AD17-F8A838F5BA4C}"/>
               </a:ext>
             </a:extLst>
           </p:cNvPr>
@@ -8203,7 +9162,7 @@
           <p:cNvPr id="3" name="">
             <a:extLst xmlns:a="http://schemas.openxmlformats.org/drawingml/2006/main">
               <a:ext uri="{FF2B5EF4-FFF2-40B4-BE49-F238E27FC236}">
-                <a16:creationId xmlns:a16="http://schemas.microsoft.com/office/drawing/2014/main" id="{2E469BA2-DA79-4113-9581-3D25F748BA79}"/>
+                <a16:creationId xmlns:a16="http://schemas.microsoft.com/office/drawing/2014/main" id="{46CA2C4E-A554-4004-BA73-BBEF418372A5}"/>
               </a:ext>
             </a:extLst>
           </p:cNvPr>
@@ -8267,7 +9226,7 @@
           <p:cNvPr id="4" name="">
             <a:extLst xmlns:a="http://schemas.openxmlformats.org/drawingml/2006/main">
               <a:ext uri="{FF2B5EF4-FFF2-40B4-BE49-F238E27FC236}">
-                <a16:creationId xmlns:a16="http://schemas.microsoft.com/office/drawing/2014/main" id="{E67A6810-A25A-4079-8006-1DF61E9E4F79}"/>
+                <a16:creationId xmlns:a16="http://schemas.microsoft.com/office/drawing/2014/main" id="{33FB29CC-02BD-496E-B1E1-AF13A0A2282C}"/>
               </a:ext>
             </a:extLst>
           </p:cNvPr>
@@ -8331,7 +9290,7 @@
           <p:cNvPr id="5" name="">
             <a:extLst xmlns:a="http://schemas.openxmlformats.org/drawingml/2006/main">
               <a:ext uri="{FF2B5EF4-FFF2-40B4-BE49-F238E27FC236}">
-                <a16:creationId xmlns:a16="http://schemas.microsoft.com/office/drawing/2014/main" id="{BB5CB017-D782-4096-B869-93609641F942}"/>
+                <a16:creationId xmlns:a16="http://schemas.microsoft.com/office/drawing/2014/main" id="{A30A03A0-FF82-42D7-BD61-A048281EE4F7}"/>
               </a:ext>
             </a:extLst>
           </p:cNvPr>
@@ -8395,7 +9354,7 @@
           <p:cNvPr id="6" name="">
             <a:extLst xmlns:a="http://schemas.openxmlformats.org/drawingml/2006/main">
               <a:ext uri="{FF2B5EF4-FFF2-40B4-BE49-F238E27FC236}">
-                <a16:creationId xmlns:a16="http://schemas.microsoft.com/office/drawing/2014/main" id="{F962AC04-D50D-4C2E-9DE8-FBF604C09556}"/>
+                <a16:creationId xmlns:a16="http://schemas.microsoft.com/office/drawing/2014/main" id="{2E1371AB-6B5C-434A-A712-D3B2C2F4F7C7}"/>
               </a:ext>
             </a:extLst>
           </p:cNvPr>
@@ -8459,7 +9418,7 @@
           <p:cNvPr id="7" name="">
             <a:extLst xmlns:a="http://schemas.openxmlformats.org/drawingml/2006/main">
               <a:ext uri="{FF2B5EF4-FFF2-40B4-BE49-F238E27FC236}">
-                <a16:creationId xmlns:a16="http://schemas.microsoft.com/office/drawing/2014/main" id="{A9A2BF79-E9C6-44AF-A332-F10308146372}"/>
+                <a16:creationId xmlns:a16="http://schemas.microsoft.com/office/drawing/2014/main" id="{0445F414-2C06-4808-BD87-9234062580D3}"/>
               </a:ext>
             </a:extLst>
           </p:cNvPr>
@@ -8492,7 +9451,7 @@
           <p:cNvPr id="8" name="">
             <a:extLst xmlns:a="http://schemas.openxmlformats.org/drawingml/2006/main">
               <a:ext uri="{FF2B5EF4-FFF2-40B4-BE49-F238E27FC236}">
-                <a16:creationId xmlns:a16="http://schemas.microsoft.com/office/drawing/2014/main" id="{677770B8-C9B3-416C-8F3D-8E5B634EB8FE}"/>
+                <a16:creationId xmlns:a16="http://schemas.microsoft.com/office/drawing/2014/main" id="{09FD6206-0698-4B08-886C-3210D80A0BC8}"/>
               </a:ext>
             </a:extLst>
           </p:cNvPr>
@@ -8556,7 +9515,7 @@
           <p:cNvPr id="9" name="">
             <a:extLst xmlns:a="http://schemas.openxmlformats.org/drawingml/2006/main">
               <a:ext uri="{FF2B5EF4-FFF2-40B4-BE49-F238E27FC236}">
-                <a16:creationId xmlns:a16="http://schemas.microsoft.com/office/drawing/2014/main" id="{CD5AC88B-9677-454C-AA86-47E79DDB514B}"/>
+                <a16:creationId xmlns:a16="http://schemas.microsoft.com/office/drawing/2014/main" id="{53CB5B38-E91E-4897-8B9D-D1C2CD9ED0B3}"/>
               </a:ext>
             </a:extLst>
           </p:cNvPr>
@@ -8643,7 +9602,7 @@
           <p:cNvPr id="10" name="">
             <a:extLst xmlns:a="http://schemas.openxmlformats.org/drawingml/2006/main">
               <a:ext uri="{FF2B5EF4-FFF2-40B4-BE49-F238E27FC236}">
-                <a16:creationId xmlns:a16="http://schemas.microsoft.com/office/drawing/2014/main" id="{4B2BEBE9-71E1-4B7E-A70F-6BD67FDEBD48}"/>
+                <a16:creationId xmlns:a16="http://schemas.microsoft.com/office/drawing/2014/main" id="{FF0E7AB9-5EFF-45D6-A7A1-1B145EE480FF}"/>
               </a:ext>
             </a:extLst>
           </p:cNvPr>
@@ -8676,7 +9635,7 @@
           <p:cNvPr id="11" name="">
             <a:extLst xmlns:a="http://schemas.openxmlformats.org/drawingml/2006/main">
               <a:ext uri="{FF2B5EF4-FFF2-40B4-BE49-F238E27FC236}">
-                <a16:creationId xmlns:a16="http://schemas.microsoft.com/office/drawing/2014/main" id="{06E4978B-97A3-44A0-BBAF-E3CFECE6256B}"/>
+                <a16:creationId xmlns:a16="http://schemas.microsoft.com/office/drawing/2014/main" id="{629EEF4D-423E-4959-AAF3-16A1CD90F60E}"/>
               </a:ext>
             </a:extLst>
           </p:cNvPr>
@@ -8740,7 +9699,7 @@
           <p:cNvPr id="12" name="">
             <a:extLst xmlns:a="http://schemas.openxmlformats.org/drawingml/2006/main">
               <a:ext uri="{FF2B5EF4-FFF2-40B4-BE49-F238E27FC236}">
-                <a16:creationId xmlns:a16="http://schemas.microsoft.com/office/drawing/2014/main" id="{06823F6D-F19D-490B-90C6-8C70F2D451B0}"/>
+                <a16:creationId xmlns:a16="http://schemas.microsoft.com/office/drawing/2014/main" id="{28980E6E-8549-4C2A-8F0C-AB3C270B97D0}"/>
               </a:ext>
             </a:extLst>
           </p:cNvPr>
@@ -8827,7 +9786,7 @@
           <p:cNvPr id="13" name="">
             <a:extLst xmlns:a="http://schemas.openxmlformats.org/drawingml/2006/main">
               <a:ext uri="{FF2B5EF4-FFF2-40B4-BE49-F238E27FC236}">
-                <a16:creationId xmlns:a16="http://schemas.microsoft.com/office/drawing/2014/main" id="{55AFB64B-2517-4773-A1A3-8E81C1C216CB}"/>
+                <a16:creationId xmlns:a16="http://schemas.microsoft.com/office/drawing/2014/main" id="{7E28E773-8A58-4DE9-A9E5-2A61480079F3}"/>
               </a:ext>
             </a:extLst>
           </p:cNvPr>
@@ -8860,7 +9819,7 @@
           <p:cNvPr id="14" name="">
             <a:extLst xmlns:a="http://schemas.openxmlformats.org/drawingml/2006/main">
               <a:ext uri="{FF2B5EF4-FFF2-40B4-BE49-F238E27FC236}">
-                <a16:creationId xmlns:a16="http://schemas.microsoft.com/office/drawing/2014/main" id="{6AA0B44B-E0AE-4DA8-9524-7C38A51BACAF}"/>
+                <a16:creationId xmlns:a16="http://schemas.microsoft.com/office/drawing/2014/main" id="{AA65791B-CB0F-4BA1-A6B6-0924D848111C}"/>
               </a:ext>
             </a:extLst>
           </p:cNvPr>
@@ -8924,7 +9883,7 @@
           <p:cNvPr id="15" name="">
             <a:extLst xmlns:a="http://schemas.openxmlformats.org/drawingml/2006/main">
               <a:ext uri="{FF2B5EF4-FFF2-40B4-BE49-F238E27FC236}">
-                <a16:creationId xmlns:a16="http://schemas.microsoft.com/office/drawing/2014/main" id="{A8B5A995-45B2-4172-9505-2DB60054542F}"/>
+                <a16:creationId xmlns:a16="http://schemas.microsoft.com/office/drawing/2014/main" id="{4972EC22-A7B2-449D-BF81-3173563D8816}"/>
               </a:ext>
             </a:extLst>
           </p:cNvPr>
@@ -9011,7 +9970,7 @@
           <p:cNvPr id="16" name="">
             <a:extLst xmlns:a="http://schemas.openxmlformats.org/drawingml/2006/main">
               <a:ext uri="{FF2B5EF4-FFF2-40B4-BE49-F238E27FC236}">
-                <a16:creationId xmlns:a16="http://schemas.microsoft.com/office/drawing/2014/main" id="{74C663D9-C127-4E1C-BD80-67944B5A4A70}"/>
+                <a16:creationId xmlns:a16="http://schemas.microsoft.com/office/drawing/2014/main" id="{9B09689E-568A-41A9-93C0-745D483B97A6}"/>
               </a:ext>
             </a:extLst>
           </p:cNvPr>
@@ -9044,7 +10003,7 @@
           <p:cNvPr id="17" name="">
             <a:extLst xmlns:a="http://schemas.openxmlformats.org/drawingml/2006/main">
               <a:ext uri="{FF2B5EF4-FFF2-40B4-BE49-F238E27FC236}">
-                <a16:creationId xmlns:a16="http://schemas.microsoft.com/office/drawing/2014/main" id="{12AE0FD1-FDD0-4615-B577-9890CF229D71}"/>
+                <a16:creationId xmlns:a16="http://schemas.microsoft.com/office/drawing/2014/main" id="{C58939D8-54E7-4609-B6BE-2FAF992E81F3}"/>
               </a:ext>
             </a:extLst>
           </p:cNvPr>
@@ -9108,7 +10067,7 @@
           <p:cNvPr id="18" name="">
             <a:extLst xmlns:a="http://schemas.openxmlformats.org/drawingml/2006/main">
               <a:ext uri="{FF2B5EF4-FFF2-40B4-BE49-F238E27FC236}">
-                <a16:creationId xmlns:a16="http://schemas.microsoft.com/office/drawing/2014/main" id="{CDA4A385-4BAE-486A-8A8D-C8D1BA8A3041}"/>
+                <a16:creationId xmlns:a16="http://schemas.microsoft.com/office/drawing/2014/main" id="{8488D847-C6D6-4F07-9A52-4C24C0926409}"/>
               </a:ext>
             </a:extLst>
           </p:cNvPr>
@@ -9172,7 +10131,7 @@
           <p:cNvPr id="19" name="">
             <a:extLst xmlns:a="http://schemas.openxmlformats.org/drawingml/2006/main">
               <a:ext uri="{FF2B5EF4-FFF2-40B4-BE49-F238E27FC236}">
-                <a16:creationId xmlns:a16="http://schemas.microsoft.com/office/drawing/2014/main" id="{ACE0155E-6319-4897-B82E-5A850A0AF9B4}"/>
+                <a16:creationId xmlns:a16="http://schemas.microsoft.com/office/drawing/2014/main" id="{56AF90B3-287F-4C72-9154-043F70F68442}"/>
               </a:ext>
             </a:extLst>
           </p:cNvPr>
@@ -9207,7 +10166,7 @@
           <p:cNvPr id="20" name="">
             <a:extLst xmlns:a="http://schemas.openxmlformats.org/drawingml/2006/main">
               <a:ext uri="{FF2B5EF4-FFF2-40B4-BE49-F238E27FC236}">
-                <a16:creationId xmlns:a16="http://schemas.microsoft.com/office/drawing/2014/main" id="{97A10E0C-E1D3-44EF-8BF8-DC49CD09B012}"/>
+                <a16:creationId xmlns:a16="http://schemas.microsoft.com/office/drawing/2014/main" id="{0F60A135-484C-438E-966D-F98F37F65D23}"/>
               </a:ext>
             </a:extLst>
           </p:cNvPr>
@@ -9271,7 +10230,7 @@
           <p:cNvPr id="21" name="">
             <a:extLst xmlns:a="http://schemas.openxmlformats.org/drawingml/2006/main">
               <a:ext uri="{FF2B5EF4-FFF2-40B4-BE49-F238E27FC236}">
-                <a16:creationId xmlns:a16="http://schemas.microsoft.com/office/drawing/2014/main" id="{9EFCCADD-D057-429C-AB58-54342A5F6002}"/>
+                <a16:creationId xmlns:a16="http://schemas.microsoft.com/office/drawing/2014/main" id="{7242F8A0-3E89-4245-948C-557C31F6A623}"/>
               </a:ext>
             </a:extLst>
           </p:cNvPr>
@@ -9333,7 +10292,7 @@
     </p:spTree>
     <p:extLst>
       <p:ext uri="{BB962C8B-B14F-4D97-AF65-F5344CB8AC3E}">
-        <p14:creationId xmlns:p14="http://schemas.microsoft.com/office/powerpoint/2010/main" val="398578296"/>
+        <p14:creationId xmlns:p14="http://schemas.microsoft.com/office/powerpoint/2010/main" val="1513249777"/>
       </p:ext>
     </p:extLst>
   </p:cSld>
@@ -9357,7 +10316,7 @@
           <p:cNvPr id="1" name="">
             <a:extLst xmlns:a="http://schemas.openxmlformats.org/drawingml/2006/main">
               <a:ext uri="{FF2B5EF4-FFF2-40B4-BE49-F238E27FC236}">
-                <a16:creationId xmlns:a16="http://schemas.microsoft.com/office/drawing/2014/main" id="{FD8C4E76-9125-4C43-8AF8-8C22A29388B4}"/>
+                <a16:creationId xmlns:a16="http://schemas.microsoft.com/office/drawing/2014/main" id="{62660055-290E-4FFF-9D6B-0CF56E16731D}"/>
               </a:ext>
             </a:extLst>
           </p:cNvPr>
@@ -9392,7 +10351,7 @@
           <p:cNvPr id="2" name="">
             <a:extLst xmlns:a="http://schemas.openxmlformats.org/drawingml/2006/main">
               <a:ext uri="{FF2B5EF4-FFF2-40B4-BE49-F238E27FC236}">
-                <a16:creationId xmlns:a16="http://schemas.microsoft.com/office/drawing/2014/main" id="{523B7FF5-E6BA-4C07-A97D-8F17C05173DB}"/>
+                <a16:creationId xmlns:a16="http://schemas.microsoft.com/office/drawing/2014/main" id="{01526CAC-3C2C-4428-8042-08A23EA111E7}"/>
               </a:ext>
             </a:extLst>
           </p:cNvPr>
@@ -9427,7 +10386,7 @@
           <p:cNvPr id="3" name="">
             <a:extLst xmlns:a="http://schemas.openxmlformats.org/drawingml/2006/main">
               <a:ext uri="{FF2B5EF4-FFF2-40B4-BE49-F238E27FC236}">
-                <a16:creationId xmlns:a16="http://schemas.microsoft.com/office/drawing/2014/main" id="{2277A65B-7909-424F-BBF3-A55B43C34798}"/>
+                <a16:creationId xmlns:a16="http://schemas.microsoft.com/office/drawing/2014/main" id="{1F8739A3-AD17-4633-9D56-AE741D39D030}"/>
               </a:ext>
             </a:extLst>
           </p:cNvPr>
@@ -9491,7 +10450,7 @@
           <p:cNvPr id="4" name="">
             <a:extLst xmlns:a="http://schemas.openxmlformats.org/drawingml/2006/main">
               <a:ext uri="{FF2B5EF4-FFF2-40B4-BE49-F238E27FC236}">
-                <a16:creationId xmlns:a16="http://schemas.microsoft.com/office/drawing/2014/main" id="{262A65DA-D5FC-4C31-B1F5-5C8FF0AA2FFC}"/>
+                <a16:creationId xmlns:a16="http://schemas.microsoft.com/office/drawing/2014/main" id="{6B555CEE-66C5-45EC-86B2-FB3FA8165E9A}"/>
               </a:ext>
             </a:extLst>
           </p:cNvPr>
@@ -9555,7 +10514,7 @@
           <p:cNvPr id="5" name="">
             <a:extLst xmlns:a="http://schemas.openxmlformats.org/drawingml/2006/main">
               <a:ext uri="{FF2B5EF4-FFF2-40B4-BE49-F238E27FC236}">
-                <a16:creationId xmlns:a16="http://schemas.microsoft.com/office/drawing/2014/main" id="{BF4F3FDA-A043-4A53-9ACF-940EF487DD3D}"/>
+                <a16:creationId xmlns:a16="http://schemas.microsoft.com/office/drawing/2014/main" id="{A559989B-B3F2-4BCA-A157-56F938DAE472}"/>
               </a:ext>
             </a:extLst>
           </p:cNvPr>
@@ -9619,7 +10578,7 @@
           <p:cNvPr id="6" name="">
             <a:extLst xmlns:a="http://schemas.openxmlformats.org/drawingml/2006/main">
               <a:ext uri="{FF2B5EF4-FFF2-40B4-BE49-F238E27FC236}">
-                <a16:creationId xmlns:a16="http://schemas.microsoft.com/office/drawing/2014/main" id="{3407164E-1337-4BD6-9F44-3F3A65FF3EDA}"/>
+                <a16:creationId xmlns:a16="http://schemas.microsoft.com/office/drawing/2014/main" id="{DA0ECD73-8B2E-480B-AEA4-22F4C35B81AD}"/>
               </a:ext>
             </a:extLst>
           </p:cNvPr>
@@ -9652,7 +10611,7 @@
           <p:cNvPr id="7" name="">
             <a:extLst xmlns:a="http://schemas.openxmlformats.org/drawingml/2006/main">
               <a:ext uri="{FF2B5EF4-FFF2-40B4-BE49-F238E27FC236}">
-                <a16:creationId xmlns:a16="http://schemas.microsoft.com/office/drawing/2014/main" id="{84A11967-FD9F-4BAF-A233-EF11FBF0A4FD}"/>
+                <a16:creationId xmlns:a16="http://schemas.microsoft.com/office/drawing/2014/main" id="{EEC269BD-B59B-4395-9918-3C8A854A4251}"/>
               </a:ext>
             </a:extLst>
           </p:cNvPr>
@@ -9716,7 +10675,7 @@
           <p:cNvPr id="8" name="">
             <a:extLst xmlns:a="http://schemas.openxmlformats.org/drawingml/2006/main">
               <a:ext uri="{FF2B5EF4-FFF2-40B4-BE49-F238E27FC236}">
-                <a16:creationId xmlns:a16="http://schemas.microsoft.com/office/drawing/2014/main" id="{44C9516D-49E8-42AE-894F-ED505C37E3CC}"/>
+                <a16:creationId xmlns:a16="http://schemas.microsoft.com/office/drawing/2014/main" id="{D886D674-589F-47C3-B8BF-31D5B90933E1}"/>
               </a:ext>
             </a:extLst>
           </p:cNvPr>
@@ -9872,7 +10831,7 @@
           <p:cNvPr id="9" name="">
             <a:extLst xmlns:a="http://schemas.openxmlformats.org/drawingml/2006/main">
               <a:ext uri="{FF2B5EF4-FFF2-40B4-BE49-F238E27FC236}">
-                <a16:creationId xmlns:a16="http://schemas.microsoft.com/office/drawing/2014/main" id="{889210A9-1565-490D-82E1-33C5C33E5FD9}"/>
+                <a16:creationId xmlns:a16="http://schemas.microsoft.com/office/drawing/2014/main" id="{C7EADAC2-DCA2-4347-B719-BC086F6C455E}"/>
               </a:ext>
             </a:extLst>
           </p:cNvPr>
@@ -9907,7 +10866,7 @@
           <p:cNvPr id="10" name="">
             <a:extLst xmlns:a="http://schemas.openxmlformats.org/drawingml/2006/main">
               <a:ext uri="{FF2B5EF4-FFF2-40B4-BE49-F238E27FC236}">
-                <a16:creationId xmlns:a16="http://schemas.microsoft.com/office/drawing/2014/main" id="{CBE71BBC-4654-4D89-B01B-4DB8D4E916E9}"/>
+                <a16:creationId xmlns:a16="http://schemas.microsoft.com/office/drawing/2014/main" id="{B7EFC763-6425-4280-817C-B305549EB140}"/>
               </a:ext>
             </a:extLst>
           </p:cNvPr>
@@ -9940,7 +10899,7 @@
           <p:cNvPr id="11" name="">
             <a:extLst xmlns:a="http://schemas.openxmlformats.org/drawingml/2006/main">
               <a:ext uri="{FF2B5EF4-FFF2-40B4-BE49-F238E27FC236}">
-                <a16:creationId xmlns:a16="http://schemas.microsoft.com/office/drawing/2014/main" id="{2CE32D98-3A7B-49F9-9030-F9B118CAD4FD}"/>
+                <a16:creationId xmlns:a16="http://schemas.microsoft.com/office/drawing/2014/main" id="{27629DED-D1E2-4243-B0A9-5D22083702AA}"/>
               </a:ext>
             </a:extLst>
           </p:cNvPr>
@@ -10004,7 +10963,7 @@
           <p:cNvPr id="12" name="">
             <a:extLst xmlns:a="http://schemas.openxmlformats.org/drawingml/2006/main">
               <a:ext uri="{FF2B5EF4-FFF2-40B4-BE49-F238E27FC236}">
-                <a16:creationId xmlns:a16="http://schemas.microsoft.com/office/drawing/2014/main" id="{0ECC583C-1446-4090-B8AD-318DD39788A5}"/>
+                <a16:creationId xmlns:a16="http://schemas.microsoft.com/office/drawing/2014/main" id="{DC7F77DB-F980-432A-A496-62DE289DE8F0}"/>
               </a:ext>
             </a:extLst>
           </p:cNvPr>
@@ -10114,7 +11073,7 @@
           <p:cNvPr id="13" name="">
             <a:extLst xmlns:a="http://schemas.openxmlformats.org/drawingml/2006/main">
               <a:ext uri="{FF2B5EF4-FFF2-40B4-BE49-F238E27FC236}">
-                <a16:creationId xmlns:a16="http://schemas.microsoft.com/office/drawing/2014/main" id="{F6BABA1C-8DC3-4EB1-B3A4-F649B6BD5BFB}"/>
+                <a16:creationId xmlns:a16="http://schemas.microsoft.com/office/drawing/2014/main" id="{50E81667-E0A1-42C0-91FE-996B51ABEBBF}"/>
               </a:ext>
             </a:extLst>
           </p:cNvPr>
@@ -10149,7 +11108,7 @@
           <p:cNvPr id="14" name="">
             <a:extLst xmlns:a="http://schemas.openxmlformats.org/drawingml/2006/main">
               <a:ext uri="{FF2B5EF4-FFF2-40B4-BE49-F238E27FC236}">
-                <a16:creationId xmlns:a16="http://schemas.microsoft.com/office/drawing/2014/main" id="{3F09B5DE-8486-4560-BB91-9A387A07D3A7}"/>
+                <a16:creationId xmlns:a16="http://schemas.microsoft.com/office/drawing/2014/main" id="{22790B90-AEF3-431A-AFC1-DA59EE413191}"/>
               </a:ext>
             </a:extLst>
           </p:cNvPr>
@@ -10182,7 +11141,7 @@
           <p:cNvPr id="15" name="">
             <a:extLst xmlns:a="http://schemas.openxmlformats.org/drawingml/2006/main">
               <a:ext uri="{FF2B5EF4-FFF2-40B4-BE49-F238E27FC236}">
-                <a16:creationId xmlns:a16="http://schemas.microsoft.com/office/drawing/2014/main" id="{D8C8908E-6474-44A8-BA9C-82B1CF966290}"/>
+                <a16:creationId xmlns:a16="http://schemas.microsoft.com/office/drawing/2014/main" id="{5FFB0104-EAD4-4758-A259-0DAB1CF9450E}"/>
               </a:ext>
             </a:extLst>
           </p:cNvPr>
@@ -10246,7 +11205,7 @@
           <p:cNvPr id="16" name="">
             <a:extLst xmlns:a="http://schemas.openxmlformats.org/drawingml/2006/main">
               <a:ext uri="{FF2B5EF4-FFF2-40B4-BE49-F238E27FC236}">
-                <a16:creationId xmlns:a16="http://schemas.microsoft.com/office/drawing/2014/main" id="{97A0A15F-5F2F-41E0-BE71-E4A0CDF8EC89}"/>
+                <a16:creationId xmlns:a16="http://schemas.microsoft.com/office/drawing/2014/main" id="{3855C1B0-B675-4A62-A9F3-ED7E3D86C86F}"/>
               </a:ext>
             </a:extLst>
           </p:cNvPr>
@@ -10379,7 +11338,7 @@
           <p:cNvPr id="17" name="">
             <a:extLst xmlns:a="http://schemas.openxmlformats.org/drawingml/2006/main">
               <a:ext uri="{FF2B5EF4-FFF2-40B4-BE49-F238E27FC236}">
-                <a16:creationId xmlns:a16="http://schemas.microsoft.com/office/drawing/2014/main" id="{54AA9317-5333-492D-A376-4EF449C5E2F9}"/>
+                <a16:creationId xmlns:a16="http://schemas.microsoft.com/office/drawing/2014/main" id="{9E474EFD-33F3-48FF-B19B-BEC1D0955115}"/>
               </a:ext>
             </a:extLst>
           </p:cNvPr>
@@ -10414,7 +11373,7 @@
           <p:cNvPr id="18" name="">
             <a:extLst xmlns:a="http://schemas.openxmlformats.org/drawingml/2006/main">
               <a:ext uri="{FF2B5EF4-FFF2-40B4-BE49-F238E27FC236}">
-                <a16:creationId xmlns:a16="http://schemas.microsoft.com/office/drawing/2014/main" id="{DA61CF6A-766B-43D5-AB5F-2C0AE418E336}"/>
+                <a16:creationId xmlns:a16="http://schemas.microsoft.com/office/drawing/2014/main" id="{11F18982-D467-4A4B-A47D-DDBDA2FA730A}"/>
               </a:ext>
             </a:extLst>
           </p:cNvPr>
@@ -10447,7 +11406,7 @@
           <p:cNvPr id="19" name="">
             <a:extLst xmlns:a="http://schemas.openxmlformats.org/drawingml/2006/main">
               <a:ext uri="{FF2B5EF4-FFF2-40B4-BE49-F238E27FC236}">
-                <a16:creationId xmlns:a16="http://schemas.microsoft.com/office/drawing/2014/main" id="{FF97E6A3-41F1-4CDE-B507-3A75D91D12F6}"/>
+                <a16:creationId xmlns:a16="http://schemas.microsoft.com/office/drawing/2014/main" id="{3579B2D8-1902-4D03-B53D-75B126B2FF2B}"/>
               </a:ext>
             </a:extLst>
           </p:cNvPr>
@@ -10511,7 +11470,7 @@
           <p:cNvPr id="20" name="">
             <a:extLst xmlns:a="http://schemas.openxmlformats.org/drawingml/2006/main">
               <a:ext uri="{FF2B5EF4-FFF2-40B4-BE49-F238E27FC236}">
-                <a16:creationId xmlns:a16="http://schemas.microsoft.com/office/drawing/2014/main" id="{FF3CE9FA-7389-4D3A-BDDC-4610D142CC5D}"/>
+                <a16:creationId xmlns:a16="http://schemas.microsoft.com/office/drawing/2014/main" id="{243E4B5F-E77C-493F-943F-CE8ECA9EF4A7}"/>
               </a:ext>
             </a:extLst>
           </p:cNvPr>
@@ -10644,7 +11603,7 @@
           <p:cNvPr id="21" name="">
             <a:extLst xmlns:a="http://schemas.openxmlformats.org/drawingml/2006/main">
               <a:ext uri="{FF2B5EF4-FFF2-40B4-BE49-F238E27FC236}">
-                <a16:creationId xmlns:a16="http://schemas.microsoft.com/office/drawing/2014/main" id="{C9AA8643-D169-471F-AED3-C38793603AF0}"/>
+                <a16:creationId xmlns:a16="http://schemas.microsoft.com/office/drawing/2014/main" id="{030E156A-0B0B-46D1-B45F-371838D900A7}"/>
               </a:ext>
             </a:extLst>
           </p:cNvPr>
@@ -10679,7 +11638,7 @@
           <p:cNvPr id="22" name="">
             <a:extLst xmlns:a="http://schemas.openxmlformats.org/drawingml/2006/main">
               <a:ext uri="{FF2B5EF4-FFF2-40B4-BE49-F238E27FC236}">
-                <a16:creationId xmlns:a16="http://schemas.microsoft.com/office/drawing/2014/main" id="{778DFEE8-7A26-4B5F-B731-6470F46083FF}"/>
+                <a16:creationId xmlns:a16="http://schemas.microsoft.com/office/drawing/2014/main" id="{3736FE93-ED11-460F-95FA-FB3171C77360}"/>
               </a:ext>
             </a:extLst>
           </p:cNvPr>
@@ -10712,7 +11671,7 @@
           <p:cNvPr id="23" name="">
             <a:extLst xmlns:a="http://schemas.openxmlformats.org/drawingml/2006/main">
               <a:ext uri="{FF2B5EF4-FFF2-40B4-BE49-F238E27FC236}">
-                <a16:creationId xmlns:a16="http://schemas.microsoft.com/office/drawing/2014/main" id="{73CFA33B-AA50-4914-AD30-95C693921BAF}"/>
+                <a16:creationId xmlns:a16="http://schemas.microsoft.com/office/drawing/2014/main" id="{6267C9D4-543B-4D6C-91EB-D33814DFCA43}"/>
               </a:ext>
             </a:extLst>
           </p:cNvPr>
@@ -10776,7 +11735,7 @@
           <p:cNvPr id="24" name="">
             <a:extLst xmlns:a="http://schemas.openxmlformats.org/drawingml/2006/main">
               <a:ext uri="{FF2B5EF4-FFF2-40B4-BE49-F238E27FC236}">
-                <a16:creationId xmlns:a16="http://schemas.microsoft.com/office/drawing/2014/main" id="{F861E9BE-0D26-45EB-BE69-DE8376863C50}"/>
+                <a16:creationId xmlns:a16="http://schemas.microsoft.com/office/drawing/2014/main" id="{B1D9F136-D3AC-4A0D-BA47-DEF12AA80089}"/>
               </a:ext>
             </a:extLst>
           </p:cNvPr>
@@ -10886,7 +11845,7 @@
           <p:cNvPr id="25" name="">
             <a:extLst xmlns:a="http://schemas.openxmlformats.org/drawingml/2006/main">
               <a:ext uri="{FF2B5EF4-FFF2-40B4-BE49-F238E27FC236}">
-                <a16:creationId xmlns:a16="http://schemas.microsoft.com/office/drawing/2014/main" id="{C3307484-344F-4763-B973-BDA5B41355BF}"/>
+                <a16:creationId xmlns:a16="http://schemas.microsoft.com/office/drawing/2014/main" id="{72D41C5B-9157-466E-A766-541CE6B51DE8}"/>
               </a:ext>
             </a:extLst>
           </p:cNvPr>
@@ -10921,7 +11880,7 @@
           <p:cNvPr id="26" name="">
             <a:extLst xmlns:a="http://schemas.openxmlformats.org/drawingml/2006/main">
               <a:ext uri="{FF2B5EF4-FFF2-40B4-BE49-F238E27FC236}">
-                <a16:creationId xmlns:a16="http://schemas.microsoft.com/office/drawing/2014/main" id="{57DDDF02-67AC-4A74-8331-6DDB4CEF9539}"/>
+                <a16:creationId xmlns:a16="http://schemas.microsoft.com/office/drawing/2014/main" id="{771937F4-94D4-4D45-9789-403D925A7EEB}"/>
               </a:ext>
             </a:extLst>
           </p:cNvPr>
@@ -10954,7 +11913,7 @@
           <p:cNvPr id="27" name="">
             <a:extLst xmlns:a="http://schemas.openxmlformats.org/drawingml/2006/main">
               <a:ext uri="{FF2B5EF4-FFF2-40B4-BE49-F238E27FC236}">
-                <a16:creationId xmlns:a16="http://schemas.microsoft.com/office/drawing/2014/main" id="{2D3AA88C-3A55-4A8A-8239-689D81885BA0}"/>
+                <a16:creationId xmlns:a16="http://schemas.microsoft.com/office/drawing/2014/main" id="{B067A052-CFAC-46A2-AFF5-C31808DDB691}"/>
               </a:ext>
             </a:extLst>
           </p:cNvPr>
@@ -11018,7 +11977,7 @@
           <p:cNvPr id="28" name="">
             <a:extLst xmlns:a="http://schemas.openxmlformats.org/drawingml/2006/main">
               <a:ext uri="{FF2B5EF4-FFF2-40B4-BE49-F238E27FC236}">
-                <a16:creationId xmlns:a16="http://schemas.microsoft.com/office/drawing/2014/main" id="{CBF3B8F5-8E5F-4F4A-A3A3-EBFE5FFDA183}"/>
+                <a16:creationId xmlns:a16="http://schemas.microsoft.com/office/drawing/2014/main" id="{A03A44C0-595A-4BE1-AEA3-ED0ABACB1CCB}"/>
               </a:ext>
             </a:extLst>
           </p:cNvPr>
@@ -11128,7 +12087,7 @@
           <p:cNvPr id="29" name="">
             <a:extLst xmlns:a="http://schemas.openxmlformats.org/drawingml/2006/main">
               <a:ext uri="{FF2B5EF4-FFF2-40B4-BE49-F238E27FC236}">
-                <a16:creationId xmlns:a16="http://schemas.microsoft.com/office/drawing/2014/main" id="{287B7BFF-109C-45F6-9DEF-DD25C9FB286E}"/>
+                <a16:creationId xmlns:a16="http://schemas.microsoft.com/office/drawing/2014/main" id="{99101D05-01CF-4A47-823A-ADE5BFA469ED}"/>
               </a:ext>
             </a:extLst>
           </p:cNvPr>
@@ -11161,7 +12120,7 @@
           <p:cNvPr id="30" name="">
             <a:extLst xmlns:a="http://schemas.openxmlformats.org/drawingml/2006/main">
               <a:ext uri="{FF2B5EF4-FFF2-40B4-BE49-F238E27FC236}">
-                <a16:creationId xmlns:a16="http://schemas.microsoft.com/office/drawing/2014/main" id="{EE808CAE-9E0A-43A0-AF7F-FEF06F250A84}"/>
+                <a16:creationId xmlns:a16="http://schemas.microsoft.com/office/drawing/2014/main" id="{9F8587D8-B0A5-456D-BC42-DBA5D8DF4960}"/>
               </a:ext>
             </a:extLst>
           </p:cNvPr>
@@ -11225,7 +12184,7 @@
           <p:cNvPr id="31" name="">
             <a:extLst xmlns:a="http://schemas.openxmlformats.org/drawingml/2006/main">
               <a:ext uri="{FF2B5EF4-FFF2-40B4-BE49-F238E27FC236}">
-                <a16:creationId xmlns:a16="http://schemas.microsoft.com/office/drawing/2014/main" id="{586F81F2-8931-4E78-A998-4C6A532CEE70}"/>
+                <a16:creationId xmlns:a16="http://schemas.microsoft.com/office/drawing/2014/main" id="{AA9983DA-1CA0-4BB1-9DEA-3F8540B040CB}"/>
               </a:ext>
             </a:extLst>
           </p:cNvPr>
@@ -11260,7 +12219,7 @@
           <p:cNvPr id="32" name="">
             <a:extLst xmlns:a="http://schemas.openxmlformats.org/drawingml/2006/main">
               <a:ext uri="{FF2B5EF4-FFF2-40B4-BE49-F238E27FC236}">
-                <a16:creationId xmlns:a16="http://schemas.microsoft.com/office/drawing/2014/main" id="{75AE7CAA-6099-41A6-8773-A7067B58327C}"/>
+                <a16:creationId xmlns:a16="http://schemas.microsoft.com/office/drawing/2014/main" id="{9F7BC0CA-EAB9-469A-88DD-6DFD352B25C5}"/>
               </a:ext>
             </a:extLst>
           </p:cNvPr>
@@ -11324,7 +12283,7 @@
           <p:cNvPr id="33" name="">
             <a:extLst xmlns:a="http://schemas.openxmlformats.org/drawingml/2006/main">
               <a:ext uri="{FF2B5EF4-FFF2-40B4-BE49-F238E27FC236}">
-                <a16:creationId xmlns:a16="http://schemas.microsoft.com/office/drawing/2014/main" id="{73A8A388-0502-46F9-ACD5-25AADEC15E9D}"/>
+                <a16:creationId xmlns:a16="http://schemas.microsoft.com/office/drawing/2014/main" id="{11093A6B-973D-4F58-90F4-4CD5F7875135}"/>
               </a:ext>
             </a:extLst>
           </p:cNvPr>
@@ -11386,7 +12345,7 @@
     </p:spTree>
     <p:extLst>
       <p:ext uri="{BB962C8B-B14F-4D97-AF65-F5344CB8AC3E}">
-        <p14:creationId xmlns:p14="http://schemas.microsoft.com/office/powerpoint/2010/main" val="993573698"/>
+        <p14:creationId xmlns:p14="http://schemas.microsoft.com/office/powerpoint/2010/main" val="426621307"/>
       </p:ext>
     </p:extLst>
   </p:cSld>
@@ -11410,7 +12369,7 @@
           <p:cNvPr id="1" name="">
             <a:extLst xmlns:a="http://schemas.openxmlformats.org/drawingml/2006/main">
               <a:ext uri="{FF2B5EF4-FFF2-40B4-BE49-F238E27FC236}">
-                <a16:creationId xmlns:a16="http://schemas.microsoft.com/office/drawing/2014/main" id="{775CF6D1-1635-419F-911B-9F134D0568A8}"/>
+                <a16:creationId xmlns:a16="http://schemas.microsoft.com/office/drawing/2014/main" id="{34A94C8A-92AA-4B8D-B511-BA8D8EB0CB44}"/>
               </a:ext>
             </a:extLst>
           </p:cNvPr>
@@ -11445,7 +12404,7 @@
           <p:cNvPr id="2" name="">
             <a:extLst xmlns:a="http://schemas.openxmlformats.org/drawingml/2006/main">
               <a:ext uri="{FF2B5EF4-FFF2-40B4-BE49-F238E27FC236}">
-                <a16:creationId xmlns:a16="http://schemas.microsoft.com/office/drawing/2014/main" id="{9993D90C-0A26-4415-83AE-C4AA74583C77}"/>
+                <a16:creationId xmlns:a16="http://schemas.microsoft.com/office/drawing/2014/main" id="{2C5AAD9B-3EA5-4760-A863-D2F097C454D6}"/>
               </a:ext>
             </a:extLst>
           </p:cNvPr>
@@ -11480,7 +12439,7 @@
           <p:cNvPr id="3" name="">
             <a:extLst xmlns:a="http://schemas.openxmlformats.org/drawingml/2006/main">
               <a:ext uri="{FF2B5EF4-FFF2-40B4-BE49-F238E27FC236}">
-                <a16:creationId xmlns:a16="http://schemas.microsoft.com/office/drawing/2014/main" id="{BEE77CCD-41FD-49AF-857A-CFE4F7053620}"/>
+                <a16:creationId xmlns:a16="http://schemas.microsoft.com/office/drawing/2014/main" id="{38D9A679-B170-498B-AE3C-9139133CFDB2}"/>
               </a:ext>
             </a:extLst>
           </p:cNvPr>
@@ -11544,7 +12503,7 @@
           <p:cNvPr id="4" name="">
             <a:extLst xmlns:a="http://schemas.openxmlformats.org/drawingml/2006/main">
               <a:ext uri="{FF2B5EF4-FFF2-40B4-BE49-F238E27FC236}">
-                <a16:creationId xmlns:a16="http://schemas.microsoft.com/office/drawing/2014/main" id="{4744FD8D-96ED-4B5E-B680-625201803A38}"/>
+                <a16:creationId xmlns:a16="http://schemas.microsoft.com/office/drawing/2014/main" id="{4DBDEFA7-3692-42D5-9E82-222689848737}"/>
               </a:ext>
             </a:extLst>
           </p:cNvPr>
@@ -11608,7 +12567,7 @@
           <p:cNvPr id="5" name="">
             <a:extLst xmlns:a="http://schemas.openxmlformats.org/drawingml/2006/main">
               <a:ext uri="{FF2B5EF4-FFF2-40B4-BE49-F238E27FC236}">
-                <a16:creationId xmlns:a16="http://schemas.microsoft.com/office/drawing/2014/main" id="{C705C54B-DDDB-488F-AF64-080F494C0131}"/>
+                <a16:creationId xmlns:a16="http://schemas.microsoft.com/office/drawing/2014/main" id="{AE642609-4E64-40A3-939C-F40914589389}"/>
               </a:ext>
             </a:extLst>
           </p:cNvPr>
@@ -11672,7 +12631,7 @@
           <p:cNvPr id="6" name="">
             <a:extLst xmlns:a="http://schemas.openxmlformats.org/drawingml/2006/main">
               <a:ext uri="{FF2B5EF4-FFF2-40B4-BE49-F238E27FC236}">
-                <a16:creationId xmlns:a16="http://schemas.microsoft.com/office/drawing/2014/main" id="{2789D912-6592-4A91-A1BB-0DB9131BED99}"/>
+                <a16:creationId xmlns:a16="http://schemas.microsoft.com/office/drawing/2014/main" id="{1369D3FA-F695-4885-855D-7A9DE13C3478}"/>
               </a:ext>
             </a:extLst>
           </p:cNvPr>
@@ -11705,7 +12664,7 @@
           <p:cNvPr id="7" name="">
             <a:extLst xmlns:a="http://schemas.openxmlformats.org/drawingml/2006/main">
               <a:ext uri="{FF2B5EF4-FFF2-40B4-BE49-F238E27FC236}">
-                <a16:creationId xmlns:a16="http://schemas.microsoft.com/office/drawing/2014/main" id="{2630FC98-D708-47C3-9755-449ED31D8A1F}"/>
+                <a16:creationId xmlns:a16="http://schemas.microsoft.com/office/drawing/2014/main" id="{F4EB02B9-6B54-4B9E-8F79-8897AC0639EA}"/>
               </a:ext>
             </a:extLst>
           </p:cNvPr>
@@ -11738,7 +12697,7 @@
           <p:cNvPr id="8" name="">
             <a:extLst xmlns:a="http://schemas.openxmlformats.org/drawingml/2006/main">
               <a:ext uri="{FF2B5EF4-FFF2-40B4-BE49-F238E27FC236}">
-                <a16:creationId xmlns:a16="http://schemas.microsoft.com/office/drawing/2014/main" id="{E9033AD2-C55C-479C-9676-93EDA6B5DCC0}"/>
+                <a16:creationId xmlns:a16="http://schemas.microsoft.com/office/drawing/2014/main" id="{22ED102C-A47C-47BF-B01F-A0859123B19F}"/>
               </a:ext>
             </a:extLst>
           </p:cNvPr>
@@ -11802,7 +12761,7 @@
           <p:cNvPr id="9" name="">
             <a:extLst xmlns:a="http://schemas.openxmlformats.org/drawingml/2006/main">
               <a:ext uri="{FF2B5EF4-FFF2-40B4-BE49-F238E27FC236}">
-                <a16:creationId xmlns:a16="http://schemas.microsoft.com/office/drawing/2014/main" id="{C292AD24-1A44-4A0C-ADDF-1AF793063DC0}"/>
+                <a16:creationId xmlns:a16="http://schemas.microsoft.com/office/drawing/2014/main" id="{571DD84B-3BE9-40C1-B8E7-F71C92BF16A4}"/>
               </a:ext>
             </a:extLst>
           </p:cNvPr>
@@ -11837,7 +12796,7 @@
           <p:cNvPr id="10" name="">
             <a:extLst xmlns:a="http://schemas.openxmlformats.org/drawingml/2006/main">
               <a:ext uri="{FF2B5EF4-FFF2-40B4-BE49-F238E27FC236}">
-                <a16:creationId xmlns:a16="http://schemas.microsoft.com/office/drawing/2014/main" id="{2080758C-9FB4-41B5-8B05-4079EB114ED4}"/>
+                <a16:creationId xmlns:a16="http://schemas.microsoft.com/office/drawing/2014/main" id="{C4EC8AB8-2E2A-4F07-9FD6-124FF7BCB130}"/>
               </a:ext>
             </a:extLst>
           </p:cNvPr>
@@ -11901,7 +12860,7 @@
           <p:cNvPr id="11" name="">
             <a:extLst xmlns:a="http://schemas.openxmlformats.org/drawingml/2006/main">
               <a:ext uri="{FF2B5EF4-FFF2-40B4-BE49-F238E27FC236}">
-                <a16:creationId xmlns:a16="http://schemas.microsoft.com/office/drawing/2014/main" id="{70902FC9-FB67-4A8F-B772-EFE61097F79D}"/>
+                <a16:creationId xmlns:a16="http://schemas.microsoft.com/office/drawing/2014/main" id="{95B5EC1E-B976-486D-931F-48103DF33F3F}"/>
               </a:ext>
             </a:extLst>
           </p:cNvPr>
@@ -11936,7 +12895,7 @@
           <p:cNvPr id="12" name="">
             <a:extLst xmlns:a="http://schemas.openxmlformats.org/drawingml/2006/main">
               <a:ext uri="{FF2B5EF4-FFF2-40B4-BE49-F238E27FC236}">
-                <a16:creationId xmlns:a16="http://schemas.microsoft.com/office/drawing/2014/main" id="{8EF8796E-EAE6-45E5-A5AE-CB1422213C9D}"/>
+                <a16:creationId xmlns:a16="http://schemas.microsoft.com/office/drawing/2014/main" id="{1882B8E0-F177-41E5-9B09-03DA0E5CD689}"/>
               </a:ext>
             </a:extLst>
           </p:cNvPr>
@@ -12000,7 +12959,7 @@
           <p:cNvPr id="13" name="">
             <a:extLst xmlns:a="http://schemas.openxmlformats.org/drawingml/2006/main">
               <a:ext uri="{FF2B5EF4-FFF2-40B4-BE49-F238E27FC236}">
-                <a16:creationId xmlns:a16="http://schemas.microsoft.com/office/drawing/2014/main" id="{3ADE43F2-2507-4564-AB58-C0F7159ADB6A}"/>
+                <a16:creationId xmlns:a16="http://schemas.microsoft.com/office/drawing/2014/main" id="{E3FBDB07-CD81-45C5-862E-BC27975DB339}"/>
               </a:ext>
             </a:extLst>
           </p:cNvPr>
@@ -12035,7 +12994,7 @@
           <p:cNvPr id="14" name="">
             <a:extLst xmlns:a="http://schemas.openxmlformats.org/drawingml/2006/main">
               <a:ext uri="{FF2B5EF4-FFF2-40B4-BE49-F238E27FC236}">
-                <a16:creationId xmlns:a16="http://schemas.microsoft.com/office/drawing/2014/main" id="{2084FB1F-8092-468C-996C-B6E6D7F6F8B9}"/>
+                <a16:creationId xmlns:a16="http://schemas.microsoft.com/office/drawing/2014/main" id="{0D087099-0E8D-4682-8545-53571D3F077C}"/>
               </a:ext>
             </a:extLst>
           </p:cNvPr>
@@ -12099,7 +13058,7 @@
           <p:cNvPr id="15" name="">
             <a:extLst xmlns:a="http://schemas.openxmlformats.org/drawingml/2006/main">
               <a:ext uri="{FF2B5EF4-FFF2-40B4-BE49-F238E27FC236}">
-                <a16:creationId xmlns:a16="http://schemas.microsoft.com/office/drawing/2014/main" id="{220BA24E-AF80-403E-A338-FB1E58C3822C}"/>
+                <a16:creationId xmlns:a16="http://schemas.microsoft.com/office/drawing/2014/main" id="{05587CDD-FDD5-4034-991F-63EF02E3EF04}"/>
               </a:ext>
             </a:extLst>
           </p:cNvPr>
@@ -12132,7 +13091,7 @@
           <p:cNvPr id="16" name="">
             <a:extLst xmlns:a="http://schemas.openxmlformats.org/drawingml/2006/main">
               <a:ext uri="{FF2B5EF4-FFF2-40B4-BE49-F238E27FC236}">
-                <a16:creationId xmlns:a16="http://schemas.microsoft.com/office/drawing/2014/main" id="{43093DEE-D7FA-4D3A-ADF5-31CAA6520F24}"/>
+                <a16:creationId xmlns:a16="http://schemas.microsoft.com/office/drawing/2014/main" id="{1610F668-E05F-4F6B-A1B1-BF8D70216599}"/>
               </a:ext>
             </a:extLst>
           </p:cNvPr>
@@ -12165,7 +13124,7 @@
           <p:cNvPr id="17" name="">
             <a:extLst xmlns:a="http://schemas.openxmlformats.org/drawingml/2006/main">
               <a:ext uri="{FF2B5EF4-FFF2-40B4-BE49-F238E27FC236}">
-                <a16:creationId xmlns:a16="http://schemas.microsoft.com/office/drawing/2014/main" id="{65B69BC5-0578-43CA-9D23-659511C0D036}"/>
+                <a16:creationId xmlns:a16="http://schemas.microsoft.com/office/drawing/2014/main" id="{894F04CE-7583-4600-A4F7-C99F8A77C843}"/>
               </a:ext>
             </a:extLst>
           </p:cNvPr>
@@ -12229,7 +13188,7 @@
           <p:cNvPr id="18" name="">
             <a:extLst xmlns:a="http://schemas.openxmlformats.org/drawingml/2006/main">
               <a:ext uri="{FF2B5EF4-FFF2-40B4-BE49-F238E27FC236}">
-                <a16:creationId xmlns:a16="http://schemas.microsoft.com/office/drawing/2014/main" id="{358A1781-E750-40D6-809C-DFDB412086B6}"/>
+                <a16:creationId xmlns:a16="http://schemas.microsoft.com/office/drawing/2014/main" id="{55D57E82-0287-4FC4-9E56-967F4415F39B}"/>
               </a:ext>
             </a:extLst>
           </p:cNvPr>
@@ -12264,7 +13223,7 @@
           <p:cNvPr id="19" name="">
             <a:extLst xmlns:a="http://schemas.openxmlformats.org/drawingml/2006/main">
               <a:ext uri="{FF2B5EF4-FFF2-40B4-BE49-F238E27FC236}">
-                <a16:creationId xmlns:a16="http://schemas.microsoft.com/office/drawing/2014/main" id="{B8459022-AE72-4677-B345-722154415F14}"/>
+                <a16:creationId xmlns:a16="http://schemas.microsoft.com/office/drawing/2014/main" id="{8EBC2C3E-1D1C-49C2-B7EA-C798A653F0BB}"/>
               </a:ext>
             </a:extLst>
           </p:cNvPr>
@@ -12328,7 +13287,7 @@
           <p:cNvPr id="20" name="">
             <a:extLst xmlns:a="http://schemas.openxmlformats.org/drawingml/2006/main">
               <a:ext uri="{FF2B5EF4-FFF2-40B4-BE49-F238E27FC236}">
-                <a16:creationId xmlns:a16="http://schemas.microsoft.com/office/drawing/2014/main" id="{B3062849-AD05-4730-89BB-8AAA0D71BAB3}"/>
+                <a16:creationId xmlns:a16="http://schemas.microsoft.com/office/drawing/2014/main" id="{FC9B6BB2-B3A0-4731-8683-7634363657D2}"/>
               </a:ext>
             </a:extLst>
           </p:cNvPr>
@@ -12363,7 +13322,7 @@
           <p:cNvPr id="21" name="">
             <a:extLst xmlns:a="http://schemas.openxmlformats.org/drawingml/2006/main">
               <a:ext uri="{FF2B5EF4-FFF2-40B4-BE49-F238E27FC236}">
-                <a16:creationId xmlns:a16="http://schemas.microsoft.com/office/drawing/2014/main" id="{E07213C4-2882-4399-82CC-8CC898690AAF}"/>
+                <a16:creationId xmlns:a16="http://schemas.microsoft.com/office/drawing/2014/main" id="{69D61646-B62F-4D0E-91FF-946FE0E684B5}"/>
               </a:ext>
             </a:extLst>
           </p:cNvPr>
@@ -12427,7 +13386,7 @@
           <p:cNvPr id="22" name="">
             <a:extLst xmlns:a="http://schemas.openxmlformats.org/drawingml/2006/main">
               <a:ext uri="{FF2B5EF4-FFF2-40B4-BE49-F238E27FC236}">
-                <a16:creationId xmlns:a16="http://schemas.microsoft.com/office/drawing/2014/main" id="{B0A8933A-15A3-4496-AFF3-7C5350580CD5}"/>
+                <a16:creationId xmlns:a16="http://schemas.microsoft.com/office/drawing/2014/main" id="{7B341005-48A9-46BD-9552-F45886FFB7DA}"/>
               </a:ext>
             </a:extLst>
           </p:cNvPr>
@@ -12462,7 +13421,7 @@
           <p:cNvPr id="23" name="">
             <a:extLst xmlns:a="http://schemas.openxmlformats.org/drawingml/2006/main">
               <a:ext uri="{FF2B5EF4-FFF2-40B4-BE49-F238E27FC236}">
-                <a16:creationId xmlns:a16="http://schemas.microsoft.com/office/drawing/2014/main" id="{95FD0E0B-EB0B-4877-81D4-2A79E9981D45}"/>
+                <a16:creationId xmlns:a16="http://schemas.microsoft.com/office/drawing/2014/main" id="{9AFC92DE-EF74-4086-99BD-85D265D0F661}"/>
               </a:ext>
             </a:extLst>
           </p:cNvPr>
@@ -12526,7 +13485,7 @@
           <p:cNvPr id="24" name="">
             <a:extLst xmlns:a="http://schemas.openxmlformats.org/drawingml/2006/main">
               <a:ext uri="{FF2B5EF4-FFF2-40B4-BE49-F238E27FC236}">
-                <a16:creationId xmlns:a16="http://schemas.microsoft.com/office/drawing/2014/main" id="{724925B6-DD6B-4C69-8AB5-B2E159A00466}"/>
+                <a16:creationId xmlns:a16="http://schemas.microsoft.com/office/drawing/2014/main" id="{98328591-10B5-4902-961E-B2450F17D6D0}"/>
               </a:ext>
             </a:extLst>
           </p:cNvPr>
@@ -12559,7 +13518,7 @@
           <p:cNvPr id="25" name="">
             <a:extLst xmlns:a="http://schemas.openxmlformats.org/drawingml/2006/main">
               <a:ext uri="{FF2B5EF4-FFF2-40B4-BE49-F238E27FC236}">
-                <a16:creationId xmlns:a16="http://schemas.microsoft.com/office/drawing/2014/main" id="{481DBC00-4A70-4937-8E86-F9F1121B0172}"/>
+                <a16:creationId xmlns:a16="http://schemas.microsoft.com/office/drawing/2014/main" id="{C9DA6FF3-1028-4FB0-AD34-C10F476BDE04}"/>
               </a:ext>
             </a:extLst>
           </p:cNvPr>
@@ -12592,7 +13551,7 @@
           <p:cNvPr id="26" name="">
             <a:extLst xmlns:a="http://schemas.openxmlformats.org/drawingml/2006/main">
               <a:ext uri="{FF2B5EF4-FFF2-40B4-BE49-F238E27FC236}">
-                <a16:creationId xmlns:a16="http://schemas.microsoft.com/office/drawing/2014/main" id="{39F0D8B1-437B-415E-883C-768A0D715D94}"/>
+                <a16:creationId xmlns:a16="http://schemas.microsoft.com/office/drawing/2014/main" id="{91CD3B0F-C36D-41AA-8875-1769157E468E}"/>
               </a:ext>
             </a:extLst>
           </p:cNvPr>
@@ -12656,7 +13615,7 @@
           <p:cNvPr id="27" name="">
             <a:extLst xmlns:a="http://schemas.openxmlformats.org/drawingml/2006/main">
               <a:ext uri="{FF2B5EF4-FFF2-40B4-BE49-F238E27FC236}">
-                <a16:creationId xmlns:a16="http://schemas.microsoft.com/office/drawing/2014/main" id="{39026911-044C-4E10-A339-2F28F566F3B8}"/>
+                <a16:creationId xmlns:a16="http://schemas.microsoft.com/office/drawing/2014/main" id="{0754CF17-9FA1-44C5-86D0-6FC1C0D79A56}"/>
               </a:ext>
             </a:extLst>
           </p:cNvPr>
@@ -12691,7 +13650,7 @@
           <p:cNvPr id="28" name="">
             <a:extLst xmlns:a="http://schemas.openxmlformats.org/drawingml/2006/main">
               <a:ext uri="{FF2B5EF4-FFF2-40B4-BE49-F238E27FC236}">
-                <a16:creationId xmlns:a16="http://schemas.microsoft.com/office/drawing/2014/main" id="{D6CD1DC7-3DC4-43A6-B317-0F82A21BA03E}"/>
+                <a16:creationId xmlns:a16="http://schemas.microsoft.com/office/drawing/2014/main" id="{30463A76-A585-4988-9C10-F8F9139EB10B}"/>
               </a:ext>
             </a:extLst>
           </p:cNvPr>
@@ -12755,7 +13714,7 @@
           <p:cNvPr id="29" name="">
             <a:extLst xmlns:a="http://schemas.openxmlformats.org/drawingml/2006/main">
               <a:ext uri="{FF2B5EF4-FFF2-40B4-BE49-F238E27FC236}">
-                <a16:creationId xmlns:a16="http://schemas.microsoft.com/office/drawing/2014/main" id="{74150A93-9DAC-44AF-A13B-1B4CECF0940A}"/>
+                <a16:creationId xmlns:a16="http://schemas.microsoft.com/office/drawing/2014/main" id="{8D55B407-8618-4C09-B446-17F589091B1F}"/>
               </a:ext>
             </a:extLst>
           </p:cNvPr>
@@ -12790,7 +13749,7 @@
           <p:cNvPr id="30" name="">
             <a:extLst xmlns:a="http://schemas.openxmlformats.org/drawingml/2006/main">
               <a:ext uri="{FF2B5EF4-FFF2-40B4-BE49-F238E27FC236}">
-                <a16:creationId xmlns:a16="http://schemas.microsoft.com/office/drawing/2014/main" id="{288FFDD7-1EA2-413F-86A6-88CFA1D2C312}"/>
+                <a16:creationId xmlns:a16="http://schemas.microsoft.com/office/drawing/2014/main" id="{3BDE6C8D-D774-4939-8B9E-12278052AE2B}"/>
               </a:ext>
             </a:extLst>
           </p:cNvPr>
@@ -12854,7 +13813,7 @@
           <p:cNvPr id="31" name="">
             <a:extLst xmlns:a="http://schemas.openxmlformats.org/drawingml/2006/main">
               <a:ext uri="{FF2B5EF4-FFF2-40B4-BE49-F238E27FC236}">
-                <a16:creationId xmlns:a16="http://schemas.microsoft.com/office/drawing/2014/main" id="{BEA729C0-7617-45A9-AD2D-55FD6EE892EE}"/>
+                <a16:creationId xmlns:a16="http://schemas.microsoft.com/office/drawing/2014/main" id="{0F85B576-3A4A-4AE5-9D2F-633D6C890380}"/>
               </a:ext>
             </a:extLst>
           </p:cNvPr>
@@ -12889,7 +13848,7 @@
           <p:cNvPr id="32" name="">
             <a:extLst xmlns:a="http://schemas.openxmlformats.org/drawingml/2006/main">
               <a:ext uri="{FF2B5EF4-FFF2-40B4-BE49-F238E27FC236}">
-                <a16:creationId xmlns:a16="http://schemas.microsoft.com/office/drawing/2014/main" id="{5B4EC237-B508-4016-B3AA-9333AFB1F47F}"/>
+                <a16:creationId xmlns:a16="http://schemas.microsoft.com/office/drawing/2014/main" id="{0BFE17D3-2932-4418-8EEE-707C17F8A6DD}"/>
               </a:ext>
             </a:extLst>
           </p:cNvPr>
@@ -12953,7 +13912,7 @@
           <p:cNvPr id="33" name="">
             <a:extLst xmlns:a="http://schemas.openxmlformats.org/drawingml/2006/main">
               <a:ext uri="{FF2B5EF4-FFF2-40B4-BE49-F238E27FC236}">
-                <a16:creationId xmlns:a16="http://schemas.microsoft.com/office/drawing/2014/main" id="{081F1569-C8D2-4BA5-A06E-79A52ED6FFBD}"/>
+                <a16:creationId xmlns:a16="http://schemas.microsoft.com/office/drawing/2014/main" id="{9555DECF-C2FA-4F7F-9CDA-092A0AC2432F}"/>
               </a:ext>
             </a:extLst>
           </p:cNvPr>
@@ -12986,7 +13945,7 @@
           <p:cNvPr id="34" name="">
             <a:extLst xmlns:a="http://schemas.openxmlformats.org/drawingml/2006/main">
               <a:ext uri="{FF2B5EF4-FFF2-40B4-BE49-F238E27FC236}">
-                <a16:creationId xmlns:a16="http://schemas.microsoft.com/office/drawing/2014/main" id="{5DD39FD1-5F12-48F2-A902-1211E95C7EE2}"/>
+                <a16:creationId xmlns:a16="http://schemas.microsoft.com/office/drawing/2014/main" id="{D141A68B-15FF-42F7-A516-8A094F9AFCBE}"/>
               </a:ext>
             </a:extLst>
           </p:cNvPr>
@@ -13050,7 +14009,7 @@
           <p:cNvPr id="35" name="">
             <a:extLst xmlns:a="http://schemas.openxmlformats.org/drawingml/2006/main">
               <a:ext uri="{FF2B5EF4-FFF2-40B4-BE49-F238E27FC236}">
-                <a16:creationId xmlns:a16="http://schemas.microsoft.com/office/drawing/2014/main" id="{D86A13C1-356C-444E-8E83-7BDB958F6266}"/>
+                <a16:creationId xmlns:a16="http://schemas.microsoft.com/office/drawing/2014/main" id="{B45BBB6A-C496-42CE-82D4-BDF3CFE72E8D}"/>
               </a:ext>
             </a:extLst>
           </p:cNvPr>
@@ -13085,7 +14044,7 @@
           <p:cNvPr id="36" name="">
             <a:extLst xmlns:a="http://schemas.openxmlformats.org/drawingml/2006/main">
               <a:ext uri="{FF2B5EF4-FFF2-40B4-BE49-F238E27FC236}">
-                <a16:creationId xmlns:a16="http://schemas.microsoft.com/office/drawing/2014/main" id="{C5B7A8E5-52B6-44A6-8353-486EAC68F160}"/>
+                <a16:creationId xmlns:a16="http://schemas.microsoft.com/office/drawing/2014/main" id="{38053653-E5BC-4487-8D33-DDF510060176}"/>
               </a:ext>
             </a:extLst>
           </p:cNvPr>
@@ -13149,7 +14108,7 @@
           <p:cNvPr id="37" name="">
             <a:extLst xmlns:a="http://schemas.openxmlformats.org/drawingml/2006/main">
               <a:ext uri="{FF2B5EF4-FFF2-40B4-BE49-F238E27FC236}">
-                <a16:creationId xmlns:a16="http://schemas.microsoft.com/office/drawing/2014/main" id="{063DF0C2-8235-4846-87C0-F9F969FD5F2C}"/>
+                <a16:creationId xmlns:a16="http://schemas.microsoft.com/office/drawing/2014/main" id="{869EA6B7-FBEA-49F5-98BA-7856C5D58B41}"/>
               </a:ext>
             </a:extLst>
           </p:cNvPr>
@@ -13184,7 +14143,7 @@
           <p:cNvPr id="38" name="">
             <a:extLst xmlns:a="http://schemas.openxmlformats.org/drawingml/2006/main">
               <a:ext uri="{FF2B5EF4-FFF2-40B4-BE49-F238E27FC236}">
-                <a16:creationId xmlns:a16="http://schemas.microsoft.com/office/drawing/2014/main" id="{2A31D378-244C-40F2-9C3D-77F2CD172316}"/>
+                <a16:creationId xmlns:a16="http://schemas.microsoft.com/office/drawing/2014/main" id="{CF40566E-4D46-4BD8-9A49-18C0416928A8}"/>
               </a:ext>
             </a:extLst>
           </p:cNvPr>
@@ -13248,7 +14207,7 @@
           <p:cNvPr id="39" name="">
             <a:extLst xmlns:a="http://schemas.openxmlformats.org/drawingml/2006/main">
               <a:ext uri="{FF2B5EF4-FFF2-40B4-BE49-F238E27FC236}">
-                <a16:creationId xmlns:a16="http://schemas.microsoft.com/office/drawing/2014/main" id="{E8873656-56DD-443C-82A0-943465AFDAAC}"/>
+                <a16:creationId xmlns:a16="http://schemas.microsoft.com/office/drawing/2014/main" id="{7F84DA72-BF47-43ED-B3A0-33B1E853B4ED}"/>
               </a:ext>
             </a:extLst>
           </p:cNvPr>
@@ -13283,7 +14242,7 @@
           <p:cNvPr id="40" name="">
             <a:extLst xmlns:a="http://schemas.openxmlformats.org/drawingml/2006/main">
               <a:ext uri="{FF2B5EF4-FFF2-40B4-BE49-F238E27FC236}">
-                <a16:creationId xmlns:a16="http://schemas.microsoft.com/office/drawing/2014/main" id="{CFBC0208-6943-4090-96F7-580F2C31BB61}"/>
+                <a16:creationId xmlns:a16="http://schemas.microsoft.com/office/drawing/2014/main" id="{3979BB54-DE90-4267-A248-EAF26A2A586A}"/>
               </a:ext>
             </a:extLst>
           </p:cNvPr>
@@ -13347,7 +14306,7 @@
           <p:cNvPr id="41" name="">
             <a:extLst xmlns:a="http://schemas.openxmlformats.org/drawingml/2006/main">
               <a:ext uri="{FF2B5EF4-FFF2-40B4-BE49-F238E27FC236}">
-                <a16:creationId xmlns:a16="http://schemas.microsoft.com/office/drawing/2014/main" id="{846E6AB3-4487-49EA-80F7-A79F1BADB2AF}"/>
+                <a16:creationId xmlns:a16="http://schemas.microsoft.com/office/drawing/2014/main" id="{167F9B62-432F-452F-AC02-1D7AB239B572}"/>
               </a:ext>
             </a:extLst>
           </p:cNvPr>
@@ -13382,7 +14341,7 @@
           <p:cNvPr id="42" name="">
             <a:extLst xmlns:a="http://schemas.openxmlformats.org/drawingml/2006/main">
               <a:ext uri="{FF2B5EF4-FFF2-40B4-BE49-F238E27FC236}">
-                <a16:creationId xmlns:a16="http://schemas.microsoft.com/office/drawing/2014/main" id="{5F0440E0-6B86-46BB-8D6A-ECCE07C5A782}"/>
+                <a16:creationId xmlns:a16="http://schemas.microsoft.com/office/drawing/2014/main" id="{8FD79BB4-B916-4426-B062-5C1581082E0F}"/>
               </a:ext>
             </a:extLst>
           </p:cNvPr>
@@ -13446,7 +14405,7 @@
           <p:cNvPr id="43" name="">
             <a:extLst xmlns:a="http://schemas.openxmlformats.org/drawingml/2006/main">
               <a:ext uri="{FF2B5EF4-FFF2-40B4-BE49-F238E27FC236}">
-                <a16:creationId xmlns:a16="http://schemas.microsoft.com/office/drawing/2014/main" id="{2B1E2561-7C79-4F7A-93ED-EEF0887F733F}"/>
+                <a16:creationId xmlns:a16="http://schemas.microsoft.com/office/drawing/2014/main" id="{1B54A548-3122-47C3-A1D3-B8AD59FDDC63}"/>
               </a:ext>
             </a:extLst>
           </p:cNvPr>
@@ -13508,7 +14467,7 @@
     </p:spTree>
     <p:extLst>
       <p:ext uri="{BB962C8B-B14F-4D97-AF65-F5344CB8AC3E}">
-        <p14:creationId xmlns:p14="http://schemas.microsoft.com/office/powerpoint/2010/main" val="506895205"/>
+        <p14:creationId xmlns:p14="http://schemas.microsoft.com/office/powerpoint/2010/main" val="2091073151"/>
       </p:ext>
     </p:extLst>
   </p:cSld>
@@ -13532,7 +14491,7 @@
           <p:cNvPr id="1" name="">
             <a:extLst xmlns:a="http://schemas.openxmlformats.org/drawingml/2006/main">
               <a:ext uri="{FF2B5EF4-FFF2-40B4-BE49-F238E27FC236}">
-                <a16:creationId xmlns:a16="http://schemas.microsoft.com/office/drawing/2014/main" id="{56E095A0-22D4-4BCD-BDE4-DADAF9509DF4}"/>
+                <a16:creationId xmlns:a16="http://schemas.microsoft.com/office/drawing/2014/main" id="{67ED79EF-8E77-42C0-9746-BCD12A02493E}"/>
               </a:ext>
             </a:extLst>
           </p:cNvPr>
@@ -13567,7 +14526,7 @@
           <p:cNvPr id="2" name="">
             <a:extLst xmlns:a="http://schemas.openxmlformats.org/drawingml/2006/main">
               <a:ext uri="{FF2B5EF4-FFF2-40B4-BE49-F238E27FC236}">
-                <a16:creationId xmlns:a16="http://schemas.microsoft.com/office/drawing/2014/main" id="{CB71ADD3-D9B5-45D5-BF7C-725DB0F20F3F}"/>
+                <a16:creationId xmlns:a16="http://schemas.microsoft.com/office/drawing/2014/main" id="{6A383FE5-A037-46FE-A48D-85FDA3D9C83E}"/>
               </a:ext>
             </a:extLst>
           </p:cNvPr>
@@ -13602,7 +14561,7 @@
           <p:cNvPr id="3" name="">
             <a:extLst xmlns:a="http://schemas.openxmlformats.org/drawingml/2006/main">
               <a:ext uri="{FF2B5EF4-FFF2-40B4-BE49-F238E27FC236}">
-                <a16:creationId xmlns:a16="http://schemas.microsoft.com/office/drawing/2014/main" id="{2A1256DC-3DAF-4F4D-827F-0B79239FB71C}"/>
+                <a16:creationId xmlns:a16="http://schemas.microsoft.com/office/drawing/2014/main" id="{318692DF-24EE-4356-8862-4DCB504B2CFE}"/>
               </a:ext>
             </a:extLst>
           </p:cNvPr>
@@ -13666,7 +14625,7 @@
           <p:cNvPr id="4" name="">
             <a:extLst xmlns:a="http://schemas.openxmlformats.org/drawingml/2006/main">
               <a:ext uri="{FF2B5EF4-FFF2-40B4-BE49-F238E27FC236}">
-                <a16:creationId xmlns:a16="http://schemas.microsoft.com/office/drawing/2014/main" id="{1DE078AE-58F7-4696-85F8-3621EB40113E}"/>
+                <a16:creationId xmlns:a16="http://schemas.microsoft.com/office/drawing/2014/main" id="{CE4A1343-5B9F-4AB2-962B-642DB1B34715}"/>
               </a:ext>
             </a:extLst>
           </p:cNvPr>
@@ -13730,7 +14689,7 @@
           <p:cNvPr id="5" name="">
             <a:extLst xmlns:a="http://schemas.openxmlformats.org/drawingml/2006/main">
               <a:ext uri="{FF2B5EF4-FFF2-40B4-BE49-F238E27FC236}">
-                <a16:creationId xmlns:a16="http://schemas.microsoft.com/office/drawing/2014/main" id="{99B405F5-AF5C-45D4-95F1-271BE16B9BCB}"/>
+                <a16:creationId xmlns:a16="http://schemas.microsoft.com/office/drawing/2014/main" id="{0EC0155D-833A-49DA-A605-567876F8475E}"/>
               </a:ext>
             </a:extLst>
           </p:cNvPr>
@@ -13794,7 +14753,7 @@
           <p:cNvPr id="6" name="">
             <a:extLst xmlns:a="http://schemas.openxmlformats.org/drawingml/2006/main">
               <a:ext uri="{FF2B5EF4-FFF2-40B4-BE49-F238E27FC236}">
-                <a16:creationId xmlns:a16="http://schemas.microsoft.com/office/drawing/2014/main" id="{1B2EB50C-AE8A-4227-A048-D8CC03AD8AC9}"/>
+                <a16:creationId xmlns:a16="http://schemas.microsoft.com/office/drawing/2014/main" id="{5DCA32A2-C084-46A0-9962-11C77D42F27F}"/>
               </a:ext>
             </a:extLst>
           </p:cNvPr>
@@ -13827,7 +14786,7 @@
           <p:cNvPr id="7" name="">
             <a:extLst xmlns:a="http://schemas.openxmlformats.org/drawingml/2006/main">
               <a:ext uri="{FF2B5EF4-FFF2-40B4-BE49-F238E27FC236}">
-                <a16:creationId xmlns:a16="http://schemas.microsoft.com/office/drawing/2014/main" id="{25D9B211-2B3F-45FA-AED3-AD513C455F66}"/>
+                <a16:creationId xmlns:a16="http://schemas.microsoft.com/office/drawing/2014/main" id="{5689F8FD-9200-4F81-842D-D1E37213F8BE}"/>
               </a:ext>
             </a:extLst>
           </p:cNvPr>
@@ -13891,7 +14850,7 @@
           <p:cNvPr id="8" name="">
             <a:extLst xmlns:a="http://schemas.openxmlformats.org/drawingml/2006/main">
               <a:ext uri="{FF2B5EF4-FFF2-40B4-BE49-F238E27FC236}">
-                <a16:creationId xmlns:a16="http://schemas.microsoft.com/office/drawing/2014/main" id="{78D90090-C3F7-4E74-AB52-1F94E0BDD2B8}"/>
+                <a16:creationId xmlns:a16="http://schemas.microsoft.com/office/drawing/2014/main" id="{59295E96-F615-493E-B40D-519CB862988A}"/>
               </a:ext>
             </a:extLst>
           </p:cNvPr>
@@ -13924,7 +14883,7 @@
           <p:cNvPr id="9" name="">
             <a:extLst xmlns:a="http://schemas.openxmlformats.org/drawingml/2006/main">
               <a:ext uri="{FF2B5EF4-FFF2-40B4-BE49-F238E27FC236}">
-                <a16:creationId xmlns:a16="http://schemas.microsoft.com/office/drawing/2014/main" id="{270427EF-5710-403D-A3F2-E7C73D46A956}"/>
+                <a16:creationId xmlns:a16="http://schemas.microsoft.com/office/drawing/2014/main" id="{C2444132-EFE3-4156-8918-9959EC539246}"/>
               </a:ext>
             </a:extLst>
           </p:cNvPr>
@@ -13988,7 +14947,7 @@
           <p:cNvPr id="10" name="">
             <a:extLst xmlns:a="http://schemas.openxmlformats.org/drawingml/2006/main">
               <a:ext uri="{FF2B5EF4-FFF2-40B4-BE49-F238E27FC236}">
-                <a16:creationId xmlns:a16="http://schemas.microsoft.com/office/drawing/2014/main" id="{996B3A46-0F72-4C8B-9866-06AFE42E460A}"/>
+                <a16:creationId xmlns:a16="http://schemas.microsoft.com/office/drawing/2014/main" id="{673DB280-8319-45DB-BC83-672FEB07260A}"/>
               </a:ext>
             </a:extLst>
           </p:cNvPr>
@@ -14052,7 +15011,7 @@
           <p:cNvPr id="11" name="">
             <a:extLst xmlns:a="http://schemas.openxmlformats.org/drawingml/2006/main">
               <a:ext uri="{FF2B5EF4-FFF2-40B4-BE49-F238E27FC236}">
-                <a16:creationId xmlns:a16="http://schemas.microsoft.com/office/drawing/2014/main" id="{BEA970D9-74B1-4160-AECE-35F1AFC182A7}"/>
+                <a16:creationId xmlns:a16="http://schemas.microsoft.com/office/drawing/2014/main" id="{9D4CE479-4592-4162-84D5-B0F9B471F292}"/>
               </a:ext>
             </a:extLst>
           </p:cNvPr>
@@ -14085,7 +15044,7 @@
           <p:cNvPr id="12" name="">
             <a:extLst xmlns:a="http://schemas.openxmlformats.org/drawingml/2006/main">
               <a:ext uri="{FF2B5EF4-FFF2-40B4-BE49-F238E27FC236}">
-                <a16:creationId xmlns:a16="http://schemas.microsoft.com/office/drawing/2014/main" id="{21B2F1F8-3979-49F3-9330-6CA66AA74FF0}"/>
+                <a16:creationId xmlns:a16="http://schemas.microsoft.com/office/drawing/2014/main" id="{A7150953-161E-4BD6-AD1C-29ED87B002E7}"/>
               </a:ext>
             </a:extLst>
           </p:cNvPr>
@@ -14149,7 +15108,7 @@
           <p:cNvPr id="13" name="">
             <a:extLst xmlns:a="http://schemas.openxmlformats.org/drawingml/2006/main">
               <a:ext uri="{FF2B5EF4-FFF2-40B4-BE49-F238E27FC236}">
-                <a16:creationId xmlns:a16="http://schemas.microsoft.com/office/drawing/2014/main" id="{2AEF422B-927F-483A-82DF-9F78805FF8F7}"/>
+                <a16:creationId xmlns:a16="http://schemas.microsoft.com/office/drawing/2014/main" id="{AF36AC06-2452-4C29-A448-09E3D67ACFD0}"/>
               </a:ext>
             </a:extLst>
           </p:cNvPr>
@@ -14213,7 +15172,7 @@
           <p:cNvPr id="14" name="">
             <a:extLst xmlns:a="http://schemas.openxmlformats.org/drawingml/2006/main">
               <a:ext uri="{FF2B5EF4-FFF2-40B4-BE49-F238E27FC236}">
-                <a16:creationId xmlns:a16="http://schemas.microsoft.com/office/drawing/2014/main" id="{499A56D9-4A9E-46A6-A711-D779C4EB1576}"/>
+                <a16:creationId xmlns:a16="http://schemas.microsoft.com/office/drawing/2014/main" id="{D0E2C336-DCD8-4AB0-80E2-CC2F131CAAC3}"/>
               </a:ext>
             </a:extLst>
           </p:cNvPr>
@@ -14246,7 +15205,7 @@
           <p:cNvPr id="15" name="">
             <a:extLst xmlns:a="http://schemas.openxmlformats.org/drawingml/2006/main">
               <a:ext uri="{FF2B5EF4-FFF2-40B4-BE49-F238E27FC236}">
-                <a16:creationId xmlns:a16="http://schemas.microsoft.com/office/drawing/2014/main" id="{B9ADC3F7-F3F3-49BF-B673-E8FDFC082E01}"/>
+                <a16:creationId xmlns:a16="http://schemas.microsoft.com/office/drawing/2014/main" id="{017BC6F7-B91D-409A-B00D-A23D4AE8FBAE}"/>
               </a:ext>
             </a:extLst>
           </p:cNvPr>
@@ -14310,7 +15269,7 @@
           <p:cNvPr id="16" name="">
             <a:extLst xmlns:a="http://schemas.openxmlformats.org/drawingml/2006/main">
               <a:ext uri="{FF2B5EF4-FFF2-40B4-BE49-F238E27FC236}">
-                <a16:creationId xmlns:a16="http://schemas.microsoft.com/office/drawing/2014/main" id="{59520E3C-9C6B-4119-B848-EB72212467A0}"/>
+                <a16:creationId xmlns:a16="http://schemas.microsoft.com/office/drawing/2014/main" id="{B7432C55-3DB8-40CE-817D-B273D6609C93}"/>
               </a:ext>
             </a:extLst>
           </p:cNvPr>
@@ -14374,7 +15333,7 @@
           <p:cNvPr id="17" name="">
             <a:extLst xmlns:a="http://schemas.openxmlformats.org/drawingml/2006/main">
               <a:ext uri="{FF2B5EF4-FFF2-40B4-BE49-F238E27FC236}">
-                <a16:creationId xmlns:a16="http://schemas.microsoft.com/office/drawing/2014/main" id="{2C36676D-9995-4319-86DD-7FA15B001567}"/>
+                <a16:creationId xmlns:a16="http://schemas.microsoft.com/office/drawing/2014/main" id="{751AA63F-7847-4FC4-B878-4150B7AB66DC}"/>
               </a:ext>
             </a:extLst>
           </p:cNvPr>
@@ -14407,7 +15366,7 @@
           <p:cNvPr id="18" name="">
             <a:extLst xmlns:a="http://schemas.openxmlformats.org/drawingml/2006/main">
               <a:ext uri="{FF2B5EF4-FFF2-40B4-BE49-F238E27FC236}">
-                <a16:creationId xmlns:a16="http://schemas.microsoft.com/office/drawing/2014/main" id="{0B6EA6B9-8529-46F3-9BF4-476595BE8C4B}"/>
+                <a16:creationId xmlns:a16="http://schemas.microsoft.com/office/drawing/2014/main" id="{8B920A92-71A3-4027-BD4B-E84DB7AC6C4B}"/>
               </a:ext>
             </a:extLst>
           </p:cNvPr>
@@ -14471,7 +15430,7 @@
           <p:cNvPr id="19" name="">
             <a:extLst xmlns:a="http://schemas.openxmlformats.org/drawingml/2006/main">
               <a:ext uri="{FF2B5EF4-FFF2-40B4-BE49-F238E27FC236}">
-                <a16:creationId xmlns:a16="http://schemas.microsoft.com/office/drawing/2014/main" id="{46FCA6C0-0B3A-4631-872B-BC7D5AD1C23A}"/>
+                <a16:creationId xmlns:a16="http://schemas.microsoft.com/office/drawing/2014/main" id="{F535C500-662A-440F-83F3-49FC9480B1D2}"/>
               </a:ext>
             </a:extLst>
           </p:cNvPr>
@@ -14535,7 +15494,7 @@
           <p:cNvPr id="20" name="">
             <a:extLst xmlns:a="http://schemas.openxmlformats.org/drawingml/2006/main">
               <a:ext uri="{FF2B5EF4-FFF2-40B4-BE49-F238E27FC236}">
-                <a16:creationId xmlns:a16="http://schemas.microsoft.com/office/drawing/2014/main" id="{6D228F72-F46A-444D-99C1-8F9DB336C003}"/>
+                <a16:creationId xmlns:a16="http://schemas.microsoft.com/office/drawing/2014/main" id="{EA9D0712-3BF4-4408-BA50-B7091126D12C}"/>
               </a:ext>
             </a:extLst>
           </p:cNvPr>
@@ -14568,7 +15527,7 @@
           <p:cNvPr id="21" name="">
             <a:extLst xmlns:a="http://schemas.openxmlformats.org/drawingml/2006/main">
               <a:ext uri="{FF2B5EF4-FFF2-40B4-BE49-F238E27FC236}">
-                <a16:creationId xmlns:a16="http://schemas.microsoft.com/office/drawing/2014/main" id="{CC771049-69DF-4504-B545-71421C125830}"/>
+                <a16:creationId xmlns:a16="http://schemas.microsoft.com/office/drawing/2014/main" id="{B59FD72E-F973-4C95-B9F0-878BD5473BDB}"/>
               </a:ext>
             </a:extLst>
           </p:cNvPr>
@@ -14632,7 +15591,7 @@
           <p:cNvPr id="22" name="">
             <a:extLst xmlns:a="http://schemas.openxmlformats.org/drawingml/2006/main">
               <a:ext uri="{FF2B5EF4-FFF2-40B4-BE49-F238E27FC236}">
-                <a16:creationId xmlns:a16="http://schemas.microsoft.com/office/drawing/2014/main" id="{E3F09D1D-D97E-428E-822D-7BC11FCA2E1C}"/>
+                <a16:creationId xmlns:a16="http://schemas.microsoft.com/office/drawing/2014/main" id="{51F64C3B-1818-465E-9B02-C9C89ACF7E4D}"/>
               </a:ext>
             </a:extLst>
           </p:cNvPr>
@@ -14696,7 +15655,7 @@
           <p:cNvPr id="23" name="">
             <a:extLst xmlns:a="http://schemas.openxmlformats.org/drawingml/2006/main">
               <a:ext uri="{FF2B5EF4-FFF2-40B4-BE49-F238E27FC236}">
-                <a16:creationId xmlns:a16="http://schemas.microsoft.com/office/drawing/2014/main" id="{0F82358C-B033-4ED7-B710-194EA932B041}"/>
+                <a16:creationId xmlns:a16="http://schemas.microsoft.com/office/drawing/2014/main" id="{004D4513-D1E8-4369-9454-59117D4CD1F5}"/>
               </a:ext>
             </a:extLst>
           </p:cNvPr>
@@ -14729,7 +15688,7 @@
           <p:cNvPr id="24" name="">
             <a:extLst xmlns:a="http://schemas.openxmlformats.org/drawingml/2006/main">
               <a:ext uri="{FF2B5EF4-FFF2-40B4-BE49-F238E27FC236}">
-                <a16:creationId xmlns:a16="http://schemas.microsoft.com/office/drawing/2014/main" id="{3A36CC87-899E-4FC2-9D5B-5B3DBEACE2BA}"/>
+                <a16:creationId xmlns:a16="http://schemas.microsoft.com/office/drawing/2014/main" id="{31BA2D8F-58A7-494C-84F0-89096CE4B088}"/>
               </a:ext>
             </a:extLst>
           </p:cNvPr>
@@ -14793,7 +15752,7 @@
           <p:cNvPr id="25" name="">
             <a:extLst xmlns:a="http://schemas.openxmlformats.org/drawingml/2006/main">
               <a:ext uri="{FF2B5EF4-FFF2-40B4-BE49-F238E27FC236}">
-                <a16:creationId xmlns:a16="http://schemas.microsoft.com/office/drawing/2014/main" id="{05E307CF-2CD8-4C0A-B545-0A1985EE3F35}"/>
+                <a16:creationId xmlns:a16="http://schemas.microsoft.com/office/drawing/2014/main" id="{EDBDAFC0-8339-458A-8A77-EBAD2BA1B3EC}"/>
               </a:ext>
             </a:extLst>
           </p:cNvPr>
@@ -14857,7 +15816,7 @@
           <p:cNvPr id="26" name="">
             <a:extLst xmlns:a="http://schemas.openxmlformats.org/drawingml/2006/main">
               <a:ext uri="{FF2B5EF4-FFF2-40B4-BE49-F238E27FC236}">
-                <a16:creationId xmlns:a16="http://schemas.microsoft.com/office/drawing/2014/main" id="{C5799EF5-EB15-456C-B92D-F4F3FE4ED3A7}"/>
+                <a16:creationId xmlns:a16="http://schemas.microsoft.com/office/drawing/2014/main" id="{F7F810B2-2B99-4E0A-A3A6-5EFF067CE3AE}"/>
               </a:ext>
             </a:extLst>
           </p:cNvPr>
@@ -14892,7 +15851,7 @@
           <p:cNvPr id="27" name="">
             <a:extLst xmlns:a="http://schemas.openxmlformats.org/drawingml/2006/main">
               <a:ext uri="{FF2B5EF4-FFF2-40B4-BE49-F238E27FC236}">
-                <a16:creationId xmlns:a16="http://schemas.microsoft.com/office/drawing/2014/main" id="{FBF5B7A2-D871-436E-A68B-E3CBF3D2016F}"/>
+                <a16:creationId xmlns:a16="http://schemas.microsoft.com/office/drawing/2014/main" id="{2A58CFE2-EE32-4D4D-8534-573BBCF0F505}"/>
               </a:ext>
             </a:extLst>
           </p:cNvPr>
@@ -14956,7 +15915,7 @@
           <p:cNvPr id="28" name="">
             <a:extLst xmlns:a="http://schemas.openxmlformats.org/drawingml/2006/main">
               <a:ext uri="{FF2B5EF4-FFF2-40B4-BE49-F238E27FC236}">
-                <a16:creationId xmlns:a16="http://schemas.microsoft.com/office/drawing/2014/main" id="{4C11E281-5A1C-44A6-8F94-9CE6A8F4FA56}"/>
+                <a16:creationId xmlns:a16="http://schemas.microsoft.com/office/drawing/2014/main" id="{E0052D31-588A-4A0E-82B8-BB4BFFC976B8}"/>
               </a:ext>
             </a:extLst>
           </p:cNvPr>
@@ -15018,7 +15977,7 @@
     </p:spTree>
     <p:extLst>
       <p:ext uri="{BB962C8B-B14F-4D97-AF65-F5344CB8AC3E}">
-        <p14:creationId xmlns:p14="http://schemas.microsoft.com/office/powerpoint/2010/main" val="1397617387"/>
+        <p14:creationId xmlns:p14="http://schemas.microsoft.com/office/powerpoint/2010/main" val="296340200"/>
       </p:ext>
     </p:extLst>
   </p:cSld>
@@ -15042,7 +16001,7 @@
           <p:cNvPr id="1" name="">
             <a:extLst xmlns:a="http://schemas.openxmlformats.org/drawingml/2006/main">
               <a:ext uri="{FF2B5EF4-FFF2-40B4-BE49-F238E27FC236}">
-                <a16:creationId xmlns:a16="http://schemas.microsoft.com/office/drawing/2014/main" id="{81CCDA9F-2740-401E-BD88-8E9188F383B4}"/>
+                <a16:creationId xmlns:a16="http://schemas.microsoft.com/office/drawing/2014/main" id="{E75E25C1-BE20-4402-803B-82F9A3A7223F}"/>
               </a:ext>
             </a:extLst>
           </p:cNvPr>
@@ -15077,7 +16036,7 @@
           <p:cNvPr id="2" name="">
             <a:extLst xmlns:a="http://schemas.openxmlformats.org/drawingml/2006/main">
               <a:ext uri="{FF2B5EF4-FFF2-40B4-BE49-F238E27FC236}">
-                <a16:creationId xmlns:a16="http://schemas.microsoft.com/office/drawing/2014/main" id="{EE793618-6B7F-48EE-AEBB-6E96F5F42014}"/>
+                <a16:creationId xmlns:a16="http://schemas.microsoft.com/office/drawing/2014/main" id="{E049A2B4-75F3-43D0-A5B9-FE80EB4D8764}"/>
               </a:ext>
             </a:extLst>
           </p:cNvPr>
@@ -15112,7 +16071,7 @@
           <p:cNvPr id="3" name="">
             <a:extLst xmlns:a="http://schemas.openxmlformats.org/drawingml/2006/main">
               <a:ext uri="{FF2B5EF4-FFF2-40B4-BE49-F238E27FC236}">
-                <a16:creationId xmlns:a16="http://schemas.microsoft.com/office/drawing/2014/main" id="{353CA299-96A7-4FB7-B70D-01EB1D672983}"/>
+                <a16:creationId xmlns:a16="http://schemas.microsoft.com/office/drawing/2014/main" id="{B10D623F-9B64-4D9B-9838-F14D6F71755A}"/>
               </a:ext>
             </a:extLst>
           </p:cNvPr>
@@ -15176,7 +16135,7 @@
           <p:cNvPr id="4" name="">
             <a:extLst xmlns:a="http://schemas.openxmlformats.org/drawingml/2006/main">
               <a:ext uri="{FF2B5EF4-FFF2-40B4-BE49-F238E27FC236}">
-                <a16:creationId xmlns:a16="http://schemas.microsoft.com/office/drawing/2014/main" id="{96C2CA7E-019E-4894-9926-CCCA0994161C}"/>
+                <a16:creationId xmlns:a16="http://schemas.microsoft.com/office/drawing/2014/main" id="{9C85459B-AB76-4C17-8421-2E2463A58014}"/>
               </a:ext>
             </a:extLst>
           </p:cNvPr>
@@ -15240,7 +16199,7 @@
           <p:cNvPr id="5" name="">
             <a:extLst xmlns:a="http://schemas.openxmlformats.org/drawingml/2006/main">
               <a:ext uri="{FF2B5EF4-FFF2-40B4-BE49-F238E27FC236}">
-                <a16:creationId xmlns:a16="http://schemas.microsoft.com/office/drawing/2014/main" id="{D2007E91-A464-44BD-A6E2-00DE4433BE8B}"/>
+                <a16:creationId xmlns:a16="http://schemas.microsoft.com/office/drawing/2014/main" id="{E54123CA-2549-4AA8-AA5C-3B262B5B903B}"/>
               </a:ext>
             </a:extLst>
           </p:cNvPr>
@@ -15304,7 +16263,7 @@
           <p:cNvPr id="6" name="">
             <a:extLst xmlns:a="http://schemas.openxmlformats.org/drawingml/2006/main">
               <a:ext uri="{FF2B5EF4-FFF2-40B4-BE49-F238E27FC236}">
-                <a16:creationId xmlns:a16="http://schemas.microsoft.com/office/drawing/2014/main" id="{FC6C5F07-02E8-4346-8E81-1BB2213C70D7}"/>
+                <a16:creationId xmlns:a16="http://schemas.microsoft.com/office/drawing/2014/main" id="{371CA56A-31A4-422A-82AF-EC379904B30B}"/>
               </a:ext>
             </a:extLst>
           </p:cNvPr>
@@ -15337,7 +16296,7 @@
           <p:cNvPr id="7" name="">
             <a:extLst xmlns:a="http://schemas.openxmlformats.org/drawingml/2006/main">
               <a:ext uri="{FF2B5EF4-FFF2-40B4-BE49-F238E27FC236}">
-                <a16:creationId xmlns:a16="http://schemas.microsoft.com/office/drawing/2014/main" id="{451F71AE-6CBA-4E80-B31E-F1D990272007}"/>
+                <a16:creationId xmlns:a16="http://schemas.microsoft.com/office/drawing/2014/main" id="{F122620D-2549-41EF-9BE5-B7036461AE12}"/>
               </a:ext>
             </a:extLst>
           </p:cNvPr>
@@ -15370,7 +16329,7 @@
           <p:cNvPr id="8" name="">
             <a:extLst xmlns:a="http://schemas.openxmlformats.org/drawingml/2006/main">
               <a:ext uri="{FF2B5EF4-FFF2-40B4-BE49-F238E27FC236}">
-                <a16:creationId xmlns:a16="http://schemas.microsoft.com/office/drawing/2014/main" id="{88507BCD-86F0-4BFF-83B1-5A92E7CCBABA}"/>
+                <a16:creationId xmlns:a16="http://schemas.microsoft.com/office/drawing/2014/main" id="{FA066D23-B70C-4D90-9EA4-232F66DE9F8F}"/>
               </a:ext>
             </a:extLst>
           </p:cNvPr>
@@ -15434,7 +16393,7 @@
           <p:cNvPr id="9" name="">
             <a:extLst xmlns:a="http://schemas.openxmlformats.org/drawingml/2006/main">
               <a:ext uri="{FF2B5EF4-FFF2-40B4-BE49-F238E27FC236}">
-                <a16:creationId xmlns:a16="http://schemas.microsoft.com/office/drawing/2014/main" id="{8B42B82C-3B83-4E3B-95D6-957BA4431AF6}"/>
+                <a16:creationId xmlns:a16="http://schemas.microsoft.com/office/drawing/2014/main" id="{3409A747-A921-4C14-9B5C-9125B9656D21}"/>
               </a:ext>
             </a:extLst>
           </p:cNvPr>
@@ -15469,7 +16428,7 @@
           <p:cNvPr id="10" name="">
             <a:extLst xmlns:a="http://schemas.openxmlformats.org/drawingml/2006/main">
               <a:ext uri="{FF2B5EF4-FFF2-40B4-BE49-F238E27FC236}">
-                <a16:creationId xmlns:a16="http://schemas.microsoft.com/office/drawing/2014/main" id="{37617B96-B590-4BFA-B97C-7E7817FF4844}"/>
+                <a16:creationId xmlns:a16="http://schemas.microsoft.com/office/drawing/2014/main" id="{9946DE64-00BC-41C8-8CBD-3F49F2799695}"/>
               </a:ext>
             </a:extLst>
           </p:cNvPr>
@@ -15533,7 +16492,7 @@
           <p:cNvPr id="11" name="">
             <a:extLst xmlns:a="http://schemas.openxmlformats.org/drawingml/2006/main">
               <a:ext uri="{FF2B5EF4-FFF2-40B4-BE49-F238E27FC236}">
-                <a16:creationId xmlns:a16="http://schemas.microsoft.com/office/drawing/2014/main" id="{A4EC4046-36DB-4292-80BA-AA9199E48FDC}"/>
+                <a16:creationId xmlns:a16="http://schemas.microsoft.com/office/drawing/2014/main" id="{2C5927C5-A3F9-4ACA-A7D6-A379939298D4}"/>
               </a:ext>
             </a:extLst>
           </p:cNvPr>
@@ -15568,7 +16527,7 @@
           <p:cNvPr id="12" name="">
             <a:extLst xmlns:a="http://schemas.openxmlformats.org/drawingml/2006/main">
               <a:ext uri="{FF2B5EF4-FFF2-40B4-BE49-F238E27FC236}">
-                <a16:creationId xmlns:a16="http://schemas.microsoft.com/office/drawing/2014/main" id="{CD208FF1-CE16-487E-BFB1-81258653633C}"/>
+                <a16:creationId xmlns:a16="http://schemas.microsoft.com/office/drawing/2014/main" id="{B98A12E0-D517-4AEF-8B61-2F7582906DE6}"/>
               </a:ext>
             </a:extLst>
           </p:cNvPr>
@@ -15632,7 +16591,7 @@
           <p:cNvPr id="13" name="">
             <a:extLst xmlns:a="http://schemas.openxmlformats.org/drawingml/2006/main">
               <a:ext uri="{FF2B5EF4-FFF2-40B4-BE49-F238E27FC236}">
-                <a16:creationId xmlns:a16="http://schemas.microsoft.com/office/drawing/2014/main" id="{95E86F0E-F360-44D0-8579-80A63A5BC354}"/>
+                <a16:creationId xmlns:a16="http://schemas.microsoft.com/office/drawing/2014/main" id="{E466BBFD-4364-4D93-A895-D16A28808594}"/>
               </a:ext>
             </a:extLst>
           </p:cNvPr>
@@ -15667,7 +16626,7 @@
           <p:cNvPr id="14" name="">
             <a:extLst xmlns:a="http://schemas.openxmlformats.org/drawingml/2006/main">
               <a:ext uri="{FF2B5EF4-FFF2-40B4-BE49-F238E27FC236}">
-                <a16:creationId xmlns:a16="http://schemas.microsoft.com/office/drawing/2014/main" id="{D3FDD0CF-6E89-46F7-989D-F9ECB4418AAD}"/>
+                <a16:creationId xmlns:a16="http://schemas.microsoft.com/office/drawing/2014/main" id="{9BF5898E-3525-49D8-8CD9-34D9141851F6}"/>
               </a:ext>
             </a:extLst>
           </p:cNvPr>
@@ -15731,7 +16690,7 @@
           <p:cNvPr id="15" name="">
             <a:extLst xmlns:a="http://schemas.openxmlformats.org/drawingml/2006/main">
               <a:ext uri="{FF2B5EF4-FFF2-40B4-BE49-F238E27FC236}">
-                <a16:creationId xmlns:a16="http://schemas.microsoft.com/office/drawing/2014/main" id="{654E9AA4-6881-4DCF-A688-B53737A82385}"/>
+                <a16:creationId xmlns:a16="http://schemas.microsoft.com/office/drawing/2014/main" id="{32AE3B31-9FBE-491E-8CD5-0AE70AEAF303}"/>
               </a:ext>
             </a:extLst>
           </p:cNvPr>
@@ -15766,7 +16725,7 @@
           <p:cNvPr id="16" name="">
             <a:extLst xmlns:a="http://schemas.openxmlformats.org/drawingml/2006/main">
               <a:ext uri="{FF2B5EF4-FFF2-40B4-BE49-F238E27FC236}">
-                <a16:creationId xmlns:a16="http://schemas.microsoft.com/office/drawing/2014/main" id="{01C263B5-8258-4261-870A-839F59D61075}"/>
+                <a16:creationId xmlns:a16="http://schemas.microsoft.com/office/drawing/2014/main" id="{5AAB2F19-1A01-478F-9671-FBA2C1D6BEC1}"/>
               </a:ext>
             </a:extLst>
           </p:cNvPr>
@@ -15830,7 +16789,7 @@
           <p:cNvPr id="17" name="">
             <a:extLst xmlns:a="http://schemas.openxmlformats.org/drawingml/2006/main">
               <a:ext uri="{FF2B5EF4-FFF2-40B4-BE49-F238E27FC236}">
-                <a16:creationId xmlns:a16="http://schemas.microsoft.com/office/drawing/2014/main" id="{CAC4340D-73FB-4117-9358-631CD79FDDE4}"/>
+                <a16:creationId xmlns:a16="http://schemas.microsoft.com/office/drawing/2014/main" id="{05AD6398-A3ED-4A8E-BB01-D4C711B91F9A}"/>
               </a:ext>
             </a:extLst>
           </p:cNvPr>
@@ -15863,7 +16822,7 @@
           <p:cNvPr id="18" name="">
             <a:extLst xmlns:a="http://schemas.openxmlformats.org/drawingml/2006/main">
               <a:ext uri="{FF2B5EF4-FFF2-40B4-BE49-F238E27FC236}">
-                <a16:creationId xmlns:a16="http://schemas.microsoft.com/office/drawing/2014/main" id="{D1F2504A-1772-48CF-AE89-3A9A62833B52}"/>
+                <a16:creationId xmlns:a16="http://schemas.microsoft.com/office/drawing/2014/main" id="{3D758362-DC73-4CBB-BF86-849E4DBDC732}"/>
               </a:ext>
             </a:extLst>
           </p:cNvPr>
@@ -15896,7 +16855,7 @@
           <p:cNvPr id="19" name="">
             <a:extLst xmlns:a="http://schemas.openxmlformats.org/drawingml/2006/main">
               <a:ext uri="{FF2B5EF4-FFF2-40B4-BE49-F238E27FC236}">
-                <a16:creationId xmlns:a16="http://schemas.microsoft.com/office/drawing/2014/main" id="{D8B5535C-6A2C-46DC-BF46-DB178AF746B0}"/>
+                <a16:creationId xmlns:a16="http://schemas.microsoft.com/office/drawing/2014/main" id="{7CDA88E2-D0AF-4F64-B02F-0D36ECA6311A}"/>
               </a:ext>
             </a:extLst>
           </p:cNvPr>
@@ -15960,7 +16919,7 @@
           <p:cNvPr id="20" name="">
             <a:extLst xmlns:a="http://schemas.openxmlformats.org/drawingml/2006/main">
               <a:ext uri="{FF2B5EF4-FFF2-40B4-BE49-F238E27FC236}">
-                <a16:creationId xmlns:a16="http://schemas.microsoft.com/office/drawing/2014/main" id="{BF3B1CE7-11AA-49E5-88CE-76316D730283}"/>
+                <a16:creationId xmlns:a16="http://schemas.microsoft.com/office/drawing/2014/main" id="{FA8816EE-D538-4507-BF56-D6D2397C7A54}"/>
               </a:ext>
             </a:extLst>
           </p:cNvPr>
@@ -15995,7 +16954,7 @@
           <p:cNvPr id="21" name="">
             <a:extLst xmlns:a="http://schemas.openxmlformats.org/drawingml/2006/main">
               <a:ext uri="{FF2B5EF4-FFF2-40B4-BE49-F238E27FC236}">
-                <a16:creationId xmlns:a16="http://schemas.microsoft.com/office/drawing/2014/main" id="{ED6AD8D7-2FE0-4CE6-A8FF-19246380238E}"/>
+                <a16:creationId xmlns:a16="http://schemas.microsoft.com/office/drawing/2014/main" id="{13FA9E1C-36B7-460D-86AC-B6FD4387C251}"/>
               </a:ext>
             </a:extLst>
           </p:cNvPr>
@@ -16059,7 +17018,7 @@
           <p:cNvPr id="22" name="">
             <a:extLst xmlns:a="http://schemas.openxmlformats.org/drawingml/2006/main">
               <a:ext uri="{FF2B5EF4-FFF2-40B4-BE49-F238E27FC236}">
-                <a16:creationId xmlns:a16="http://schemas.microsoft.com/office/drawing/2014/main" id="{C27B1D37-9F97-4E68-845B-0DE3DA4D7DAF}"/>
+                <a16:creationId xmlns:a16="http://schemas.microsoft.com/office/drawing/2014/main" id="{0AB55962-5433-4742-A7C3-E50D752F32F8}"/>
               </a:ext>
             </a:extLst>
           </p:cNvPr>
@@ -16094,7 +17053,7 @@
           <p:cNvPr id="23" name="">
             <a:extLst xmlns:a="http://schemas.openxmlformats.org/drawingml/2006/main">
               <a:ext uri="{FF2B5EF4-FFF2-40B4-BE49-F238E27FC236}">
-                <a16:creationId xmlns:a16="http://schemas.microsoft.com/office/drawing/2014/main" id="{5B1DBC80-4E96-4A33-A2B9-AA844E6DCFE5}"/>
+                <a16:creationId xmlns:a16="http://schemas.microsoft.com/office/drawing/2014/main" id="{D21FBF24-0BC5-422C-9E7A-6870FEE050C6}"/>
               </a:ext>
             </a:extLst>
           </p:cNvPr>
@@ -16158,7 +17117,7 @@
           <p:cNvPr id="24" name="">
             <a:extLst xmlns:a="http://schemas.openxmlformats.org/drawingml/2006/main">
               <a:ext uri="{FF2B5EF4-FFF2-40B4-BE49-F238E27FC236}">
-                <a16:creationId xmlns:a16="http://schemas.microsoft.com/office/drawing/2014/main" id="{9CF66E17-2DA8-4503-B740-D2D3C8AFFB02}"/>
+                <a16:creationId xmlns:a16="http://schemas.microsoft.com/office/drawing/2014/main" id="{12E8221B-776F-416C-9726-73A493C310F7}"/>
               </a:ext>
             </a:extLst>
           </p:cNvPr>
@@ -16193,7 +17152,7 @@
           <p:cNvPr id="25" name="">
             <a:extLst xmlns:a="http://schemas.openxmlformats.org/drawingml/2006/main">
               <a:ext uri="{FF2B5EF4-FFF2-40B4-BE49-F238E27FC236}">
-                <a16:creationId xmlns:a16="http://schemas.microsoft.com/office/drawing/2014/main" id="{6E828412-27D1-4820-B787-BC6C7FF1CEEA}"/>
+                <a16:creationId xmlns:a16="http://schemas.microsoft.com/office/drawing/2014/main" id="{A8D2B67A-1321-476F-8D51-06A3DE1B8843}"/>
               </a:ext>
             </a:extLst>
           </p:cNvPr>
@@ -16257,7 +17216,7 @@
           <p:cNvPr id="26" name="">
             <a:extLst xmlns:a="http://schemas.openxmlformats.org/drawingml/2006/main">
               <a:ext uri="{FF2B5EF4-FFF2-40B4-BE49-F238E27FC236}">
-                <a16:creationId xmlns:a16="http://schemas.microsoft.com/office/drawing/2014/main" id="{55030D94-85E9-480C-85AF-EC392CD74F29}"/>
+                <a16:creationId xmlns:a16="http://schemas.microsoft.com/office/drawing/2014/main" id="{7DBFF62E-FD10-46FB-968C-CBF28F0F6563}"/>
               </a:ext>
             </a:extLst>
           </p:cNvPr>
@@ -16292,7 +17251,7 @@
           <p:cNvPr id="27" name="">
             <a:extLst xmlns:a="http://schemas.openxmlformats.org/drawingml/2006/main">
               <a:ext uri="{FF2B5EF4-FFF2-40B4-BE49-F238E27FC236}">
-                <a16:creationId xmlns:a16="http://schemas.microsoft.com/office/drawing/2014/main" id="{D4FBC1BE-9628-411C-A9B5-27DB9C50104E}"/>
+                <a16:creationId xmlns:a16="http://schemas.microsoft.com/office/drawing/2014/main" id="{1EC0C59A-CA77-4E4F-85BE-E487B46DCA7D}"/>
               </a:ext>
             </a:extLst>
           </p:cNvPr>
@@ -16356,7 +17315,7 @@
           <p:cNvPr id="28" name="">
             <a:extLst xmlns:a="http://schemas.openxmlformats.org/drawingml/2006/main">
               <a:ext uri="{FF2B5EF4-FFF2-40B4-BE49-F238E27FC236}">
-                <a16:creationId xmlns:a16="http://schemas.microsoft.com/office/drawing/2014/main" id="{5181D19E-83CC-4372-A028-C10C7801C20E}"/>
+                <a16:creationId xmlns:a16="http://schemas.microsoft.com/office/drawing/2014/main" id="{F29E9196-2373-406D-85FC-BB38004A4ED3}"/>
               </a:ext>
             </a:extLst>
           </p:cNvPr>
@@ -16389,7 +17348,7 @@
           <p:cNvPr id="29" name="">
             <a:extLst xmlns:a="http://schemas.openxmlformats.org/drawingml/2006/main">
               <a:ext uri="{FF2B5EF4-FFF2-40B4-BE49-F238E27FC236}">
-                <a16:creationId xmlns:a16="http://schemas.microsoft.com/office/drawing/2014/main" id="{FB59407C-C3C6-4C32-8F53-61AEF9A8A133}"/>
+                <a16:creationId xmlns:a16="http://schemas.microsoft.com/office/drawing/2014/main" id="{DB5E982A-2E8C-4ACA-9014-EC5993F404EB}"/>
               </a:ext>
             </a:extLst>
           </p:cNvPr>
@@ -16422,7 +17381,7 @@
           <p:cNvPr id="30" name="">
             <a:extLst xmlns:a="http://schemas.openxmlformats.org/drawingml/2006/main">
               <a:ext uri="{FF2B5EF4-FFF2-40B4-BE49-F238E27FC236}">
-                <a16:creationId xmlns:a16="http://schemas.microsoft.com/office/drawing/2014/main" id="{38666DDA-DF6F-4750-A59D-2FDAEF1CC634}"/>
+                <a16:creationId xmlns:a16="http://schemas.microsoft.com/office/drawing/2014/main" id="{B6E1ED9C-49F8-4669-A7BF-22A46A98CE39}"/>
               </a:ext>
             </a:extLst>
           </p:cNvPr>
@@ -16486,7 +17445,7 @@
           <p:cNvPr id="31" name="">
             <a:extLst xmlns:a="http://schemas.openxmlformats.org/drawingml/2006/main">
               <a:ext uri="{FF2B5EF4-FFF2-40B4-BE49-F238E27FC236}">
-                <a16:creationId xmlns:a16="http://schemas.microsoft.com/office/drawing/2014/main" id="{DB6732FF-7F54-4745-9A9B-DA4CF12D183B}"/>
+                <a16:creationId xmlns:a16="http://schemas.microsoft.com/office/drawing/2014/main" id="{FE255B3A-6F4F-4A5C-A01E-EE73C4FC18B8}"/>
               </a:ext>
             </a:extLst>
           </p:cNvPr>
@@ -16521,7 +17480,7 @@
           <p:cNvPr id="32" name="">
             <a:extLst xmlns:a="http://schemas.openxmlformats.org/drawingml/2006/main">
               <a:ext uri="{FF2B5EF4-FFF2-40B4-BE49-F238E27FC236}">
-                <a16:creationId xmlns:a16="http://schemas.microsoft.com/office/drawing/2014/main" id="{E6F30BBE-F958-4B6C-B145-29A681BBA791}"/>
+                <a16:creationId xmlns:a16="http://schemas.microsoft.com/office/drawing/2014/main" id="{48470B88-B3C0-42DB-99F0-346C1C858C5D}"/>
               </a:ext>
             </a:extLst>
           </p:cNvPr>
@@ -16585,7 +17544,7 @@
           <p:cNvPr id="33" name="">
             <a:extLst xmlns:a="http://schemas.openxmlformats.org/drawingml/2006/main">
               <a:ext uri="{FF2B5EF4-FFF2-40B4-BE49-F238E27FC236}">
-                <a16:creationId xmlns:a16="http://schemas.microsoft.com/office/drawing/2014/main" id="{56762498-CE78-420A-A62F-888A9EFADE76}"/>
+                <a16:creationId xmlns:a16="http://schemas.microsoft.com/office/drawing/2014/main" id="{6301B3EE-B71E-4C09-A207-3D06953D3587}"/>
               </a:ext>
             </a:extLst>
           </p:cNvPr>
@@ -16620,7 +17579,7 @@
           <p:cNvPr id="34" name="">
             <a:extLst xmlns:a="http://schemas.openxmlformats.org/drawingml/2006/main">
               <a:ext uri="{FF2B5EF4-FFF2-40B4-BE49-F238E27FC236}">
-                <a16:creationId xmlns:a16="http://schemas.microsoft.com/office/drawing/2014/main" id="{DFEAE74A-AE9E-4A56-B4B8-C63E9A812C73}"/>
+                <a16:creationId xmlns:a16="http://schemas.microsoft.com/office/drawing/2014/main" id="{458AE7C9-6DD3-47AE-976B-3AC5B36AB406}"/>
               </a:ext>
             </a:extLst>
           </p:cNvPr>
@@ -16684,7 +17643,7 @@
           <p:cNvPr id="35" name="">
             <a:extLst xmlns:a="http://schemas.openxmlformats.org/drawingml/2006/main">
               <a:ext uri="{FF2B5EF4-FFF2-40B4-BE49-F238E27FC236}">
-                <a16:creationId xmlns:a16="http://schemas.microsoft.com/office/drawing/2014/main" id="{AE985C1F-D6A5-43C5-A199-4B2BEBC103B1}"/>
+                <a16:creationId xmlns:a16="http://schemas.microsoft.com/office/drawing/2014/main" id="{227393E3-BB71-4BA9-AD5A-C263320F1071}"/>
               </a:ext>
             </a:extLst>
           </p:cNvPr>
@@ -16719,7 +17678,7 @@
           <p:cNvPr id="36" name="">
             <a:extLst xmlns:a="http://schemas.openxmlformats.org/drawingml/2006/main">
               <a:ext uri="{FF2B5EF4-FFF2-40B4-BE49-F238E27FC236}">
-                <a16:creationId xmlns:a16="http://schemas.microsoft.com/office/drawing/2014/main" id="{0E09E4EF-F13A-450C-A405-8E93E30CC32E}"/>
+                <a16:creationId xmlns:a16="http://schemas.microsoft.com/office/drawing/2014/main" id="{5358F83C-A49A-42F2-B0FA-806C1BEAD0FB}"/>
               </a:ext>
             </a:extLst>
           </p:cNvPr>
@@ -16783,7 +17742,7 @@
           <p:cNvPr id="37" name="">
             <a:extLst xmlns:a="http://schemas.openxmlformats.org/drawingml/2006/main">
               <a:ext uri="{FF2B5EF4-FFF2-40B4-BE49-F238E27FC236}">
-                <a16:creationId xmlns:a16="http://schemas.microsoft.com/office/drawing/2014/main" id="{4CFF242E-E936-4ACE-8C1B-C7FB2D89A6BF}"/>
+                <a16:creationId xmlns:a16="http://schemas.microsoft.com/office/drawing/2014/main" id="{B7BA61D4-0458-4473-96A8-135C095EAFAC}"/>
               </a:ext>
             </a:extLst>
           </p:cNvPr>
@@ -16818,7 +17777,7 @@
           <p:cNvPr id="38" name="">
             <a:extLst xmlns:a="http://schemas.openxmlformats.org/drawingml/2006/main">
               <a:ext uri="{FF2B5EF4-FFF2-40B4-BE49-F238E27FC236}">
-                <a16:creationId xmlns:a16="http://schemas.microsoft.com/office/drawing/2014/main" id="{17031D05-9019-48B8-9114-293F5AB74127}"/>
+                <a16:creationId xmlns:a16="http://schemas.microsoft.com/office/drawing/2014/main" id="{7ACF3963-FE10-48CF-9184-4CF31FB8AEAF}"/>
               </a:ext>
             </a:extLst>
           </p:cNvPr>
@@ -16882,7 +17841,7 @@
           <p:cNvPr id="39" name="">
             <a:extLst xmlns:a="http://schemas.openxmlformats.org/drawingml/2006/main">
               <a:ext uri="{FF2B5EF4-FFF2-40B4-BE49-F238E27FC236}">
-                <a16:creationId xmlns:a16="http://schemas.microsoft.com/office/drawing/2014/main" id="{1EF777A1-C8D4-44AF-969C-5B9B4106E5D8}"/>
+                <a16:creationId xmlns:a16="http://schemas.microsoft.com/office/drawing/2014/main" id="{DC49FAE9-ECFE-4A43-BDBA-FC01D2B4F311}"/>
               </a:ext>
             </a:extLst>
           </p:cNvPr>
@@ -16917,7 +17876,7 @@
           <p:cNvPr id="40" name="">
             <a:extLst xmlns:a="http://schemas.openxmlformats.org/drawingml/2006/main">
               <a:ext uri="{FF2B5EF4-FFF2-40B4-BE49-F238E27FC236}">
-                <a16:creationId xmlns:a16="http://schemas.microsoft.com/office/drawing/2014/main" id="{BF601665-8711-4E4A-8C7F-133E391D68F1}"/>
+                <a16:creationId xmlns:a16="http://schemas.microsoft.com/office/drawing/2014/main" id="{0435DC26-CA7A-4D83-824B-BAC13BDA3117}"/>
               </a:ext>
             </a:extLst>
           </p:cNvPr>
@@ -16981,7 +17940,7 @@
           <p:cNvPr id="41" name="">
             <a:extLst xmlns:a="http://schemas.openxmlformats.org/drawingml/2006/main">
               <a:ext uri="{FF2B5EF4-FFF2-40B4-BE49-F238E27FC236}">
-                <a16:creationId xmlns:a16="http://schemas.microsoft.com/office/drawing/2014/main" id="{03BEF246-12E8-45EF-B595-ED6FE66B5BBC}"/>
+                <a16:creationId xmlns:a16="http://schemas.microsoft.com/office/drawing/2014/main" id="{662C2D60-8DB2-4E6E-B116-B484389FD8CD}"/>
               </a:ext>
             </a:extLst>
           </p:cNvPr>
@@ -17014,7 +17973,7 @@
           <p:cNvPr id="42" name="">
             <a:extLst xmlns:a="http://schemas.openxmlformats.org/drawingml/2006/main">
               <a:ext uri="{FF2B5EF4-FFF2-40B4-BE49-F238E27FC236}">
-                <a16:creationId xmlns:a16="http://schemas.microsoft.com/office/drawing/2014/main" id="{A8C4EAAA-D6D8-44D6-AFF7-D7A363EB2001}"/>
+                <a16:creationId xmlns:a16="http://schemas.microsoft.com/office/drawing/2014/main" id="{892C1025-6722-4AFF-860B-ADC50A5A9FC4}"/>
               </a:ext>
             </a:extLst>
           </p:cNvPr>
@@ -17078,7 +18037,7 @@
           <p:cNvPr id="43" name="">
             <a:extLst xmlns:a="http://schemas.openxmlformats.org/drawingml/2006/main">
               <a:ext uri="{FF2B5EF4-FFF2-40B4-BE49-F238E27FC236}">
-                <a16:creationId xmlns:a16="http://schemas.microsoft.com/office/drawing/2014/main" id="{FC17F2AF-4DE7-4050-9BBA-1DCD7C434EB5}"/>
+                <a16:creationId xmlns:a16="http://schemas.microsoft.com/office/drawing/2014/main" id="{25FF7539-EC3A-4FAF-AA55-37084080D9BF}"/>
               </a:ext>
             </a:extLst>
           </p:cNvPr>
@@ -17113,7 +18072,7 @@
           <p:cNvPr id="44" name="">
             <a:extLst xmlns:a="http://schemas.openxmlformats.org/drawingml/2006/main">
               <a:ext uri="{FF2B5EF4-FFF2-40B4-BE49-F238E27FC236}">
-                <a16:creationId xmlns:a16="http://schemas.microsoft.com/office/drawing/2014/main" id="{BA75191F-AEF2-4ACE-81C1-62A677581458}"/>
+                <a16:creationId xmlns:a16="http://schemas.microsoft.com/office/drawing/2014/main" id="{8D4849B4-5D35-4BB1-939F-CC4F5D11474B}"/>
               </a:ext>
             </a:extLst>
           </p:cNvPr>
@@ -17177,7 +18136,7 @@
           <p:cNvPr id="45" name="">
             <a:extLst xmlns:a="http://schemas.openxmlformats.org/drawingml/2006/main">
               <a:ext uri="{FF2B5EF4-FFF2-40B4-BE49-F238E27FC236}">
-                <a16:creationId xmlns:a16="http://schemas.microsoft.com/office/drawing/2014/main" id="{F9DFAED9-4D64-46CC-801C-2DE5CBACBEBE}"/>
+                <a16:creationId xmlns:a16="http://schemas.microsoft.com/office/drawing/2014/main" id="{C826A633-17CD-4A68-95F0-B43945A0026E}"/>
               </a:ext>
             </a:extLst>
           </p:cNvPr>
@@ -17239,7 +18198,7 @@
     </p:spTree>
     <p:extLst>
       <p:ext uri="{BB962C8B-B14F-4D97-AF65-F5344CB8AC3E}">
-        <p14:creationId xmlns:p14="http://schemas.microsoft.com/office/powerpoint/2010/main" val="1296121087"/>
+        <p14:creationId xmlns:p14="http://schemas.microsoft.com/office/powerpoint/2010/main" val="715062414"/>
       </p:ext>
     </p:extLst>
   </p:cSld>
@@ -17263,7 +18222,7 @@
           <p:cNvPr id="1" name="">
             <a:extLst xmlns:a="http://schemas.openxmlformats.org/drawingml/2006/main">
               <a:ext uri="{FF2B5EF4-FFF2-40B4-BE49-F238E27FC236}">
-                <a16:creationId xmlns:a16="http://schemas.microsoft.com/office/drawing/2014/main" id="{F7D0F86A-4B77-40E4-9B7F-08CDBB030925}"/>
+                <a16:creationId xmlns:a16="http://schemas.microsoft.com/office/drawing/2014/main" id="{F5AD7F5C-FE07-4935-9FB9-EB90B19468C6}"/>
               </a:ext>
             </a:extLst>
           </p:cNvPr>
@@ -17298,7 +18257,7 @@
           <p:cNvPr id="2" name="">
             <a:extLst xmlns:a="http://schemas.openxmlformats.org/drawingml/2006/main">
               <a:ext uri="{FF2B5EF4-FFF2-40B4-BE49-F238E27FC236}">
-                <a16:creationId xmlns:a16="http://schemas.microsoft.com/office/drawing/2014/main" id="{62C5A2B3-5448-40C9-90F2-E18C474DE98C}"/>
+                <a16:creationId xmlns:a16="http://schemas.microsoft.com/office/drawing/2014/main" id="{C81BA676-8BB1-4C2C-8040-D3447E9F99C2}"/>
               </a:ext>
             </a:extLst>
           </p:cNvPr>
@@ -17333,7 +18292,7 @@
           <p:cNvPr id="3" name="">
             <a:extLst xmlns:a="http://schemas.openxmlformats.org/drawingml/2006/main">
               <a:ext uri="{FF2B5EF4-FFF2-40B4-BE49-F238E27FC236}">
-                <a16:creationId xmlns:a16="http://schemas.microsoft.com/office/drawing/2014/main" id="{701395CE-59CF-4B08-9232-70839A28CD92}"/>
+                <a16:creationId xmlns:a16="http://schemas.microsoft.com/office/drawing/2014/main" id="{9EDE3C4C-365F-4F3C-9CE5-1C458FFC0DC4}"/>
               </a:ext>
             </a:extLst>
           </p:cNvPr>
@@ -17397,7 +18356,7 @@
           <p:cNvPr id="4" name="">
             <a:extLst xmlns:a="http://schemas.openxmlformats.org/drawingml/2006/main">
               <a:ext uri="{FF2B5EF4-FFF2-40B4-BE49-F238E27FC236}">
-                <a16:creationId xmlns:a16="http://schemas.microsoft.com/office/drawing/2014/main" id="{D3984F72-B5A0-4AEC-BBE1-E02D5EA40CCE}"/>
+                <a16:creationId xmlns:a16="http://schemas.microsoft.com/office/drawing/2014/main" id="{2E1B7EA3-4E88-4841-8ED8-9CF9DE8B3830}"/>
               </a:ext>
             </a:extLst>
           </p:cNvPr>
@@ -17461,7 +18420,7 @@
           <p:cNvPr id="5" name="">
             <a:extLst xmlns:a="http://schemas.openxmlformats.org/drawingml/2006/main">
               <a:ext uri="{FF2B5EF4-FFF2-40B4-BE49-F238E27FC236}">
-                <a16:creationId xmlns:a16="http://schemas.microsoft.com/office/drawing/2014/main" id="{A4187830-9134-4620-9F01-026D869208C5}"/>
+                <a16:creationId xmlns:a16="http://schemas.microsoft.com/office/drawing/2014/main" id="{9B17A3D8-FD67-41C0-BE98-6BA2E58D5EE3}"/>
               </a:ext>
             </a:extLst>
           </p:cNvPr>
@@ -17525,7 +18484,7 @@
           <p:cNvPr id="6" name="">
             <a:extLst xmlns:a="http://schemas.openxmlformats.org/drawingml/2006/main">
               <a:ext uri="{FF2B5EF4-FFF2-40B4-BE49-F238E27FC236}">
-                <a16:creationId xmlns:a16="http://schemas.microsoft.com/office/drawing/2014/main" id="{9199EFCC-DBB0-4724-8D87-B665345BB3BE}"/>
+                <a16:creationId xmlns:a16="http://schemas.microsoft.com/office/drawing/2014/main" id="{F5113CBA-87F2-4AE7-BDD5-42EAEE059300}"/>
               </a:ext>
             </a:extLst>
           </p:cNvPr>
@@ -17558,7 +18517,7 @@
           <p:cNvPr id="7" name="">
             <a:extLst xmlns:a="http://schemas.openxmlformats.org/drawingml/2006/main">
               <a:ext uri="{FF2B5EF4-FFF2-40B4-BE49-F238E27FC236}">
-                <a16:creationId xmlns:a16="http://schemas.microsoft.com/office/drawing/2014/main" id="{1618D0D5-53F3-4634-B4FC-236CB13EAE9A}"/>
+                <a16:creationId xmlns:a16="http://schemas.microsoft.com/office/drawing/2014/main" id="{AAADE2DB-BF3C-4E5D-BED0-E0C504939ACF}"/>
               </a:ext>
             </a:extLst>
           </p:cNvPr>
@@ -17622,7 +18581,7 @@
           <p:cNvPr id="8" name="">
             <a:extLst xmlns:a="http://schemas.openxmlformats.org/drawingml/2006/main">
               <a:ext uri="{FF2B5EF4-FFF2-40B4-BE49-F238E27FC236}">
-                <a16:creationId xmlns:a16="http://schemas.microsoft.com/office/drawing/2014/main" id="{9AE404C3-FB12-4856-AFB9-E043B5B723EE}"/>
+                <a16:creationId xmlns:a16="http://schemas.microsoft.com/office/drawing/2014/main" id="{25C40173-9D97-4544-A088-B238423257C2}"/>
               </a:ext>
             </a:extLst>
           </p:cNvPr>
@@ -17655,7 +18614,7 @@
           <p:cNvPr id="9" name="">
             <a:extLst xmlns:a="http://schemas.openxmlformats.org/drawingml/2006/main">
               <a:ext uri="{FF2B5EF4-FFF2-40B4-BE49-F238E27FC236}">
-                <a16:creationId xmlns:a16="http://schemas.microsoft.com/office/drawing/2014/main" id="{6BE6CBCC-F12F-462A-8705-6356B5115A81}"/>
+                <a16:creationId xmlns:a16="http://schemas.microsoft.com/office/drawing/2014/main" id="{D1E84ECD-A526-4C0F-B797-34CD34BB1FD1}"/>
               </a:ext>
             </a:extLst>
           </p:cNvPr>
@@ -17719,7 +18678,7 @@
           <p:cNvPr id="10" name="">
             <a:extLst xmlns:a="http://schemas.openxmlformats.org/drawingml/2006/main">
               <a:ext uri="{FF2B5EF4-FFF2-40B4-BE49-F238E27FC236}">
-                <a16:creationId xmlns:a16="http://schemas.microsoft.com/office/drawing/2014/main" id="{9D5B4EE3-4025-40E4-A465-36E9FEF2F478}"/>
+                <a16:creationId xmlns:a16="http://schemas.microsoft.com/office/drawing/2014/main" id="{B9D0C8C1-F60F-4AA2-BBBA-455D918CF901}"/>
               </a:ext>
             </a:extLst>
           </p:cNvPr>
@@ -17783,7 +18742,7 @@
           <p:cNvPr id="11" name="">
             <a:extLst xmlns:a="http://schemas.openxmlformats.org/drawingml/2006/main">
               <a:ext uri="{FF2B5EF4-FFF2-40B4-BE49-F238E27FC236}">
-                <a16:creationId xmlns:a16="http://schemas.microsoft.com/office/drawing/2014/main" id="{57522929-3058-4182-80F6-C95D65A2078A}"/>
+                <a16:creationId xmlns:a16="http://schemas.microsoft.com/office/drawing/2014/main" id="{2EF321F7-315A-4A37-84C0-C01C8E55F4C8}"/>
               </a:ext>
             </a:extLst>
           </p:cNvPr>
@@ -17816,7 +18775,7 @@
           <p:cNvPr id="12" name="">
             <a:extLst xmlns:a="http://schemas.openxmlformats.org/drawingml/2006/main">
               <a:ext uri="{FF2B5EF4-FFF2-40B4-BE49-F238E27FC236}">
-                <a16:creationId xmlns:a16="http://schemas.microsoft.com/office/drawing/2014/main" id="{A9DAD4C6-42A9-4711-930C-44BF53CA3DAB}"/>
+                <a16:creationId xmlns:a16="http://schemas.microsoft.com/office/drawing/2014/main" id="{B0EB9B42-A8C1-422D-8EF9-ABC03A3A9674}"/>
               </a:ext>
             </a:extLst>
           </p:cNvPr>
@@ -17880,7 +18839,7 @@
           <p:cNvPr id="13" name="">
             <a:extLst xmlns:a="http://schemas.openxmlformats.org/drawingml/2006/main">
               <a:ext uri="{FF2B5EF4-FFF2-40B4-BE49-F238E27FC236}">
-                <a16:creationId xmlns:a16="http://schemas.microsoft.com/office/drawing/2014/main" id="{6BAA8BA5-8B91-4908-A346-AEB6A6D3B73F}"/>
+                <a16:creationId xmlns:a16="http://schemas.microsoft.com/office/drawing/2014/main" id="{170B7AE5-F869-4D68-8404-4035B3A287F7}"/>
               </a:ext>
             </a:extLst>
           </p:cNvPr>
@@ -17944,7 +18903,7 @@
           <p:cNvPr id="14" name="">
             <a:extLst xmlns:a="http://schemas.openxmlformats.org/drawingml/2006/main">
               <a:ext uri="{FF2B5EF4-FFF2-40B4-BE49-F238E27FC236}">
-                <a16:creationId xmlns:a16="http://schemas.microsoft.com/office/drawing/2014/main" id="{ACE87079-A1AC-4B1B-8C0F-72B7228E34A4}"/>
+                <a16:creationId xmlns:a16="http://schemas.microsoft.com/office/drawing/2014/main" id="{51200D25-2E38-4B0C-8A94-90B9A8063205}"/>
               </a:ext>
             </a:extLst>
           </p:cNvPr>
@@ -17977,7 +18936,7 @@
           <p:cNvPr id="15" name="">
             <a:extLst xmlns:a="http://schemas.openxmlformats.org/drawingml/2006/main">
               <a:ext uri="{FF2B5EF4-FFF2-40B4-BE49-F238E27FC236}">
-                <a16:creationId xmlns:a16="http://schemas.microsoft.com/office/drawing/2014/main" id="{896A0DB0-6CE6-40AD-A8B3-A8EA729CE95F}"/>
+                <a16:creationId xmlns:a16="http://schemas.microsoft.com/office/drawing/2014/main" id="{55EA2AC8-59B8-4883-8256-5DF6547AEDFD}"/>
               </a:ext>
             </a:extLst>
           </p:cNvPr>
@@ -18041,7 +19000,7 @@
           <p:cNvPr id="16" name="">
             <a:extLst xmlns:a="http://schemas.openxmlformats.org/drawingml/2006/main">
               <a:ext uri="{FF2B5EF4-FFF2-40B4-BE49-F238E27FC236}">
-                <a16:creationId xmlns:a16="http://schemas.microsoft.com/office/drawing/2014/main" id="{8813EE32-813B-41E8-AA8B-CE01847EDD3E}"/>
+                <a16:creationId xmlns:a16="http://schemas.microsoft.com/office/drawing/2014/main" id="{60BD1D32-7D82-4831-BFAB-F850E35D448B}"/>
               </a:ext>
             </a:extLst>
           </p:cNvPr>
@@ -18105,7 +19064,7 @@
           <p:cNvPr id="17" name="">
             <a:extLst xmlns:a="http://schemas.openxmlformats.org/drawingml/2006/main">
               <a:ext uri="{FF2B5EF4-FFF2-40B4-BE49-F238E27FC236}">
-                <a16:creationId xmlns:a16="http://schemas.microsoft.com/office/drawing/2014/main" id="{88F29834-C8DE-4820-B164-73BADA8C7185}"/>
+                <a16:creationId xmlns:a16="http://schemas.microsoft.com/office/drawing/2014/main" id="{225ED50F-87F4-419D-9E9D-30AE2CC0625E}"/>
               </a:ext>
             </a:extLst>
           </p:cNvPr>
@@ -18138,7 +19097,7 @@
           <p:cNvPr id="18" name="">
             <a:extLst xmlns:a="http://schemas.openxmlformats.org/drawingml/2006/main">
               <a:ext uri="{FF2B5EF4-FFF2-40B4-BE49-F238E27FC236}">
-                <a16:creationId xmlns:a16="http://schemas.microsoft.com/office/drawing/2014/main" id="{F2C1D184-BCA7-4ABA-A86D-A783ADA7A84D}"/>
+                <a16:creationId xmlns:a16="http://schemas.microsoft.com/office/drawing/2014/main" id="{12185A89-29D1-4C37-9994-F9C6BDB5E61A}"/>
               </a:ext>
             </a:extLst>
           </p:cNvPr>
@@ -18171,7 +19130,7 @@
           <p:cNvPr id="19" name="">
             <a:extLst xmlns:a="http://schemas.openxmlformats.org/drawingml/2006/main">
               <a:ext uri="{FF2B5EF4-FFF2-40B4-BE49-F238E27FC236}">
-                <a16:creationId xmlns:a16="http://schemas.microsoft.com/office/drawing/2014/main" id="{6FD6C466-FCB5-4E83-AB3A-457865472EF3}"/>
+                <a16:creationId xmlns:a16="http://schemas.microsoft.com/office/drawing/2014/main" id="{043AA918-941D-45CE-A93F-17D0E9B377F2}"/>
               </a:ext>
             </a:extLst>
           </p:cNvPr>
@@ -18235,7 +19194,7 @@
           <p:cNvPr id="20" name="">
             <a:extLst xmlns:a="http://schemas.openxmlformats.org/drawingml/2006/main">
               <a:ext uri="{FF2B5EF4-FFF2-40B4-BE49-F238E27FC236}">
-                <a16:creationId xmlns:a16="http://schemas.microsoft.com/office/drawing/2014/main" id="{62464678-42E2-433E-B694-346093169B8B}"/>
+                <a16:creationId xmlns:a16="http://schemas.microsoft.com/office/drawing/2014/main" id="{009E8903-E150-4EDF-B801-25AB87FB2910}"/>
               </a:ext>
             </a:extLst>
           </p:cNvPr>
@@ -18299,7 +19258,7 @@
           <p:cNvPr id="21" name="">
             <a:extLst xmlns:a="http://schemas.openxmlformats.org/drawingml/2006/main">
               <a:ext uri="{FF2B5EF4-FFF2-40B4-BE49-F238E27FC236}">
-                <a16:creationId xmlns:a16="http://schemas.microsoft.com/office/drawing/2014/main" id="{7348211F-E2AF-4FEB-961E-C86E24E4445C}"/>
+                <a16:creationId xmlns:a16="http://schemas.microsoft.com/office/drawing/2014/main" id="{8A817C0E-E5E8-42DE-83E7-C6C4453C0E5C}"/>
               </a:ext>
             </a:extLst>
           </p:cNvPr>
@@ -18363,7 +19322,7 @@
           <p:cNvPr id="22" name="">
             <a:extLst xmlns:a="http://schemas.openxmlformats.org/drawingml/2006/main">
               <a:ext uri="{FF2B5EF4-FFF2-40B4-BE49-F238E27FC236}">
-                <a16:creationId xmlns:a16="http://schemas.microsoft.com/office/drawing/2014/main" id="{505824B4-76C4-4D70-A1FA-303B8E046AF1}"/>
+                <a16:creationId xmlns:a16="http://schemas.microsoft.com/office/drawing/2014/main" id="{92456D1D-85EE-4552-A884-CC90CCB8D9D4}"/>
               </a:ext>
             </a:extLst>
           </p:cNvPr>
@@ -18427,7 +19386,7 @@
           <p:cNvPr id="23" name="">
             <a:extLst xmlns:a="http://schemas.openxmlformats.org/drawingml/2006/main">
               <a:ext uri="{FF2B5EF4-FFF2-40B4-BE49-F238E27FC236}">
-                <a16:creationId xmlns:a16="http://schemas.microsoft.com/office/drawing/2014/main" id="{C57C07CD-A5B7-4776-AC42-961EE3C7AC7C}"/>
+                <a16:creationId xmlns:a16="http://schemas.microsoft.com/office/drawing/2014/main" id="{AD621911-D388-4235-B837-5E9BD1C19546}"/>
               </a:ext>
             </a:extLst>
           </p:cNvPr>
@@ -18491,7 +19450,7 @@
           <p:cNvPr id="24" name="">
             <a:extLst xmlns:a="http://schemas.openxmlformats.org/drawingml/2006/main">
               <a:ext uri="{FF2B5EF4-FFF2-40B4-BE49-F238E27FC236}">
-                <a16:creationId xmlns:a16="http://schemas.microsoft.com/office/drawing/2014/main" id="{EA5875D4-143F-4F86-9184-261E50BDE709}"/>
+                <a16:creationId xmlns:a16="http://schemas.microsoft.com/office/drawing/2014/main" id="{3A135C78-98A0-4612-A237-07C6B9910095}"/>
               </a:ext>
             </a:extLst>
           </p:cNvPr>
@@ -18555,7 +19514,7 @@
           <p:cNvPr id="25" name="">
             <a:extLst xmlns:a="http://schemas.openxmlformats.org/drawingml/2006/main">
               <a:ext uri="{FF2B5EF4-FFF2-40B4-BE49-F238E27FC236}">
-                <a16:creationId xmlns:a16="http://schemas.microsoft.com/office/drawing/2014/main" id="{F0FBCD4D-17B2-4F66-8EC4-46CD4A9F349E}"/>
+                <a16:creationId xmlns:a16="http://schemas.microsoft.com/office/drawing/2014/main" id="{327A0498-ACF3-4037-9B3A-DD2B952D969E}"/>
               </a:ext>
             </a:extLst>
           </p:cNvPr>
@@ -18619,7 +19578,7 @@
           <p:cNvPr id="26" name="">
             <a:extLst xmlns:a="http://schemas.openxmlformats.org/drawingml/2006/main">
               <a:ext uri="{FF2B5EF4-FFF2-40B4-BE49-F238E27FC236}">
-                <a16:creationId xmlns:a16="http://schemas.microsoft.com/office/drawing/2014/main" id="{8A0A7D86-BBF3-40A5-8DBF-A3C6ADEAE253}"/>
+                <a16:creationId xmlns:a16="http://schemas.microsoft.com/office/drawing/2014/main" id="{2B8BC4CA-F899-44B4-8D78-B56F55EF8DD5}"/>
               </a:ext>
             </a:extLst>
           </p:cNvPr>
@@ -18683,7 +19642,7 @@
           <p:cNvPr id="27" name="">
             <a:extLst xmlns:a="http://schemas.openxmlformats.org/drawingml/2006/main">
               <a:ext uri="{FF2B5EF4-FFF2-40B4-BE49-F238E27FC236}">
-                <a16:creationId xmlns:a16="http://schemas.microsoft.com/office/drawing/2014/main" id="{7C3479B8-B818-4D59-83C5-10A49045D136}"/>
+                <a16:creationId xmlns:a16="http://schemas.microsoft.com/office/drawing/2014/main" id="{B474344B-35A9-435E-9329-A1EF568758A0}"/>
               </a:ext>
             </a:extLst>
           </p:cNvPr>
@@ -18747,7 +19706,7 @@
           <p:cNvPr id="28" name="">
             <a:extLst xmlns:a="http://schemas.openxmlformats.org/drawingml/2006/main">
               <a:ext uri="{FF2B5EF4-FFF2-40B4-BE49-F238E27FC236}">
-                <a16:creationId xmlns:a16="http://schemas.microsoft.com/office/drawing/2014/main" id="{710460BB-FA68-4CFA-9E69-0C962172DBDB}"/>
+                <a16:creationId xmlns:a16="http://schemas.microsoft.com/office/drawing/2014/main" id="{08FC427D-47E1-4106-B594-36D30DF16497}"/>
               </a:ext>
             </a:extLst>
           </p:cNvPr>
@@ -18811,7 +19770,7 @@
           <p:cNvPr id="29" name="">
             <a:extLst xmlns:a="http://schemas.openxmlformats.org/drawingml/2006/main">
               <a:ext uri="{FF2B5EF4-FFF2-40B4-BE49-F238E27FC236}">
-                <a16:creationId xmlns:a16="http://schemas.microsoft.com/office/drawing/2014/main" id="{A268FD9A-3F21-4E68-AAA0-E263A4191B83}"/>
+                <a16:creationId xmlns:a16="http://schemas.microsoft.com/office/drawing/2014/main" id="{508AA813-6A20-45D8-A3C6-C35D06D34722}"/>
               </a:ext>
             </a:extLst>
           </p:cNvPr>
@@ -18875,7 +19834,7 @@
           <p:cNvPr id="30" name="">
             <a:extLst xmlns:a="http://schemas.openxmlformats.org/drawingml/2006/main">
               <a:ext uri="{FF2B5EF4-FFF2-40B4-BE49-F238E27FC236}">
-                <a16:creationId xmlns:a16="http://schemas.microsoft.com/office/drawing/2014/main" id="{590C63D2-0709-4809-8F6F-66B2425E902C}"/>
+                <a16:creationId xmlns:a16="http://schemas.microsoft.com/office/drawing/2014/main" id="{F8CCE92B-0EAA-410A-A7AD-FED896E14080}"/>
               </a:ext>
             </a:extLst>
           </p:cNvPr>
@@ -18939,7 +19898,7 @@
           <p:cNvPr id="31" name="">
             <a:extLst xmlns:a="http://schemas.openxmlformats.org/drawingml/2006/main">
               <a:ext uri="{FF2B5EF4-FFF2-40B4-BE49-F238E27FC236}">
-                <a16:creationId xmlns:a16="http://schemas.microsoft.com/office/drawing/2014/main" id="{90B5D61D-274F-43BF-8115-57EBC62F2F30}"/>
+                <a16:creationId xmlns:a16="http://schemas.microsoft.com/office/drawing/2014/main" id="{6523BBC0-085E-4EEF-890B-D7A5AF893059}"/>
               </a:ext>
             </a:extLst>
           </p:cNvPr>
@@ -19003,7 +19962,7 @@
           <p:cNvPr id="32" name="">
             <a:extLst xmlns:a="http://schemas.openxmlformats.org/drawingml/2006/main">
               <a:ext uri="{FF2B5EF4-FFF2-40B4-BE49-F238E27FC236}">
-                <a16:creationId xmlns:a16="http://schemas.microsoft.com/office/drawing/2014/main" id="{5A059AED-4BA8-48D5-95FC-67F5E1C8785B}"/>
+                <a16:creationId xmlns:a16="http://schemas.microsoft.com/office/drawing/2014/main" id="{DB94C78D-92B9-4928-8AF1-8C54CE949B8C}"/>
               </a:ext>
             </a:extLst>
           </p:cNvPr>
@@ -19067,7 +20026,7 @@
           <p:cNvPr id="33" name="">
             <a:extLst xmlns:a="http://schemas.openxmlformats.org/drawingml/2006/main">
               <a:ext uri="{FF2B5EF4-FFF2-40B4-BE49-F238E27FC236}">
-                <a16:creationId xmlns:a16="http://schemas.microsoft.com/office/drawing/2014/main" id="{F58D1599-2D23-4826-B342-BB3D361726FC}"/>
+                <a16:creationId xmlns:a16="http://schemas.microsoft.com/office/drawing/2014/main" id="{1C06FCAF-BAA4-42AB-8B5C-B631CF1B6A38}"/>
               </a:ext>
             </a:extLst>
           </p:cNvPr>
@@ -19131,7 +20090,7 @@
           <p:cNvPr id="34" name="">
             <a:extLst xmlns:a="http://schemas.openxmlformats.org/drawingml/2006/main">
               <a:ext uri="{FF2B5EF4-FFF2-40B4-BE49-F238E27FC236}">
-                <a16:creationId xmlns:a16="http://schemas.microsoft.com/office/drawing/2014/main" id="{6D52EDD3-9161-4816-A304-568AA07D9E1A}"/>
+                <a16:creationId xmlns:a16="http://schemas.microsoft.com/office/drawing/2014/main" id="{22005B60-038A-4FE7-B7C0-9CF6D2AAFFFB}"/>
               </a:ext>
             </a:extLst>
           </p:cNvPr>
@@ -19195,7 +20154,7 @@
           <p:cNvPr id="35" name="">
             <a:extLst xmlns:a="http://schemas.openxmlformats.org/drawingml/2006/main">
               <a:ext uri="{FF2B5EF4-FFF2-40B4-BE49-F238E27FC236}">
-                <a16:creationId xmlns:a16="http://schemas.microsoft.com/office/drawing/2014/main" id="{826E5663-0D8D-4F72-B03B-9AADED28F6BB}"/>
+                <a16:creationId xmlns:a16="http://schemas.microsoft.com/office/drawing/2014/main" id="{F88F1813-4D98-4135-8202-93685C079C0E}"/>
               </a:ext>
             </a:extLst>
           </p:cNvPr>
@@ -19259,7 +20218,7 @@
           <p:cNvPr id="36" name="">
             <a:extLst xmlns:a="http://schemas.openxmlformats.org/drawingml/2006/main">
               <a:ext uri="{FF2B5EF4-FFF2-40B4-BE49-F238E27FC236}">
-                <a16:creationId xmlns:a16="http://schemas.microsoft.com/office/drawing/2014/main" id="{03D7490B-1D67-4EBB-9F2B-3373C0B4D853}"/>
+                <a16:creationId xmlns:a16="http://schemas.microsoft.com/office/drawing/2014/main" id="{5AD2D1C9-7E39-4813-8E35-69E2FD5DE47D}"/>
               </a:ext>
             </a:extLst>
           </p:cNvPr>
@@ -19323,7 +20282,7 @@
           <p:cNvPr id="37" name="">
             <a:extLst xmlns:a="http://schemas.openxmlformats.org/drawingml/2006/main">
               <a:ext uri="{FF2B5EF4-FFF2-40B4-BE49-F238E27FC236}">
-                <a16:creationId xmlns:a16="http://schemas.microsoft.com/office/drawing/2014/main" id="{34C71B75-8B09-4FE7-A864-1FBDBE9E3F8F}"/>
+                <a16:creationId xmlns:a16="http://schemas.microsoft.com/office/drawing/2014/main" id="{DA073C35-6170-4769-A70B-6DA08677F8C4}"/>
               </a:ext>
             </a:extLst>
           </p:cNvPr>
@@ -19387,7 +20346,7 @@
           <p:cNvPr id="38" name="">
             <a:extLst xmlns:a="http://schemas.openxmlformats.org/drawingml/2006/main">
               <a:ext uri="{FF2B5EF4-FFF2-40B4-BE49-F238E27FC236}">
-                <a16:creationId xmlns:a16="http://schemas.microsoft.com/office/drawing/2014/main" id="{39CEE5C2-CB7C-4A77-93C4-D3CCDC9E9037}"/>
+                <a16:creationId xmlns:a16="http://schemas.microsoft.com/office/drawing/2014/main" id="{6D87CFF9-5007-4627-BF2B-56192F84611E}"/>
               </a:ext>
             </a:extLst>
           </p:cNvPr>
@@ -19451,7 +20410,7 @@
           <p:cNvPr id="39" name="">
             <a:extLst xmlns:a="http://schemas.openxmlformats.org/drawingml/2006/main">
               <a:ext uri="{FF2B5EF4-FFF2-40B4-BE49-F238E27FC236}">
-                <a16:creationId xmlns:a16="http://schemas.microsoft.com/office/drawing/2014/main" id="{892125D0-A388-4AEB-AA85-541EABC2A78F}"/>
+                <a16:creationId xmlns:a16="http://schemas.microsoft.com/office/drawing/2014/main" id="{5D2EC493-A2D0-461A-8146-50C53ADB3447}"/>
               </a:ext>
             </a:extLst>
           </p:cNvPr>
@@ -19515,7 +20474,7 @@
           <p:cNvPr id="40" name="">
             <a:extLst xmlns:a="http://schemas.openxmlformats.org/drawingml/2006/main">
               <a:ext uri="{FF2B5EF4-FFF2-40B4-BE49-F238E27FC236}">
-                <a16:creationId xmlns:a16="http://schemas.microsoft.com/office/drawing/2014/main" id="{6F0962A6-6732-4C8E-9298-DBEA0D116732}"/>
+                <a16:creationId xmlns:a16="http://schemas.microsoft.com/office/drawing/2014/main" id="{13A47F20-D09B-4A5D-8CF6-39748C85ACED}"/>
               </a:ext>
             </a:extLst>
           </p:cNvPr>
@@ -19579,7 +20538,7 @@
           <p:cNvPr id="41" name="">
             <a:extLst xmlns:a="http://schemas.openxmlformats.org/drawingml/2006/main">
               <a:ext uri="{FF2B5EF4-FFF2-40B4-BE49-F238E27FC236}">
-                <a16:creationId xmlns:a16="http://schemas.microsoft.com/office/drawing/2014/main" id="{416963CA-4242-429B-B08C-5C9FD3B85318}"/>
+                <a16:creationId xmlns:a16="http://schemas.microsoft.com/office/drawing/2014/main" id="{B62CE8C4-8405-43FF-B71B-3204573F897C}"/>
               </a:ext>
             </a:extLst>
           </p:cNvPr>
@@ -19643,7 +20602,7 @@
           <p:cNvPr id="42" name="">
             <a:extLst xmlns:a="http://schemas.openxmlformats.org/drawingml/2006/main">
               <a:ext uri="{FF2B5EF4-FFF2-40B4-BE49-F238E27FC236}">
-                <a16:creationId xmlns:a16="http://schemas.microsoft.com/office/drawing/2014/main" id="{1FE9CB7A-CA77-4E54-AC4C-D45839729813}"/>
+                <a16:creationId xmlns:a16="http://schemas.microsoft.com/office/drawing/2014/main" id="{8A8A5F08-EBEC-49EF-866B-74683E8911A9}"/>
               </a:ext>
             </a:extLst>
           </p:cNvPr>
@@ -19707,7 +20666,7 @@
           <p:cNvPr id="43" name="">
             <a:extLst xmlns:a="http://schemas.openxmlformats.org/drawingml/2006/main">
               <a:ext uri="{FF2B5EF4-FFF2-40B4-BE49-F238E27FC236}">
-                <a16:creationId xmlns:a16="http://schemas.microsoft.com/office/drawing/2014/main" id="{49F9F2F6-B9B5-4F94-909A-883FFEBDFF61}"/>
+                <a16:creationId xmlns:a16="http://schemas.microsoft.com/office/drawing/2014/main" id="{E9ED4CD5-B107-45F0-9DA4-6140390A544D}"/>
               </a:ext>
             </a:extLst>
           </p:cNvPr>
@@ -19771,7 +20730,7 @@
           <p:cNvPr id="44" name="">
             <a:extLst xmlns:a="http://schemas.openxmlformats.org/drawingml/2006/main">
               <a:ext uri="{FF2B5EF4-FFF2-40B4-BE49-F238E27FC236}">
-                <a16:creationId xmlns:a16="http://schemas.microsoft.com/office/drawing/2014/main" id="{3C108BC4-5B0D-46E9-AFBA-D05A38E7E595}"/>
+                <a16:creationId xmlns:a16="http://schemas.microsoft.com/office/drawing/2014/main" id="{0345C83F-C122-4AC8-BF30-C1B546C53C8B}"/>
               </a:ext>
             </a:extLst>
           </p:cNvPr>
@@ -19835,7 +20794,7 @@
           <p:cNvPr id="45" name="">
             <a:extLst xmlns:a="http://schemas.openxmlformats.org/drawingml/2006/main">
               <a:ext uri="{FF2B5EF4-FFF2-40B4-BE49-F238E27FC236}">
-                <a16:creationId xmlns:a16="http://schemas.microsoft.com/office/drawing/2014/main" id="{6F911E1B-B60B-4D4A-B722-4A70F5469087}"/>
+                <a16:creationId xmlns:a16="http://schemas.microsoft.com/office/drawing/2014/main" id="{ACCA801B-5919-454A-BBA2-F4637202DE35}"/>
               </a:ext>
             </a:extLst>
           </p:cNvPr>
@@ -19899,7 +20858,7 @@
           <p:cNvPr id="46" name="">
             <a:extLst xmlns:a="http://schemas.openxmlformats.org/drawingml/2006/main">
               <a:ext uri="{FF2B5EF4-FFF2-40B4-BE49-F238E27FC236}">
-                <a16:creationId xmlns:a16="http://schemas.microsoft.com/office/drawing/2014/main" id="{9CCC44DE-91A4-4969-A024-24759E7C7D3E}"/>
+                <a16:creationId xmlns:a16="http://schemas.microsoft.com/office/drawing/2014/main" id="{55187AA5-B18D-4233-919C-5E44709F2B88}"/>
               </a:ext>
             </a:extLst>
           </p:cNvPr>
@@ -19934,7 +20893,7 @@
           <p:cNvPr id="47" name="">
             <a:extLst xmlns:a="http://schemas.openxmlformats.org/drawingml/2006/main">
               <a:ext uri="{FF2B5EF4-FFF2-40B4-BE49-F238E27FC236}">
-                <a16:creationId xmlns:a16="http://schemas.microsoft.com/office/drawing/2014/main" id="{D1C78A71-6FEE-427D-9319-4313D9FFFA10}"/>
+                <a16:creationId xmlns:a16="http://schemas.microsoft.com/office/drawing/2014/main" id="{B0D6A678-AA91-442F-885E-DEA213F256C9}"/>
               </a:ext>
             </a:extLst>
           </p:cNvPr>
@@ -19998,7 +20957,7 @@
           <p:cNvPr id="48" name="">
             <a:extLst xmlns:a="http://schemas.openxmlformats.org/drawingml/2006/main">
               <a:ext uri="{FF2B5EF4-FFF2-40B4-BE49-F238E27FC236}">
-                <a16:creationId xmlns:a16="http://schemas.microsoft.com/office/drawing/2014/main" id="{E2D89E01-CA00-45A8-8B2C-C685B7085B55}"/>
+                <a16:creationId xmlns:a16="http://schemas.microsoft.com/office/drawing/2014/main" id="{66508A22-7AC3-45C0-BD4D-B6CCFD464526}"/>
               </a:ext>
             </a:extLst>
           </p:cNvPr>
@@ -20060,7 +21019,7 @@
     </p:spTree>
     <p:extLst>
       <p:ext uri="{BB962C8B-B14F-4D97-AF65-F5344CB8AC3E}">
-        <p14:creationId xmlns:p14="http://schemas.microsoft.com/office/powerpoint/2010/main" val="1071409987"/>
+        <p14:creationId xmlns:p14="http://schemas.microsoft.com/office/powerpoint/2010/main" val="346818655"/>
       </p:ext>
     </p:extLst>
   </p:cSld>

--- a/deliverables/proposal_2026_06_03/PromoMind_proposal_slides_zh.pptx
+++ b/deliverables/proposal_2026_06_03/PromoMind_proposal_slides_zh.pptx
@@ -2,22 +2,22 @@
 <file path=ppt/presentation.xml><?xml version="1.0" encoding="utf-8"?>
 <p:presentation xmlns:p="http://schemas.openxmlformats.org/presentationml/2006/main">
   <p:sldMasterIdLst>
-    <p:sldMasterId xmlns:r="http://schemas.openxmlformats.org/officeDocument/2006/relationships" id="2147483648" r:id="Rb8807933ce0c4f0c"/>
+    <p:sldMasterId xmlns:r="http://schemas.openxmlformats.org/officeDocument/2006/relationships" id="2147483648" r:id="R3a2f4ba2dae04de8"/>
   </p:sldMasterIdLst>
   <p:notesMasterIdLst>
-    <p:notesMasterId xmlns:r="http://schemas.openxmlformats.org/officeDocument/2006/relationships" r:id="Rf1df337b759340f7"/>
+    <p:notesMasterId xmlns:r="http://schemas.openxmlformats.org/officeDocument/2006/relationships" r:id="R5aef7142023f42a0"/>
   </p:notesMasterIdLst>
   <p:sldIdLst>
-    <p:sldId xmlns:r="http://schemas.openxmlformats.org/officeDocument/2006/relationships" id="256" r:id="Ref68c98d3ba6440c"/>
-    <p:sldId xmlns:r="http://schemas.openxmlformats.org/officeDocument/2006/relationships" id="257" r:id="Rc262ba980ec44c1e"/>
-    <p:sldId xmlns:r="http://schemas.openxmlformats.org/officeDocument/2006/relationships" id="258" r:id="Rc0dbb74f2841496a"/>
-    <p:sldId xmlns:r="http://schemas.openxmlformats.org/officeDocument/2006/relationships" id="259" r:id="Re65f793e5a7a4094"/>
-    <p:sldId xmlns:r="http://schemas.openxmlformats.org/officeDocument/2006/relationships" id="260" r:id="R4e3d4226ea5b475d"/>
-    <p:sldId xmlns:r="http://schemas.openxmlformats.org/officeDocument/2006/relationships" id="261" r:id="R53c36dfec5104e4d"/>
-    <p:sldId xmlns:r="http://schemas.openxmlformats.org/officeDocument/2006/relationships" id="262" r:id="R2914e21a37cd46a0"/>
-    <p:sldId xmlns:r="http://schemas.openxmlformats.org/officeDocument/2006/relationships" id="263" r:id="Rcc3bc53c70c94a9d"/>
-    <p:sldId xmlns:r="http://schemas.openxmlformats.org/officeDocument/2006/relationships" id="264" r:id="R25704ddbb4c7440c"/>
-    <p:sldId xmlns:r="http://schemas.openxmlformats.org/officeDocument/2006/relationships" id="265" r:id="R747c3fcd236041ae"/>
+    <p:sldId xmlns:r="http://schemas.openxmlformats.org/officeDocument/2006/relationships" id="256" r:id="Rbeefd6259e5d46ae"/>
+    <p:sldId xmlns:r="http://schemas.openxmlformats.org/officeDocument/2006/relationships" id="257" r:id="R194acf2e8e2547b9"/>
+    <p:sldId xmlns:r="http://schemas.openxmlformats.org/officeDocument/2006/relationships" id="258" r:id="Ra33c7bc6571f4950"/>
+    <p:sldId xmlns:r="http://schemas.openxmlformats.org/officeDocument/2006/relationships" id="259" r:id="R07fcfc509d304ecd"/>
+    <p:sldId xmlns:r="http://schemas.openxmlformats.org/officeDocument/2006/relationships" id="260" r:id="R6354014e171f47ed"/>
+    <p:sldId xmlns:r="http://schemas.openxmlformats.org/officeDocument/2006/relationships" id="261" r:id="R9a21de4c6f864419"/>
+    <p:sldId xmlns:r="http://schemas.openxmlformats.org/officeDocument/2006/relationships" id="262" r:id="R7134f1f3f5364b36"/>
+    <p:sldId xmlns:r="http://schemas.openxmlformats.org/officeDocument/2006/relationships" id="263" r:id="Rde68cec871f248df"/>
+    <p:sldId xmlns:r="http://schemas.openxmlformats.org/officeDocument/2006/relationships" id="264" r:id="Rc7b255b2dc8a4fc4"/>
+    <p:sldId xmlns:r="http://schemas.openxmlformats.org/officeDocument/2006/relationships" id="265" r:id="R4ba50749daaf471f"/>
   </p:sldIdLst>
   <p:sldSz cx="12192000" cy="6858000"/>
   <p:notesSz cx="6858000" cy="9144000"/>
@@ -1158,7 +1158,7 @@
   </p:cSld>
   <p:clrMap bg1="lt1" tx1="dk1" bg2="lt2" tx2="dk2" accent1="accent1" accent2="accent2" accent3="accent3" accent4="accent4" accent5="accent5" accent6="accent6" hlink="hlink" folHlink="folHlink"/>
   <p:sldLayoutIdLst>
-    <p:sldLayoutId xmlns:r="http://schemas.openxmlformats.org/officeDocument/2006/relationships" id="2147483649" r:id="Re980dd6c94324652"/>
+    <p:sldLayoutId xmlns:r="http://schemas.openxmlformats.org/officeDocument/2006/relationships" id="2147483649" r:id="Rfd98c456c7ce4858"/>
   </p:sldLayoutIdLst>
   <p:txStyles>
     <p:titleStyle>
@@ -1656,7 +1656,7 @@
           <p:cNvPr id="1" name="">
             <a:extLst xmlns:a="http://schemas.openxmlformats.org/drawingml/2006/main">
               <a:ext uri="{FF2B5EF4-FFF2-40B4-BE49-F238E27FC236}">
-                <a16:creationId xmlns:a16="http://schemas.microsoft.com/office/drawing/2014/main" id="{154A0F42-B85A-4496-9E67-14C4F8EB9527}"/>
+                <a16:creationId xmlns:a16="http://schemas.microsoft.com/office/drawing/2014/main" id="{9BF940B6-0EC7-483C-B5E2-EA1D971605A4}"/>
               </a:ext>
             </a:extLst>
           </p:cNvPr>
@@ -1691,7 +1691,7 @@
           <p:cNvPr id="2" name="">
             <a:extLst xmlns:a="http://schemas.openxmlformats.org/drawingml/2006/main">
               <a:ext uri="{FF2B5EF4-FFF2-40B4-BE49-F238E27FC236}">
-                <a16:creationId xmlns:a16="http://schemas.microsoft.com/office/drawing/2014/main" id="{EBDB276A-B916-4D03-BF60-61E9076F589C}"/>
+                <a16:creationId xmlns:a16="http://schemas.microsoft.com/office/drawing/2014/main" id="{5745869D-4B1A-480C-B0E2-4AA9DA704122}"/>
               </a:ext>
             </a:extLst>
           </p:cNvPr>
@@ -1726,7 +1726,7 @@
           <p:cNvPr id="3" name="">
             <a:extLst xmlns:a="http://schemas.openxmlformats.org/drawingml/2006/main">
               <a:ext uri="{FF2B5EF4-FFF2-40B4-BE49-F238E27FC236}">
-                <a16:creationId xmlns:a16="http://schemas.microsoft.com/office/drawing/2014/main" id="{DC1D19BF-48F7-46E3-9237-C1EF39E0BA96}"/>
+                <a16:creationId xmlns:a16="http://schemas.microsoft.com/office/drawing/2014/main" id="{A9BE76DF-698F-4E1D-92E6-0A66B723F48C}"/>
               </a:ext>
             </a:extLst>
           </p:cNvPr>
@@ -1759,7 +1759,7 @@
           <p:cNvPr id="4" name="">
             <a:extLst xmlns:a="http://schemas.openxmlformats.org/drawingml/2006/main">
               <a:ext uri="{FF2B5EF4-FFF2-40B4-BE49-F238E27FC236}">
-                <a16:creationId xmlns:a16="http://schemas.microsoft.com/office/drawing/2014/main" id="{3D32A162-4CB6-4277-B22A-3E9E2DBAB3E1}"/>
+                <a16:creationId xmlns:a16="http://schemas.microsoft.com/office/drawing/2014/main" id="{2B0D998F-E6D8-4C44-9F9D-DCFA2CD77B2B}"/>
               </a:ext>
             </a:extLst>
           </p:cNvPr>
@@ -1823,7 +1823,7 @@
           <p:cNvPr id="5" name="">
             <a:extLst xmlns:a="http://schemas.openxmlformats.org/drawingml/2006/main">
               <a:ext uri="{FF2B5EF4-FFF2-40B4-BE49-F238E27FC236}">
-                <a16:creationId xmlns:a16="http://schemas.microsoft.com/office/drawing/2014/main" id="{1D7E60AB-6E80-4C25-915B-A742BD0133CD}"/>
+                <a16:creationId xmlns:a16="http://schemas.microsoft.com/office/drawing/2014/main" id="{7493D2F4-8280-4F4A-8914-0F2F169D6C7D}"/>
               </a:ext>
             </a:extLst>
           </p:cNvPr>
@@ -1887,7 +1887,7 @@
           <p:cNvPr id="6" name="">
             <a:extLst xmlns:a="http://schemas.openxmlformats.org/drawingml/2006/main">
               <a:ext uri="{FF2B5EF4-FFF2-40B4-BE49-F238E27FC236}">
-                <a16:creationId xmlns:a16="http://schemas.microsoft.com/office/drawing/2014/main" id="{0A5847DB-F152-4506-8915-214F901E560D}"/>
+                <a16:creationId xmlns:a16="http://schemas.microsoft.com/office/drawing/2014/main" id="{63ECB3C1-5BF7-42F8-9DB7-9FFF811B0739}"/>
               </a:ext>
             </a:extLst>
           </p:cNvPr>
@@ -1951,7 +1951,7 @@
           <p:cNvPr id="7" name="">
             <a:extLst xmlns:a="http://schemas.openxmlformats.org/drawingml/2006/main">
               <a:ext uri="{FF2B5EF4-FFF2-40B4-BE49-F238E27FC236}">
-                <a16:creationId xmlns:a16="http://schemas.microsoft.com/office/drawing/2014/main" id="{3F8CEADC-AD09-413F-A5DA-6870B8510226}"/>
+                <a16:creationId xmlns:a16="http://schemas.microsoft.com/office/drawing/2014/main" id="{FC990293-CEDC-4104-B2DD-527934AE7B3B}"/>
               </a:ext>
             </a:extLst>
           </p:cNvPr>
@@ -2015,7 +2015,7 @@
           <p:cNvPr id="8" name="">
             <a:extLst xmlns:a="http://schemas.openxmlformats.org/drawingml/2006/main">
               <a:ext uri="{FF2B5EF4-FFF2-40B4-BE49-F238E27FC236}">
-                <a16:creationId xmlns:a16="http://schemas.microsoft.com/office/drawing/2014/main" id="{10BA5B16-A53F-4CD1-9E05-E38C2F3586B8}"/>
+                <a16:creationId xmlns:a16="http://schemas.microsoft.com/office/drawing/2014/main" id="{C0988B4E-36E9-43C8-9E1A-22C6747A54E4}"/>
               </a:ext>
             </a:extLst>
           </p:cNvPr>
@@ -2048,7 +2048,7 @@
           <p:cNvPr id="9" name="">
             <a:extLst xmlns:a="http://schemas.openxmlformats.org/drawingml/2006/main">
               <a:ext uri="{FF2B5EF4-FFF2-40B4-BE49-F238E27FC236}">
-                <a16:creationId xmlns:a16="http://schemas.microsoft.com/office/drawing/2014/main" id="{4AD792F4-3725-44DB-8597-29338CD17C5A}"/>
+                <a16:creationId xmlns:a16="http://schemas.microsoft.com/office/drawing/2014/main" id="{82A32A71-BB0B-4EC0-98E0-FFFE55570EEF}"/>
               </a:ext>
             </a:extLst>
           </p:cNvPr>
@@ -2112,7 +2112,7 @@
           <p:cNvPr id="10" name="">
             <a:extLst xmlns:a="http://schemas.openxmlformats.org/drawingml/2006/main">
               <a:ext uri="{FF2B5EF4-FFF2-40B4-BE49-F238E27FC236}">
-                <a16:creationId xmlns:a16="http://schemas.microsoft.com/office/drawing/2014/main" id="{EF1CB747-DA98-40EA-BA51-FD236EEFEAE0}"/>
+                <a16:creationId xmlns:a16="http://schemas.microsoft.com/office/drawing/2014/main" id="{2E627CD0-54C2-4B22-BE0F-EEB9FAF8EEA7}"/>
               </a:ext>
             </a:extLst>
           </p:cNvPr>
@@ -2176,7 +2176,7 @@
           <p:cNvPr id="11" name="">
             <a:extLst xmlns:a="http://schemas.openxmlformats.org/drawingml/2006/main">
               <a:ext uri="{FF2B5EF4-FFF2-40B4-BE49-F238E27FC236}">
-                <a16:creationId xmlns:a16="http://schemas.microsoft.com/office/drawing/2014/main" id="{D74632C7-DEA5-4BFD-9585-B52BFA6B396E}"/>
+                <a16:creationId xmlns:a16="http://schemas.microsoft.com/office/drawing/2014/main" id="{87FE9E33-1221-4B5A-A598-29411F5FB676}"/>
               </a:ext>
             </a:extLst>
           </p:cNvPr>
@@ -2240,7 +2240,7 @@
           <p:cNvPr id="12" name="">
             <a:extLst xmlns:a="http://schemas.openxmlformats.org/drawingml/2006/main">
               <a:ext uri="{FF2B5EF4-FFF2-40B4-BE49-F238E27FC236}">
-                <a16:creationId xmlns:a16="http://schemas.microsoft.com/office/drawing/2014/main" id="{76FC78EB-C74C-4C1D-AAC1-3784ABDB2241}"/>
+                <a16:creationId xmlns:a16="http://schemas.microsoft.com/office/drawing/2014/main" id="{09CEEE63-F404-4388-925A-8C9B0C277A94}"/>
               </a:ext>
             </a:extLst>
           </p:cNvPr>
@@ -2273,7 +2273,7 @@
           <p:cNvPr id="13" name="">
             <a:extLst xmlns:a="http://schemas.openxmlformats.org/drawingml/2006/main">
               <a:ext uri="{FF2B5EF4-FFF2-40B4-BE49-F238E27FC236}">
-                <a16:creationId xmlns:a16="http://schemas.microsoft.com/office/drawing/2014/main" id="{E821D888-337B-4F76-9EE5-E6E9A9F4F397}"/>
+                <a16:creationId xmlns:a16="http://schemas.microsoft.com/office/drawing/2014/main" id="{875D1EC5-57FF-4541-BB54-A5B33D8799FD}"/>
               </a:ext>
             </a:extLst>
           </p:cNvPr>
@@ -2337,7 +2337,7 @@
           <p:cNvPr id="14" name="">
             <a:extLst xmlns:a="http://schemas.openxmlformats.org/drawingml/2006/main">
               <a:ext uri="{FF2B5EF4-FFF2-40B4-BE49-F238E27FC236}">
-                <a16:creationId xmlns:a16="http://schemas.microsoft.com/office/drawing/2014/main" id="{3AE8D4AC-B5BF-40BF-9EA0-1FD851F4C543}"/>
+                <a16:creationId xmlns:a16="http://schemas.microsoft.com/office/drawing/2014/main" id="{6A2E6534-0D59-4EAD-926C-097990C13CFE}"/>
               </a:ext>
             </a:extLst>
           </p:cNvPr>
@@ -2401,7 +2401,7 @@
           <p:cNvPr id="15" name="">
             <a:extLst xmlns:a="http://schemas.openxmlformats.org/drawingml/2006/main">
               <a:ext uri="{FF2B5EF4-FFF2-40B4-BE49-F238E27FC236}">
-                <a16:creationId xmlns:a16="http://schemas.microsoft.com/office/drawing/2014/main" id="{565B1885-CC94-4D1E-904D-26FDDEF2F1F3}"/>
+                <a16:creationId xmlns:a16="http://schemas.microsoft.com/office/drawing/2014/main" id="{D2D9914B-F62B-49B5-BA94-A65122D8EBCA}"/>
               </a:ext>
             </a:extLst>
           </p:cNvPr>
@@ -2465,7 +2465,7 @@
           <p:cNvPr id="16" name="">
             <a:extLst xmlns:a="http://schemas.openxmlformats.org/drawingml/2006/main">
               <a:ext uri="{FF2B5EF4-FFF2-40B4-BE49-F238E27FC236}">
-                <a16:creationId xmlns:a16="http://schemas.microsoft.com/office/drawing/2014/main" id="{A744DB96-9034-4D0B-81DD-299F26C79902}"/>
+                <a16:creationId xmlns:a16="http://schemas.microsoft.com/office/drawing/2014/main" id="{BCBDE59C-A1F5-4943-AC89-31AE7AEF22BB}"/>
               </a:ext>
             </a:extLst>
           </p:cNvPr>
@@ -2498,7 +2498,7 @@
           <p:cNvPr id="17" name="">
             <a:extLst xmlns:a="http://schemas.openxmlformats.org/drawingml/2006/main">
               <a:ext uri="{FF2B5EF4-FFF2-40B4-BE49-F238E27FC236}">
-                <a16:creationId xmlns:a16="http://schemas.microsoft.com/office/drawing/2014/main" id="{4D212423-4174-4FB0-A315-2D449C1F9DA2}"/>
+                <a16:creationId xmlns:a16="http://schemas.microsoft.com/office/drawing/2014/main" id="{6AFD2905-4556-42E3-B9A3-BAA48969CDA2}"/>
               </a:ext>
             </a:extLst>
           </p:cNvPr>
@@ -2562,7 +2562,7 @@
           <p:cNvPr id="18" name="">
             <a:extLst xmlns:a="http://schemas.openxmlformats.org/drawingml/2006/main">
               <a:ext uri="{FF2B5EF4-FFF2-40B4-BE49-F238E27FC236}">
-                <a16:creationId xmlns:a16="http://schemas.microsoft.com/office/drawing/2014/main" id="{AB76431F-BCF7-4ECB-B918-8714B7DEDB28}"/>
+                <a16:creationId xmlns:a16="http://schemas.microsoft.com/office/drawing/2014/main" id="{BDA2B9D7-38A1-497A-9033-7105779DD3E4}"/>
               </a:ext>
             </a:extLst>
           </p:cNvPr>
@@ -2626,7 +2626,7 @@
           <p:cNvPr id="19" name="">
             <a:extLst xmlns:a="http://schemas.openxmlformats.org/drawingml/2006/main">
               <a:ext uri="{FF2B5EF4-FFF2-40B4-BE49-F238E27FC236}">
-                <a16:creationId xmlns:a16="http://schemas.microsoft.com/office/drawing/2014/main" id="{9E25736A-7242-44C5-B773-92D937265D6F}"/>
+                <a16:creationId xmlns:a16="http://schemas.microsoft.com/office/drawing/2014/main" id="{A776E3DB-309E-4B5F-8BD0-1EA0A587E3CD}"/>
               </a:ext>
             </a:extLst>
           </p:cNvPr>
@@ -2690,7 +2690,7 @@
           <p:cNvPr id="20" name="">
             <a:extLst xmlns:a="http://schemas.openxmlformats.org/drawingml/2006/main">
               <a:ext uri="{FF2B5EF4-FFF2-40B4-BE49-F238E27FC236}">
-                <a16:creationId xmlns:a16="http://schemas.microsoft.com/office/drawing/2014/main" id="{6DFC38FA-8A91-400E-8E81-BCE891FAFB90}"/>
+                <a16:creationId xmlns:a16="http://schemas.microsoft.com/office/drawing/2014/main" id="{F617D2F0-1003-4341-8F0D-1EB561F30FE6}"/>
               </a:ext>
             </a:extLst>
           </p:cNvPr>
@@ -2723,7 +2723,7 @@
           <p:cNvPr id="21" name="">
             <a:extLst xmlns:a="http://schemas.openxmlformats.org/drawingml/2006/main">
               <a:ext uri="{FF2B5EF4-FFF2-40B4-BE49-F238E27FC236}">
-                <a16:creationId xmlns:a16="http://schemas.microsoft.com/office/drawing/2014/main" id="{E004DC61-E55E-4D75-BAF0-24503E6C0E3B}"/>
+                <a16:creationId xmlns:a16="http://schemas.microsoft.com/office/drawing/2014/main" id="{07E99670-8FE7-49BC-9DD0-469BEE775612}"/>
               </a:ext>
             </a:extLst>
           </p:cNvPr>
@@ -2787,7 +2787,7 @@
           <p:cNvPr id="22" name="">
             <a:extLst xmlns:a="http://schemas.openxmlformats.org/drawingml/2006/main">
               <a:ext uri="{FF2B5EF4-FFF2-40B4-BE49-F238E27FC236}">
-                <a16:creationId xmlns:a16="http://schemas.microsoft.com/office/drawing/2014/main" id="{BB3ADBFC-DA8A-41A7-A97B-25F00F33F8BB}"/>
+                <a16:creationId xmlns:a16="http://schemas.microsoft.com/office/drawing/2014/main" id="{10576CF5-42C3-443E-A0C9-0E753C5A0CBB}"/>
               </a:ext>
             </a:extLst>
           </p:cNvPr>
@@ -2851,7 +2851,7 @@
           <p:cNvPr id="23" name="">
             <a:extLst xmlns:a="http://schemas.openxmlformats.org/drawingml/2006/main">
               <a:ext uri="{FF2B5EF4-FFF2-40B4-BE49-F238E27FC236}">
-                <a16:creationId xmlns:a16="http://schemas.microsoft.com/office/drawing/2014/main" id="{5AE6E756-F87F-4EAC-B1FB-E80A54F501D5}"/>
+                <a16:creationId xmlns:a16="http://schemas.microsoft.com/office/drawing/2014/main" id="{4D999CEB-7364-4094-AA85-0AD6788500C1}"/>
               </a:ext>
             </a:extLst>
           </p:cNvPr>
@@ -2915,7 +2915,7 @@
           <p:cNvPr id="24" name="">
             <a:extLst xmlns:a="http://schemas.openxmlformats.org/drawingml/2006/main">
               <a:ext uri="{FF2B5EF4-FFF2-40B4-BE49-F238E27FC236}">
-                <a16:creationId xmlns:a16="http://schemas.microsoft.com/office/drawing/2014/main" id="{B79A3D8D-6615-404A-9061-5B13EED7769E}"/>
+                <a16:creationId xmlns:a16="http://schemas.microsoft.com/office/drawing/2014/main" id="{F0EB48BA-38D5-41EA-AC2D-276BF3663AE1}"/>
               </a:ext>
             </a:extLst>
           </p:cNvPr>
@@ -2979,7 +2979,7 @@
           <p:cNvPr id="25" name="">
             <a:extLst xmlns:a="http://schemas.openxmlformats.org/drawingml/2006/main">
               <a:ext uri="{FF2B5EF4-FFF2-40B4-BE49-F238E27FC236}">
-                <a16:creationId xmlns:a16="http://schemas.microsoft.com/office/drawing/2014/main" id="{312885E2-F8B5-4E93-BCF8-517DB9541628}"/>
+                <a16:creationId xmlns:a16="http://schemas.microsoft.com/office/drawing/2014/main" id="{B217D266-93E6-4AF9-8FE3-1CAD364A60E1}"/>
               </a:ext>
             </a:extLst>
           </p:cNvPr>
@@ -3014,7 +3014,7 @@
           <p:cNvPr id="26" name="">
             <a:extLst xmlns:a="http://schemas.openxmlformats.org/drawingml/2006/main">
               <a:ext uri="{FF2B5EF4-FFF2-40B4-BE49-F238E27FC236}">
-                <a16:creationId xmlns:a16="http://schemas.microsoft.com/office/drawing/2014/main" id="{431C6842-0634-4F1E-A55A-9520A886A1ED}"/>
+                <a16:creationId xmlns:a16="http://schemas.microsoft.com/office/drawing/2014/main" id="{575749F6-EFB1-4F24-8DE6-56F3CDC3397D}"/>
               </a:ext>
             </a:extLst>
           </p:cNvPr>
@@ -3078,7 +3078,7 @@
           <p:cNvPr id="27" name="">
             <a:extLst xmlns:a="http://schemas.openxmlformats.org/drawingml/2006/main">
               <a:ext uri="{FF2B5EF4-FFF2-40B4-BE49-F238E27FC236}">
-                <a16:creationId xmlns:a16="http://schemas.microsoft.com/office/drawing/2014/main" id="{58836131-1987-45EE-8749-D631C0B881EE}"/>
+                <a16:creationId xmlns:a16="http://schemas.microsoft.com/office/drawing/2014/main" id="{F9A02756-05AB-46F1-A5A9-DB82F2E26175}"/>
               </a:ext>
             </a:extLst>
           </p:cNvPr>
@@ -3140,7 +3140,7 @@
     </p:spTree>
     <p:extLst>
       <p:ext uri="{BB962C8B-B14F-4D97-AF65-F5344CB8AC3E}">
-        <p14:creationId xmlns:p14="http://schemas.microsoft.com/office/powerpoint/2010/main" val="78014007"/>
+        <p14:creationId xmlns:p14="http://schemas.microsoft.com/office/powerpoint/2010/main" val="1277130356"/>
       </p:ext>
     </p:extLst>
   </p:cSld>
@@ -3164,7 +3164,7 @@
           <p:cNvPr id="1" name="">
             <a:extLst xmlns:a="http://schemas.openxmlformats.org/drawingml/2006/main">
               <a:ext uri="{FF2B5EF4-FFF2-40B4-BE49-F238E27FC236}">
-                <a16:creationId xmlns:a16="http://schemas.microsoft.com/office/drawing/2014/main" id="{284C28D2-118D-4AD0-B3B9-9286788F5B24}"/>
+                <a16:creationId xmlns:a16="http://schemas.microsoft.com/office/drawing/2014/main" id="{5E211103-8322-4FFC-9D62-B8CE89F302A1}"/>
               </a:ext>
             </a:extLst>
           </p:cNvPr>
@@ -3199,7 +3199,7 @@
           <p:cNvPr id="2" name="">
             <a:extLst xmlns:a="http://schemas.openxmlformats.org/drawingml/2006/main">
               <a:ext uri="{FF2B5EF4-FFF2-40B4-BE49-F238E27FC236}">
-                <a16:creationId xmlns:a16="http://schemas.microsoft.com/office/drawing/2014/main" id="{DD512F64-0D1A-4E7A-824E-0F03349D3CF5}"/>
+                <a16:creationId xmlns:a16="http://schemas.microsoft.com/office/drawing/2014/main" id="{FAB425B4-86A0-4FD4-B66E-4818F64119E4}"/>
               </a:ext>
             </a:extLst>
           </p:cNvPr>
@@ -3234,7 +3234,7 @@
           <p:cNvPr id="3" name="">
             <a:extLst xmlns:a="http://schemas.openxmlformats.org/drawingml/2006/main">
               <a:ext uri="{FF2B5EF4-FFF2-40B4-BE49-F238E27FC236}">
-                <a16:creationId xmlns:a16="http://schemas.microsoft.com/office/drawing/2014/main" id="{0517710B-33D7-4BFD-BB92-D1D11B250F30}"/>
+                <a16:creationId xmlns:a16="http://schemas.microsoft.com/office/drawing/2014/main" id="{8FD55280-D0B7-4223-B0D4-9A7BA3A49315}"/>
               </a:ext>
             </a:extLst>
           </p:cNvPr>
@@ -3298,7 +3298,7 @@
           <p:cNvPr id="4" name="">
             <a:extLst xmlns:a="http://schemas.openxmlformats.org/drawingml/2006/main">
               <a:ext uri="{FF2B5EF4-FFF2-40B4-BE49-F238E27FC236}">
-                <a16:creationId xmlns:a16="http://schemas.microsoft.com/office/drawing/2014/main" id="{25811844-CFAD-49A8-850F-8F09E1F26540}"/>
+                <a16:creationId xmlns:a16="http://schemas.microsoft.com/office/drawing/2014/main" id="{A0F2B783-9EB9-46F0-931D-DF29C2092DBF}"/>
               </a:ext>
             </a:extLst>
           </p:cNvPr>
@@ -3362,7 +3362,7 @@
           <p:cNvPr id="5" name="">
             <a:extLst xmlns:a="http://schemas.openxmlformats.org/drawingml/2006/main">
               <a:ext uri="{FF2B5EF4-FFF2-40B4-BE49-F238E27FC236}">
-                <a16:creationId xmlns:a16="http://schemas.microsoft.com/office/drawing/2014/main" id="{D09535C0-EED3-4D9A-931D-8419E6861C48}"/>
+                <a16:creationId xmlns:a16="http://schemas.microsoft.com/office/drawing/2014/main" id="{13C5F872-80AB-4FFB-9AA2-FFBBC75F0208}"/>
               </a:ext>
             </a:extLst>
           </p:cNvPr>
@@ -3426,7 +3426,7 @@
           <p:cNvPr id="6" name="">
             <a:extLst xmlns:a="http://schemas.openxmlformats.org/drawingml/2006/main">
               <a:ext uri="{FF2B5EF4-FFF2-40B4-BE49-F238E27FC236}">
-                <a16:creationId xmlns:a16="http://schemas.microsoft.com/office/drawing/2014/main" id="{B012BD1E-B4E9-4863-AC75-110ECD12DB13}"/>
+                <a16:creationId xmlns:a16="http://schemas.microsoft.com/office/drawing/2014/main" id="{90704020-7BAE-496E-90D6-CE7331665A61}"/>
               </a:ext>
             </a:extLst>
           </p:cNvPr>
@@ -3459,7 +3459,7 @@
           <p:cNvPr id="7" name="">
             <a:extLst xmlns:a="http://schemas.openxmlformats.org/drawingml/2006/main">
               <a:ext uri="{FF2B5EF4-FFF2-40B4-BE49-F238E27FC236}">
-                <a16:creationId xmlns:a16="http://schemas.microsoft.com/office/drawing/2014/main" id="{8764293D-F866-443D-9D8D-5359FD9398B4}"/>
+                <a16:creationId xmlns:a16="http://schemas.microsoft.com/office/drawing/2014/main" id="{83E3471B-2ED5-4A4B-A125-B053A7A04ECC}"/>
               </a:ext>
             </a:extLst>
           </p:cNvPr>
@@ -3523,7 +3523,7 @@
           <p:cNvPr id="8" name="">
             <a:extLst xmlns:a="http://schemas.openxmlformats.org/drawingml/2006/main">
               <a:ext uri="{FF2B5EF4-FFF2-40B4-BE49-F238E27FC236}">
-                <a16:creationId xmlns:a16="http://schemas.microsoft.com/office/drawing/2014/main" id="{7DB5C9FC-D9C0-448F-9FA1-9C201ACD6044}"/>
+                <a16:creationId xmlns:a16="http://schemas.microsoft.com/office/drawing/2014/main" id="{2F84570E-3D1C-4F65-BC27-E3A1D87B3FD9}"/>
               </a:ext>
             </a:extLst>
           </p:cNvPr>
@@ -3558,7 +3558,7 @@
           <p:cNvPr id="9" name="">
             <a:extLst xmlns:a="http://schemas.openxmlformats.org/drawingml/2006/main">
               <a:ext uri="{FF2B5EF4-FFF2-40B4-BE49-F238E27FC236}">
-                <a16:creationId xmlns:a16="http://schemas.microsoft.com/office/drawing/2014/main" id="{54AE0711-E509-4331-9A62-DFBE5DCE6890}"/>
+                <a16:creationId xmlns:a16="http://schemas.microsoft.com/office/drawing/2014/main" id="{08505D82-4A20-4154-9A66-9ECEDB064223}"/>
               </a:ext>
             </a:extLst>
           </p:cNvPr>
@@ -3622,7 +3622,7 @@
           <p:cNvPr id="10" name="">
             <a:extLst xmlns:a="http://schemas.openxmlformats.org/drawingml/2006/main">
               <a:ext uri="{FF2B5EF4-FFF2-40B4-BE49-F238E27FC236}">
-                <a16:creationId xmlns:a16="http://schemas.microsoft.com/office/drawing/2014/main" id="{A80C97B2-B725-4F2E-B34A-B0633A5FD696}"/>
+                <a16:creationId xmlns:a16="http://schemas.microsoft.com/office/drawing/2014/main" id="{F4B32DFF-4F23-4B1B-802F-34E7284FD295}"/>
               </a:ext>
             </a:extLst>
           </p:cNvPr>
@@ -3657,7 +3657,7 @@
           <p:cNvPr id="11" name="">
             <a:extLst xmlns:a="http://schemas.openxmlformats.org/drawingml/2006/main">
               <a:ext uri="{FF2B5EF4-FFF2-40B4-BE49-F238E27FC236}">
-                <a16:creationId xmlns:a16="http://schemas.microsoft.com/office/drawing/2014/main" id="{FC9E3805-01DA-4570-9585-ABD012D2DDC9}"/>
+                <a16:creationId xmlns:a16="http://schemas.microsoft.com/office/drawing/2014/main" id="{3E226613-8EDC-43D2-B0BC-FB8E443B2878}"/>
               </a:ext>
             </a:extLst>
           </p:cNvPr>
@@ -3721,7 +3721,7 @@
           <p:cNvPr id="12" name="">
             <a:extLst xmlns:a="http://schemas.openxmlformats.org/drawingml/2006/main">
               <a:ext uri="{FF2B5EF4-FFF2-40B4-BE49-F238E27FC236}">
-                <a16:creationId xmlns:a16="http://schemas.microsoft.com/office/drawing/2014/main" id="{A8419401-25E2-4F99-A842-105ECC923843}"/>
+                <a16:creationId xmlns:a16="http://schemas.microsoft.com/office/drawing/2014/main" id="{A36EDB57-473C-46AE-8104-8A6E7B041D64}"/>
               </a:ext>
             </a:extLst>
           </p:cNvPr>
@@ -3756,7 +3756,7 @@
           <p:cNvPr id="13" name="">
             <a:extLst xmlns:a="http://schemas.openxmlformats.org/drawingml/2006/main">
               <a:ext uri="{FF2B5EF4-FFF2-40B4-BE49-F238E27FC236}">
-                <a16:creationId xmlns:a16="http://schemas.microsoft.com/office/drawing/2014/main" id="{D7C0ABE6-2619-41A3-8965-7BA06521C166}"/>
+                <a16:creationId xmlns:a16="http://schemas.microsoft.com/office/drawing/2014/main" id="{3A2E929F-2977-4BA2-B3A6-617B3F31704F}"/>
               </a:ext>
             </a:extLst>
           </p:cNvPr>
@@ -3820,7 +3820,7 @@
           <p:cNvPr id="14" name="">
             <a:extLst xmlns:a="http://schemas.openxmlformats.org/drawingml/2006/main">
               <a:ext uri="{FF2B5EF4-FFF2-40B4-BE49-F238E27FC236}">
-                <a16:creationId xmlns:a16="http://schemas.microsoft.com/office/drawing/2014/main" id="{31B0CBAC-F32F-44E8-A698-6EC01B8B3524}"/>
+                <a16:creationId xmlns:a16="http://schemas.microsoft.com/office/drawing/2014/main" id="{69D39927-62FD-4C7B-8703-459FE6EE4BCC}"/>
               </a:ext>
             </a:extLst>
           </p:cNvPr>
@@ -3855,7 +3855,7 @@
           <p:cNvPr id="15" name="">
             <a:extLst xmlns:a="http://schemas.openxmlformats.org/drawingml/2006/main">
               <a:ext uri="{FF2B5EF4-FFF2-40B4-BE49-F238E27FC236}">
-                <a16:creationId xmlns:a16="http://schemas.microsoft.com/office/drawing/2014/main" id="{00AF3606-4E87-4A9C-8834-14FB9D0ABCBE}"/>
+                <a16:creationId xmlns:a16="http://schemas.microsoft.com/office/drawing/2014/main" id="{0709B93B-D9A4-4F87-881D-58A36619D7F8}"/>
               </a:ext>
             </a:extLst>
           </p:cNvPr>
@@ -3919,7 +3919,7 @@
           <p:cNvPr id="16" name="">
             <a:extLst xmlns:a="http://schemas.openxmlformats.org/drawingml/2006/main">
               <a:ext uri="{FF2B5EF4-FFF2-40B4-BE49-F238E27FC236}">
-                <a16:creationId xmlns:a16="http://schemas.microsoft.com/office/drawing/2014/main" id="{45773E02-F3D5-4A61-9407-0E873933C4E8}"/>
+                <a16:creationId xmlns:a16="http://schemas.microsoft.com/office/drawing/2014/main" id="{27361384-11B9-45E0-B764-3CC77A37A620}"/>
               </a:ext>
             </a:extLst>
           </p:cNvPr>
@@ -3954,7 +3954,7 @@
           <p:cNvPr id="17" name="">
             <a:extLst xmlns:a="http://schemas.openxmlformats.org/drawingml/2006/main">
               <a:ext uri="{FF2B5EF4-FFF2-40B4-BE49-F238E27FC236}">
-                <a16:creationId xmlns:a16="http://schemas.microsoft.com/office/drawing/2014/main" id="{54EE624F-97EF-459A-89DB-71466657B2CC}"/>
+                <a16:creationId xmlns:a16="http://schemas.microsoft.com/office/drawing/2014/main" id="{1099F3B0-6ED7-41DC-94DE-07DCC02C8CC7}"/>
               </a:ext>
             </a:extLst>
           </p:cNvPr>
@@ -4018,7 +4018,7 @@
           <p:cNvPr id="18" name="">
             <a:extLst xmlns:a="http://schemas.openxmlformats.org/drawingml/2006/main">
               <a:ext uri="{FF2B5EF4-FFF2-40B4-BE49-F238E27FC236}">
-                <a16:creationId xmlns:a16="http://schemas.microsoft.com/office/drawing/2014/main" id="{30FB2E32-D886-4D30-A605-0592BA0B73E5}"/>
+                <a16:creationId xmlns:a16="http://schemas.microsoft.com/office/drawing/2014/main" id="{341C0EF4-AF39-4C4A-A25A-75F96A2A2D5B}"/>
               </a:ext>
             </a:extLst>
           </p:cNvPr>
@@ -4051,7 +4051,7 @@
           <p:cNvPr id="19" name="">
             <a:extLst xmlns:a="http://schemas.openxmlformats.org/drawingml/2006/main">
               <a:ext uri="{FF2B5EF4-FFF2-40B4-BE49-F238E27FC236}">
-                <a16:creationId xmlns:a16="http://schemas.microsoft.com/office/drawing/2014/main" id="{B62F706F-EFBC-4EF8-8D63-D42C2D5E0E57}"/>
+                <a16:creationId xmlns:a16="http://schemas.microsoft.com/office/drawing/2014/main" id="{76E15A08-D712-4F7E-A2F1-BF86E96F07DE}"/>
               </a:ext>
             </a:extLst>
           </p:cNvPr>
@@ -4115,7 +4115,7 @@
           <p:cNvPr id="20" name="">
             <a:extLst xmlns:a="http://schemas.openxmlformats.org/drawingml/2006/main">
               <a:ext uri="{FF2B5EF4-FFF2-40B4-BE49-F238E27FC236}">
-                <a16:creationId xmlns:a16="http://schemas.microsoft.com/office/drawing/2014/main" id="{6A237514-DB65-43EF-888C-50E20F0F6ABE}"/>
+                <a16:creationId xmlns:a16="http://schemas.microsoft.com/office/drawing/2014/main" id="{B847E7D3-AD00-4374-8A54-2EC9275D8E26}"/>
               </a:ext>
             </a:extLst>
           </p:cNvPr>
@@ -4150,7 +4150,7 @@
           <p:cNvPr id="21" name="">
             <a:extLst xmlns:a="http://schemas.openxmlformats.org/drawingml/2006/main">
               <a:ext uri="{FF2B5EF4-FFF2-40B4-BE49-F238E27FC236}">
-                <a16:creationId xmlns:a16="http://schemas.microsoft.com/office/drawing/2014/main" id="{26EF6EA4-B846-4FB9-A755-E54B31A6D647}"/>
+                <a16:creationId xmlns:a16="http://schemas.microsoft.com/office/drawing/2014/main" id="{B216F24E-5881-4E2F-ABB8-C9726282D9C5}"/>
               </a:ext>
             </a:extLst>
           </p:cNvPr>
@@ -4214,7 +4214,7 @@
           <p:cNvPr id="22" name="">
             <a:extLst xmlns:a="http://schemas.openxmlformats.org/drawingml/2006/main">
               <a:ext uri="{FF2B5EF4-FFF2-40B4-BE49-F238E27FC236}">
-                <a16:creationId xmlns:a16="http://schemas.microsoft.com/office/drawing/2014/main" id="{88A458F5-6008-49C8-8A9C-65FFBA45251D}"/>
+                <a16:creationId xmlns:a16="http://schemas.microsoft.com/office/drawing/2014/main" id="{7BE41B62-CF83-4DB8-9A42-C26C34C1CD0C}"/>
               </a:ext>
             </a:extLst>
           </p:cNvPr>
@@ -4249,7 +4249,7 @@
           <p:cNvPr id="23" name="">
             <a:extLst xmlns:a="http://schemas.openxmlformats.org/drawingml/2006/main">
               <a:ext uri="{FF2B5EF4-FFF2-40B4-BE49-F238E27FC236}">
-                <a16:creationId xmlns:a16="http://schemas.microsoft.com/office/drawing/2014/main" id="{8CBF3FA0-8791-49F7-B8E8-6D41DE8CB916}"/>
+                <a16:creationId xmlns:a16="http://schemas.microsoft.com/office/drawing/2014/main" id="{E76C43C9-41B3-493D-9803-506E3570D4BD}"/>
               </a:ext>
             </a:extLst>
           </p:cNvPr>
@@ -4313,7 +4313,7 @@
           <p:cNvPr id="24" name="">
             <a:extLst xmlns:a="http://schemas.openxmlformats.org/drawingml/2006/main">
               <a:ext uri="{FF2B5EF4-FFF2-40B4-BE49-F238E27FC236}">
-                <a16:creationId xmlns:a16="http://schemas.microsoft.com/office/drawing/2014/main" id="{F0878703-AC93-493C-A21C-A0B325A07A35}"/>
+                <a16:creationId xmlns:a16="http://schemas.microsoft.com/office/drawing/2014/main" id="{3B7CFD8C-033A-4E99-8702-1493EC1B33BC}"/>
               </a:ext>
             </a:extLst>
           </p:cNvPr>
@@ -4348,7 +4348,7 @@
           <p:cNvPr id="25" name="">
             <a:extLst xmlns:a="http://schemas.openxmlformats.org/drawingml/2006/main">
               <a:ext uri="{FF2B5EF4-FFF2-40B4-BE49-F238E27FC236}">
-                <a16:creationId xmlns:a16="http://schemas.microsoft.com/office/drawing/2014/main" id="{8F08C9B4-4CF2-42CD-A2E3-2BF72D52864D}"/>
+                <a16:creationId xmlns:a16="http://schemas.microsoft.com/office/drawing/2014/main" id="{297D4CF2-ECA8-49BF-A0E2-BC7BDB8DA58A}"/>
               </a:ext>
             </a:extLst>
           </p:cNvPr>
@@ -4412,7 +4412,7 @@
           <p:cNvPr id="26" name="">
             <a:extLst xmlns:a="http://schemas.openxmlformats.org/drawingml/2006/main">
               <a:ext uri="{FF2B5EF4-FFF2-40B4-BE49-F238E27FC236}">
-                <a16:creationId xmlns:a16="http://schemas.microsoft.com/office/drawing/2014/main" id="{36BE52C2-B2E5-4A50-B161-2890E799C47B}"/>
+                <a16:creationId xmlns:a16="http://schemas.microsoft.com/office/drawing/2014/main" id="{B3419748-E3FE-41BB-AACA-767033316D22}"/>
               </a:ext>
             </a:extLst>
           </p:cNvPr>
@@ -4447,7 +4447,7 @@
           <p:cNvPr id="27" name="">
             <a:extLst xmlns:a="http://schemas.openxmlformats.org/drawingml/2006/main">
               <a:ext uri="{FF2B5EF4-FFF2-40B4-BE49-F238E27FC236}">
-                <a16:creationId xmlns:a16="http://schemas.microsoft.com/office/drawing/2014/main" id="{E7667827-51A3-4EB3-AD4B-046E07EFA42D}"/>
+                <a16:creationId xmlns:a16="http://schemas.microsoft.com/office/drawing/2014/main" id="{02232A7A-5B8A-4A91-B229-71509B2B8EAD}"/>
               </a:ext>
             </a:extLst>
           </p:cNvPr>
@@ -4511,7 +4511,7 @@
           <p:cNvPr id="28" name="">
             <a:extLst xmlns:a="http://schemas.openxmlformats.org/drawingml/2006/main">
               <a:ext uri="{FF2B5EF4-FFF2-40B4-BE49-F238E27FC236}">
-                <a16:creationId xmlns:a16="http://schemas.microsoft.com/office/drawing/2014/main" id="{C240F537-A6DF-4C8C-8230-0AD12162DA0D}"/>
+                <a16:creationId xmlns:a16="http://schemas.microsoft.com/office/drawing/2014/main" id="{9A181182-1A33-45CE-9DF9-504EBFB38E7A}"/>
               </a:ext>
             </a:extLst>
           </p:cNvPr>
@@ -4544,7 +4544,7 @@
           <p:cNvPr id="29" name="">
             <a:extLst xmlns:a="http://schemas.openxmlformats.org/drawingml/2006/main">
               <a:ext uri="{FF2B5EF4-FFF2-40B4-BE49-F238E27FC236}">
-                <a16:creationId xmlns:a16="http://schemas.microsoft.com/office/drawing/2014/main" id="{75635123-467B-4808-BE37-DCA89FF41035}"/>
+                <a16:creationId xmlns:a16="http://schemas.microsoft.com/office/drawing/2014/main" id="{C64D24B0-0380-4AA1-994F-53370719F8D5}"/>
               </a:ext>
             </a:extLst>
           </p:cNvPr>
@@ -4608,7 +4608,7 @@
           <p:cNvPr id="30" name="">
             <a:extLst xmlns:a="http://schemas.openxmlformats.org/drawingml/2006/main">
               <a:ext uri="{FF2B5EF4-FFF2-40B4-BE49-F238E27FC236}">
-                <a16:creationId xmlns:a16="http://schemas.microsoft.com/office/drawing/2014/main" id="{D4886D62-F0B0-49A8-B01C-9D8F28428E74}"/>
+                <a16:creationId xmlns:a16="http://schemas.microsoft.com/office/drawing/2014/main" id="{BFBC3655-88FD-4CE2-85D7-7AADE1B477C3}"/>
               </a:ext>
             </a:extLst>
           </p:cNvPr>
@@ -4643,7 +4643,7 @@
           <p:cNvPr id="31" name="">
             <a:extLst xmlns:a="http://schemas.openxmlformats.org/drawingml/2006/main">
               <a:ext uri="{FF2B5EF4-FFF2-40B4-BE49-F238E27FC236}">
-                <a16:creationId xmlns:a16="http://schemas.microsoft.com/office/drawing/2014/main" id="{383B1D97-9923-4737-87B5-8C1F766BE494}"/>
+                <a16:creationId xmlns:a16="http://schemas.microsoft.com/office/drawing/2014/main" id="{E69E4909-5953-4833-B3DF-AEB2C11B1714}"/>
               </a:ext>
             </a:extLst>
           </p:cNvPr>
@@ -4707,7 +4707,7 @@
           <p:cNvPr id="32" name="">
             <a:extLst xmlns:a="http://schemas.openxmlformats.org/drawingml/2006/main">
               <a:ext uri="{FF2B5EF4-FFF2-40B4-BE49-F238E27FC236}">
-                <a16:creationId xmlns:a16="http://schemas.microsoft.com/office/drawing/2014/main" id="{9568993B-7FDD-4283-8579-936E22A4E425}"/>
+                <a16:creationId xmlns:a16="http://schemas.microsoft.com/office/drawing/2014/main" id="{53D6DADC-A8A1-4ED1-A4F0-F7EF189A0AA9}"/>
               </a:ext>
             </a:extLst>
           </p:cNvPr>
@@ -4742,7 +4742,7 @@
           <p:cNvPr id="33" name="">
             <a:extLst xmlns:a="http://schemas.openxmlformats.org/drawingml/2006/main">
               <a:ext uri="{FF2B5EF4-FFF2-40B4-BE49-F238E27FC236}">
-                <a16:creationId xmlns:a16="http://schemas.microsoft.com/office/drawing/2014/main" id="{BAFCB5D8-8F20-4974-9E2D-DE83D069B9DF}"/>
+                <a16:creationId xmlns:a16="http://schemas.microsoft.com/office/drawing/2014/main" id="{AF2B8719-64C1-4FD5-BC12-1ACBBDA2EC09}"/>
               </a:ext>
             </a:extLst>
           </p:cNvPr>
@@ -4806,7 +4806,7 @@
           <p:cNvPr id="34" name="">
             <a:extLst xmlns:a="http://schemas.openxmlformats.org/drawingml/2006/main">
               <a:ext uri="{FF2B5EF4-FFF2-40B4-BE49-F238E27FC236}">
-                <a16:creationId xmlns:a16="http://schemas.microsoft.com/office/drawing/2014/main" id="{195E5CB5-B223-45D5-87EA-FBB568B14B33}"/>
+                <a16:creationId xmlns:a16="http://schemas.microsoft.com/office/drawing/2014/main" id="{D1A35439-2B04-4FCE-97F3-C1A226D35938}"/>
               </a:ext>
             </a:extLst>
           </p:cNvPr>
@@ -4841,7 +4841,7 @@
           <p:cNvPr id="35" name="">
             <a:extLst xmlns:a="http://schemas.openxmlformats.org/drawingml/2006/main">
               <a:ext uri="{FF2B5EF4-FFF2-40B4-BE49-F238E27FC236}">
-                <a16:creationId xmlns:a16="http://schemas.microsoft.com/office/drawing/2014/main" id="{AE1794D5-E20C-4180-8A02-EE5A8960BDBD}"/>
+                <a16:creationId xmlns:a16="http://schemas.microsoft.com/office/drawing/2014/main" id="{A29A6DE7-5F07-4F1D-BF74-F7372F23DA19}"/>
               </a:ext>
             </a:extLst>
           </p:cNvPr>
@@ -4905,7 +4905,7 @@
           <p:cNvPr id="36" name="">
             <a:extLst xmlns:a="http://schemas.openxmlformats.org/drawingml/2006/main">
               <a:ext uri="{FF2B5EF4-FFF2-40B4-BE49-F238E27FC236}">
-                <a16:creationId xmlns:a16="http://schemas.microsoft.com/office/drawing/2014/main" id="{C939AD65-BBF1-43F3-8ADF-40728F15E84F}"/>
+                <a16:creationId xmlns:a16="http://schemas.microsoft.com/office/drawing/2014/main" id="{A6EDA51F-95C3-44FA-B3AC-0E05FFE487C0}"/>
               </a:ext>
             </a:extLst>
           </p:cNvPr>
@@ -4940,7 +4940,7 @@
           <p:cNvPr id="37" name="">
             <a:extLst xmlns:a="http://schemas.openxmlformats.org/drawingml/2006/main">
               <a:ext uri="{FF2B5EF4-FFF2-40B4-BE49-F238E27FC236}">
-                <a16:creationId xmlns:a16="http://schemas.microsoft.com/office/drawing/2014/main" id="{7535BCF2-25C7-4E81-89DC-A29EBB46523F}"/>
+                <a16:creationId xmlns:a16="http://schemas.microsoft.com/office/drawing/2014/main" id="{85FFD0C2-F4C3-49B4-9A2C-0DD40DA562C6}"/>
               </a:ext>
             </a:extLst>
           </p:cNvPr>
@@ -5004,7 +5004,7 @@
           <p:cNvPr id="38" name="">
             <a:extLst xmlns:a="http://schemas.openxmlformats.org/drawingml/2006/main">
               <a:ext uri="{FF2B5EF4-FFF2-40B4-BE49-F238E27FC236}">
-                <a16:creationId xmlns:a16="http://schemas.microsoft.com/office/drawing/2014/main" id="{0CB08E76-DDAF-40D7-8915-F101DA00A28F}"/>
+                <a16:creationId xmlns:a16="http://schemas.microsoft.com/office/drawing/2014/main" id="{9859FBFC-1D0E-4674-8F0D-E72679C86F65}"/>
               </a:ext>
             </a:extLst>
           </p:cNvPr>
@@ -5037,7 +5037,7 @@
           <p:cNvPr id="39" name="">
             <a:extLst xmlns:a="http://schemas.openxmlformats.org/drawingml/2006/main">
               <a:ext uri="{FF2B5EF4-FFF2-40B4-BE49-F238E27FC236}">
-                <a16:creationId xmlns:a16="http://schemas.microsoft.com/office/drawing/2014/main" id="{DC90057A-540B-420F-86E1-CCE2BE0F8515}"/>
+                <a16:creationId xmlns:a16="http://schemas.microsoft.com/office/drawing/2014/main" id="{2D6D1649-8629-4746-91D3-BEF10A39E815}"/>
               </a:ext>
             </a:extLst>
           </p:cNvPr>
@@ -5070,7 +5070,7 @@
           <p:cNvPr id="40" name="">
             <a:extLst xmlns:a="http://schemas.openxmlformats.org/drawingml/2006/main">
               <a:ext uri="{FF2B5EF4-FFF2-40B4-BE49-F238E27FC236}">
-                <a16:creationId xmlns:a16="http://schemas.microsoft.com/office/drawing/2014/main" id="{28E80A56-73F8-4F32-AEBE-2EE5C7C3CE0E}"/>
+                <a16:creationId xmlns:a16="http://schemas.microsoft.com/office/drawing/2014/main" id="{607B9C5B-4F26-4FFC-8469-935B3D987607}"/>
               </a:ext>
             </a:extLst>
           </p:cNvPr>
@@ -5134,7 +5134,7 @@
           <p:cNvPr id="41" name="">
             <a:extLst xmlns:a="http://schemas.openxmlformats.org/drawingml/2006/main">
               <a:ext uri="{FF2B5EF4-FFF2-40B4-BE49-F238E27FC236}">
-                <a16:creationId xmlns:a16="http://schemas.microsoft.com/office/drawing/2014/main" id="{BBBB6EBC-6ADD-4D2F-914D-FB83E00003BD}"/>
+                <a16:creationId xmlns:a16="http://schemas.microsoft.com/office/drawing/2014/main" id="{756F2DD1-57EC-4594-A326-7FEFF97B7639}"/>
               </a:ext>
             </a:extLst>
           </p:cNvPr>
@@ -5169,7 +5169,7 @@
           <p:cNvPr id="42" name="">
             <a:extLst xmlns:a="http://schemas.openxmlformats.org/drawingml/2006/main">
               <a:ext uri="{FF2B5EF4-FFF2-40B4-BE49-F238E27FC236}">
-                <a16:creationId xmlns:a16="http://schemas.microsoft.com/office/drawing/2014/main" id="{6F1824D4-AED5-4FED-B887-976FF60ECBC8}"/>
+                <a16:creationId xmlns:a16="http://schemas.microsoft.com/office/drawing/2014/main" id="{53D232B2-1C6F-4C60-932F-15F93905D8AA}"/>
               </a:ext>
             </a:extLst>
           </p:cNvPr>
@@ -5233,7 +5233,7 @@
           <p:cNvPr id="43" name="">
             <a:extLst xmlns:a="http://schemas.openxmlformats.org/drawingml/2006/main">
               <a:ext uri="{FF2B5EF4-FFF2-40B4-BE49-F238E27FC236}">
-                <a16:creationId xmlns:a16="http://schemas.microsoft.com/office/drawing/2014/main" id="{B6CB109D-B2F1-4435-843F-D1164F89EFDB}"/>
+                <a16:creationId xmlns:a16="http://schemas.microsoft.com/office/drawing/2014/main" id="{F21C959C-9971-495A-A791-71D57E10AB8D}"/>
               </a:ext>
             </a:extLst>
           </p:cNvPr>
@@ -5268,7 +5268,7 @@
           <p:cNvPr id="44" name="">
             <a:extLst xmlns:a="http://schemas.openxmlformats.org/drawingml/2006/main">
               <a:ext uri="{FF2B5EF4-FFF2-40B4-BE49-F238E27FC236}">
-                <a16:creationId xmlns:a16="http://schemas.microsoft.com/office/drawing/2014/main" id="{4C1CAD40-C2C5-49DF-87CE-96976EF13C81}"/>
+                <a16:creationId xmlns:a16="http://schemas.microsoft.com/office/drawing/2014/main" id="{13DF3443-FB96-4866-ADB9-7CB6278B4F66}"/>
               </a:ext>
             </a:extLst>
           </p:cNvPr>
@@ -5332,7 +5332,7 @@
           <p:cNvPr id="45" name="">
             <a:extLst xmlns:a="http://schemas.openxmlformats.org/drawingml/2006/main">
               <a:ext uri="{FF2B5EF4-FFF2-40B4-BE49-F238E27FC236}">
-                <a16:creationId xmlns:a16="http://schemas.microsoft.com/office/drawing/2014/main" id="{BA0E2550-3F4D-4ABB-B76D-EC1A469FCE4C}"/>
+                <a16:creationId xmlns:a16="http://schemas.microsoft.com/office/drawing/2014/main" id="{3FA93E89-FAA2-4903-8AE0-30712CDA15AC}"/>
               </a:ext>
             </a:extLst>
           </p:cNvPr>
@@ -5367,7 +5367,7 @@
           <p:cNvPr id="46" name="">
             <a:extLst xmlns:a="http://schemas.openxmlformats.org/drawingml/2006/main">
               <a:ext uri="{FF2B5EF4-FFF2-40B4-BE49-F238E27FC236}">
-                <a16:creationId xmlns:a16="http://schemas.microsoft.com/office/drawing/2014/main" id="{B9664D34-DA2D-4C20-868C-66E0B13BCD0D}"/>
+                <a16:creationId xmlns:a16="http://schemas.microsoft.com/office/drawing/2014/main" id="{B27EB889-3545-42E7-9EDC-31BBD0CF8C72}"/>
               </a:ext>
             </a:extLst>
           </p:cNvPr>
@@ -5431,7 +5431,7 @@
           <p:cNvPr id="47" name="">
             <a:extLst xmlns:a="http://schemas.openxmlformats.org/drawingml/2006/main">
               <a:ext uri="{FF2B5EF4-FFF2-40B4-BE49-F238E27FC236}">
-                <a16:creationId xmlns:a16="http://schemas.microsoft.com/office/drawing/2014/main" id="{8FED0508-F42E-4AC1-A19F-47655F8C148C}"/>
+                <a16:creationId xmlns:a16="http://schemas.microsoft.com/office/drawing/2014/main" id="{AED4F002-61B5-44E7-9A12-9A262445938B}"/>
               </a:ext>
             </a:extLst>
           </p:cNvPr>
@@ -5464,7 +5464,7 @@
           <p:cNvPr id="48" name="">
             <a:extLst xmlns:a="http://schemas.openxmlformats.org/drawingml/2006/main">
               <a:ext uri="{FF2B5EF4-FFF2-40B4-BE49-F238E27FC236}">
-                <a16:creationId xmlns:a16="http://schemas.microsoft.com/office/drawing/2014/main" id="{5057B3D3-D035-4DDA-BC83-4EBC71C67F15}"/>
+                <a16:creationId xmlns:a16="http://schemas.microsoft.com/office/drawing/2014/main" id="{15861648-CF1A-44DA-90CE-17173290073D}"/>
               </a:ext>
             </a:extLst>
           </p:cNvPr>
@@ -5497,7 +5497,7 @@
           <p:cNvPr id="49" name="">
             <a:extLst xmlns:a="http://schemas.openxmlformats.org/drawingml/2006/main">
               <a:ext uri="{FF2B5EF4-FFF2-40B4-BE49-F238E27FC236}">
-                <a16:creationId xmlns:a16="http://schemas.microsoft.com/office/drawing/2014/main" id="{7F01BED2-1ACC-46AE-85CD-B54AEC01F58D}"/>
+                <a16:creationId xmlns:a16="http://schemas.microsoft.com/office/drawing/2014/main" id="{56485EC5-09DB-464A-B2BB-88778BFF1085}"/>
               </a:ext>
             </a:extLst>
           </p:cNvPr>
@@ -5561,7 +5561,7 @@
           <p:cNvPr id="50" name="">
             <a:extLst xmlns:a="http://schemas.openxmlformats.org/drawingml/2006/main">
               <a:ext uri="{FF2B5EF4-FFF2-40B4-BE49-F238E27FC236}">
-                <a16:creationId xmlns:a16="http://schemas.microsoft.com/office/drawing/2014/main" id="{7385CDE7-20EC-4B79-A7CD-CD3B56B01B87}"/>
+                <a16:creationId xmlns:a16="http://schemas.microsoft.com/office/drawing/2014/main" id="{01B05C28-48A6-4EEE-9437-9185940F5711}"/>
               </a:ext>
             </a:extLst>
           </p:cNvPr>
@@ -5596,7 +5596,7 @@
           <p:cNvPr id="51" name="">
             <a:extLst xmlns:a="http://schemas.openxmlformats.org/drawingml/2006/main">
               <a:ext uri="{FF2B5EF4-FFF2-40B4-BE49-F238E27FC236}">
-                <a16:creationId xmlns:a16="http://schemas.microsoft.com/office/drawing/2014/main" id="{77BBF616-C267-447C-B7AE-0593263DCB1A}"/>
+                <a16:creationId xmlns:a16="http://schemas.microsoft.com/office/drawing/2014/main" id="{61B0526D-692B-45D2-A43B-42E1E2EC119A}"/>
               </a:ext>
             </a:extLst>
           </p:cNvPr>
@@ -5660,7 +5660,7 @@
           <p:cNvPr id="52" name="">
             <a:extLst xmlns:a="http://schemas.openxmlformats.org/drawingml/2006/main">
               <a:ext uri="{FF2B5EF4-FFF2-40B4-BE49-F238E27FC236}">
-                <a16:creationId xmlns:a16="http://schemas.microsoft.com/office/drawing/2014/main" id="{20965403-85CB-4244-A9A6-236ADFCBEE4E}"/>
+                <a16:creationId xmlns:a16="http://schemas.microsoft.com/office/drawing/2014/main" id="{0BB20E09-B0AE-4FC8-A9BA-649AF3C8906C}"/>
               </a:ext>
             </a:extLst>
           </p:cNvPr>
@@ -5695,7 +5695,7 @@
           <p:cNvPr id="53" name="">
             <a:extLst xmlns:a="http://schemas.openxmlformats.org/drawingml/2006/main">
               <a:ext uri="{FF2B5EF4-FFF2-40B4-BE49-F238E27FC236}">
-                <a16:creationId xmlns:a16="http://schemas.microsoft.com/office/drawing/2014/main" id="{A81AB3DC-482D-4D95-B863-A83F873FB49D}"/>
+                <a16:creationId xmlns:a16="http://schemas.microsoft.com/office/drawing/2014/main" id="{EC4264D0-331A-4794-9C45-DCB2A830EC0D}"/>
               </a:ext>
             </a:extLst>
           </p:cNvPr>
@@ -5759,7 +5759,7 @@
           <p:cNvPr id="54" name="">
             <a:extLst xmlns:a="http://schemas.openxmlformats.org/drawingml/2006/main">
               <a:ext uri="{FF2B5EF4-FFF2-40B4-BE49-F238E27FC236}">
-                <a16:creationId xmlns:a16="http://schemas.microsoft.com/office/drawing/2014/main" id="{C1A309BA-3F5C-4B3B-AFF7-FE51C627D0CB}"/>
+                <a16:creationId xmlns:a16="http://schemas.microsoft.com/office/drawing/2014/main" id="{ED1D08A3-7E7A-4E3B-97C6-4DEC34CD623B}"/>
               </a:ext>
             </a:extLst>
           </p:cNvPr>
@@ -5794,7 +5794,7 @@
           <p:cNvPr id="55" name="">
             <a:extLst xmlns:a="http://schemas.openxmlformats.org/drawingml/2006/main">
               <a:ext uri="{FF2B5EF4-FFF2-40B4-BE49-F238E27FC236}">
-                <a16:creationId xmlns:a16="http://schemas.microsoft.com/office/drawing/2014/main" id="{10BA7931-A28D-4598-959A-FFF139A9C15E}"/>
+                <a16:creationId xmlns:a16="http://schemas.microsoft.com/office/drawing/2014/main" id="{5273D45F-E3D9-4431-8438-2B2A7FF9BEDD}"/>
               </a:ext>
             </a:extLst>
           </p:cNvPr>
@@ -5858,7 +5858,7 @@
           <p:cNvPr id="56" name="">
             <a:extLst xmlns:a="http://schemas.openxmlformats.org/drawingml/2006/main">
               <a:ext uri="{FF2B5EF4-FFF2-40B4-BE49-F238E27FC236}">
-                <a16:creationId xmlns:a16="http://schemas.microsoft.com/office/drawing/2014/main" id="{A1F902D7-3BA0-4992-8A9E-59A8A7B77CFF}"/>
+                <a16:creationId xmlns:a16="http://schemas.microsoft.com/office/drawing/2014/main" id="{831F1D8E-703D-43D0-BDD0-B96D783A99CC}"/>
               </a:ext>
             </a:extLst>
           </p:cNvPr>
@@ -5922,7 +5922,7 @@
           <p:cNvPr id="57" name="">
             <a:extLst xmlns:a="http://schemas.openxmlformats.org/drawingml/2006/main">
               <a:ext uri="{FF2B5EF4-FFF2-40B4-BE49-F238E27FC236}">
-                <a16:creationId xmlns:a16="http://schemas.microsoft.com/office/drawing/2014/main" id="{D54254F2-E402-44D5-8EC5-825EBE544009}"/>
+                <a16:creationId xmlns:a16="http://schemas.microsoft.com/office/drawing/2014/main" id="{EE1946FD-B1C7-4CEB-A506-FA421476A255}"/>
               </a:ext>
             </a:extLst>
           </p:cNvPr>
@@ -5957,7 +5957,7 @@
           <p:cNvPr id="58" name="">
             <a:extLst xmlns:a="http://schemas.openxmlformats.org/drawingml/2006/main">
               <a:ext uri="{FF2B5EF4-FFF2-40B4-BE49-F238E27FC236}">
-                <a16:creationId xmlns:a16="http://schemas.microsoft.com/office/drawing/2014/main" id="{F41E15E3-5FAF-48F5-802D-CAE02144859F}"/>
+                <a16:creationId xmlns:a16="http://schemas.microsoft.com/office/drawing/2014/main" id="{14256124-A9DF-418D-A6F3-8BD03C16EA64}"/>
               </a:ext>
             </a:extLst>
           </p:cNvPr>
@@ -6021,7 +6021,7 @@
           <p:cNvPr id="59" name="">
             <a:extLst xmlns:a="http://schemas.openxmlformats.org/drawingml/2006/main">
               <a:ext uri="{FF2B5EF4-FFF2-40B4-BE49-F238E27FC236}">
-                <a16:creationId xmlns:a16="http://schemas.microsoft.com/office/drawing/2014/main" id="{C6E3BC06-CE66-4D8B-802C-6EF2A08AB9C0}"/>
+                <a16:creationId xmlns:a16="http://schemas.microsoft.com/office/drawing/2014/main" id="{F662B25E-0B69-441C-B244-DA11D77ACFF9}"/>
               </a:ext>
             </a:extLst>
           </p:cNvPr>
@@ -6083,7 +6083,7 @@
     </p:spTree>
     <p:extLst>
       <p:ext uri="{BB962C8B-B14F-4D97-AF65-F5344CB8AC3E}">
-        <p14:creationId xmlns:p14="http://schemas.microsoft.com/office/powerpoint/2010/main" val="1300325606"/>
+        <p14:creationId xmlns:p14="http://schemas.microsoft.com/office/powerpoint/2010/main" val="226006258"/>
       </p:ext>
     </p:extLst>
   </p:cSld>
@@ -6107,7 +6107,7 @@
           <p:cNvPr id="1" name="">
             <a:extLst xmlns:a="http://schemas.openxmlformats.org/drawingml/2006/main">
               <a:ext uri="{FF2B5EF4-FFF2-40B4-BE49-F238E27FC236}">
-                <a16:creationId xmlns:a16="http://schemas.microsoft.com/office/drawing/2014/main" id="{825B5089-7B9B-46BD-A967-5F978D9F7BA3}"/>
+                <a16:creationId xmlns:a16="http://schemas.microsoft.com/office/drawing/2014/main" id="{5FED6FD5-3A72-4968-8542-88FFD73187FB}"/>
               </a:ext>
             </a:extLst>
           </p:cNvPr>
@@ -6142,7 +6142,7 @@
           <p:cNvPr id="2" name="">
             <a:extLst xmlns:a="http://schemas.openxmlformats.org/drawingml/2006/main">
               <a:ext uri="{FF2B5EF4-FFF2-40B4-BE49-F238E27FC236}">
-                <a16:creationId xmlns:a16="http://schemas.microsoft.com/office/drawing/2014/main" id="{69699DE3-B8B1-4096-90E5-F8AACAC6D0AC}"/>
+                <a16:creationId xmlns:a16="http://schemas.microsoft.com/office/drawing/2014/main" id="{72A5D0C3-44D6-4A62-98BB-6533CEB1C330}"/>
               </a:ext>
             </a:extLst>
           </p:cNvPr>
@@ -6177,7 +6177,7 @@
           <p:cNvPr id="3" name="">
             <a:extLst xmlns:a="http://schemas.openxmlformats.org/drawingml/2006/main">
               <a:ext uri="{FF2B5EF4-FFF2-40B4-BE49-F238E27FC236}">
-                <a16:creationId xmlns:a16="http://schemas.microsoft.com/office/drawing/2014/main" id="{AACC86C9-A972-40F3-9D02-7A27CA13A503}"/>
+                <a16:creationId xmlns:a16="http://schemas.microsoft.com/office/drawing/2014/main" id="{544D5B1C-D74E-4D05-B00B-560BD55A6976}"/>
               </a:ext>
             </a:extLst>
           </p:cNvPr>
@@ -6241,7 +6241,7 @@
           <p:cNvPr id="4" name="">
             <a:extLst xmlns:a="http://schemas.openxmlformats.org/drawingml/2006/main">
               <a:ext uri="{FF2B5EF4-FFF2-40B4-BE49-F238E27FC236}">
-                <a16:creationId xmlns:a16="http://schemas.microsoft.com/office/drawing/2014/main" id="{3091AA8F-E993-43C4-84D2-9C792D2623B8}"/>
+                <a16:creationId xmlns:a16="http://schemas.microsoft.com/office/drawing/2014/main" id="{E180DD91-192B-4E9E-9A70-D4C4C68EE7E4}"/>
               </a:ext>
             </a:extLst>
           </p:cNvPr>
@@ -6305,7 +6305,7 @@
           <p:cNvPr id="5" name="">
             <a:extLst xmlns:a="http://schemas.openxmlformats.org/drawingml/2006/main">
               <a:ext uri="{FF2B5EF4-FFF2-40B4-BE49-F238E27FC236}">
-                <a16:creationId xmlns:a16="http://schemas.microsoft.com/office/drawing/2014/main" id="{BE18FCD7-5CBF-4682-888F-9576C5B71DA8}"/>
+                <a16:creationId xmlns:a16="http://schemas.microsoft.com/office/drawing/2014/main" id="{C6DB1D62-18BD-437C-A14A-A096649F754E}"/>
               </a:ext>
             </a:extLst>
           </p:cNvPr>
@@ -6369,7 +6369,7 @@
           <p:cNvPr id="6" name="">
             <a:extLst xmlns:a="http://schemas.openxmlformats.org/drawingml/2006/main">
               <a:ext uri="{FF2B5EF4-FFF2-40B4-BE49-F238E27FC236}">
-                <a16:creationId xmlns:a16="http://schemas.microsoft.com/office/drawing/2014/main" id="{69A758C0-49A5-48F9-82C0-DE59327F834A}"/>
+                <a16:creationId xmlns:a16="http://schemas.microsoft.com/office/drawing/2014/main" id="{73BEFD2D-4EC7-4999-9E03-E8666E3F1C16}"/>
               </a:ext>
             </a:extLst>
           </p:cNvPr>
@@ -6402,7 +6402,7 @@
           <p:cNvPr id="7" name="">
             <a:extLst xmlns:a="http://schemas.openxmlformats.org/drawingml/2006/main">
               <a:ext uri="{FF2B5EF4-FFF2-40B4-BE49-F238E27FC236}">
-                <a16:creationId xmlns:a16="http://schemas.microsoft.com/office/drawing/2014/main" id="{58AA8354-C341-4950-A3C7-4BE5C84A9F3E}"/>
+                <a16:creationId xmlns:a16="http://schemas.microsoft.com/office/drawing/2014/main" id="{F06DEF87-9895-41A1-A4E6-D05F188B7297}"/>
               </a:ext>
             </a:extLst>
           </p:cNvPr>
@@ -6466,7 +6466,7 @@
           <p:cNvPr id="8" name="">
             <a:extLst xmlns:a="http://schemas.openxmlformats.org/drawingml/2006/main">
               <a:ext uri="{FF2B5EF4-FFF2-40B4-BE49-F238E27FC236}">
-                <a16:creationId xmlns:a16="http://schemas.microsoft.com/office/drawing/2014/main" id="{74A49957-C0C2-40FC-8DFA-2A865FA35D22}"/>
+                <a16:creationId xmlns:a16="http://schemas.microsoft.com/office/drawing/2014/main" id="{93DEE179-4A5B-4C6D-99F5-AEC62F25D578}"/>
               </a:ext>
             </a:extLst>
           </p:cNvPr>
@@ -6530,7 +6530,7 @@
           <p:cNvPr id="9" name="">
             <a:extLst xmlns:a="http://schemas.openxmlformats.org/drawingml/2006/main">
               <a:ext uri="{FF2B5EF4-FFF2-40B4-BE49-F238E27FC236}">
-                <a16:creationId xmlns:a16="http://schemas.microsoft.com/office/drawing/2014/main" id="{5987EB89-CECB-4408-9CDB-47A8EF9907B1}"/>
+                <a16:creationId xmlns:a16="http://schemas.microsoft.com/office/drawing/2014/main" id="{C209D0EF-3AD2-4A33-BA5C-DF985C995EEB}"/>
               </a:ext>
             </a:extLst>
           </p:cNvPr>
@@ -6563,7 +6563,7 @@
           <p:cNvPr id="10" name="">
             <a:extLst xmlns:a="http://schemas.openxmlformats.org/drawingml/2006/main">
               <a:ext uri="{FF2B5EF4-FFF2-40B4-BE49-F238E27FC236}">
-                <a16:creationId xmlns:a16="http://schemas.microsoft.com/office/drawing/2014/main" id="{E70DD9DA-34DA-4C3F-8064-B9ACEE1E42C9}"/>
+                <a16:creationId xmlns:a16="http://schemas.microsoft.com/office/drawing/2014/main" id="{FEDFB6C9-6D57-41B8-AF4C-109B4985075C}"/>
               </a:ext>
             </a:extLst>
           </p:cNvPr>
@@ -6627,7 +6627,7 @@
           <p:cNvPr id="11" name="">
             <a:extLst xmlns:a="http://schemas.openxmlformats.org/drawingml/2006/main">
               <a:ext uri="{FF2B5EF4-FFF2-40B4-BE49-F238E27FC236}">
-                <a16:creationId xmlns:a16="http://schemas.microsoft.com/office/drawing/2014/main" id="{3D16AD08-79AA-42E6-9AFE-3D93281080E4}"/>
+                <a16:creationId xmlns:a16="http://schemas.microsoft.com/office/drawing/2014/main" id="{9BF4CF27-BB2B-4519-9EFC-1E7F061A7458}"/>
               </a:ext>
             </a:extLst>
           </p:cNvPr>
@@ -6691,7 +6691,7 @@
           <p:cNvPr id="12" name="">
             <a:extLst xmlns:a="http://schemas.openxmlformats.org/drawingml/2006/main">
               <a:ext uri="{FF2B5EF4-FFF2-40B4-BE49-F238E27FC236}">
-                <a16:creationId xmlns:a16="http://schemas.microsoft.com/office/drawing/2014/main" id="{50E85C10-D890-4578-AFF4-D5DFE0BA0D74}"/>
+                <a16:creationId xmlns:a16="http://schemas.microsoft.com/office/drawing/2014/main" id="{F433CF62-13DB-432B-AEA4-78AD230855AB}"/>
               </a:ext>
             </a:extLst>
           </p:cNvPr>
@@ -6724,7 +6724,7 @@
           <p:cNvPr id="13" name="">
             <a:extLst xmlns:a="http://schemas.openxmlformats.org/drawingml/2006/main">
               <a:ext uri="{FF2B5EF4-FFF2-40B4-BE49-F238E27FC236}">
-                <a16:creationId xmlns:a16="http://schemas.microsoft.com/office/drawing/2014/main" id="{ACB2E3D6-89BD-4811-BD0E-09E267F7AF3C}"/>
+                <a16:creationId xmlns:a16="http://schemas.microsoft.com/office/drawing/2014/main" id="{A205F80C-4835-4132-8265-BDC5A9C4EF29}"/>
               </a:ext>
             </a:extLst>
           </p:cNvPr>
@@ -6788,7 +6788,7 @@
           <p:cNvPr id="14" name="">
             <a:extLst xmlns:a="http://schemas.openxmlformats.org/drawingml/2006/main">
               <a:ext uri="{FF2B5EF4-FFF2-40B4-BE49-F238E27FC236}">
-                <a16:creationId xmlns:a16="http://schemas.microsoft.com/office/drawing/2014/main" id="{CB0EF320-E122-47D4-9D4C-543FBA80C2AB}"/>
+                <a16:creationId xmlns:a16="http://schemas.microsoft.com/office/drawing/2014/main" id="{9672845B-D556-4ABC-BF02-A4B2FEBF6EB5}"/>
               </a:ext>
             </a:extLst>
           </p:cNvPr>
@@ -6852,7 +6852,7 @@
           <p:cNvPr id="15" name="">
             <a:extLst xmlns:a="http://schemas.openxmlformats.org/drawingml/2006/main">
               <a:ext uri="{FF2B5EF4-FFF2-40B4-BE49-F238E27FC236}">
-                <a16:creationId xmlns:a16="http://schemas.microsoft.com/office/drawing/2014/main" id="{12E05D67-80D5-4A45-805D-A4410367445A}"/>
+                <a16:creationId xmlns:a16="http://schemas.microsoft.com/office/drawing/2014/main" id="{95CDD3BE-5B7C-41C9-B8F4-F03E13E77B51}"/>
               </a:ext>
             </a:extLst>
           </p:cNvPr>
@@ -6885,7 +6885,7 @@
           <p:cNvPr id="16" name="">
             <a:extLst xmlns:a="http://schemas.openxmlformats.org/drawingml/2006/main">
               <a:ext uri="{FF2B5EF4-FFF2-40B4-BE49-F238E27FC236}">
-                <a16:creationId xmlns:a16="http://schemas.microsoft.com/office/drawing/2014/main" id="{16089084-EF53-425A-9D86-5EF527DF3303}"/>
+                <a16:creationId xmlns:a16="http://schemas.microsoft.com/office/drawing/2014/main" id="{10AE0F2B-40B7-4CAD-BA67-ED083F6E91E0}"/>
               </a:ext>
             </a:extLst>
           </p:cNvPr>
@@ -6949,7 +6949,7 @@
           <p:cNvPr id="17" name="">
             <a:extLst xmlns:a="http://schemas.openxmlformats.org/drawingml/2006/main">
               <a:ext uri="{FF2B5EF4-FFF2-40B4-BE49-F238E27FC236}">
-                <a16:creationId xmlns:a16="http://schemas.microsoft.com/office/drawing/2014/main" id="{3ED5FD67-F940-4240-9D11-7A143AD548F9}"/>
+                <a16:creationId xmlns:a16="http://schemas.microsoft.com/office/drawing/2014/main" id="{C79D1A6F-8F74-41FE-B283-C71DDB2E5287}"/>
               </a:ext>
             </a:extLst>
           </p:cNvPr>
@@ -7013,7 +7013,7 @@
           <p:cNvPr id="18" name="">
             <a:extLst xmlns:a="http://schemas.openxmlformats.org/drawingml/2006/main">
               <a:ext uri="{FF2B5EF4-FFF2-40B4-BE49-F238E27FC236}">
-                <a16:creationId xmlns:a16="http://schemas.microsoft.com/office/drawing/2014/main" id="{D72C9181-22E3-41F2-BF41-D46DCBCBB309}"/>
+                <a16:creationId xmlns:a16="http://schemas.microsoft.com/office/drawing/2014/main" id="{D25FE070-66FC-4B89-8190-0C47325FCE3A}"/>
               </a:ext>
             </a:extLst>
           </p:cNvPr>
@@ -7048,7 +7048,7 @@
           <p:cNvPr id="19" name="">
             <a:extLst xmlns:a="http://schemas.openxmlformats.org/drawingml/2006/main">
               <a:ext uri="{FF2B5EF4-FFF2-40B4-BE49-F238E27FC236}">
-                <a16:creationId xmlns:a16="http://schemas.microsoft.com/office/drawing/2014/main" id="{C3C74255-58CE-44C7-8D27-012920D5BF4D}"/>
+                <a16:creationId xmlns:a16="http://schemas.microsoft.com/office/drawing/2014/main" id="{7BAD7B5B-ECBC-42BF-9980-F8A9503C858E}"/>
               </a:ext>
             </a:extLst>
           </p:cNvPr>
@@ -7112,7 +7112,7 @@
           <p:cNvPr id="20" name="">
             <a:extLst xmlns:a="http://schemas.openxmlformats.org/drawingml/2006/main">
               <a:ext uri="{FF2B5EF4-FFF2-40B4-BE49-F238E27FC236}">
-                <a16:creationId xmlns:a16="http://schemas.microsoft.com/office/drawing/2014/main" id="{5CAC0A2C-A0F6-4D66-80B0-C41A055E82CD}"/>
+                <a16:creationId xmlns:a16="http://schemas.microsoft.com/office/drawing/2014/main" id="{76D5927E-F427-4F2F-BAE1-0EC7967F9219}"/>
               </a:ext>
             </a:extLst>
           </p:cNvPr>
@@ -7174,7 +7174,7 @@
     </p:spTree>
     <p:extLst>
       <p:ext uri="{BB962C8B-B14F-4D97-AF65-F5344CB8AC3E}">
-        <p14:creationId xmlns:p14="http://schemas.microsoft.com/office/powerpoint/2010/main" val="1574197442"/>
+        <p14:creationId xmlns:p14="http://schemas.microsoft.com/office/powerpoint/2010/main" val="972987498"/>
       </p:ext>
     </p:extLst>
   </p:cSld>
@@ -7198,7 +7198,7 @@
           <p:cNvPr id="1" name="">
             <a:extLst xmlns:a="http://schemas.openxmlformats.org/drawingml/2006/main">
               <a:ext uri="{FF2B5EF4-FFF2-40B4-BE49-F238E27FC236}">
-                <a16:creationId xmlns:a16="http://schemas.microsoft.com/office/drawing/2014/main" id="{09123167-A41D-4F55-AF2A-E147294B26E9}"/>
+                <a16:creationId xmlns:a16="http://schemas.microsoft.com/office/drawing/2014/main" id="{B7C3C00B-14AB-4E7F-B22C-9DDBD73846F7}"/>
               </a:ext>
             </a:extLst>
           </p:cNvPr>
@@ -7233,7 +7233,7 @@
           <p:cNvPr id="2" name="">
             <a:extLst xmlns:a="http://schemas.openxmlformats.org/drawingml/2006/main">
               <a:ext uri="{FF2B5EF4-FFF2-40B4-BE49-F238E27FC236}">
-                <a16:creationId xmlns:a16="http://schemas.microsoft.com/office/drawing/2014/main" id="{FD2BD74F-8950-482F-B3C8-B3FB2E7FD17A}"/>
+                <a16:creationId xmlns:a16="http://schemas.microsoft.com/office/drawing/2014/main" id="{15D29721-84CA-43B3-9973-586CFF674D70}"/>
               </a:ext>
             </a:extLst>
           </p:cNvPr>
@@ -7268,7 +7268,7 @@
           <p:cNvPr id="3" name="">
             <a:extLst xmlns:a="http://schemas.openxmlformats.org/drawingml/2006/main">
               <a:ext uri="{FF2B5EF4-FFF2-40B4-BE49-F238E27FC236}">
-                <a16:creationId xmlns:a16="http://schemas.microsoft.com/office/drawing/2014/main" id="{E4FD720A-750C-49E5-AD44-52E7798AA548}"/>
+                <a16:creationId xmlns:a16="http://schemas.microsoft.com/office/drawing/2014/main" id="{3ED6DFC5-E5F7-404F-BC61-42ECDB6B74F0}"/>
               </a:ext>
             </a:extLst>
           </p:cNvPr>
@@ -7332,7 +7332,7 @@
           <p:cNvPr id="4" name="">
             <a:extLst xmlns:a="http://schemas.openxmlformats.org/drawingml/2006/main">
               <a:ext uri="{FF2B5EF4-FFF2-40B4-BE49-F238E27FC236}">
-                <a16:creationId xmlns:a16="http://schemas.microsoft.com/office/drawing/2014/main" id="{E918EB6D-4587-429F-BEEB-66D6573CD40F}"/>
+                <a16:creationId xmlns:a16="http://schemas.microsoft.com/office/drawing/2014/main" id="{A256AE3B-5DCE-498B-BB33-4B4F655ED69E}"/>
               </a:ext>
             </a:extLst>
           </p:cNvPr>
@@ -7396,7 +7396,7 @@
           <p:cNvPr id="5" name="">
             <a:extLst xmlns:a="http://schemas.openxmlformats.org/drawingml/2006/main">
               <a:ext uri="{FF2B5EF4-FFF2-40B4-BE49-F238E27FC236}">
-                <a16:creationId xmlns:a16="http://schemas.microsoft.com/office/drawing/2014/main" id="{6B67F32C-8B1A-4A07-BA75-564D7E75D55F}"/>
+                <a16:creationId xmlns:a16="http://schemas.microsoft.com/office/drawing/2014/main" id="{95B2C4AC-151E-4184-8CB9-CEB1C7F91169}"/>
               </a:ext>
             </a:extLst>
           </p:cNvPr>
@@ -7460,7 +7460,7 @@
           <p:cNvPr id="6" name="">
             <a:extLst xmlns:a="http://schemas.openxmlformats.org/drawingml/2006/main">
               <a:ext uri="{FF2B5EF4-FFF2-40B4-BE49-F238E27FC236}">
-                <a16:creationId xmlns:a16="http://schemas.microsoft.com/office/drawing/2014/main" id="{9A1E0795-5B35-4C6D-8B6E-32BD1C852D6A}"/>
+                <a16:creationId xmlns:a16="http://schemas.microsoft.com/office/drawing/2014/main" id="{74155A34-0B4C-4E8E-8E37-BA58CEEC0CD1}"/>
               </a:ext>
             </a:extLst>
           </p:cNvPr>
@@ -7493,7 +7493,7 @@
           <p:cNvPr id="7" name="">
             <a:extLst xmlns:a="http://schemas.openxmlformats.org/drawingml/2006/main">
               <a:ext uri="{FF2B5EF4-FFF2-40B4-BE49-F238E27FC236}">
-                <a16:creationId xmlns:a16="http://schemas.microsoft.com/office/drawing/2014/main" id="{DDC27570-F434-4798-BC51-49A40C0B9F1D}"/>
+                <a16:creationId xmlns:a16="http://schemas.microsoft.com/office/drawing/2014/main" id="{BB85796B-97F4-4848-B15C-A3EC5E869C4B}"/>
               </a:ext>
             </a:extLst>
           </p:cNvPr>
@@ -7557,7 +7557,7 @@
           <p:cNvPr id="8" name="">
             <a:extLst xmlns:a="http://schemas.openxmlformats.org/drawingml/2006/main">
               <a:ext uri="{FF2B5EF4-FFF2-40B4-BE49-F238E27FC236}">
-                <a16:creationId xmlns:a16="http://schemas.microsoft.com/office/drawing/2014/main" id="{AFB9296D-8E7D-4CDA-8459-5E06543D3D14}"/>
+                <a16:creationId xmlns:a16="http://schemas.microsoft.com/office/drawing/2014/main" id="{462BEB32-2D2B-4D21-A9DB-39D667408BE5}"/>
               </a:ext>
             </a:extLst>
           </p:cNvPr>
@@ -7621,7 +7621,7 @@
           <p:cNvPr id="9" name="">
             <a:extLst xmlns:a="http://schemas.openxmlformats.org/drawingml/2006/main">
               <a:ext uri="{FF2B5EF4-FFF2-40B4-BE49-F238E27FC236}">
-                <a16:creationId xmlns:a16="http://schemas.microsoft.com/office/drawing/2014/main" id="{B17F9B77-5BD2-4F8C-A434-DFFB32D5925C}"/>
+                <a16:creationId xmlns:a16="http://schemas.microsoft.com/office/drawing/2014/main" id="{2D43E8EA-D90A-408A-A9A8-FD8DD1895A06}"/>
               </a:ext>
             </a:extLst>
           </p:cNvPr>
@@ -7685,7 +7685,7 @@
           <p:cNvPr id="10" name="">
             <a:extLst xmlns:a="http://schemas.openxmlformats.org/drawingml/2006/main">
               <a:ext uri="{FF2B5EF4-FFF2-40B4-BE49-F238E27FC236}">
-                <a16:creationId xmlns:a16="http://schemas.microsoft.com/office/drawing/2014/main" id="{57E4AD86-BAE4-4781-A592-C1B286560C14}"/>
+                <a16:creationId xmlns:a16="http://schemas.microsoft.com/office/drawing/2014/main" id="{CBD2A851-48C1-4BE3-8B8F-C0B336871A9A}"/>
               </a:ext>
             </a:extLst>
           </p:cNvPr>
@@ -7718,7 +7718,7 @@
           <p:cNvPr id="11" name="">
             <a:extLst xmlns:a="http://schemas.openxmlformats.org/drawingml/2006/main">
               <a:ext uri="{FF2B5EF4-FFF2-40B4-BE49-F238E27FC236}">
-                <a16:creationId xmlns:a16="http://schemas.microsoft.com/office/drawing/2014/main" id="{C6085DC4-E627-4AE2-8FA1-39C37953B5FD}"/>
+                <a16:creationId xmlns:a16="http://schemas.microsoft.com/office/drawing/2014/main" id="{B8E00BDE-4C3B-4094-82E4-F153F9402EF1}"/>
               </a:ext>
             </a:extLst>
           </p:cNvPr>
@@ -7782,7 +7782,7 @@
           <p:cNvPr id="12" name="">
             <a:extLst xmlns:a="http://schemas.openxmlformats.org/drawingml/2006/main">
               <a:ext uri="{FF2B5EF4-FFF2-40B4-BE49-F238E27FC236}">
-                <a16:creationId xmlns:a16="http://schemas.microsoft.com/office/drawing/2014/main" id="{D76DC496-17E6-4437-BB5A-C7A2ADA019F2}"/>
+                <a16:creationId xmlns:a16="http://schemas.microsoft.com/office/drawing/2014/main" id="{DDC69F09-49FC-4526-81B5-F49C972110F5}"/>
               </a:ext>
             </a:extLst>
           </p:cNvPr>
@@ -7846,7 +7846,7 @@
           <p:cNvPr id="13" name="">
             <a:extLst xmlns:a="http://schemas.openxmlformats.org/drawingml/2006/main">
               <a:ext uri="{FF2B5EF4-FFF2-40B4-BE49-F238E27FC236}">
-                <a16:creationId xmlns:a16="http://schemas.microsoft.com/office/drawing/2014/main" id="{68DD2149-102E-424A-84F4-ABA282E8C800}"/>
+                <a16:creationId xmlns:a16="http://schemas.microsoft.com/office/drawing/2014/main" id="{1A44EFBA-636C-471F-8994-84F6F8DAE5DA}"/>
               </a:ext>
             </a:extLst>
           </p:cNvPr>
@@ -7910,7 +7910,7 @@
           <p:cNvPr id="14" name="">
             <a:extLst xmlns:a="http://schemas.openxmlformats.org/drawingml/2006/main">
               <a:ext uri="{FF2B5EF4-FFF2-40B4-BE49-F238E27FC236}">
-                <a16:creationId xmlns:a16="http://schemas.microsoft.com/office/drawing/2014/main" id="{132CE7B4-2F79-4EC8-A753-00DA7F4DB445}"/>
+                <a16:creationId xmlns:a16="http://schemas.microsoft.com/office/drawing/2014/main" id="{B1401DC1-5114-43F0-BEEB-F6AED927906F}"/>
               </a:ext>
             </a:extLst>
           </p:cNvPr>
@@ -7943,7 +7943,7 @@
           <p:cNvPr id="15" name="">
             <a:extLst xmlns:a="http://schemas.openxmlformats.org/drawingml/2006/main">
               <a:ext uri="{FF2B5EF4-FFF2-40B4-BE49-F238E27FC236}">
-                <a16:creationId xmlns:a16="http://schemas.microsoft.com/office/drawing/2014/main" id="{9BFD1DF6-7EEE-44F0-BD85-72D474EADBC0}"/>
+                <a16:creationId xmlns:a16="http://schemas.microsoft.com/office/drawing/2014/main" id="{1090C8F7-43F4-469C-9BC9-0599895FE266}"/>
               </a:ext>
             </a:extLst>
           </p:cNvPr>
@@ -8007,7 +8007,7 @@
           <p:cNvPr id="16" name="">
             <a:extLst xmlns:a="http://schemas.openxmlformats.org/drawingml/2006/main">
               <a:ext uri="{FF2B5EF4-FFF2-40B4-BE49-F238E27FC236}">
-                <a16:creationId xmlns:a16="http://schemas.microsoft.com/office/drawing/2014/main" id="{A1C90F11-1B14-4E55-B4C2-83CCDD95D7EE}"/>
+                <a16:creationId xmlns:a16="http://schemas.microsoft.com/office/drawing/2014/main" id="{900FBA8E-272E-4B32-8877-8B30C0E59540}"/>
               </a:ext>
             </a:extLst>
           </p:cNvPr>
@@ -8071,7 +8071,7 @@
           <p:cNvPr id="17" name="">
             <a:extLst xmlns:a="http://schemas.openxmlformats.org/drawingml/2006/main">
               <a:ext uri="{FF2B5EF4-FFF2-40B4-BE49-F238E27FC236}">
-                <a16:creationId xmlns:a16="http://schemas.microsoft.com/office/drawing/2014/main" id="{FFB3BB9C-2120-4B39-9914-46467FBC734A}"/>
+                <a16:creationId xmlns:a16="http://schemas.microsoft.com/office/drawing/2014/main" id="{41D334B6-8AA3-46C6-AE1F-9A1B45109862}"/>
               </a:ext>
             </a:extLst>
           </p:cNvPr>
@@ -8135,7 +8135,7 @@
           <p:cNvPr id="18" name="">
             <a:extLst xmlns:a="http://schemas.openxmlformats.org/drawingml/2006/main">
               <a:ext uri="{FF2B5EF4-FFF2-40B4-BE49-F238E27FC236}">
-                <a16:creationId xmlns:a16="http://schemas.microsoft.com/office/drawing/2014/main" id="{408C1363-9557-4CAA-9611-1666940FAD1F}"/>
+                <a16:creationId xmlns:a16="http://schemas.microsoft.com/office/drawing/2014/main" id="{924EDBDD-1862-424B-A50F-B399C54EC3E2}"/>
               </a:ext>
             </a:extLst>
           </p:cNvPr>
@@ -8168,7 +8168,7 @@
           <p:cNvPr id="19" name="">
             <a:extLst xmlns:a="http://schemas.openxmlformats.org/drawingml/2006/main">
               <a:ext uri="{FF2B5EF4-FFF2-40B4-BE49-F238E27FC236}">
-                <a16:creationId xmlns:a16="http://schemas.microsoft.com/office/drawing/2014/main" id="{B70E0D8A-9B8F-4556-9A2D-510B6908AD82}"/>
+                <a16:creationId xmlns:a16="http://schemas.microsoft.com/office/drawing/2014/main" id="{28742DE9-1660-4B57-A5EA-AF993AB2F62E}"/>
               </a:ext>
             </a:extLst>
           </p:cNvPr>
@@ -8232,7 +8232,7 @@
           <p:cNvPr id="20" name="">
             <a:extLst xmlns:a="http://schemas.openxmlformats.org/drawingml/2006/main">
               <a:ext uri="{FF2B5EF4-FFF2-40B4-BE49-F238E27FC236}">
-                <a16:creationId xmlns:a16="http://schemas.microsoft.com/office/drawing/2014/main" id="{815FB243-4057-42B8-8631-0A90405EE754}"/>
+                <a16:creationId xmlns:a16="http://schemas.microsoft.com/office/drawing/2014/main" id="{D8F505F2-D6BC-4848-97B9-B125F9E9AB52}"/>
               </a:ext>
             </a:extLst>
           </p:cNvPr>
@@ -8296,7 +8296,7 @@
           <p:cNvPr id="21" name="">
             <a:extLst xmlns:a="http://schemas.openxmlformats.org/drawingml/2006/main">
               <a:ext uri="{FF2B5EF4-FFF2-40B4-BE49-F238E27FC236}">
-                <a16:creationId xmlns:a16="http://schemas.microsoft.com/office/drawing/2014/main" id="{1EE8ACA1-3E41-4F08-82C8-2C5A3B56276C}"/>
+                <a16:creationId xmlns:a16="http://schemas.microsoft.com/office/drawing/2014/main" id="{91CEB924-8B07-4150-B0AF-A7273DBF92A4}"/>
               </a:ext>
             </a:extLst>
           </p:cNvPr>
@@ -8360,7 +8360,7 @@
           <p:cNvPr id="22" name="">
             <a:extLst xmlns:a="http://schemas.openxmlformats.org/drawingml/2006/main">
               <a:ext uri="{FF2B5EF4-FFF2-40B4-BE49-F238E27FC236}">
-                <a16:creationId xmlns:a16="http://schemas.microsoft.com/office/drawing/2014/main" id="{4F2E9F1B-E73E-41C5-8DA8-EA244D0CA8ED}"/>
+                <a16:creationId xmlns:a16="http://schemas.microsoft.com/office/drawing/2014/main" id="{C17EE652-FC65-4D1F-B003-BDF455473A2E}"/>
               </a:ext>
             </a:extLst>
           </p:cNvPr>
@@ -8393,7 +8393,7 @@
           <p:cNvPr id="23" name="">
             <a:extLst xmlns:a="http://schemas.openxmlformats.org/drawingml/2006/main">
               <a:ext uri="{FF2B5EF4-FFF2-40B4-BE49-F238E27FC236}">
-                <a16:creationId xmlns:a16="http://schemas.microsoft.com/office/drawing/2014/main" id="{AC13E5FE-4BD5-452A-954F-8E284C7037AF}"/>
+                <a16:creationId xmlns:a16="http://schemas.microsoft.com/office/drawing/2014/main" id="{AFC28DC6-F0F4-4C20-9A3C-09DC4D9AE485}"/>
               </a:ext>
             </a:extLst>
           </p:cNvPr>
@@ -8457,7 +8457,7 @@
           <p:cNvPr id="24" name="">
             <a:extLst xmlns:a="http://schemas.openxmlformats.org/drawingml/2006/main">
               <a:ext uri="{FF2B5EF4-FFF2-40B4-BE49-F238E27FC236}">
-                <a16:creationId xmlns:a16="http://schemas.microsoft.com/office/drawing/2014/main" id="{83007BFD-6DFB-4285-BB95-E6BFBD7602C0}"/>
+                <a16:creationId xmlns:a16="http://schemas.microsoft.com/office/drawing/2014/main" id="{54877BC1-4D9F-4094-9EBA-B773133015E0}"/>
               </a:ext>
             </a:extLst>
           </p:cNvPr>
@@ -8521,7 +8521,7 @@
           <p:cNvPr id="25" name="">
             <a:extLst xmlns:a="http://schemas.openxmlformats.org/drawingml/2006/main">
               <a:ext uri="{FF2B5EF4-FFF2-40B4-BE49-F238E27FC236}">
-                <a16:creationId xmlns:a16="http://schemas.microsoft.com/office/drawing/2014/main" id="{CC7EB87D-ABF2-4D9E-9F14-8589FC2FE350}"/>
+                <a16:creationId xmlns:a16="http://schemas.microsoft.com/office/drawing/2014/main" id="{C2E35EF0-A691-46DE-AEA9-4890CC2E427B}"/>
               </a:ext>
             </a:extLst>
           </p:cNvPr>
@@ -8585,7 +8585,7 @@
           <p:cNvPr id="26" name="">
             <a:extLst xmlns:a="http://schemas.openxmlformats.org/drawingml/2006/main">
               <a:ext uri="{FF2B5EF4-FFF2-40B4-BE49-F238E27FC236}">
-                <a16:creationId xmlns:a16="http://schemas.microsoft.com/office/drawing/2014/main" id="{D848DD00-5A0F-4718-87C9-22F13F9672E8}"/>
+                <a16:creationId xmlns:a16="http://schemas.microsoft.com/office/drawing/2014/main" id="{19CF94E6-5CA4-46D2-879B-18B7419409C8}"/>
               </a:ext>
             </a:extLst>
           </p:cNvPr>
@@ -8618,7 +8618,7 @@
           <p:cNvPr id="27" name="">
             <a:extLst xmlns:a="http://schemas.openxmlformats.org/drawingml/2006/main">
               <a:ext uri="{FF2B5EF4-FFF2-40B4-BE49-F238E27FC236}">
-                <a16:creationId xmlns:a16="http://schemas.microsoft.com/office/drawing/2014/main" id="{184450F5-ACF1-4643-B303-8E7E0DEEB551}"/>
+                <a16:creationId xmlns:a16="http://schemas.microsoft.com/office/drawing/2014/main" id="{8AC02D89-0F1D-4212-8EE7-72C1F27B450B}"/>
               </a:ext>
             </a:extLst>
           </p:cNvPr>
@@ -8651,7 +8651,7 @@
           <p:cNvPr id="28" name="">
             <a:extLst xmlns:a="http://schemas.openxmlformats.org/drawingml/2006/main">
               <a:ext uri="{FF2B5EF4-FFF2-40B4-BE49-F238E27FC236}">
-                <a16:creationId xmlns:a16="http://schemas.microsoft.com/office/drawing/2014/main" id="{CFFC94DC-8424-4BF6-9FF1-C13FE034828F}"/>
+                <a16:creationId xmlns:a16="http://schemas.microsoft.com/office/drawing/2014/main" id="{EC519424-E00E-4853-A890-91D51D665AFC}"/>
               </a:ext>
             </a:extLst>
           </p:cNvPr>
@@ -8715,7 +8715,7 @@
           <p:cNvPr id="29" name="">
             <a:extLst xmlns:a="http://schemas.openxmlformats.org/drawingml/2006/main">
               <a:ext uri="{FF2B5EF4-FFF2-40B4-BE49-F238E27FC236}">
-                <a16:creationId xmlns:a16="http://schemas.microsoft.com/office/drawing/2014/main" id="{5694B3FF-A941-46F9-9DBE-5A405C354498}"/>
+                <a16:creationId xmlns:a16="http://schemas.microsoft.com/office/drawing/2014/main" id="{FA6823BD-B2D8-4FC2-A4CB-A018022FAA22}"/>
               </a:ext>
             </a:extLst>
           </p:cNvPr>
@@ -8779,7 +8779,7 @@
           <p:cNvPr id="30" name="">
             <a:extLst xmlns:a="http://schemas.openxmlformats.org/drawingml/2006/main">
               <a:ext uri="{FF2B5EF4-FFF2-40B4-BE49-F238E27FC236}">
-                <a16:creationId xmlns:a16="http://schemas.microsoft.com/office/drawing/2014/main" id="{70E6BEBD-12D2-4ED9-B3E3-378991E605BA}"/>
+                <a16:creationId xmlns:a16="http://schemas.microsoft.com/office/drawing/2014/main" id="{7507EF56-F8CB-4D18-A9C4-D1E87543BFFB}"/>
               </a:ext>
             </a:extLst>
           </p:cNvPr>
@@ -8843,7 +8843,7 @@
           <p:cNvPr id="31" name="">
             <a:extLst xmlns:a="http://schemas.openxmlformats.org/drawingml/2006/main">
               <a:ext uri="{FF2B5EF4-FFF2-40B4-BE49-F238E27FC236}">
-                <a16:creationId xmlns:a16="http://schemas.microsoft.com/office/drawing/2014/main" id="{78E6EFFC-9E52-4B19-9DAE-F7DED4E3D208}"/>
+                <a16:creationId xmlns:a16="http://schemas.microsoft.com/office/drawing/2014/main" id="{CEEFD111-1431-4C36-9C5F-043B526C6906}"/>
               </a:ext>
             </a:extLst>
           </p:cNvPr>
@@ -8907,7 +8907,7 @@
           <p:cNvPr id="32" name="">
             <a:extLst xmlns:a="http://schemas.openxmlformats.org/drawingml/2006/main">
               <a:ext uri="{FF2B5EF4-FFF2-40B4-BE49-F238E27FC236}">
-                <a16:creationId xmlns:a16="http://schemas.microsoft.com/office/drawing/2014/main" id="{25B84C4C-932C-4AF8-B676-948396627467}"/>
+                <a16:creationId xmlns:a16="http://schemas.microsoft.com/office/drawing/2014/main" id="{0C6AFC82-C98F-4123-BED8-C3E818EE69EF}"/>
               </a:ext>
             </a:extLst>
           </p:cNvPr>
@@ -8942,7 +8942,7 @@
           <p:cNvPr id="33" name="">
             <a:extLst xmlns:a="http://schemas.openxmlformats.org/drawingml/2006/main">
               <a:ext uri="{FF2B5EF4-FFF2-40B4-BE49-F238E27FC236}">
-                <a16:creationId xmlns:a16="http://schemas.microsoft.com/office/drawing/2014/main" id="{1AEB1131-ADAA-44C9-9421-AB112C0643B4}"/>
+                <a16:creationId xmlns:a16="http://schemas.microsoft.com/office/drawing/2014/main" id="{5DD7B117-62CF-469A-9E1F-15F1DC2119AB}"/>
               </a:ext>
             </a:extLst>
           </p:cNvPr>
@@ -9006,7 +9006,7 @@
           <p:cNvPr id="34" name="">
             <a:extLst xmlns:a="http://schemas.openxmlformats.org/drawingml/2006/main">
               <a:ext uri="{FF2B5EF4-FFF2-40B4-BE49-F238E27FC236}">
-                <a16:creationId xmlns:a16="http://schemas.microsoft.com/office/drawing/2014/main" id="{A0368B9D-F184-4800-B5FA-BD0FDB680B86}"/>
+                <a16:creationId xmlns:a16="http://schemas.microsoft.com/office/drawing/2014/main" id="{D672208A-E196-4036-899E-58F925773B79}"/>
               </a:ext>
             </a:extLst>
           </p:cNvPr>
@@ -9068,7 +9068,7 @@
     </p:spTree>
     <p:extLst>
       <p:ext uri="{BB962C8B-B14F-4D97-AF65-F5344CB8AC3E}">
-        <p14:creationId xmlns:p14="http://schemas.microsoft.com/office/powerpoint/2010/main" val="2129414734"/>
+        <p14:creationId xmlns:p14="http://schemas.microsoft.com/office/powerpoint/2010/main" val="1440706623"/>
       </p:ext>
     </p:extLst>
   </p:cSld>
@@ -9092,7 +9092,7 @@
           <p:cNvPr id="1" name="">
             <a:extLst xmlns:a="http://schemas.openxmlformats.org/drawingml/2006/main">
               <a:ext uri="{FF2B5EF4-FFF2-40B4-BE49-F238E27FC236}">
-                <a16:creationId xmlns:a16="http://schemas.microsoft.com/office/drawing/2014/main" id="{E903758D-5F15-4265-AC3F-BBD344CF3DD1}"/>
+                <a16:creationId xmlns:a16="http://schemas.microsoft.com/office/drawing/2014/main" id="{314AA0AD-F22E-4EC9-B5A3-B18F7281E835}"/>
               </a:ext>
             </a:extLst>
           </p:cNvPr>
@@ -9127,7 +9127,7 @@
           <p:cNvPr id="2" name="">
             <a:extLst xmlns:a="http://schemas.openxmlformats.org/drawingml/2006/main">
               <a:ext uri="{FF2B5EF4-FFF2-40B4-BE49-F238E27FC236}">
-                <a16:creationId xmlns:a16="http://schemas.microsoft.com/office/drawing/2014/main" id="{1D6220E3-EB35-4B08-AD17-F8A838F5BA4C}"/>
+                <a16:creationId xmlns:a16="http://schemas.microsoft.com/office/drawing/2014/main" id="{4FFFE5EA-72B7-4571-A088-0C75CF818F0D}"/>
               </a:ext>
             </a:extLst>
           </p:cNvPr>
@@ -9162,7 +9162,7 @@
           <p:cNvPr id="3" name="">
             <a:extLst xmlns:a="http://schemas.openxmlformats.org/drawingml/2006/main">
               <a:ext uri="{FF2B5EF4-FFF2-40B4-BE49-F238E27FC236}">
-                <a16:creationId xmlns:a16="http://schemas.microsoft.com/office/drawing/2014/main" id="{46CA2C4E-A554-4004-BA73-BBEF418372A5}"/>
+                <a16:creationId xmlns:a16="http://schemas.microsoft.com/office/drawing/2014/main" id="{7FC75496-2532-40EB-9190-2B9215979FE6}"/>
               </a:ext>
             </a:extLst>
           </p:cNvPr>
@@ -9226,7 +9226,7 @@
           <p:cNvPr id="4" name="">
             <a:extLst xmlns:a="http://schemas.openxmlformats.org/drawingml/2006/main">
               <a:ext uri="{FF2B5EF4-FFF2-40B4-BE49-F238E27FC236}">
-                <a16:creationId xmlns:a16="http://schemas.microsoft.com/office/drawing/2014/main" id="{33FB29CC-02BD-496E-B1E1-AF13A0A2282C}"/>
+                <a16:creationId xmlns:a16="http://schemas.microsoft.com/office/drawing/2014/main" id="{DCBA3798-CF38-4FF9-91C0-A5ACE5EB7C11}"/>
               </a:ext>
             </a:extLst>
           </p:cNvPr>
@@ -9290,7 +9290,7 @@
           <p:cNvPr id="5" name="">
             <a:extLst xmlns:a="http://schemas.openxmlformats.org/drawingml/2006/main">
               <a:ext uri="{FF2B5EF4-FFF2-40B4-BE49-F238E27FC236}">
-                <a16:creationId xmlns:a16="http://schemas.microsoft.com/office/drawing/2014/main" id="{A30A03A0-FF82-42D7-BD61-A048281EE4F7}"/>
+                <a16:creationId xmlns:a16="http://schemas.microsoft.com/office/drawing/2014/main" id="{FDC7927E-607E-4BFC-B8F5-B2FC1B849C3D}"/>
               </a:ext>
             </a:extLst>
           </p:cNvPr>
@@ -9354,7 +9354,7 @@
           <p:cNvPr id="6" name="">
             <a:extLst xmlns:a="http://schemas.openxmlformats.org/drawingml/2006/main">
               <a:ext uri="{FF2B5EF4-FFF2-40B4-BE49-F238E27FC236}">
-                <a16:creationId xmlns:a16="http://schemas.microsoft.com/office/drawing/2014/main" id="{2E1371AB-6B5C-434A-A712-D3B2C2F4F7C7}"/>
+                <a16:creationId xmlns:a16="http://schemas.microsoft.com/office/drawing/2014/main" id="{F597502D-0049-428E-AD46-ABB63BA94B00}"/>
               </a:ext>
             </a:extLst>
           </p:cNvPr>
@@ -9418,7 +9418,7 @@
           <p:cNvPr id="7" name="">
             <a:extLst xmlns:a="http://schemas.openxmlformats.org/drawingml/2006/main">
               <a:ext uri="{FF2B5EF4-FFF2-40B4-BE49-F238E27FC236}">
-                <a16:creationId xmlns:a16="http://schemas.microsoft.com/office/drawing/2014/main" id="{0445F414-2C06-4808-BD87-9234062580D3}"/>
+                <a16:creationId xmlns:a16="http://schemas.microsoft.com/office/drawing/2014/main" id="{F459F71A-56B8-4655-82B9-49412BA45B80}"/>
               </a:ext>
             </a:extLst>
           </p:cNvPr>
@@ -9451,7 +9451,7 @@
           <p:cNvPr id="8" name="">
             <a:extLst xmlns:a="http://schemas.openxmlformats.org/drawingml/2006/main">
               <a:ext uri="{FF2B5EF4-FFF2-40B4-BE49-F238E27FC236}">
-                <a16:creationId xmlns:a16="http://schemas.microsoft.com/office/drawing/2014/main" id="{09FD6206-0698-4B08-886C-3210D80A0BC8}"/>
+                <a16:creationId xmlns:a16="http://schemas.microsoft.com/office/drawing/2014/main" id="{F154C91B-053B-412F-B88E-E9582A08B96D}"/>
               </a:ext>
             </a:extLst>
           </p:cNvPr>
@@ -9515,7 +9515,7 @@
           <p:cNvPr id="9" name="">
             <a:extLst xmlns:a="http://schemas.openxmlformats.org/drawingml/2006/main">
               <a:ext uri="{FF2B5EF4-FFF2-40B4-BE49-F238E27FC236}">
-                <a16:creationId xmlns:a16="http://schemas.microsoft.com/office/drawing/2014/main" id="{53CB5B38-E91E-4897-8B9D-D1C2CD9ED0B3}"/>
+                <a16:creationId xmlns:a16="http://schemas.microsoft.com/office/drawing/2014/main" id="{A2847BFC-69E2-46DC-9C0B-1122A6403D9D}"/>
               </a:ext>
             </a:extLst>
           </p:cNvPr>
@@ -9602,7 +9602,7 @@
           <p:cNvPr id="10" name="">
             <a:extLst xmlns:a="http://schemas.openxmlformats.org/drawingml/2006/main">
               <a:ext uri="{FF2B5EF4-FFF2-40B4-BE49-F238E27FC236}">
-                <a16:creationId xmlns:a16="http://schemas.microsoft.com/office/drawing/2014/main" id="{FF0E7AB9-5EFF-45D6-A7A1-1B145EE480FF}"/>
+                <a16:creationId xmlns:a16="http://schemas.microsoft.com/office/drawing/2014/main" id="{1123C344-0589-49B8-8328-08F0EBE7C751}"/>
               </a:ext>
             </a:extLst>
           </p:cNvPr>
@@ -9635,7 +9635,7 @@
           <p:cNvPr id="11" name="">
             <a:extLst xmlns:a="http://schemas.openxmlformats.org/drawingml/2006/main">
               <a:ext uri="{FF2B5EF4-FFF2-40B4-BE49-F238E27FC236}">
-                <a16:creationId xmlns:a16="http://schemas.microsoft.com/office/drawing/2014/main" id="{629EEF4D-423E-4959-AAF3-16A1CD90F60E}"/>
+                <a16:creationId xmlns:a16="http://schemas.microsoft.com/office/drawing/2014/main" id="{3A426357-253F-4550-8FAB-BE3F2B47A109}"/>
               </a:ext>
             </a:extLst>
           </p:cNvPr>
@@ -9699,7 +9699,7 @@
           <p:cNvPr id="12" name="">
             <a:extLst xmlns:a="http://schemas.openxmlformats.org/drawingml/2006/main">
               <a:ext uri="{FF2B5EF4-FFF2-40B4-BE49-F238E27FC236}">
-                <a16:creationId xmlns:a16="http://schemas.microsoft.com/office/drawing/2014/main" id="{28980E6E-8549-4C2A-8F0C-AB3C270B97D0}"/>
+                <a16:creationId xmlns:a16="http://schemas.microsoft.com/office/drawing/2014/main" id="{C9D4B116-0C7E-4F2C-ADFF-CDB2F4A5221D}"/>
               </a:ext>
             </a:extLst>
           </p:cNvPr>
@@ -9786,7 +9786,7 @@
           <p:cNvPr id="13" name="">
             <a:extLst xmlns:a="http://schemas.openxmlformats.org/drawingml/2006/main">
               <a:ext uri="{FF2B5EF4-FFF2-40B4-BE49-F238E27FC236}">
-                <a16:creationId xmlns:a16="http://schemas.microsoft.com/office/drawing/2014/main" id="{7E28E773-8A58-4DE9-A9E5-2A61480079F3}"/>
+                <a16:creationId xmlns:a16="http://schemas.microsoft.com/office/drawing/2014/main" id="{87C16843-E64E-46EF-A29F-EF642F7E42B7}"/>
               </a:ext>
             </a:extLst>
           </p:cNvPr>
@@ -9819,7 +9819,7 @@
           <p:cNvPr id="14" name="">
             <a:extLst xmlns:a="http://schemas.openxmlformats.org/drawingml/2006/main">
               <a:ext uri="{FF2B5EF4-FFF2-40B4-BE49-F238E27FC236}">
-                <a16:creationId xmlns:a16="http://schemas.microsoft.com/office/drawing/2014/main" id="{AA65791B-CB0F-4BA1-A6B6-0924D848111C}"/>
+                <a16:creationId xmlns:a16="http://schemas.microsoft.com/office/drawing/2014/main" id="{CB9CBBE1-18C3-4F4A-AECE-64FD481FDABF}"/>
               </a:ext>
             </a:extLst>
           </p:cNvPr>
@@ -9883,7 +9883,7 @@
           <p:cNvPr id="15" name="">
             <a:extLst xmlns:a="http://schemas.openxmlformats.org/drawingml/2006/main">
               <a:ext uri="{FF2B5EF4-FFF2-40B4-BE49-F238E27FC236}">
-                <a16:creationId xmlns:a16="http://schemas.microsoft.com/office/drawing/2014/main" id="{4972EC22-A7B2-449D-BF81-3173563D8816}"/>
+                <a16:creationId xmlns:a16="http://schemas.microsoft.com/office/drawing/2014/main" id="{D958D9EA-A0D6-4747-9C11-E5029CE312D1}"/>
               </a:ext>
             </a:extLst>
           </p:cNvPr>
@@ -9970,7 +9970,7 @@
           <p:cNvPr id="16" name="">
             <a:extLst xmlns:a="http://schemas.openxmlformats.org/drawingml/2006/main">
               <a:ext uri="{FF2B5EF4-FFF2-40B4-BE49-F238E27FC236}">
-                <a16:creationId xmlns:a16="http://schemas.microsoft.com/office/drawing/2014/main" id="{9B09689E-568A-41A9-93C0-745D483B97A6}"/>
+                <a16:creationId xmlns:a16="http://schemas.microsoft.com/office/drawing/2014/main" id="{6432D9E5-46CC-487F-9D03-C710A88927F6}"/>
               </a:ext>
             </a:extLst>
           </p:cNvPr>
@@ -10003,7 +10003,7 @@
           <p:cNvPr id="17" name="">
             <a:extLst xmlns:a="http://schemas.openxmlformats.org/drawingml/2006/main">
               <a:ext uri="{FF2B5EF4-FFF2-40B4-BE49-F238E27FC236}">
-                <a16:creationId xmlns:a16="http://schemas.microsoft.com/office/drawing/2014/main" id="{C58939D8-54E7-4609-B6BE-2FAF992E81F3}"/>
+                <a16:creationId xmlns:a16="http://schemas.microsoft.com/office/drawing/2014/main" id="{4F34BBEF-F19E-404E-A075-5A267FB085D1}"/>
               </a:ext>
             </a:extLst>
           </p:cNvPr>
@@ -10067,7 +10067,7 @@
           <p:cNvPr id="18" name="">
             <a:extLst xmlns:a="http://schemas.openxmlformats.org/drawingml/2006/main">
               <a:ext uri="{FF2B5EF4-FFF2-40B4-BE49-F238E27FC236}">
-                <a16:creationId xmlns:a16="http://schemas.microsoft.com/office/drawing/2014/main" id="{8488D847-C6D6-4F07-9A52-4C24C0926409}"/>
+                <a16:creationId xmlns:a16="http://schemas.microsoft.com/office/drawing/2014/main" id="{AF688407-4F26-4B02-A077-3D6F3F754632}"/>
               </a:ext>
             </a:extLst>
           </p:cNvPr>
@@ -10131,7 +10131,7 @@
           <p:cNvPr id="19" name="">
             <a:extLst xmlns:a="http://schemas.openxmlformats.org/drawingml/2006/main">
               <a:ext uri="{FF2B5EF4-FFF2-40B4-BE49-F238E27FC236}">
-                <a16:creationId xmlns:a16="http://schemas.microsoft.com/office/drawing/2014/main" id="{56AF90B3-287F-4C72-9154-043F70F68442}"/>
+                <a16:creationId xmlns:a16="http://schemas.microsoft.com/office/drawing/2014/main" id="{4B8F5278-EE60-45EC-B983-17C9C5E8FE7C}"/>
               </a:ext>
             </a:extLst>
           </p:cNvPr>
@@ -10166,7 +10166,7 @@
           <p:cNvPr id="20" name="">
             <a:extLst xmlns:a="http://schemas.openxmlformats.org/drawingml/2006/main">
               <a:ext uri="{FF2B5EF4-FFF2-40B4-BE49-F238E27FC236}">
-                <a16:creationId xmlns:a16="http://schemas.microsoft.com/office/drawing/2014/main" id="{0F60A135-484C-438E-966D-F98F37F65D23}"/>
+                <a16:creationId xmlns:a16="http://schemas.microsoft.com/office/drawing/2014/main" id="{94B96D94-7EA4-46F4-817A-12126259FEA8}"/>
               </a:ext>
             </a:extLst>
           </p:cNvPr>
@@ -10230,7 +10230,7 @@
           <p:cNvPr id="21" name="">
             <a:extLst xmlns:a="http://schemas.openxmlformats.org/drawingml/2006/main">
               <a:ext uri="{FF2B5EF4-FFF2-40B4-BE49-F238E27FC236}">
-                <a16:creationId xmlns:a16="http://schemas.microsoft.com/office/drawing/2014/main" id="{7242F8A0-3E89-4245-948C-557C31F6A623}"/>
+                <a16:creationId xmlns:a16="http://schemas.microsoft.com/office/drawing/2014/main" id="{1AB21E08-C5FB-4A8E-82FB-469A11EFAFFD}"/>
               </a:ext>
             </a:extLst>
           </p:cNvPr>
@@ -10292,7 +10292,7 @@
     </p:spTree>
     <p:extLst>
       <p:ext uri="{BB962C8B-B14F-4D97-AF65-F5344CB8AC3E}">
-        <p14:creationId xmlns:p14="http://schemas.microsoft.com/office/powerpoint/2010/main" val="1513249777"/>
+        <p14:creationId xmlns:p14="http://schemas.microsoft.com/office/powerpoint/2010/main" val="1308437827"/>
       </p:ext>
     </p:extLst>
   </p:cSld>
@@ -10316,7 +10316,7 @@
           <p:cNvPr id="1" name="">
             <a:extLst xmlns:a="http://schemas.openxmlformats.org/drawingml/2006/main">
               <a:ext uri="{FF2B5EF4-FFF2-40B4-BE49-F238E27FC236}">
-                <a16:creationId xmlns:a16="http://schemas.microsoft.com/office/drawing/2014/main" id="{62660055-290E-4FFF-9D6B-0CF56E16731D}"/>
+                <a16:creationId xmlns:a16="http://schemas.microsoft.com/office/drawing/2014/main" id="{5AC0D82A-C557-4747-ADA6-3EE5D6144F4D}"/>
               </a:ext>
             </a:extLst>
           </p:cNvPr>
@@ -10351,7 +10351,7 @@
           <p:cNvPr id="2" name="">
             <a:extLst xmlns:a="http://schemas.openxmlformats.org/drawingml/2006/main">
               <a:ext uri="{FF2B5EF4-FFF2-40B4-BE49-F238E27FC236}">
-                <a16:creationId xmlns:a16="http://schemas.microsoft.com/office/drawing/2014/main" id="{01526CAC-3C2C-4428-8042-08A23EA111E7}"/>
+                <a16:creationId xmlns:a16="http://schemas.microsoft.com/office/drawing/2014/main" id="{E1BCB389-6F25-4671-8E1E-06F80EEBF49E}"/>
               </a:ext>
             </a:extLst>
           </p:cNvPr>
@@ -10386,7 +10386,7 @@
           <p:cNvPr id="3" name="">
             <a:extLst xmlns:a="http://schemas.openxmlformats.org/drawingml/2006/main">
               <a:ext uri="{FF2B5EF4-FFF2-40B4-BE49-F238E27FC236}">
-                <a16:creationId xmlns:a16="http://schemas.microsoft.com/office/drawing/2014/main" id="{1F8739A3-AD17-4633-9D56-AE741D39D030}"/>
+                <a16:creationId xmlns:a16="http://schemas.microsoft.com/office/drawing/2014/main" id="{454E0ACA-9CDE-42E7-B128-76719667D2BB}"/>
               </a:ext>
             </a:extLst>
           </p:cNvPr>
@@ -10450,7 +10450,7 @@
           <p:cNvPr id="4" name="">
             <a:extLst xmlns:a="http://schemas.openxmlformats.org/drawingml/2006/main">
               <a:ext uri="{FF2B5EF4-FFF2-40B4-BE49-F238E27FC236}">
-                <a16:creationId xmlns:a16="http://schemas.microsoft.com/office/drawing/2014/main" id="{6B555CEE-66C5-45EC-86B2-FB3FA8165E9A}"/>
+                <a16:creationId xmlns:a16="http://schemas.microsoft.com/office/drawing/2014/main" id="{CA669839-04B8-4CB8-B5C7-1C1EE4439694}"/>
               </a:ext>
             </a:extLst>
           </p:cNvPr>
@@ -10514,7 +10514,7 @@
           <p:cNvPr id="5" name="">
             <a:extLst xmlns:a="http://schemas.openxmlformats.org/drawingml/2006/main">
               <a:ext uri="{FF2B5EF4-FFF2-40B4-BE49-F238E27FC236}">
-                <a16:creationId xmlns:a16="http://schemas.microsoft.com/office/drawing/2014/main" id="{A559989B-B3F2-4BCA-A157-56F938DAE472}"/>
+                <a16:creationId xmlns:a16="http://schemas.microsoft.com/office/drawing/2014/main" id="{DB26D43E-4005-4593-BF5B-4E375AC44DAC}"/>
               </a:ext>
             </a:extLst>
           </p:cNvPr>
@@ -10578,7 +10578,7 @@
           <p:cNvPr id="6" name="">
             <a:extLst xmlns:a="http://schemas.openxmlformats.org/drawingml/2006/main">
               <a:ext uri="{FF2B5EF4-FFF2-40B4-BE49-F238E27FC236}">
-                <a16:creationId xmlns:a16="http://schemas.microsoft.com/office/drawing/2014/main" id="{DA0ECD73-8B2E-480B-AEA4-22F4C35B81AD}"/>
+                <a16:creationId xmlns:a16="http://schemas.microsoft.com/office/drawing/2014/main" id="{D6F00D51-2779-400C-A499-2932B83E8DA1}"/>
               </a:ext>
             </a:extLst>
           </p:cNvPr>
@@ -10611,7 +10611,7 @@
           <p:cNvPr id="7" name="">
             <a:extLst xmlns:a="http://schemas.openxmlformats.org/drawingml/2006/main">
               <a:ext uri="{FF2B5EF4-FFF2-40B4-BE49-F238E27FC236}">
-                <a16:creationId xmlns:a16="http://schemas.microsoft.com/office/drawing/2014/main" id="{EEC269BD-B59B-4395-9918-3C8A854A4251}"/>
+                <a16:creationId xmlns:a16="http://schemas.microsoft.com/office/drawing/2014/main" id="{D7B7833E-837C-4AE1-9D28-88824514558F}"/>
               </a:ext>
             </a:extLst>
           </p:cNvPr>
@@ -10675,7 +10675,7 @@
           <p:cNvPr id="8" name="">
             <a:extLst xmlns:a="http://schemas.openxmlformats.org/drawingml/2006/main">
               <a:ext uri="{FF2B5EF4-FFF2-40B4-BE49-F238E27FC236}">
-                <a16:creationId xmlns:a16="http://schemas.microsoft.com/office/drawing/2014/main" id="{D886D674-589F-47C3-B8BF-31D5B90933E1}"/>
+                <a16:creationId xmlns:a16="http://schemas.microsoft.com/office/drawing/2014/main" id="{D6214B8F-C8BE-472D-B858-4906CC316AFA}"/>
               </a:ext>
             </a:extLst>
           </p:cNvPr>
@@ -10831,7 +10831,7 @@
           <p:cNvPr id="9" name="">
             <a:extLst xmlns:a="http://schemas.openxmlformats.org/drawingml/2006/main">
               <a:ext uri="{FF2B5EF4-FFF2-40B4-BE49-F238E27FC236}">
-                <a16:creationId xmlns:a16="http://schemas.microsoft.com/office/drawing/2014/main" id="{C7EADAC2-DCA2-4347-B719-BC086F6C455E}"/>
+                <a16:creationId xmlns:a16="http://schemas.microsoft.com/office/drawing/2014/main" id="{F90519BC-582B-449D-86DE-21AE41791F4B}"/>
               </a:ext>
             </a:extLst>
           </p:cNvPr>
@@ -10866,7 +10866,7 @@
           <p:cNvPr id="10" name="">
             <a:extLst xmlns:a="http://schemas.openxmlformats.org/drawingml/2006/main">
               <a:ext uri="{FF2B5EF4-FFF2-40B4-BE49-F238E27FC236}">
-                <a16:creationId xmlns:a16="http://schemas.microsoft.com/office/drawing/2014/main" id="{B7EFC763-6425-4280-817C-B305549EB140}"/>
+                <a16:creationId xmlns:a16="http://schemas.microsoft.com/office/drawing/2014/main" id="{2EEF567B-FB39-4808-9D9D-79885D7D46F3}"/>
               </a:ext>
             </a:extLst>
           </p:cNvPr>
@@ -10899,7 +10899,7 @@
           <p:cNvPr id="11" name="">
             <a:extLst xmlns:a="http://schemas.openxmlformats.org/drawingml/2006/main">
               <a:ext uri="{FF2B5EF4-FFF2-40B4-BE49-F238E27FC236}">
-                <a16:creationId xmlns:a16="http://schemas.microsoft.com/office/drawing/2014/main" id="{27629DED-D1E2-4243-B0A9-5D22083702AA}"/>
+                <a16:creationId xmlns:a16="http://schemas.microsoft.com/office/drawing/2014/main" id="{4EC771E9-E0DB-4972-8602-F8FB02EB92EC}"/>
               </a:ext>
             </a:extLst>
           </p:cNvPr>
@@ -10963,7 +10963,7 @@
           <p:cNvPr id="12" name="">
             <a:extLst xmlns:a="http://schemas.openxmlformats.org/drawingml/2006/main">
               <a:ext uri="{FF2B5EF4-FFF2-40B4-BE49-F238E27FC236}">
-                <a16:creationId xmlns:a16="http://schemas.microsoft.com/office/drawing/2014/main" id="{DC7F77DB-F980-432A-A496-62DE289DE8F0}"/>
+                <a16:creationId xmlns:a16="http://schemas.microsoft.com/office/drawing/2014/main" id="{B3641495-BB8C-4519-A39B-A1713F048DBC}"/>
               </a:ext>
             </a:extLst>
           </p:cNvPr>
@@ -11073,7 +11073,7 @@
           <p:cNvPr id="13" name="">
             <a:extLst xmlns:a="http://schemas.openxmlformats.org/drawingml/2006/main">
               <a:ext uri="{FF2B5EF4-FFF2-40B4-BE49-F238E27FC236}">
-                <a16:creationId xmlns:a16="http://schemas.microsoft.com/office/drawing/2014/main" id="{50E81667-E0A1-42C0-91FE-996B51ABEBBF}"/>
+                <a16:creationId xmlns:a16="http://schemas.microsoft.com/office/drawing/2014/main" id="{87A4257D-E6C6-4197-A760-D9B1F8D0FB77}"/>
               </a:ext>
             </a:extLst>
           </p:cNvPr>
@@ -11108,7 +11108,7 @@
           <p:cNvPr id="14" name="">
             <a:extLst xmlns:a="http://schemas.openxmlformats.org/drawingml/2006/main">
               <a:ext uri="{FF2B5EF4-FFF2-40B4-BE49-F238E27FC236}">
-                <a16:creationId xmlns:a16="http://schemas.microsoft.com/office/drawing/2014/main" id="{22790B90-AEF3-431A-AFC1-DA59EE413191}"/>
+                <a16:creationId xmlns:a16="http://schemas.microsoft.com/office/drawing/2014/main" id="{2B2CC887-3B1B-47FC-8AA2-DE2C70E491EE}"/>
               </a:ext>
             </a:extLst>
           </p:cNvPr>
@@ -11141,7 +11141,7 @@
           <p:cNvPr id="15" name="">
             <a:extLst xmlns:a="http://schemas.openxmlformats.org/drawingml/2006/main">
               <a:ext uri="{FF2B5EF4-FFF2-40B4-BE49-F238E27FC236}">
-                <a16:creationId xmlns:a16="http://schemas.microsoft.com/office/drawing/2014/main" id="{5FFB0104-EAD4-4758-A259-0DAB1CF9450E}"/>
+                <a16:creationId xmlns:a16="http://schemas.microsoft.com/office/drawing/2014/main" id="{1AF19F87-999D-4B4B-821F-42472C8113C7}"/>
               </a:ext>
             </a:extLst>
           </p:cNvPr>
@@ -11205,7 +11205,7 @@
           <p:cNvPr id="16" name="">
             <a:extLst xmlns:a="http://schemas.openxmlformats.org/drawingml/2006/main">
               <a:ext uri="{FF2B5EF4-FFF2-40B4-BE49-F238E27FC236}">
-                <a16:creationId xmlns:a16="http://schemas.microsoft.com/office/drawing/2014/main" id="{3855C1B0-B675-4A62-A9F3-ED7E3D86C86F}"/>
+                <a16:creationId xmlns:a16="http://schemas.microsoft.com/office/drawing/2014/main" id="{B835586A-DE34-4C6B-A95F-E19E24029C7B}"/>
               </a:ext>
             </a:extLst>
           </p:cNvPr>
@@ -11338,7 +11338,7 @@
           <p:cNvPr id="17" name="">
             <a:extLst xmlns:a="http://schemas.openxmlformats.org/drawingml/2006/main">
               <a:ext uri="{FF2B5EF4-FFF2-40B4-BE49-F238E27FC236}">
-                <a16:creationId xmlns:a16="http://schemas.microsoft.com/office/drawing/2014/main" id="{9E474EFD-33F3-48FF-B19B-BEC1D0955115}"/>
+                <a16:creationId xmlns:a16="http://schemas.microsoft.com/office/drawing/2014/main" id="{F48F2FB6-1932-4F12-9BB9-28C51FAD6932}"/>
               </a:ext>
             </a:extLst>
           </p:cNvPr>
@@ -11373,7 +11373,7 @@
           <p:cNvPr id="18" name="">
             <a:extLst xmlns:a="http://schemas.openxmlformats.org/drawingml/2006/main">
               <a:ext uri="{FF2B5EF4-FFF2-40B4-BE49-F238E27FC236}">
-                <a16:creationId xmlns:a16="http://schemas.microsoft.com/office/drawing/2014/main" id="{11F18982-D467-4A4B-A47D-DDBDA2FA730A}"/>
+                <a16:creationId xmlns:a16="http://schemas.microsoft.com/office/drawing/2014/main" id="{BA94CA5A-E27E-4D97-A2DB-2B948E8DEEBF}"/>
               </a:ext>
             </a:extLst>
           </p:cNvPr>
@@ -11406,7 +11406,7 @@
           <p:cNvPr id="19" name="">
             <a:extLst xmlns:a="http://schemas.openxmlformats.org/drawingml/2006/main">
               <a:ext uri="{FF2B5EF4-FFF2-40B4-BE49-F238E27FC236}">
-                <a16:creationId xmlns:a16="http://schemas.microsoft.com/office/drawing/2014/main" id="{3579B2D8-1902-4D03-B53D-75B126B2FF2B}"/>
+                <a16:creationId xmlns:a16="http://schemas.microsoft.com/office/drawing/2014/main" id="{B5EBE1DE-4C53-4036-B1C0-8ED2657B8A74}"/>
               </a:ext>
             </a:extLst>
           </p:cNvPr>
@@ -11470,7 +11470,7 @@
           <p:cNvPr id="20" name="">
             <a:extLst xmlns:a="http://schemas.openxmlformats.org/drawingml/2006/main">
               <a:ext uri="{FF2B5EF4-FFF2-40B4-BE49-F238E27FC236}">
-                <a16:creationId xmlns:a16="http://schemas.microsoft.com/office/drawing/2014/main" id="{243E4B5F-E77C-493F-943F-CE8ECA9EF4A7}"/>
+                <a16:creationId xmlns:a16="http://schemas.microsoft.com/office/drawing/2014/main" id="{3E847711-AA58-4F59-A982-D57635FE85F1}"/>
               </a:ext>
             </a:extLst>
           </p:cNvPr>
@@ -11603,7 +11603,7 @@
           <p:cNvPr id="21" name="">
             <a:extLst xmlns:a="http://schemas.openxmlformats.org/drawingml/2006/main">
               <a:ext uri="{FF2B5EF4-FFF2-40B4-BE49-F238E27FC236}">
-                <a16:creationId xmlns:a16="http://schemas.microsoft.com/office/drawing/2014/main" id="{030E156A-0B0B-46D1-B45F-371838D900A7}"/>
+                <a16:creationId xmlns:a16="http://schemas.microsoft.com/office/drawing/2014/main" id="{91F05958-A3F6-422B-ADF9-76BE1DA90147}"/>
               </a:ext>
             </a:extLst>
           </p:cNvPr>
@@ -11638,7 +11638,7 @@
           <p:cNvPr id="22" name="">
             <a:extLst xmlns:a="http://schemas.openxmlformats.org/drawingml/2006/main">
               <a:ext uri="{FF2B5EF4-FFF2-40B4-BE49-F238E27FC236}">
-                <a16:creationId xmlns:a16="http://schemas.microsoft.com/office/drawing/2014/main" id="{3736FE93-ED11-460F-95FA-FB3171C77360}"/>
+                <a16:creationId xmlns:a16="http://schemas.microsoft.com/office/drawing/2014/main" id="{3FCDE109-7803-4604-8679-33F7BC087917}"/>
               </a:ext>
             </a:extLst>
           </p:cNvPr>
@@ -11671,7 +11671,7 @@
           <p:cNvPr id="23" name="">
             <a:extLst xmlns:a="http://schemas.openxmlformats.org/drawingml/2006/main">
               <a:ext uri="{FF2B5EF4-FFF2-40B4-BE49-F238E27FC236}">
-                <a16:creationId xmlns:a16="http://schemas.microsoft.com/office/drawing/2014/main" id="{6267C9D4-543B-4D6C-91EB-D33814DFCA43}"/>
+                <a16:creationId xmlns:a16="http://schemas.microsoft.com/office/drawing/2014/main" id="{297ED896-EB79-4BC9-B763-30E1B27B6C69}"/>
               </a:ext>
             </a:extLst>
           </p:cNvPr>
@@ -11735,7 +11735,7 @@
           <p:cNvPr id="24" name="">
             <a:extLst xmlns:a="http://schemas.openxmlformats.org/drawingml/2006/main">
               <a:ext uri="{FF2B5EF4-FFF2-40B4-BE49-F238E27FC236}">
-                <a16:creationId xmlns:a16="http://schemas.microsoft.com/office/drawing/2014/main" id="{B1D9F136-D3AC-4A0D-BA47-DEF12AA80089}"/>
+                <a16:creationId xmlns:a16="http://schemas.microsoft.com/office/drawing/2014/main" id="{7D4B39BD-DFEF-420F-BF6C-16F91A947010}"/>
               </a:ext>
             </a:extLst>
           </p:cNvPr>
@@ -11845,7 +11845,7 @@
           <p:cNvPr id="25" name="">
             <a:extLst xmlns:a="http://schemas.openxmlformats.org/drawingml/2006/main">
               <a:ext uri="{FF2B5EF4-FFF2-40B4-BE49-F238E27FC236}">
-                <a16:creationId xmlns:a16="http://schemas.microsoft.com/office/drawing/2014/main" id="{72D41C5B-9157-466E-A766-541CE6B51DE8}"/>
+                <a16:creationId xmlns:a16="http://schemas.microsoft.com/office/drawing/2014/main" id="{B7EC54C7-D3D1-4E76-99B8-258FFDDE8613}"/>
               </a:ext>
             </a:extLst>
           </p:cNvPr>
@@ -11880,7 +11880,7 @@
           <p:cNvPr id="26" name="">
             <a:extLst xmlns:a="http://schemas.openxmlformats.org/drawingml/2006/main">
               <a:ext uri="{FF2B5EF4-FFF2-40B4-BE49-F238E27FC236}">
-                <a16:creationId xmlns:a16="http://schemas.microsoft.com/office/drawing/2014/main" id="{771937F4-94D4-4D45-9789-403D925A7EEB}"/>
+                <a16:creationId xmlns:a16="http://schemas.microsoft.com/office/drawing/2014/main" id="{6573A637-71DD-45D1-966C-C883F67EA130}"/>
               </a:ext>
             </a:extLst>
           </p:cNvPr>
@@ -11913,7 +11913,7 @@
           <p:cNvPr id="27" name="">
             <a:extLst xmlns:a="http://schemas.openxmlformats.org/drawingml/2006/main">
               <a:ext uri="{FF2B5EF4-FFF2-40B4-BE49-F238E27FC236}">
-                <a16:creationId xmlns:a16="http://schemas.microsoft.com/office/drawing/2014/main" id="{B067A052-CFAC-46A2-AFF5-C31808DDB691}"/>
+                <a16:creationId xmlns:a16="http://schemas.microsoft.com/office/drawing/2014/main" id="{160A2C8F-4991-4854-A361-BA76A9894B50}"/>
               </a:ext>
             </a:extLst>
           </p:cNvPr>
@@ -11977,7 +11977,7 @@
           <p:cNvPr id="28" name="">
             <a:extLst xmlns:a="http://schemas.openxmlformats.org/drawingml/2006/main">
               <a:ext uri="{FF2B5EF4-FFF2-40B4-BE49-F238E27FC236}">
-                <a16:creationId xmlns:a16="http://schemas.microsoft.com/office/drawing/2014/main" id="{A03A44C0-595A-4BE1-AEA3-ED0ABACB1CCB}"/>
+                <a16:creationId xmlns:a16="http://schemas.microsoft.com/office/drawing/2014/main" id="{9003C648-267B-493F-80F1-A0766A592C24}"/>
               </a:ext>
             </a:extLst>
           </p:cNvPr>
@@ -12087,7 +12087,7 @@
           <p:cNvPr id="29" name="">
             <a:extLst xmlns:a="http://schemas.openxmlformats.org/drawingml/2006/main">
               <a:ext uri="{FF2B5EF4-FFF2-40B4-BE49-F238E27FC236}">
-                <a16:creationId xmlns:a16="http://schemas.microsoft.com/office/drawing/2014/main" id="{99101D05-01CF-4A47-823A-ADE5BFA469ED}"/>
+                <a16:creationId xmlns:a16="http://schemas.microsoft.com/office/drawing/2014/main" id="{7A86E3F5-5576-4C41-96BC-83576BE607AC}"/>
               </a:ext>
             </a:extLst>
           </p:cNvPr>
@@ -12120,7 +12120,7 @@
           <p:cNvPr id="30" name="">
             <a:extLst xmlns:a="http://schemas.openxmlformats.org/drawingml/2006/main">
               <a:ext uri="{FF2B5EF4-FFF2-40B4-BE49-F238E27FC236}">
-                <a16:creationId xmlns:a16="http://schemas.microsoft.com/office/drawing/2014/main" id="{9F8587D8-B0A5-456D-BC42-DBA5D8DF4960}"/>
+                <a16:creationId xmlns:a16="http://schemas.microsoft.com/office/drawing/2014/main" id="{762B9F3F-0D43-45F9-93DD-01A3AE96BFCD}"/>
               </a:ext>
             </a:extLst>
           </p:cNvPr>
@@ -12184,7 +12184,7 @@
           <p:cNvPr id="31" name="">
             <a:extLst xmlns:a="http://schemas.openxmlformats.org/drawingml/2006/main">
               <a:ext uri="{FF2B5EF4-FFF2-40B4-BE49-F238E27FC236}">
-                <a16:creationId xmlns:a16="http://schemas.microsoft.com/office/drawing/2014/main" id="{AA9983DA-1CA0-4BB1-9DEA-3F8540B040CB}"/>
+                <a16:creationId xmlns:a16="http://schemas.microsoft.com/office/drawing/2014/main" id="{3DF60F90-CD27-4C8E-9E42-BDA3FE65A0F8}"/>
               </a:ext>
             </a:extLst>
           </p:cNvPr>
@@ -12219,7 +12219,7 @@
           <p:cNvPr id="32" name="">
             <a:extLst xmlns:a="http://schemas.openxmlformats.org/drawingml/2006/main">
               <a:ext uri="{FF2B5EF4-FFF2-40B4-BE49-F238E27FC236}">
-                <a16:creationId xmlns:a16="http://schemas.microsoft.com/office/drawing/2014/main" id="{9F7BC0CA-EAB9-469A-88DD-6DFD352B25C5}"/>
+                <a16:creationId xmlns:a16="http://schemas.microsoft.com/office/drawing/2014/main" id="{00AA8A8A-B9D5-4A22-A7CD-CB9E5BB60A65}"/>
               </a:ext>
             </a:extLst>
           </p:cNvPr>
@@ -12283,7 +12283,7 @@
           <p:cNvPr id="33" name="">
             <a:extLst xmlns:a="http://schemas.openxmlformats.org/drawingml/2006/main">
               <a:ext uri="{FF2B5EF4-FFF2-40B4-BE49-F238E27FC236}">
-                <a16:creationId xmlns:a16="http://schemas.microsoft.com/office/drawing/2014/main" id="{11093A6B-973D-4F58-90F4-4CD5F7875135}"/>
+                <a16:creationId xmlns:a16="http://schemas.microsoft.com/office/drawing/2014/main" id="{2D727AA0-3BAE-4F4A-B476-38DDC7B7CAE2}"/>
               </a:ext>
             </a:extLst>
           </p:cNvPr>
@@ -12345,7 +12345,7 @@
     </p:spTree>
     <p:extLst>
       <p:ext uri="{BB962C8B-B14F-4D97-AF65-F5344CB8AC3E}">
-        <p14:creationId xmlns:p14="http://schemas.microsoft.com/office/powerpoint/2010/main" val="426621307"/>
+        <p14:creationId xmlns:p14="http://schemas.microsoft.com/office/powerpoint/2010/main" val="410764032"/>
       </p:ext>
     </p:extLst>
   </p:cSld>
@@ -12369,7 +12369,7 @@
           <p:cNvPr id="1" name="">
             <a:extLst xmlns:a="http://schemas.openxmlformats.org/drawingml/2006/main">
               <a:ext uri="{FF2B5EF4-FFF2-40B4-BE49-F238E27FC236}">
-                <a16:creationId xmlns:a16="http://schemas.microsoft.com/office/drawing/2014/main" id="{34A94C8A-92AA-4B8D-B511-BA8D8EB0CB44}"/>
+                <a16:creationId xmlns:a16="http://schemas.microsoft.com/office/drawing/2014/main" id="{5E0B6CF9-0969-4CBF-93BA-F078DE26D198}"/>
               </a:ext>
             </a:extLst>
           </p:cNvPr>
@@ -12404,7 +12404,7 @@
           <p:cNvPr id="2" name="">
             <a:extLst xmlns:a="http://schemas.openxmlformats.org/drawingml/2006/main">
               <a:ext uri="{FF2B5EF4-FFF2-40B4-BE49-F238E27FC236}">
-                <a16:creationId xmlns:a16="http://schemas.microsoft.com/office/drawing/2014/main" id="{2C5AAD9B-3EA5-4760-A863-D2F097C454D6}"/>
+                <a16:creationId xmlns:a16="http://schemas.microsoft.com/office/drawing/2014/main" id="{2C941678-A920-4E77-A7DC-87EA1822D3D6}"/>
               </a:ext>
             </a:extLst>
           </p:cNvPr>
@@ -12439,7 +12439,7 @@
           <p:cNvPr id="3" name="">
             <a:extLst xmlns:a="http://schemas.openxmlformats.org/drawingml/2006/main">
               <a:ext uri="{FF2B5EF4-FFF2-40B4-BE49-F238E27FC236}">
-                <a16:creationId xmlns:a16="http://schemas.microsoft.com/office/drawing/2014/main" id="{38D9A679-B170-498B-AE3C-9139133CFDB2}"/>
+                <a16:creationId xmlns:a16="http://schemas.microsoft.com/office/drawing/2014/main" id="{64645C3F-E90B-45C5-BEB0-F1DD4763C7EC}"/>
               </a:ext>
             </a:extLst>
           </p:cNvPr>
@@ -12503,7 +12503,7 @@
           <p:cNvPr id="4" name="">
             <a:extLst xmlns:a="http://schemas.openxmlformats.org/drawingml/2006/main">
               <a:ext uri="{FF2B5EF4-FFF2-40B4-BE49-F238E27FC236}">
-                <a16:creationId xmlns:a16="http://schemas.microsoft.com/office/drawing/2014/main" id="{4DBDEFA7-3692-42D5-9E82-222689848737}"/>
+                <a16:creationId xmlns:a16="http://schemas.microsoft.com/office/drawing/2014/main" id="{30DEE0C4-DC2F-4A8E-86D6-E8526B6CC061}"/>
               </a:ext>
             </a:extLst>
           </p:cNvPr>
@@ -12567,7 +12567,7 @@
           <p:cNvPr id="5" name="">
             <a:extLst xmlns:a="http://schemas.openxmlformats.org/drawingml/2006/main">
               <a:ext uri="{FF2B5EF4-FFF2-40B4-BE49-F238E27FC236}">
-                <a16:creationId xmlns:a16="http://schemas.microsoft.com/office/drawing/2014/main" id="{AE642609-4E64-40A3-939C-F40914589389}"/>
+                <a16:creationId xmlns:a16="http://schemas.microsoft.com/office/drawing/2014/main" id="{357B3EAB-FDBB-428C-A7BA-E46266E2633A}"/>
               </a:ext>
             </a:extLst>
           </p:cNvPr>
@@ -12631,7 +12631,7 @@
           <p:cNvPr id="6" name="">
             <a:extLst xmlns:a="http://schemas.openxmlformats.org/drawingml/2006/main">
               <a:ext uri="{FF2B5EF4-FFF2-40B4-BE49-F238E27FC236}">
-                <a16:creationId xmlns:a16="http://schemas.microsoft.com/office/drawing/2014/main" id="{1369D3FA-F695-4885-855D-7A9DE13C3478}"/>
+                <a16:creationId xmlns:a16="http://schemas.microsoft.com/office/drawing/2014/main" id="{AC5C018E-0215-4B27-B1DD-9553B1C15F7B}"/>
               </a:ext>
             </a:extLst>
           </p:cNvPr>
@@ -12664,7 +12664,7 @@
           <p:cNvPr id="7" name="">
             <a:extLst xmlns:a="http://schemas.openxmlformats.org/drawingml/2006/main">
               <a:ext uri="{FF2B5EF4-FFF2-40B4-BE49-F238E27FC236}">
-                <a16:creationId xmlns:a16="http://schemas.microsoft.com/office/drawing/2014/main" id="{F4EB02B9-6B54-4B9E-8F79-8897AC0639EA}"/>
+                <a16:creationId xmlns:a16="http://schemas.microsoft.com/office/drawing/2014/main" id="{3EFC6CFD-3927-4F96-AB81-15EB31CEB71F}"/>
               </a:ext>
             </a:extLst>
           </p:cNvPr>
@@ -12697,7 +12697,7 @@
           <p:cNvPr id="8" name="">
             <a:extLst xmlns:a="http://schemas.openxmlformats.org/drawingml/2006/main">
               <a:ext uri="{FF2B5EF4-FFF2-40B4-BE49-F238E27FC236}">
-                <a16:creationId xmlns:a16="http://schemas.microsoft.com/office/drawing/2014/main" id="{22ED102C-A47C-47BF-B01F-A0859123B19F}"/>
+                <a16:creationId xmlns:a16="http://schemas.microsoft.com/office/drawing/2014/main" id="{68D95698-8986-4E42-9673-BBA065D648B9}"/>
               </a:ext>
             </a:extLst>
           </p:cNvPr>
@@ -12761,7 +12761,7 @@
           <p:cNvPr id="9" name="">
             <a:extLst xmlns:a="http://schemas.openxmlformats.org/drawingml/2006/main">
               <a:ext uri="{FF2B5EF4-FFF2-40B4-BE49-F238E27FC236}">
-                <a16:creationId xmlns:a16="http://schemas.microsoft.com/office/drawing/2014/main" id="{571DD84B-3BE9-40C1-B8E7-F71C92BF16A4}"/>
+                <a16:creationId xmlns:a16="http://schemas.microsoft.com/office/drawing/2014/main" id="{A79D7229-4794-43BA-A371-14F7C0C2DB1A}"/>
               </a:ext>
             </a:extLst>
           </p:cNvPr>
@@ -12796,7 +12796,7 @@
           <p:cNvPr id="10" name="">
             <a:extLst xmlns:a="http://schemas.openxmlformats.org/drawingml/2006/main">
               <a:ext uri="{FF2B5EF4-FFF2-40B4-BE49-F238E27FC236}">
-                <a16:creationId xmlns:a16="http://schemas.microsoft.com/office/drawing/2014/main" id="{C4EC8AB8-2E2A-4F07-9FD6-124FF7BCB130}"/>
+                <a16:creationId xmlns:a16="http://schemas.microsoft.com/office/drawing/2014/main" id="{DE63EA7D-96D3-48E4-B21A-8784611B5E88}"/>
               </a:ext>
             </a:extLst>
           </p:cNvPr>
@@ -12860,7 +12860,7 @@
           <p:cNvPr id="11" name="">
             <a:extLst xmlns:a="http://schemas.openxmlformats.org/drawingml/2006/main">
               <a:ext uri="{FF2B5EF4-FFF2-40B4-BE49-F238E27FC236}">
-                <a16:creationId xmlns:a16="http://schemas.microsoft.com/office/drawing/2014/main" id="{95B5EC1E-B976-486D-931F-48103DF33F3F}"/>
+                <a16:creationId xmlns:a16="http://schemas.microsoft.com/office/drawing/2014/main" id="{BC1B8603-1A72-4064-B320-18976C527E32}"/>
               </a:ext>
             </a:extLst>
           </p:cNvPr>
@@ -12895,7 +12895,7 @@
           <p:cNvPr id="12" name="">
             <a:extLst xmlns:a="http://schemas.openxmlformats.org/drawingml/2006/main">
               <a:ext uri="{FF2B5EF4-FFF2-40B4-BE49-F238E27FC236}">
-                <a16:creationId xmlns:a16="http://schemas.microsoft.com/office/drawing/2014/main" id="{1882B8E0-F177-41E5-9B09-03DA0E5CD689}"/>
+                <a16:creationId xmlns:a16="http://schemas.microsoft.com/office/drawing/2014/main" id="{32265661-6230-483F-A7DA-5E2D2F0AAFC8}"/>
               </a:ext>
             </a:extLst>
           </p:cNvPr>
@@ -12959,7 +12959,7 @@
           <p:cNvPr id="13" name="">
             <a:extLst xmlns:a="http://schemas.openxmlformats.org/drawingml/2006/main">
               <a:ext uri="{FF2B5EF4-FFF2-40B4-BE49-F238E27FC236}">
-                <a16:creationId xmlns:a16="http://schemas.microsoft.com/office/drawing/2014/main" id="{E3FBDB07-CD81-45C5-862E-BC27975DB339}"/>
+                <a16:creationId xmlns:a16="http://schemas.microsoft.com/office/drawing/2014/main" id="{AD55FA0F-5D5F-4DA6-89A0-8D564AE64DF0}"/>
               </a:ext>
             </a:extLst>
           </p:cNvPr>
@@ -12994,7 +12994,7 @@
           <p:cNvPr id="14" name="">
             <a:extLst xmlns:a="http://schemas.openxmlformats.org/drawingml/2006/main">
               <a:ext uri="{FF2B5EF4-FFF2-40B4-BE49-F238E27FC236}">
-                <a16:creationId xmlns:a16="http://schemas.microsoft.com/office/drawing/2014/main" id="{0D087099-0E8D-4682-8545-53571D3F077C}"/>
+                <a16:creationId xmlns:a16="http://schemas.microsoft.com/office/drawing/2014/main" id="{99D7F8A8-D8BA-47C0-9916-503701A8C82A}"/>
               </a:ext>
             </a:extLst>
           </p:cNvPr>
@@ -13058,7 +13058,7 @@
           <p:cNvPr id="15" name="">
             <a:extLst xmlns:a="http://schemas.openxmlformats.org/drawingml/2006/main">
               <a:ext uri="{FF2B5EF4-FFF2-40B4-BE49-F238E27FC236}">
-                <a16:creationId xmlns:a16="http://schemas.microsoft.com/office/drawing/2014/main" id="{05587CDD-FDD5-4034-991F-63EF02E3EF04}"/>
+                <a16:creationId xmlns:a16="http://schemas.microsoft.com/office/drawing/2014/main" id="{A2F23A4B-2478-4750-92BD-8AE26E5C7A27}"/>
               </a:ext>
             </a:extLst>
           </p:cNvPr>
@@ -13091,7 +13091,7 @@
           <p:cNvPr id="16" name="">
             <a:extLst xmlns:a="http://schemas.openxmlformats.org/drawingml/2006/main">
               <a:ext uri="{FF2B5EF4-FFF2-40B4-BE49-F238E27FC236}">
-                <a16:creationId xmlns:a16="http://schemas.microsoft.com/office/drawing/2014/main" id="{1610F668-E05F-4F6B-A1B1-BF8D70216599}"/>
+                <a16:creationId xmlns:a16="http://schemas.microsoft.com/office/drawing/2014/main" id="{447F8EFB-F3DC-46C5-B31D-65B28900DC80}"/>
               </a:ext>
             </a:extLst>
           </p:cNvPr>
@@ -13124,7 +13124,7 @@
           <p:cNvPr id="17" name="">
             <a:extLst xmlns:a="http://schemas.openxmlformats.org/drawingml/2006/main">
               <a:ext uri="{FF2B5EF4-FFF2-40B4-BE49-F238E27FC236}">
-                <a16:creationId xmlns:a16="http://schemas.microsoft.com/office/drawing/2014/main" id="{894F04CE-7583-4600-A4F7-C99F8A77C843}"/>
+                <a16:creationId xmlns:a16="http://schemas.microsoft.com/office/drawing/2014/main" id="{79FD3994-6956-4CBC-99D5-FC5FE1193E62}"/>
               </a:ext>
             </a:extLst>
           </p:cNvPr>
@@ -13188,7 +13188,7 @@
           <p:cNvPr id="18" name="">
             <a:extLst xmlns:a="http://schemas.openxmlformats.org/drawingml/2006/main">
               <a:ext uri="{FF2B5EF4-FFF2-40B4-BE49-F238E27FC236}">
-                <a16:creationId xmlns:a16="http://schemas.microsoft.com/office/drawing/2014/main" id="{55D57E82-0287-4FC4-9E56-967F4415F39B}"/>
+                <a16:creationId xmlns:a16="http://schemas.microsoft.com/office/drawing/2014/main" id="{C4AE725B-B5F8-4CE4-9E24-D7F501D4F175}"/>
               </a:ext>
             </a:extLst>
           </p:cNvPr>
@@ -13223,7 +13223,7 @@
           <p:cNvPr id="19" name="">
             <a:extLst xmlns:a="http://schemas.openxmlformats.org/drawingml/2006/main">
               <a:ext uri="{FF2B5EF4-FFF2-40B4-BE49-F238E27FC236}">
-                <a16:creationId xmlns:a16="http://schemas.microsoft.com/office/drawing/2014/main" id="{8EBC2C3E-1D1C-49C2-B7EA-C798A653F0BB}"/>
+                <a16:creationId xmlns:a16="http://schemas.microsoft.com/office/drawing/2014/main" id="{C36D0957-69AB-4075-806D-1DE41A80CF2D}"/>
               </a:ext>
             </a:extLst>
           </p:cNvPr>
@@ -13287,7 +13287,7 @@
           <p:cNvPr id="20" name="">
             <a:extLst xmlns:a="http://schemas.openxmlformats.org/drawingml/2006/main">
               <a:ext uri="{FF2B5EF4-FFF2-40B4-BE49-F238E27FC236}">
-                <a16:creationId xmlns:a16="http://schemas.microsoft.com/office/drawing/2014/main" id="{FC9B6BB2-B3A0-4731-8683-7634363657D2}"/>
+                <a16:creationId xmlns:a16="http://schemas.microsoft.com/office/drawing/2014/main" id="{CF392E22-80EA-4D86-95F8-F8CC4CF4C6CB}"/>
               </a:ext>
             </a:extLst>
           </p:cNvPr>
@@ -13322,7 +13322,7 @@
           <p:cNvPr id="21" name="">
             <a:extLst xmlns:a="http://schemas.openxmlformats.org/drawingml/2006/main">
               <a:ext uri="{FF2B5EF4-FFF2-40B4-BE49-F238E27FC236}">
-                <a16:creationId xmlns:a16="http://schemas.microsoft.com/office/drawing/2014/main" id="{69D61646-B62F-4D0E-91FF-946FE0E684B5}"/>
+                <a16:creationId xmlns:a16="http://schemas.microsoft.com/office/drawing/2014/main" id="{85F5DB72-F691-4CB0-AC2E-68879823E07C}"/>
               </a:ext>
             </a:extLst>
           </p:cNvPr>
@@ -13386,7 +13386,7 @@
           <p:cNvPr id="22" name="">
             <a:extLst xmlns:a="http://schemas.openxmlformats.org/drawingml/2006/main">
               <a:ext uri="{FF2B5EF4-FFF2-40B4-BE49-F238E27FC236}">
-                <a16:creationId xmlns:a16="http://schemas.microsoft.com/office/drawing/2014/main" id="{7B341005-48A9-46BD-9552-F45886FFB7DA}"/>
+                <a16:creationId xmlns:a16="http://schemas.microsoft.com/office/drawing/2014/main" id="{6EB78E7C-7751-45C6-82EA-C17E1700E7E7}"/>
               </a:ext>
             </a:extLst>
           </p:cNvPr>
@@ -13421,7 +13421,7 @@
           <p:cNvPr id="23" name="">
             <a:extLst xmlns:a="http://schemas.openxmlformats.org/drawingml/2006/main">
               <a:ext uri="{FF2B5EF4-FFF2-40B4-BE49-F238E27FC236}">
-                <a16:creationId xmlns:a16="http://schemas.microsoft.com/office/drawing/2014/main" id="{9AFC92DE-EF74-4086-99BD-85D265D0F661}"/>
+                <a16:creationId xmlns:a16="http://schemas.microsoft.com/office/drawing/2014/main" id="{B6CF9951-47DF-4D23-9D8C-0F0E4AB09533}"/>
               </a:ext>
             </a:extLst>
           </p:cNvPr>
@@ -13485,7 +13485,7 @@
           <p:cNvPr id="24" name="">
             <a:extLst xmlns:a="http://schemas.openxmlformats.org/drawingml/2006/main">
               <a:ext uri="{FF2B5EF4-FFF2-40B4-BE49-F238E27FC236}">
-                <a16:creationId xmlns:a16="http://schemas.microsoft.com/office/drawing/2014/main" id="{98328591-10B5-4902-961E-B2450F17D6D0}"/>
+                <a16:creationId xmlns:a16="http://schemas.microsoft.com/office/drawing/2014/main" id="{E6E9A8F3-E3CB-4818-9A53-AD7875BB5ACE}"/>
               </a:ext>
             </a:extLst>
           </p:cNvPr>
@@ -13518,7 +13518,7 @@
           <p:cNvPr id="25" name="">
             <a:extLst xmlns:a="http://schemas.openxmlformats.org/drawingml/2006/main">
               <a:ext uri="{FF2B5EF4-FFF2-40B4-BE49-F238E27FC236}">
-                <a16:creationId xmlns:a16="http://schemas.microsoft.com/office/drawing/2014/main" id="{C9DA6FF3-1028-4FB0-AD34-C10F476BDE04}"/>
+                <a16:creationId xmlns:a16="http://schemas.microsoft.com/office/drawing/2014/main" id="{4F13C295-C753-4C79-B51B-3C704730DAEB}"/>
               </a:ext>
             </a:extLst>
           </p:cNvPr>
@@ -13551,7 +13551,7 @@
           <p:cNvPr id="26" name="">
             <a:extLst xmlns:a="http://schemas.openxmlformats.org/drawingml/2006/main">
               <a:ext uri="{FF2B5EF4-FFF2-40B4-BE49-F238E27FC236}">
-                <a16:creationId xmlns:a16="http://schemas.microsoft.com/office/drawing/2014/main" id="{91CD3B0F-C36D-41AA-8875-1769157E468E}"/>
+                <a16:creationId xmlns:a16="http://schemas.microsoft.com/office/drawing/2014/main" id="{17500301-3B49-4C66-9B1D-D8E2FDD03D00}"/>
               </a:ext>
             </a:extLst>
           </p:cNvPr>
@@ -13615,7 +13615,7 @@
           <p:cNvPr id="27" name="">
             <a:extLst xmlns:a="http://schemas.openxmlformats.org/drawingml/2006/main">
               <a:ext uri="{FF2B5EF4-FFF2-40B4-BE49-F238E27FC236}">
-                <a16:creationId xmlns:a16="http://schemas.microsoft.com/office/drawing/2014/main" id="{0754CF17-9FA1-44C5-86D0-6FC1C0D79A56}"/>
+                <a16:creationId xmlns:a16="http://schemas.microsoft.com/office/drawing/2014/main" id="{F0DE382B-216F-4539-BFA3-8BC2A036EE0F}"/>
               </a:ext>
             </a:extLst>
           </p:cNvPr>
@@ -13650,7 +13650,7 @@
           <p:cNvPr id="28" name="">
             <a:extLst xmlns:a="http://schemas.openxmlformats.org/drawingml/2006/main">
               <a:ext uri="{FF2B5EF4-FFF2-40B4-BE49-F238E27FC236}">
-                <a16:creationId xmlns:a16="http://schemas.microsoft.com/office/drawing/2014/main" id="{30463A76-A585-4988-9C10-F8F9139EB10B}"/>
+                <a16:creationId xmlns:a16="http://schemas.microsoft.com/office/drawing/2014/main" id="{FB5ACBE0-A12C-427C-A351-C96BFA7D3AED}"/>
               </a:ext>
             </a:extLst>
           </p:cNvPr>
@@ -13714,7 +13714,7 @@
           <p:cNvPr id="29" name="">
             <a:extLst xmlns:a="http://schemas.openxmlformats.org/drawingml/2006/main">
               <a:ext uri="{FF2B5EF4-FFF2-40B4-BE49-F238E27FC236}">
-                <a16:creationId xmlns:a16="http://schemas.microsoft.com/office/drawing/2014/main" id="{8D55B407-8618-4C09-B446-17F589091B1F}"/>
+                <a16:creationId xmlns:a16="http://schemas.microsoft.com/office/drawing/2014/main" id="{F21FBE6D-2978-45CA-9AA5-CC47292A45B7}"/>
               </a:ext>
             </a:extLst>
           </p:cNvPr>
@@ -13749,7 +13749,7 @@
           <p:cNvPr id="30" name="">
             <a:extLst xmlns:a="http://schemas.openxmlformats.org/drawingml/2006/main">
               <a:ext uri="{FF2B5EF4-FFF2-40B4-BE49-F238E27FC236}">
-                <a16:creationId xmlns:a16="http://schemas.microsoft.com/office/drawing/2014/main" id="{3BDE6C8D-D774-4939-8B9E-12278052AE2B}"/>
+                <a16:creationId xmlns:a16="http://schemas.microsoft.com/office/drawing/2014/main" id="{5977013D-E42B-433F-909F-E20024B6BF3F}"/>
               </a:ext>
             </a:extLst>
           </p:cNvPr>
@@ -13813,7 +13813,7 @@
           <p:cNvPr id="31" name="">
             <a:extLst xmlns:a="http://schemas.openxmlformats.org/drawingml/2006/main">
               <a:ext uri="{FF2B5EF4-FFF2-40B4-BE49-F238E27FC236}">
-                <a16:creationId xmlns:a16="http://schemas.microsoft.com/office/drawing/2014/main" id="{0F85B576-3A4A-4AE5-9D2F-633D6C890380}"/>
+                <a16:creationId xmlns:a16="http://schemas.microsoft.com/office/drawing/2014/main" id="{4C688FDB-5F7C-4704-912B-3334DC3574EE}"/>
               </a:ext>
             </a:extLst>
           </p:cNvPr>
@@ -13848,7 +13848,7 @@
           <p:cNvPr id="32" name="">
             <a:extLst xmlns:a="http://schemas.openxmlformats.org/drawingml/2006/main">
               <a:ext uri="{FF2B5EF4-FFF2-40B4-BE49-F238E27FC236}">
-                <a16:creationId xmlns:a16="http://schemas.microsoft.com/office/drawing/2014/main" id="{0BFE17D3-2932-4418-8EEE-707C17F8A6DD}"/>
+                <a16:creationId xmlns:a16="http://schemas.microsoft.com/office/drawing/2014/main" id="{9ECB90C3-0FBF-4C2E-8E47-357D769B5D5C}"/>
               </a:ext>
             </a:extLst>
           </p:cNvPr>
@@ -13912,7 +13912,7 @@
           <p:cNvPr id="33" name="">
             <a:extLst xmlns:a="http://schemas.openxmlformats.org/drawingml/2006/main">
               <a:ext uri="{FF2B5EF4-FFF2-40B4-BE49-F238E27FC236}">
-                <a16:creationId xmlns:a16="http://schemas.microsoft.com/office/drawing/2014/main" id="{9555DECF-C2FA-4F7F-9CDA-092A0AC2432F}"/>
+                <a16:creationId xmlns:a16="http://schemas.microsoft.com/office/drawing/2014/main" id="{727CB8F0-CF48-4A0F-B29F-BB27BEE2A56F}"/>
               </a:ext>
             </a:extLst>
           </p:cNvPr>
@@ -13945,7 +13945,7 @@
           <p:cNvPr id="34" name="">
             <a:extLst xmlns:a="http://schemas.openxmlformats.org/drawingml/2006/main">
               <a:ext uri="{FF2B5EF4-FFF2-40B4-BE49-F238E27FC236}">
-                <a16:creationId xmlns:a16="http://schemas.microsoft.com/office/drawing/2014/main" id="{D141A68B-15FF-42F7-A516-8A094F9AFCBE}"/>
+                <a16:creationId xmlns:a16="http://schemas.microsoft.com/office/drawing/2014/main" id="{B94B56D7-295D-4DA2-9B69-C9019C7FDCE8}"/>
               </a:ext>
             </a:extLst>
           </p:cNvPr>
@@ -14009,7 +14009,7 @@
           <p:cNvPr id="35" name="">
             <a:extLst xmlns:a="http://schemas.openxmlformats.org/drawingml/2006/main">
               <a:ext uri="{FF2B5EF4-FFF2-40B4-BE49-F238E27FC236}">
-                <a16:creationId xmlns:a16="http://schemas.microsoft.com/office/drawing/2014/main" id="{B45BBB6A-C496-42CE-82D4-BDF3CFE72E8D}"/>
+                <a16:creationId xmlns:a16="http://schemas.microsoft.com/office/drawing/2014/main" id="{31457C40-9213-4510-8A67-99C35813E17B}"/>
               </a:ext>
             </a:extLst>
           </p:cNvPr>
@@ -14044,7 +14044,7 @@
           <p:cNvPr id="36" name="">
             <a:extLst xmlns:a="http://schemas.openxmlformats.org/drawingml/2006/main">
               <a:ext uri="{FF2B5EF4-FFF2-40B4-BE49-F238E27FC236}">
-                <a16:creationId xmlns:a16="http://schemas.microsoft.com/office/drawing/2014/main" id="{38053653-E5BC-4487-8D33-DDF510060176}"/>
+                <a16:creationId xmlns:a16="http://schemas.microsoft.com/office/drawing/2014/main" id="{FAF9D7D4-7A32-4C86-B2D2-5964A863B798}"/>
               </a:ext>
             </a:extLst>
           </p:cNvPr>
@@ -14108,7 +14108,7 @@
           <p:cNvPr id="37" name="">
             <a:extLst xmlns:a="http://schemas.openxmlformats.org/drawingml/2006/main">
               <a:ext uri="{FF2B5EF4-FFF2-40B4-BE49-F238E27FC236}">
-                <a16:creationId xmlns:a16="http://schemas.microsoft.com/office/drawing/2014/main" id="{869EA6B7-FBEA-49F5-98BA-7856C5D58B41}"/>
+                <a16:creationId xmlns:a16="http://schemas.microsoft.com/office/drawing/2014/main" id="{66BE1F86-98C5-4764-82D4-E82480D029CF}"/>
               </a:ext>
             </a:extLst>
           </p:cNvPr>
@@ -14143,7 +14143,7 @@
           <p:cNvPr id="38" name="">
             <a:extLst xmlns:a="http://schemas.openxmlformats.org/drawingml/2006/main">
               <a:ext uri="{FF2B5EF4-FFF2-40B4-BE49-F238E27FC236}">
-                <a16:creationId xmlns:a16="http://schemas.microsoft.com/office/drawing/2014/main" id="{CF40566E-4D46-4BD8-9A49-18C0416928A8}"/>
+                <a16:creationId xmlns:a16="http://schemas.microsoft.com/office/drawing/2014/main" id="{6872E31E-F930-4DC9-9244-6AADB4B6DFF4}"/>
               </a:ext>
             </a:extLst>
           </p:cNvPr>
@@ -14207,7 +14207,7 @@
           <p:cNvPr id="39" name="">
             <a:extLst xmlns:a="http://schemas.openxmlformats.org/drawingml/2006/main">
               <a:ext uri="{FF2B5EF4-FFF2-40B4-BE49-F238E27FC236}">
-                <a16:creationId xmlns:a16="http://schemas.microsoft.com/office/drawing/2014/main" id="{7F84DA72-BF47-43ED-B3A0-33B1E853B4ED}"/>
+                <a16:creationId xmlns:a16="http://schemas.microsoft.com/office/drawing/2014/main" id="{FA4D8FFA-C73D-45EC-9366-33EA1206DA89}"/>
               </a:ext>
             </a:extLst>
           </p:cNvPr>
@@ -14242,7 +14242,7 @@
           <p:cNvPr id="40" name="">
             <a:extLst xmlns:a="http://schemas.openxmlformats.org/drawingml/2006/main">
               <a:ext uri="{FF2B5EF4-FFF2-40B4-BE49-F238E27FC236}">
-                <a16:creationId xmlns:a16="http://schemas.microsoft.com/office/drawing/2014/main" id="{3979BB54-DE90-4267-A248-EAF26A2A586A}"/>
+                <a16:creationId xmlns:a16="http://schemas.microsoft.com/office/drawing/2014/main" id="{C4507D1F-DF44-47D0-A99E-802741D1623A}"/>
               </a:ext>
             </a:extLst>
           </p:cNvPr>
@@ -14306,7 +14306,7 @@
           <p:cNvPr id="41" name="">
             <a:extLst xmlns:a="http://schemas.openxmlformats.org/drawingml/2006/main">
               <a:ext uri="{FF2B5EF4-FFF2-40B4-BE49-F238E27FC236}">
-                <a16:creationId xmlns:a16="http://schemas.microsoft.com/office/drawing/2014/main" id="{167F9B62-432F-452F-AC02-1D7AB239B572}"/>
+                <a16:creationId xmlns:a16="http://schemas.microsoft.com/office/drawing/2014/main" id="{BD2805E7-1411-455E-82FA-2B90A600CB5B}"/>
               </a:ext>
             </a:extLst>
           </p:cNvPr>
@@ -14341,7 +14341,7 @@
           <p:cNvPr id="42" name="">
             <a:extLst xmlns:a="http://schemas.openxmlformats.org/drawingml/2006/main">
               <a:ext uri="{FF2B5EF4-FFF2-40B4-BE49-F238E27FC236}">
-                <a16:creationId xmlns:a16="http://schemas.microsoft.com/office/drawing/2014/main" id="{8FD79BB4-B916-4426-B062-5C1581082E0F}"/>
+                <a16:creationId xmlns:a16="http://schemas.microsoft.com/office/drawing/2014/main" id="{F2DF57B2-98DF-4015-B1D8-8E2A6189A16F}"/>
               </a:ext>
             </a:extLst>
           </p:cNvPr>
@@ -14405,7 +14405,7 @@
           <p:cNvPr id="43" name="">
             <a:extLst xmlns:a="http://schemas.openxmlformats.org/drawingml/2006/main">
               <a:ext uri="{FF2B5EF4-FFF2-40B4-BE49-F238E27FC236}">
-                <a16:creationId xmlns:a16="http://schemas.microsoft.com/office/drawing/2014/main" id="{1B54A548-3122-47C3-A1D3-B8AD59FDDC63}"/>
+                <a16:creationId xmlns:a16="http://schemas.microsoft.com/office/drawing/2014/main" id="{F0545D28-64A6-4715-9251-C0B49FDCDBCD}"/>
               </a:ext>
             </a:extLst>
           </p:cNvPr>
@@ -14467,7 +14467,7 @@
     </p:spTree>
     <p:extLst>
       <p:ext uri="{BB962C8B-B14F-4D97-AF65-F5344CB8AC3E}">
-        <p14:creationId xmlns:p14="http://schemas.microsoft.com/office/powerpoint/2010/main" val="2091073151"/>
+        <p14:creationId xmlns:p14="http://schemas.microsoft.com/office/powerpoint/2010/main" val="1581594646"/>
       </p:ext>
     </p:extLst>
   </p:cSld>
@@ -14491,7 +14491,7 @@
           <p:cNvPr id="1" name="">
             <a:extLst xmlns:a="http://schemas.openxmlformats.org/drawingml/2006/main">
               <a:ext uri="{FF2B5EF4-FFF2-40B4-BE49-F238E27FC236}">
-                <a16:creationId xmlns:a16="http://schemas.microsoft.com/office/drawing/2014/main" id="{67ED79EF-8E77-42C0-9746-BCD12A02493E}"/>
+                <a16:creationId xmlns:a16="http://schemas.microsoft.com/office/drawing/2014/main" id="{ED2C0EE0-138D-403C-9055-4220732379F8}"/>
               </a:ext>
             </a:extLst>
           </p:cNvPr>
@@ -14526,7 +14526,7 @@
           <p:cNvPr id="2" name="">
             <a:extLst xmlns:a="http://schemas.openxmlformats.org/drawingml/2006/main">
               <a:ext uri="{FF2B5EF4-FFF2-40B4-BE49-F238E27FC236}">
-                <a16:creationId xmlns:a16="http://schemas.microsoft.com/office/drawing/2014/main" id="{6A383FE5-A037-46FE-A48D-85FDA3D9C83E}"/>
+                <a16:creationId xmlns:a16="http://schemas.microsoft.com/office/drawing/2014/main" id="{65BEC546-F79A-42ED-A36A-FF2DEE4109C5}"/>
               </a:ext>
             </a:extLst>
           </p:cNvPr>
@@ -14561,7 +14561,7 @@
           <p:cNvPr id="3" name="">
             <a:extLst xmlns:a="http://schemas.openxmlformats.org/drawingml/2006/main">
               <a:ext uri="{FF2B5EF4-FFF2-40B4-BE49-F238E27FC236}">
-                <a16:creationId xmlns:a16="http://schemas.microsoft.com/office/drawing/2014/main" id="{318692DF-24EE-4356-8862-4DCB504B2CFE}"/>
+                <a16:creationId xmlns:a16="http://schemas.microsoft.com/office/drawing/2014/main" id="{D81825D3-EA42-4634-BCB7-88ECFDE1A608}"/>
               </a:ext>
             </a:extLst>
           </p:cNvPr>
@@ -14625,7 +14625,7 @@
           <p:cNvPr id="4" name="">
             <a:extLst xmlns:a="http://schemas.openxmlformats.org/drawingml/2006/main">
               <a:ext uri="{FF2B5EF4-FFF2-40B4-BE49-F238E27FC236}">
-                <a16:creationId xmlns:a16="http://schemas.microsoft.com/office/drawing/2014/main" id="{CE4A1343-5B9F-4AB2-962B-642DB1B34715}"/>
+                <a16:creationId xmlns:a16="http://schemas.microsoft.com/office/drawing/2014/main" id="{82492B4F-212E-48B0-A7B2-1CC7912D3AB5}"/>
               </a:ext>
             </a:extLst>
           </p:cNvPr>
@@ -14689,7 +14689,7 @@
           <p:cNvPr id="5" name="">
             <a:extLst xmlns:a="http://schemas.openxmlformats.org/drawingml/2006/main">
               <a:ext uri="{FF2B5EF4-FFF2-40B4-BE49-F238E27FC236}">
-                <a16:creationId xmlns:a16="http://schemas.microsoft.com/office/drawing/2014/main" id="{0EC0155D-833A-49DA-A605-567876F8475E}"/>
+                <a16:creationId xmlns:a16="http://schemas.microsoft.com/office/drawing/2014/main" id="{F73945B4-6D9B-4096-87AD-42EBA2F2723B}"/>
               </a:ext>
             </a:extLst>
           </p:cNvPr>
@@ -14753,7 +14753,7 @@
           <p:cNvPr id="6" name="">
             <a:extLst xmlns:a="http://schemas.openxmlformats.org/drawingml/2006/main">
               <a:ext uri="{FF2B5EF4-FFF2-40B4-BE49-F238E27FC236}">
-                <a16:creationId xmlns:a16="http://schemas.microsoft.com/office/drawing/2014/main" id="{5DCA32A2-C084-46A0-9962-11C77D42F27F}"/>
+                <a16:creationId xmlns:a16="http://schemas.microsoft.com/office/drawing/2014/main" id="{AE50FD50-89BE-43DC-A86F-C2B06698E1C3}"/>
               </a:ext>
             </a:extLst>
           </p:cNvPr>
@@ -14786,7 +14786,7 @@
           <p:cNvPr id="7" name="">
             <a:extLst xmlns:a="http://schemas.openxmlformats.org/drawingml/2006/main">
               <a:ext uri="{FF2B5EF4-FFF2-40B4-BE49-F238E27FC236}">
-                <a16:creationId xmlns:a16="http://schemas.microsoft.com/office/drawing/2014/main" id="{5689F8FD-9200-4F81-842D-D1E37213F8BE}"/>
+                <a16:creationId xmlns:a16="http://schemas.microsoft.com/office/drawing/2014/main" id="{2C88F03C-AD9C-474E-940C-511A2558C726}"/>
               </a:ext>
             </a:extLst>
           </p:cNvPr>
@@ -14850,7 +14850,7 @@
           <p:cNvPr id="8" name="">
             <a:extLst xmlns:a="http://schemas.openxmlformats.org/drawingml/2006/main">
               <a:ext uri="{FF2B5EF4-FFF2-40B4-BE49-F238E27FC236}">
-                <a16:creationId xmlns:a16="http://schemas.microsoft.com/office/drawing/2014/main" id="{59295E96-F615-493E-B40D-519CB862988A}"/>
+                <a16:creationId xmlns:a16="http://schemas.microsoft.com/office/drawing/2014/main" id="{C00FFD81-F386-4EAE-BD89-0E49A1FBB8C1}"/>
               </a:ext>
             </a:extLst>
           </p:cNvPr>
@@ -14883,7 +14883,7 @@
           <p:cNvPr id="9" name="">
             <a:extLst xmlns:a="http://schemas.openxmlformats.org/drawingml/2006/main">
               <a:ext uri="{FF2B5EF4-FFF2-40B4-BE49-F238E27FC236}">
-                <a16:creationId xmlns:a16="http://schemas.microsoft.com/office/drawing/2014/main" id="{C2444132-EFE3-4156-8918-9959EC539246}"/>
+                <a16:creationId xmlns:a16="http://schemas.microsoft.com/office/drawing/2014/main" id="{1CF73348-558F-4FF6-977B-5C67E905EF29}"/>
               </a:ext>
             </a:extLst>
           </p:cNvPr>
@@ -14947,7 +14947,7 @@
           <p:cNvPr id="10" name="">
             <a:extLst xmlns:a="http://schemas.openxmlformats.org/drawingml/2006/main">
               <a:ext uri="{FF2B5EF4-FFF2-40B4-BE49-F238E27FC236}">
-                <a16:creationId xmlns:a16="http://schemas.microsoft.com/office/drawing/2014/main" id="{673DB280-8319-45DB-BC83-672FEB07260A}"/>
+                <a16:creationId xmlns:a16="http://schemas.microsoft.com/office/drawing/2014/main" id="{BD5B0F3D-CD97-450E-A280-468F9D622120}"/>
               </a:ext>
             </a:extLst>
           </p:cNvPr>
@@ -15011,7 +15011,7 @@
           <p:cNvPr id="11" name="">
             <a:extLst xmlns:a="http://schemas.openxmlformats.org/drawingml/2006/main">
               <a:ext uri="{FF2B5EF4-FFF2-40B4-BE49-F238E27FC236}">
-                <a16:creationId xmlns:a16="http://schemas.microsoft.com/office/drawing/2014/main" id="{9D4CE479-4592-4162-84D5-B0F9B471F292}"/>
+                <a16:creationId xmlns:a16="http://schemas.microsoft.com/office/drawing/2014/main" id="{C02B7EF3-FFC6-4E30-A850-0314DE65D56E}"/>
               </a:ext>
             </a:extLst>
           </p:cNvPr>
@@ -15044,7 +15044,7 @@
           <p:cNvPr id="12" name="">
             <a:extLst xmlns:a="http://schemas.openxmlformats.org/drawingml/2006/main">
               <a:ext uri="{FF2B5EF4-FFF2-40B4-BE49-F238E27FC236}">
-                <a16:creationId xmlns:a16="http://schemas.microsoft.com/office/drawing/2014/main" id="{A7150953-161E-4BD6-AD1C-29ED87B002E7}"/>
+                <a16:creationId xmlns:a16="http://schemas.microsoft.com/office/drawing/2014/main" id="{A832A386-1CEC-4B41-B942-B8AD8E1A14A4}"/>
               </a:ext>
             </a:extLst>
           </p:cNvPr>
@@ -15108,7 +15108,7 @@
           <p:cNvPr id="13" name="">
             <a:extLst xmlns:a="http://schemas.openxmlformats.org/drawingml/2006/main">
               <a:ext uri="{FF2B5EF4-FFF2-40B4-BE49-F238E27FC236}">
-                <a16:creationId xmlns:a16="http://schemas.microsoft.com/office/drawing/2014/main" id="{AF36AC06-2452-4C29-A448-09E3D67ACFD0}"/>
+                <a16:creationId xmlns:a16="http://schemas.microsoft.com/office/drawing/2014/main" id="{5C7AECCD-2EB2-48A9-86C6-CDE05EDACB4B}"/>
               </a:ext>
             </a:extLst>
           </p:cNvPr>
@@ -15172,7 +15172,7 @@
           <p:cNvPr id="14" name="">
             <a:extLst xmlns:a="http://schemas.openxmlformats.org/drawingml/2006/main">
               <a:ext uri="{FF2B5EF4-FFF2-40B4-BE49-F238E27FC236}">
-                <a16:creationId xmlns:a16="http://schemas.microsoft.com/office/drawing/2014/main" id="{D0E2C336-DCD8-4AB0-80E2-CC2F131CAAC3}"/>
+                <a16:creationId xmlns:a16="http://schemas.microsoft.com/office/drawing/2014/main" id="{31B3285F-535C-4611-A189-D6C53D633F85}"/>
               </a:ext>
             </a:extLst>
           </p:cNvPr>
@@ -15205,7 +15205,7 @@
           <p:cNvPr id="15" name="">
             <a:extLst xmlns:a="http://schemas.openxmlformats.org/drawingml/2006/main">
               <a:ext uri="{FF2B5EF4-FFF2-40B4-BE49-F238E27FC236}">
-                <a16:creationId xmlns:a16="http://schemas.microsoft.com/office/drawing/2014/main" id="{017BC6F7-B91D-409A-B00D-A23D4AE8FBAE}"/>
+                <a16:creationId xmlns:a16="http://schemas.microsoft.com/office/drawing/2014/main" id="{1495D698-0F5B-4091-B3AB-6C7D4B84D976}"/>
               </a:ext>
             </a:extLst>
           </p:cNvPr>
@@ -15269,7 +15269,7 @@
           <p:cNvPr id="16" name="">
             <a:extLst xmlns:a="http://schemas.openxmlformats.org/drawingml/2006/main">
               <a:ext uri="{FF2B5EF4-FFF2-40B4-BE49-F238E27FC236}">
-                <a16:creationId xmlns:a16="http://schemas.microsoft.com/office/drawing/2014/main" id="{B7432C55-3DB8-40CE-817D-B273D6609C93}"/>
+                <a16:creationId xmlns:a16="http://schemas.microsoft.com/office/drawing/2014/main" id="{E5E49F55-B20B-4A7B-9DF1-08C70D413005}"/>
               </a:ext>
             </a:extLst>
           </p:cNvPr>
@@ -15333,7 +15333,7 @@
           <p:cNvPr id="17" name="">
             <a:extLst xmlns:a="http://schemas.openxmlformats.org/drawingml/2006/main">
               <a:ext uri="{FF2B5EF4-FFF2-40B4-BE49-F238E27FC236}">
-                <a16:creationId xmlns:a16="http://schemas.microsoft.com/office/drawing/2014/main" id="{751AA63F-7847-4FC4-B878-4150B7AB66DC}"/>
+                <a16:creationId xmlns:a16="http://schemas.microsoft.com/office/drawing/2014/main" id="{A5EC6998-B193-48F6-A7BC-7DC23992954B}"/>
               </a:ext>
             </a:extLst>
           </p:cNvPr>
@@ -15366,7 +15366,7 @@
           <p:cNvPr id="18" name="">
             <a:extLst xmlns:a="http://schemas.openxmlformats.org/drawingml/2006/main">
               <a:ext uri="{FF2B5EF4-FFF2-40B4-BE49-F238E27FC236}">
-                <a16:creationId xmlns:a16="http://schemas.microsoft.com/office/drawing/2014/main" id="{8B920A92-71A3-4027-BD4B-E84DB7AC6C4B}"/>
+                <a16:creationId xmlns:a16="http://schemas.microsoft.com/office/drawing/2014/main" id="{D3AB028A-3FF8-4558-AF86-4481CA47CDD6}"/>
               </a:ext>
             </a:extLst>
           </p:cNvPr>
@@ -15430,7 +15430,7 @@
           <p:cNvPr id="19" name="">
             <a:extLst xmlns:a="http://schemas.openxmlformats.org/drawingml/2006/main">
               <a:ext uri="{FF2B5EF4-FFF2-40B4-BE49-F238E27FC236}">
-                <a16:creationId xmlns:a16="http://schemas.microsoft.com/office/drawing/2014/main" id="{F535C500-662A-440F-83F3-49FC9480B1D2}"/>
+                <a16:creationId xmlns:a16="http://schemas.microsoft.com/office/drawing/2014/main" id="{860797EE-C621-4711-B877-7A150CE4D952}"/>
               </a:ext>
             </a:extLst>
           </p:cNvPr>
@@ -15494,7 +15494,7 @@
           <p:cNvPr id="20" name="">
             <a:extLst xmlns:a="http://schemas.openxmlformats.org/drawingml/2006/main">
               <a:ext uri="{FF2B5EF4-FFF2-40B4-BE49-F238E27FC236}">
-                <a16:creationId xmlns:a16="http://schemas.microsoft.com/office/drawing/2014/main" id="{EA9D0712-3BF4-4408-BA50-B7091126D12C}"/>
+                <a16:creationId xmlns:a16="http://schemas.microsoft.com/office/drawing/2014/main" id="{10683BAD-E91A-4D8D-9234-E1FB97EC74C2}"/>
               </a:ext>
             </a:extLst>
           </p:cNvPr>
@@ -15527,7 +15527,7 @@
           <p:cNvPr id="21" name="">
             <a:extLst xmlns:a="http://schemas.openxmlformats.org/drawingml/2006/main">
               <a:ext uri="{FF2B5EF4-FFF2-40B4-BE49-F238E27FC236}">
-                <a16:creationId xmlns:a16="http://schemas.microsoft.com/office/drawing/2014/main" id="{B59FD72E-F973-4C95-B9F0-878BD5473BDB}"/>
+                <a16:creationId xmlns:a16="http://schemas.microsoft.com/office/drawing/2014/main" id="{043D3929-1B46-47D5-8B6D-DB9BE20022ED}"/>
               </a:ext>
             </a:extLst>
           </p:cNvPr>
@@ -15591,7 +15591,7 @@
           <p:cNvPr id="22" name="">
             <a:extLst xmlns:a="http://schemas.openxmlformats.org/drawingml/2006/main">
               <a:ext uri="{FF2B5EF4-FFF2-40B4-BE49-F238E27FC236}">
-                <a16:creationId xmlns:a16="http://schemas.microsoft.com/office/drawing/2014/main" id="{51F64C3B-1818-465E-9B02-C9C89ACF7E4D}"/>
+                <a16:creationId xmlns:a16="http://schemas.microsoft.com/office/drawing/2014/main" id="{55B3AB33-9B6A-4D61-827D-549DFFABEC6E}"/>
               </a:ext>
             </a:extLst>
           </p:cNvPr>
@@ -15655,7 +15655,7 @@
           <p:cNvPr id="23" name="">
             <a:extLst xmlns:a="http://schemas.openxmlformats.org/drawingml/2006/main">
               <a:ext uri="{FF2B5EF4-FFF2-40B4-BE49-F238E27FC236}">
-                <a16:creationId xmlns:a16="http://schemas.microsoft.com/office/drawing/2014/main" id="{004D4513-D1E8-4369-9454-59117D4CD1F5}"/>
+                <a16:creationId xmlns:a16="http://schemas.microsoft.com/office/drawing/2014/main" id="{D1E766C3-1C21-4706-A1D1-A49A3FBACADC}"/>
               </a:ext>
             </a:extLst>
           </p:cNvPr>
@@ -15688,7 +15688,7 @@
           <p:cNvPr id="24" name="">
             <a:extLst xmlns:a="http://schemas.openxmlformats.org/drawingml/2006/main">
               <a:ext uri="{FF2B5EF4-FFF2-40B4-BE49-F238E27FC236}">
-                <a16:creationId xmlns:a16="http://schemas.microsoft.com/office/drawing/2014/main" id="{31BA2D8F-58A7-494C-84F0-89096CE4B088}"/>
+                <a16:creationId xmlns:a16="http://schemas.microsoft.com/office/drawing/2014/main" id="{1D94498F-F3DD-467F-917D-DD704183FE16}"/>
               </a:ext>
             </a:extLst>
           </p:cNvPr>
@@ -15752,7 +15752,7 @@
           <p:cNvPr id="25" name="">
             <a:extLst xmlns:a="http://schemas.openxmlformats.org/drawingml/2006/main">
               <a:ext uri="{FF2B5EF4-FFF2-40B4-BE49-F238E27FC236}">
-                <a16:creationId xmlns:a16="http://schemas.microsoft.com/office/drawing/2014/main" id="{EDBDAFC0-8339-458A-8A77-EBAD2BA1B3EC}"/>
+                <a16:creationId xmlns:a16="http://schemas.microsoft.com/office/drawing/2014/main" id="{EE155B97-D3C8-4D34-9E09-4CBDFF53BF32}"/>
               </a:ext>
             </a:extLst>
           </p:cNvPr>
@@ -15816,7 +15816,7 @@
           <p:cNvPr id="26" name="">
             <a:extLst xmlns:a="http://schemas.openxmlformats.org/drawingml/2006/main">
               <a:ext uri="{FF2B5EF4-FFF2-40B4-BE49-F238E27FC236}">
-                <a16:creationId xmlns:a16="http://schemas.microsoft.com/office/drawing/2014/main" id="{F7F810B2-2B99-4E0A-A3A6-5EFF067CE3AE}"/>
+                <a16:creationId xmlns:a16="http://schemas.microsoft.com/office/drawing/2014/main" id="{8A925534-8273-4443-ADA9-1A49EA04470E}"/>
               </a:ext>
             </a:extLst>
           </p:cNvPr>
@@ -15851,7 +15851,7 @@
           <p:cNvPr id="27" name="">
             <a:extLst xmlns:a="http://schemas.openxmlformats.org/drawingml/2006/main">
               <a:ext uri="{FF2B5EF4-FFF2-40B4-BE49-F238E27FC236}">
-                <a16:creationId xmlns:a16="http://schemas.microsoft.com/office/drawing/2014/main" id="{2A58CFE2-EE32-4D4D-8534-573BBCF0F505}"/>
+                <a16:creationId xmlns:a16="http://schemas.microsoft.com/office/drawing/2014/main" id="{06FA6A25-3607-438F-BA6A-63B816BCE0C2}"/>
               </a:ext>
             </a:extLst>
           </p:cNvPr>
@@ -15915,7 +15915,7 @@
           <p:cNvPr id="28" name="">
             <a:extLst xmlns:a="http://schemas.openxmlformats.org/drawingml/2006/main">
               <a:ext uri="{FF2B5EF4-FFF2-40B4-BE49-F238E27FC236}">
-                <a16:creationId xmlns:a16="http://schemas.microsoft.com/office/drawing/2014/main" id="{E0052D31-588A-4A0E-82B8-BB4BFFC976B8}"/>
+                <a16:creationId xmlns:a16="http://schemas.microsoft.com/office/drawing/2014/main" id="{49C4B13C-1A7A-4EC5-8B7D-61737F67C688}"/>
               </a:ext>
             </a:extLst>
           </p:cNvPr>
@@ -15977,7 +15977,7 @@
     </p:spTree>
     <p:extLst>
       <p:ext uri="{BB962C8B-B14F-4D97-AF65-F5344CB8AC3E}">
-        <p14:creationId xmlns:p14="http://schemas.microsoft.com/office/powerpoint/2010/main" val="296340200"/>
+        <p14:creationId xmlns:p14="http://schemas.microsoft.com/office/powerpoint/2010/main" val="2046367358"/>
       </p:ext>
     </p:extLst>
   </p:cSld>
@@ -16001,7 +16001,7 @@
           <p:cNvPr id="1" name="">
             <a:extLst xmlns:a="http://schemas.openxmlformats.org/drawingml/2006/main">
               <a:ext uri="{FF2B5EF4-FFF2-40B4-BE49-F238E27FC236}">
-                <a16:creationId xmlns:a16="http://schemas.microsoft.com/office/drawing/2014/main" id="{E75E25C1-BE20-4402-803B-82F9A3A7223F}"/>
+                <a16:creationId xmlns:a16="http://schemas.microsoft.com/office/drawing/2014/main" id="{D98454FA-DA0C-4728-8C9C-6B5F8251FF24}"/>
               </a:ext>
             </a:extLst>
           </p:cNvPr>
@@ -16036,7 +16036,7 @@
           <p:cNvPr id="2" name="">
             <a:extLst xmlns:a="http://schemas.openxmlformats.org/drawingml/2006/main">
               <a:ext uri="{FF2B5EF4-FFF2-40B4-BE49-F238E27FC236}">
-                <a16:creationId xmlns:a16="http://schemas.microsoft.com/office/drawing/2014/main" id="{E049A2B4-75F3-43D0-A5B9-FE80EB4D8764}"/>
+                <a16:creationId xmlns:a16="http://schemas.microsoft.com/office/drawing/2014/main" id="{CA6BD4EA-1BFA-4B14-9AB4-FF3EBDEFA462}"/>
               </a:ext>
             </a:extLst>
           </p:cNvPr>
@@ -16071,7 +16071,7 @@
           <p:cNvPr id="3" name="">
             <a:extLst xmlns:a="http://schemas.openxmlformats.org/drawingml/2006/main">
               <a:ext uri="{FF2B5EF4-FFF2-40B4-BE49-F238E27FC236}">
-                <a16:creationId xmlns:a16="http://schemas.microsoft.com/office/drawing/2014/main" id="{B10D623F-9B64-4D9B-9838-F14D6F71755A}"/>
+                <a16:creationId xmlns:a16="http://schemas.microsoft.com/office/drawing/2014/main" id="{1FEF0617-80C5-4F4A-9293-FFFCD0B4D30B}"/>
               </a:ext>
             </a:extLst>
           </p:cNvPr>
@@ -16135,7 +16135,7 @@
           <p:cNvPr id="4" name="">
             <a:extLst xmlns:a="http://schemas.openxmlformats.org/drawingml/2006/main">
               <a:ext uri="{FF2B5EF4-FFF2-40B4-BE49-F238E27FC236}">
-                <a16:creationId xmlns:a16="http://schemas.microsoft.com/office/drawing/2014/main" id="{9C85459B-AB76-4C17-8421-2E2463A58014}"/>
+                <a16:creationId xmlns:a16="http://schemas.microsoft.com/office/drawing/2014/main" id="{CAA79793-486A-4CE0-9790-9D6D326EA3C7}"/>
               </a:ext>
             </a:extLst>
           </p:cNvPr>
@@ -16199,7 +16199,7 @@
           <p:cNvPr id="5" name="">
             <a:extLst xmlns:a="http://schemas.openxmlformats.org/drawingml/2006/main">
               <a:ext uri="{FF2B5EF4-FFF2-40B4-BE49-F238E27FC236}">
-                <a16:creationId xmlns:a16="http://schemas.microsoft.com/office/drawing/2014/main" id="{E54123CA-2549-4AA8-AA5C-3B262B5B903B}"/>
+                <a16:creationId xmlns:a16="http://schemas.microsoft.com/office/drawing/2014/main" id="{93CBF83B-9164-49CF-B2CD-E58A40650C5A}"/>
               </a:ext>
             </a:extLst>
           </p:cNvPr>
@@ -16263,7 +16263,7 @@
           <p:cNvPr id="6" name="">
             <a:extLst xmlns:a="http://schemas.openxmlformats.org/drawingml/2006/main">
               <a:ext uri="{FF2B5EF4-FFF2-40B4-BE49-F238E27FC236}">
-                <a16:creationId xmlns:a16="http://schemas.microsoft.com/office/drawing/2014/main" id="{371CA56A-31A4-422A-82AF-EC379904B30B}"/>
+                <a16:creationId xmlns:a16="http://schemas.microsoft.com/office/drawing/2014/main" id="{8E865B7C-873A-4E5F-B5F9-9712313CA482}"/>
               </a:ext>
             </a:extLst>
           </p:cNvPr>
@@ -16296,7 +16296,7 @@
           <p:cNvPr id="7" name="">
             <a:extLst xmlns:a="http://schemas.openxmlformats.org/drawingml/2006/main">
               <a:ext uri="{FF2B5EF4-FFF2-40B4-BE49-F238E27FC236}">
-                <a16:creationId xmlns:a16="http://schemas.microsoft.com/office/drawing/2014/main" id="{F122620D-2549-41EF-9BE5-B7036461AE12}"/>
+                <a16:creationId xmlns:a16="http://schemas.microsoft.com/office/drawing/2014/main" id="{BB441720-0B13-4ED5-B2EE-4A88674983CA}"/>
               </a:ext>
             </a:extLst>
           </p:cNvPr>
@@ -16329,7 +16329,7 @@
           <p:cNvPr id="8" name="">
             <a:extLst xmlns:a="http://schemas.openxmlformats.org/drawingml/2006/main">
               <a:ext uri="{FF2B5EF4-FFF2-40B4-BE49-F238E27FC236}">
-                <a16:creationId xmlns:a16="http://schemas.microsoft.com/office/drawing/2014/main" id="{FA066D23-B70C-4D90-9EA4-232F66DE9F8F}"/>
+                <a16:creationId xmlns:a16="http://schemas.microsoft.com/office/drawing/2014/main" id="{E4E19056-EA95-4678-B0D2-EFD8DB78824A}"/>
               </a:ext>
             </a:extLst>
           </p:cNvPr>
@@ -16393,7 +16393,7 @@
           <p:cNvPr id="9" name="">
             <a:extLst xmlns:a="http://schemas.openxmlformats.org/drawingml/2006/main">
               <a:ext uri="{FF2B5EF4-FFF2-40B4-BE49-F238E27FC236}">
-                <a16:creationId xmlns:a16="http://schemas.microsoft.com/office/drawing/2014/main" id="{3409A747-A921-4C14-9B5C-9125B9656D21}"/>
+                <a16:creationId xmlns:a16="http://schemas.microsoft.com/office/drawing/2014/main" id="{26098255-8FC3-4BE2-8486-BA256306A3D3}"/>
               </a:ext>
             </a:extLst>
           </p:cNvPr>
@@ -16428,7 +16428,7 @@
           <p:cNvPr id="10" name="">
             <a:extLst xmlns:a="http://schemas.openxmlformats.org/drawingml/2006/main">
               <a:ext uri="{FF2B5EF4-FFF2-40B4-BE49-F238E27FC236}">
-                <a16:creationId xmlns:a16="http://schemas.microsoft.com/office/drawing/2014/main" id="{9946DE64-00BC-41C8-8CBD-3F49F2799695}"/>
+                <a16:creationId xmlns:a16="http://schemas.microsoft.com/office/drawing/2014/main" id="{36A8B29F-56B1-49CA-8946-523789F281A6}"/>
               </a:ext>
             </a:extLst>
           </p:cNvPr>
@@ -16492,7 +16492,7 @@
           <p:cNvPr id="11" name="">
             <a:extLst xmlns:a="http://schemas.openxmlformats.org/drawingml/2006/main">
               <a:ext uri="{FF2B5EF4-FFF2-40B4-BE49-F238E27FC236}">
-                <a16:creationId xmlns:a16="http://schemas.microsoft.com/office/drawing/2014/main" id="{2C5927C5-A3F9-4ACA-A7D6-A379939298D4}"/>
+                <a16:creationId xmlns:a16="http://schemas.microsoft.com/office/drawing/2014/main" id="{96DFF1C7-BE20-4979-BE4E-8D63B48B6484}"/>
               </a:ext>
             </a:extLst>
           </p:cNvPr>
@@ -16527,7 +16527,7 @@
           <p:cNvPr id="12" name="">
             <a:extLst xmlns:a="http://schemas.openxmlformats.org/drawingml/2006/main">
               <a:ext uri="{FF2B5EF4-FFF2-40B4-BE49-F238E27FC236}">
-                <a16:creationId xmlns:a16="http://schemas.microsoft.com/office/drawing/2014/main" id="{B98A12E0-D517-4AEF-8B61-2F7582906DE6}"/>
+                <a16:creationId xmlns:a16="http://schemas.microsoft.com/office/drawing/2014/main" id="{F8F5586C-3F6F-4BD0-B1AD-31F482A5924B}"/>
               </a:ext>
             </a:extLst>
           </p:cNvPr>
@@ -16591,7 +16591,7 @@
           <p:cNvPr id="13" name="">
             <a:extLst xmlns:a="http://schemas.openxmlformats.org/drawingml/2006/main">
               <a:ext uri="{FF2B5EF4-FFF2-40B4-BE49-F238E27FC236}">
-                <a16:creationId xmlns:a16="http://schemas.microsoft.com/office/drawing/2014/main" id="{E466BBFD-4364-4D93-A895-D16A28808594}"/>
+                <a16:creationId xmlns:a16="http://schemas.microsoft.com/office/drawing/2014/main" id="{D2C1BA8E-B4CD-494E-9373-5A6B85EFF250}"/>
               </a:ext>
             </a:extLst>
           </p:cNvPr>
@@ -16626,7 +16626,7 @@
           <p:cNvPr id="14" name="">
             <a:extLst xmlns:a="http://schemas.openxmlformats.org/drawingml/2006/main">
               <a:ext uri="{FF2B5EF4-FFF2-40B4-BE49-F238E27FC236}">
-                <a16:creationId xmlns:a16="http://schemas.microsoft.com/office/drawing/2014/main" id="{9BF5898E-3525-49D8-8CD9-34D9141851F6}"/>
+                <a16:creationId xmlns:a16="http://schemas.microsoft.com/office/drawing/2014/main" id="{FE0E398F-BAD9-4564-82E3-762C0DC82DE2}"/>
               </a:ext>
             </a:extLst>
           </p:cNvPr>
@@ -16690,7 +16690,7 @@
           <p:cNvPr id="15" name="">
             <a:extLst xmlns:a="http://schemas.openxmlformats.org/drawingml/2006/main">
               <a:ext uri="{FF2B5EF4-FFF2-40B4-BE49-F238E27FC236}">
-                <a16:creationId xmlns:a16="http://schemas.microsoft.com/office/drawing/2014/main" id="{32AE3B31-9FBE-491E-8CD5-0AE70AEAF303}"/>
+                <a16:creationId xmlns:a16="http://schemas.microsoft.com/office/drawing/2014/main" id="{F11AEAD8-45AE-4B92-96ED-8836BA7F78C1}"/>
               </a:ext>
             </a:extLst>
           </p:cNvPr>
@@ -16725,7 +16725,7 @@
           <p:cNvPr id="16" name="">
             <a:extLst xmlns:a="http://schemas.openxmlformats.org/drawingml/2006/main">
               <a:ext uri="{FF2B5EF4-FFF2-40B4-BE49-F238E27FC236}">
-                <a16:creationId xmlns:a16="http://schemas.microsoft.com/office/drawing/2014/main" id="{5AAB2F19-1A01-478F-9671-FBA2C1D6BEC1}"/>
+                <a16:creationId xmlns:a16="http://schemas.microsoft.com/office/drawing/2014/main" id="{7F2D05F1-4EB6-4880-86A9-F44664255DA4}"/>
               </a:ext>
             </a:extLst>
           </p:cNvPr>
@@ -16789,7 +16789,7 @@
           <p:cNvPr id="17" name="">
             <a:extLst xmlns:a="http://schemas.openxmlformats.org/drawingml/2006/main">
               <a:ext uri="{FF2B5EF4-FFF2-40B4-BE49-F238E27FC236}">
-                <a16:creationId xmlns:a16="http://schemas.microsoft.com/office/drawing/2014/main" id="{05AD6398-A3ED-4A8E-BB01-D4C711B91F9A}"/>
+                <a16:creationId xmlns:a16="http://schemas.microsoft.com/office/drawing/2014/main" id="{A4AF8E60-EE2F-4122-AD9D-005AD8D1FCF6}"/>
               </a:ext>
             </a:extLst>
           </p:cNvPr>
@@ -16822,7 +16822,7 @@
           <p:cNvPr id="18" name="">
             <a:extLst xmlns:a="http://schemas.openxmlformats.org/drawingml/2006/main">
               <a:ext uri="{FF2B5EF4-FFF2-40B4-BE49-F238E27FC236}">
-                <a16:creationId xmlns:a16="http://schemas.microsoft.com/office/drawing/2014/main" id="{3D758362-DC73-4CBB-BF86-849E4DBDC732}"/>
+                <a16:creationId xmlns:a16="http://schemas.microsoft.com/office/drawing/2014/main" id="{296AD79E-8B0A-45BB-A88E-FF82FE3E7FA8}"/>
               </a:ext>
             </a:extLst>
           </p:cNvPr>
@@ -16855,7 +16855,7 @@
           <p:cNvPr id="19" name="">
             <a:extLst xmlns:a="http://schemas.openxmlformats.org/drawingml/2006/main">
               <a:ext uri="{FF2B5EF4-FFF2-40B4-BE49-F238E27FC236}">
-                <a16:creationId xmlns:a16="http://schemas.microsoft.com/office/drawing/2014/main" id="{7CDA88E2-D0AF-4F64-B02F-0D36ECA6311A}"/>
+                <a16:creationId xmlns:a16="http://schemas.microsoft.com/office/drawing/2014/main" id="{65575B6D-D54D-46E6-8F91-DDD0C231FB7E}"/>
               </a:ext>
             </a:extLst>
           </p:cNvPr>
@@ -16919,7 +16919,7 @@
           <p:cNvPr id="20" name="">
             <a:extLst xmlns:a="http://schemas.openxmlformats.org/drawingml/2006/main">
               <a:ext uri="{FF2B5EF4-FFF2-40B4-BE49-F238E27FC236}">
-                <a16:creationId xmlns:a16="http://schemas.microsoft.com/office/drawing/2014/main" id="{FA8816EE-D538-4507-BF56-D6D2397C7A54}"/>
+                <a16:creationId xmlns:a16="http://schemas.microsoft.com/office/drawing/2014/main" id="{9EC92837-C8D5-4752-A231-AF1917420EC3}"/>
               </a:ext>
             </a:extLst>
           </p:cNvPr>
@@ -16954,7 +16954,7 @@
           <p:cNvPr id="21" name="">
             <a:extLst xmlns:a="http://schemas.openxmlformats.org/drawingml/2006/main">
               <a:ext uri="{FF2B5EF4-FFF2-40B4-BE49-F238E27FC236}">
-                <a16:creationId xmlns:a16="http://schemas.microsoft.com/office/drawing/2014/main" id="{13FA9E1C-36B7-460D-86AC-B6FD4387C251}"/>
+                <a16:creationId xmlns:a16="http://schemas.microsoft.com/office/drawing/2014/main" id="{25514DDD-E9D5-4A8F-BEE1-14B12A7C6FEF}"/>
               </a:ext>
             </a:extLst>
           </p:cNvPr>
@@ -17018,7 +17018,7 @@
           <p:cNvPr id="22" name="">
             <a:extLst xmlns:a="http://schemas.openxmlformats.org/drawingml/2006/main">
               <a:ext uri="{FF2B5EF4-FFF2-40B4-BE49-F238E27FC236}">
-                <a16:creationId xmlns:a16="http://schemas.microsoft.com/office/drawing/2014/main" id="{0AB55962-5433-4742-A7C3-E50D752F32F8}"/>
+                <a16:creationId xmlns:a16="http://schemas.microsoft.com/office/drawing/2014/main" id="{9D5FFDA6-E75D-4A47-8149-27BEDF84D308}"/>
               </a:ext>
             </a:extLst>
           </p:cNvPr>
@@ -17053,7 +17053,7 @@
           <p:cNvPr id="23" name="">
             <a:extLst xmlns:a="http://schemas.openxmlformats.org/drawingml/2006/main">
               <a:ext uri="{FF2B5EF4-FFF2-40B4-BE49-F238E27FC236}">
-                <a16:creationId xmlns:a16="http://schemas.microsoft.com/office/drawing/2014/main" id="{D21FBF24-0BC5-422C-9E7A-6870FEE050C6}"/>
+                <a16:creationId xmlns:a16="http://schemas.microsoft.com/office/drawing/2014/main" id="{415D8B8D-5842-4D60-88E5-16D760EF1689}"/>
               </a:ext>
             </a:extLst>
           </p:cNvPr>
@@ -17117,7 +17117,7 @@
           <p:cNvPr id="24" name="">
             <a:extLst xmlns:a="http://schemas.openxmlformats.org/drawingml/2006/main">
               <a:ext uri="{FF2B5EF4-FFF2-40B4-BE49-F238E27FC236}">
-                <a16:creationId xmlns:a16="http://schemas.microsoft.com/office/drawing/2014/main" id="{12E8221B-776F-416C-9726-73A493C310F7}"/>
+                <a16:creationId xmlns:a16="http://schemas.microsoft.com/office/drawing/2014/main" id="{64426CDC-FF33-4E28-8D70-581B2AFDECF9}"/>
               </a:ext>
             </a:extLst>
           </p:cNvPr>
@@ -17152,7 +17152,7 @@
           <p:cNvPr id="25" name="">
             <a:extLst xmlns:a="http://schemas.openxmlformats.org/drawingml/2006/main">
               <a:ext uri="{FF2B5EF4-FFF2-40B4-BE49-F238E27FC236}">
-                <a16:creationId xmlns:a16="http://schemas.microsoft.com/office/drawing/2014/main" id="{A8D2B67A-1321-476F-8D51-06A3DE1B8843}"/>
+                <a16:creationId xmlns:a16="http://schemas.microsoft.com/office/drawing/2014/main" id="{21EE6910-1EBA-4AF1-8210-4EA4994714DF}"/>
               </a:ext>
             </a:extLst>
           </p:cNvPr>
@@ -17216,7 +17216,7 @@
           <p:cNvPr id="26" name="">
             <a:extLst xmlns:a="http://schemas.openxmlformats.org/drawingml/2006/main">
               <a:ext uri="{FF2B5EF4-FFF2-40B4-BE49-F238E27FC236}">
-                <a16:creationId xmlns:a16="http://schemas.microsoft.com/office/drawing/2014/main" id="{7DBFF62E-FD10-46FB-968C-CBF28F0F6563}"/>
+                <a16:creationId xmlns:a16="http://schemas.microsoft.com/office/drawing/2014/main" id="{734CC5A7-778D-422E-8DC6-83590F425591}"/>
               </a:ext>
             </a:extLst>
           </p:cNvPr>
@@ -17251,7 +17251,7 @@
           <p:cNvPr id="27" name="">
             <a:extLst xmlns:a="http://schemas.openxmlformats.org/drawingml/2006/main">
               <a:ext uri="{FF2B5EF4-FFF2-40B4-BE49-F238E27FC236}">
-                <a16:creationId xmlns:a16="http://schemas.microsoft.com/office/drawing/2014/main" id="{1EC0C59A-CA77-4E4F-85BE-E487B46DCA7D}"/>
+                <a16:creationId xmlns:a16="http://schemas.microsoft.com/office/drawing/2014/main" id="{0D547519-C52B-4103-987E-2BE6108E68FA}"/>
               </a:ext>
             </a:extLst>
           </p:cNvPr>
@@ -17315,7 +17315,7 @@
           <p:cNvPr id="28" name="">
             <a:extLst xmlns:a="http://schemas.openxmlformats.org/drawingml/2006/main">
               <a:ext uri="{FF2B5EF4-FFF2-40B4-BE49-F238E27FC236}">
-                <a16:creationId xmlns:a16="http://schemas.microsoft.com/office/drawing/2014/main" id="{F29E9196-2373-406D-85FC-BB38004A4ED3}"/>
+                <a16:creationId xmlns:a16="http://schemas.microsoft.com/office/drawing/2014/main" id="{7D4A939F-1E14-4EEF-8D44-8D4DC9E3059B}"/>
               </a:ext>
             </a:extLst>
           </p:cNvPr>
@@ -17348,7 +17348,7 @@
           <p:cNvPr id="29" name="">
             <a:extLst xmlns:a="http://schemas.openxmlformats.org/drawingml/2006/main">
               <a:ext uri="{FF2B5EF4-FFF2-40B4-BE49-F238E27FC236}">
-                <a16:creationId xmlns:a16="http://schemas.microsoft.com/office/drawing/2014/main" id="{DB5E982A-2E8C-4ACA-9014-EC5993F404EB}"/>
+                <a16:creationId xmlns:a16="http://schemas.microsoft.com/office/drawing/2014/main" id="{7FD103B8-380A-42A3-9E96-E9E3E1D74CF5}"/>
               </a:ext>
             </a:extLst>
           </p:cNvPr>
@@ -17381,7 +17381,7 @@
           <p:cNvPr id="30" name="">
             <a:extLst xmlns:a="http://schemas.openxmlformats.org/drawingml/2006/main">
               <a:ext uri="{FF2B5EF4-FFF2-40B4-BE49-F238E27FC236}">
-                <a16:creationId xmlns:a16="http://schemas.microsoft.com/office/drawing/2014/main" id="{B6E1ED9C-49F8-4669-A7BF-22A46A98CE39}"/>
+                <a16:creationId xmlns:a16="http://schemas.microsoft.com/office/drawing/2014/main" id="{C3A3DA05-0432-42B5-A3ED-05EDD30C2B70}"/>
               </a:ext>
             </a:extLst>
           </p:cNvPr>
@@ -17445,7 +17445,7 @@
           <p:cNvPr id="31" name="">
             <a:extLst xmlns:a="http://schemas.openxmlformats.org/drawingml/2006/main">
               <a:ext uri="{FF2B5EF4-FFF2-40B4-BE49-F238E27FC236}">
-                <a16:creationId xmlns:a16="http://schemas.microsoft.com/office/drawing/2014/main" id="{FE255B3A-6F4F-4A5C-A01E-EE73C4FC18B8}"/>
+                <a16:creationId xmlns:a16="http://schemas.microsoft.com/office/drawing/2014/main" id="{3B49245C-8574-455A-B610-3F5959E3A296}"/>
               </a:ext>
             </a:extLst>
           </p:cNvPr>
@@ -17480,7 +17480,7 @@
           <p:cNvPr id="32" name="">
             <a:extLst xmlns:a="http://schemas.openxmlformats.org/drawingml/2006/main">
               <a:ext uri="{FF2B5EF4-FFF2-40B4-BE49-F238E27FC236}">
-                <a16:creationId xmlns:a16="http://schemas.microsoft.com/office/drawing/2014/main" id="{48470B88-B3C0-42DB-99F0-346C1C858C5D}"/>
+                <a16:creationId xmlns:a16="http://schemas.microsoft.com/office/drawing/2014/main" id="{3F5CFEB6-AFCE-4C90-ADA8-36EDE9980166}"/>
               </a:ext>
             </a:extLst>
           </p:cNvPr>
@@ -17544,7 +17544,7 @@
           <p:cNvPr id="33" name="">
             <a:extLst xmlns:a="http://schemas.openxmlformats.org/drawingml/2006/main">
               <a:ext uri="{FF2B5EF4-FFF2-40B4-BE49-F238E27FC236}">
-                <a16:creationId xmlns:a16="http://schemas.microsoft.com/office/drawing/2014/main" id="{6301B3EE-B71E-4C09-A207-3D06953D3587}"/>
+                <a16:creationId xmlns:a16="http://schemas.microsoft.com/office/drawing/2014/main" id="{1D698331-C1B1-4241-A5A5-1EE39333F258}"/>
               </a:ext>
             </a:extLst>
           </p:cNvPr>
@@ -17579,7 +17579,7 @@
           <p:cNvPr id="34" name="">
             <a:extLst xmlns:a="http://schemas.openxmlformats.org/drawingml/2006/main">
               <a:ext uri="{FF2B5EF4-FFF2-40B4-BE49-F238E27FC236}">
-                <a16:creationId xmlns:a16="http://schemas.microsoft.com/office/drawing/2014/main" id="{458AE7C9-6DD3-47AE-976B-3AC5B36AB406}"/>
+                <a16:creationId xmlns:a16="http://schemas.microsoft.com/office/drawing/2014/main" id="{F269A10A-0054-4898-8646-73722B9D3A60}"/>
               </a:ext>
             </a:extLst>
           </p:cNvPr>
@@ -17643,7 +17643,7 @@
           <p:cNvPr id="35" name="">
             <a:extLst xmlns:a="http://schemas.openxmlformats.org/drawingml/2006/main">
               <a:ext uri="{FF2B5EF4-FFF2-40B4-BE49-F238E27FC236}">
-                <a16:creationId xmlns:a16="http://schemas.microsoft.com/office/drawing/2014/main" id="{227393E3-BB71-4BA9-AD5A-C263320F1071}"/>
+                <a16:creationId xmlns:a16="http://schemas.microsoft.com/office/drawing/2014/main" id="{319F4FC0-0583-4F94-BF05-018BB34CAC17}"/>
               </a:ext>
             </a:extLst>
           </p:cNvPr>
@@ -17678,7 +17678,7 @@
           <p:cNvPr id="36" name="">
             <a:extLst xmlns:a="http://schemas.openxmlformats.org/drawingml/2006/main">
               <a:ext uri="{FF2B5EF4-FFF2-40B4-BE49-F238E27FC236}">
-                <a16:creationId xmlns:a16="http://schemas.microsoft.com/office/drawing/2014/main" id="{5358F83C-A49A-42F2-B0FA-806C1BEAD0FB}"/>
+                <a16:creationId xmlns:a16="http://schemas.microsoft.com/office/drawing/2014/main" id="{024012AE-F373-441E-A1E8-1C49EE3C318D}"/>
               </a:ext>
             </a:extLst>
           </p:cNvPr>
@@ -17742,7 +17742,7 @@
           <p:cNvPr id="37" name="">
             <a:extLst xmlns:a="http://schemas.openxmlformats.org/drawingml/2006/main">
               <a:ext uri="{FF2B5EF4-FFF2-40B4-BE49-F238E27FC236}">
-                <a16:creationId xmlns:a16="http://schemas.microsoft.com/office/drawing/2014/main" id="{B7BA61D4-0458-4473-96A8-135C095EAFAC}"/>
+                <a16:creationId xmlns:a16="http://schemas.microsoft.com/office/drawing/2014/main" id="{A441746B-3E79-44E4-8C2F-66F5F426B5FB}"/>
               </a:ext>
             </a:extLst>
           </p:cNvPr>
@@ -17777,7 +17777,7 @@
           <p:cNvPr id="38" name="">
             <a:extLst xmlns:a="http://schemas.openxmlformats.org/drawingml/2006/main">
               <a:ext uri="{FF2B5EF4-FFF2-40B4-BE49-F238E27FC236}">
-                <a16:creationId xmlns:a16="http://schemas.microsoft.com/office/drawing/2014/main" id="{7ACF3963-FE10-48CF-9184-4CF31FB8AEAF}"/>
+                <a16:creationId xmlns:a16="http://schemas.microsoft.com/office/drawing/2014/main" id="{C27E3F2C-F5CA-48ED-B60E-244CC94400C1}"/>
               </a:ext>
             </a:extLst>
           </p:cNvPr>
@@ -17831,7 +17831,7 @@
                 <a:ea typeface="Aptos"/>
                 <a:cs typeface="Aptos"/>
               </a:rPr>
-              <a:t>+ Discount cost</a:t>
+              <a:t>+ Discount-cost penalty</a:t>
             </a:r>
           </a:p>
         </p:txBody>
@@ -17841,7 +17841,7 @@
           <p:cNvPr id="39" name="">
             <a:extLst xmlns:a="http://schemas.openxmlformats.org/drawingml/2006/main">
               <a:ext uri="{FF2B5EF4-FFF2-40B4-BE49-F238E27FC236}">
-                <a16:creationId xmlns:a16="http://schemas.microsoft.com/office/drawing/2014/main" id="{DC49FAE9-ECFE-4A43-BDBA-FC01D2B4F311}"/>
+                <a16:creationId xmlns:a16="http://schemas.microsoft.com/office/drawing/2014/main" id="{84EC0DAB-D4EC-4B3B-A7CE-03B5BDEACC92}"/>
               </a:ext>
             </a:extLst>
           </p:cNvPr>
@@ -17876,7 +17876,7 @@
           <p:cNvPr id="40" name="">
             <a:extLst xmlns:a="http://schemas.openxmlformats.org/drawingml/2006/main">
               <a:ext uri="{FF2B5EF4-FFF2-40B4-BE49-F238E27FC236}">
-                <a16:creationId xmlns:a16="http://schemas.microsoft.com/office/drawing/2014/main" id="{0435DC26-CA7A-4D83-824B-BAC13BDA3117}"/>
+                <a16:creationId xmlns:a16="http://schemas.microsoft.com/office/drawing/2014/main" id="{7D705F52-CA5C-400C-A392-BB5E8F3303F8}"/>
               </a:ext>
             </a:extLst>
           </p:cNvPr>
@@ -17940,7 +17940,7 @@
           <p:cNvPr id="41" name="">
             <a:extLst xmlns:a="http://schemas.openxmlformats.org/drawingml/2006/main">
               <a:ext uri="{FF2B5EF4-FFF2-40B4-BE49-F238E27FC236}">
-                <a16:creationId xmlns:a16="http://schemas.microsoft.com/office/drawing/2014/main" id="{662C2D60-8DB2-4E6E-B116-B484389FD8CD}"/>
+                <a16:creationId xmlns:a16="http://schemas.microsoft.com/office/drawing/2014/main" id="{249E1138-0FCD-401A-99D7-30D52A4FD79F}"/>
               </a:ext>
             </a:extLst>
           </p:cNvPr>
@@ -17973,7 +17973,7 @@
           <p:cNvPr id="42" name="">
             <a:extLst xmlns:a="http://schemas.openxmlformats.org/drawingml/2006/main">
               <a:ext uri="{FF2B5EF4-FFF2-40B4-BE49-F238E27FC236}">
-                <a16:creationId xmlns:a16="http://schemas.microsoft.com/office/drawing/2014/main" id="{892C1025-6722-4AFF-860B-ADC50A5A9FC4}"/>
+                <a16:creationId xmlns:a16="http://schemas.microsoft.com/office/drawing/2014/main" id="{0E8B8BF9-F97E-4100-A2DC-15C7A55BB7FE}"/>
               </a:ext>
             </a:extLst>
           </p:cNvPr>
@@ -18037,7 +18037,7 @@
           <p:cNvPr id="43" name="">
             <a:extLst xmlns:a="http://schemas.openxmlformats.org/drawingml/2006/main">
               <a:ext uri="{FF2B5EF4-FFF2-40B4-BE49-F238E27FC236}">
-                <a16:creationId xmlns:a16="http://schemas.microsoft.com/office/drawing/2014/main" id="{25FF7539-EC3A-4FAF-AA55-37084080D9BF}"/>
+                <a16:creationId xmlns:a16="http://schemas.microsoft.com/office/drawing/2014/main" id="{A889BFC9-1C17-4B19-871B-3118E1B6F7B1}"/>
               </a:ext>
             </a:extLst>
           </p:cNvPr>
@@ -18072,7 +18072,7 @@
           <p:cNvPr id="44" name="">
             <a:extLst xmlns:a="http://schemas.openxmlformats.org/drawingml/2006/main">
               <a:ext uri="{FF2B5EF4-FFF2-40B4-BE49-F238E27FC236}">
-                <a16:creationId xmlns:a16="http://schemas.microsoft.com/office/drawing/2014/main" id="{8D4849B4-5D35-4BB1-939F-CC4F5D11474B}"/>
+                <a16:creationId xmlns:a16="http://schemas.microsoft.com/office/drawing/2014/main" id="{3347B8C8-47E1-42E7-A290-44215FB36B7A}"/>
               </a:ext>
             </a:extLst>
           </p:cNvPr>
@@ -18136,7 +18136,7 @@
           <p:cNvPr id="45" name="">
             <a:extLst xmlns:a="http://schemas.openxmlformats.org/drawingml/2006/main">
               <a:ext uri="{FF2B5EF4-FFF2-40B4-BE49-F238E27FC236}">
-                <a16:creationId xmlns:a16="http://schemas.microsoft.com/office/drawing/2014/main" id="{C826A633-17CD-4A68-95F0-B43945A0026E}"/>
+                <a16:creationId xmlns:a16="http://schemas.microsoft.com/office/drawing/2014/main" id="{071B71C0-9260-4A0D-A87F-E79A6B378705}"/>
               </a:ext>
             </a:extLst>
           </p:cNvPr>
@@ -18198,7 +18198,7 @@
     </p:spTree>
     <p:extLst>
       <p:ext uri="{BB962C8B-B14F-4D97-AF65-F5344CB8AC3E}">
-        <p14:creationId xmlns:p14="http://schemas.microsoft.com/office/powerpoint/2010/main" val="715062414"/>
+        <p14:creationId xmlns:p14="http://schemas.microsoft.com/office/powerpoint/2010/main" val="1639311243"/>
       </p:ext>
     </p:extLst>
   </p:cSld>
@@ -18222,7 +18222,7 @@
           <p:cNvPr id="1" name="">
             <a:extLst xmlns:a="http://schemas.openxmlformats.org/drawingml/2006/main">
               <a:ext uri="{FF2B5EF4-FFF2-40B4-BE49-F238E27FC236}">
-                <a16:creationId xmlns:a16="http://schemas.microsoft.com/office/drawing/2014/main" id="{F5AD7F5C-FE07-4935-9FB9-EB90B19468C6}"/>
+                <a16:creationId xmlns:a16="http://schemas.microsoft.com/office/drawing/2014/main" id="{BCCA478E-C654-4D63-A021-36EB1EBA828A}"/>
               </a:ext>
             </a:extLst>
           </p:cNvPr>
@@ -18257,7 +18257,7 @@
           <p:cNvPr id="2" name="">
             <a:extLst xmlns:a="http://schemas.openxmlformats.org/drawingml/2006/main">
               <a:ext uri="{FF2B5EF4-FFF2-40B4-BE49-F238E27FC236}">
-                <a16:creationId xmlns:a16="http://schemas.microsoft.com/office/drawing/2014/main" id="{C81BA676-8BB1-4C2C-8040-D3447E9F99C2}"/>
+                <a16:creationId xmlns:a16="http://schemas.microsoft.com/office/drawing/2014/main" id="{EAE3B341-3E9E-4DD0-B3BA-410E5CC983DB}"/>
               </a:ext>
             </a:extLst>
           </p:cNvPr>
@@ -18292,7 +18292,7 @@
           <p:cNvPr id="3" name="">
             <a:extLst xmlns:a="http://schemas.openxmlformats.org/drawingml/2006/main">
               <a:ext uri="{FF2B5EF4-FFF2-40B4-BE49-F238E27FC236}">
-                <a16:creationId xmlns:a16="http://schemas.microsoft.com/office/drawing/2014/main" id="{9EDE3C4C-365F-4F3C-9CE5-1C458FFC0DC4}"/>
+                <a16:creationId xmlns:a16="http://schemas.microsoft.com/office/drawing/2014/main" id="{CE7064CC-410F-47F0-B927-1B6FD3F11877}"/>
               </a:ext>
             </a:extLst>
           </p:cNvPr>
@@ -18356,7 +18356,7 @@
           <p:cNvPr id="4" name="">
             <a:extLst xmlns:a="http://schemas.openxmlformats.org/drawingml/2006/main">
               <a:ext uri="{FF2B5EF4-FFF2-40B4-BE49-F238E27FC236}">
-                <a16:creationId xmlns:a16="http://schemas.microsoft.com/office/drawing/2014/main" id="{2E1B7EA3-4E88-4841-8ED8-9CF9DE8B3830}"/>
+                <a16:creationId xmlns:a16="http://schemas.microsoft.com/office/drawing/2014/main" id="{D364F736-710A-4103-8439-62CEFF17BDF7}"/>
               </a:ext>
             </a:extLst>
           </p:cNvPr>
@@ -18420,7 +18420,7 @@
           <p:cNvPr id="5" name="">
             <a:extLst xmlns:a="http://schemas.openxmlformats.org/drawingml/2006/main">
               <a:ext uri="{FF2B5EF4-FFF2-40B4-BE49-F238E27FC236}">
-                <a16:creationId xmlns:a16="http://schemas.microsoft.com/office/drawing/2014/main" id="{9B17A3D8-FD67-41C0-BE98-6BA2E58D5EE3}"/>
+                <a16:creationId xmlns:a16="http://schemas.microsoft.com/office/drawing/2014/main" id="{B8371B21-F91E-4AFD-9B02-B950B7FDA10D}"/>
               </a:ext>
             </a:extLst>
           </p:cNvPr>
@@ -18484,7 +18484,7 @@
           <p:cNvPr id="6" name="">
             <a:extLst xmlns:a="http://schemas.openxmlformats.org/drawingml/2006/main">
               <a:ext uri="{FF2B5EF4-FFF2-40B4-BE49-F238E27FC236}">
-                <a16:creationId xmlns:a16="http://schemas.microsoft.com/office/drawing/2014/main" id="{F5113CBA-87F2-4AE7-BDD5-42EAEE059300}"/>
+                <a16:creationId xmlns:a16="http://schemas.microsoft.com/office/drawing/2014/main" id="{5F651AEF-BF2B-45BE-AB83-3A5905803AC4}"/>
               </a:ext>
             </a:extLst>
           </p:cNvPr>
@@ -18517,7 +18517,7 @@
           <p:cNvPr id="7" name="">
             <a:extLst xmlns:a="http://schemas.openxmlformats.org/drawingml/2006/main">
               <a:ext uri="{FF2B5EF4-FFF2-40B4-BE49-F238E27FC236}">
-                <a16:creationId xmlns:a16="http://schemas.microsoft.com/office/drawing/2014/main" id="{AAADE2DB-BF3C-4E5D-BED0-E0C504939ACF}"/>
+                <a16:creationId xmlns:a16="http://schemas.microsoft.com/office/drawing/2014/main" id="{7626DC63-9E58-4B09-8ADC-3AC7423ECE46}"/>
               </a:ext>
             </a:extLst>
           </p:cNvPr>
@@ -18581,7 +18581,7 @@
           <p:cNvPr id="8" name="">
             <a:extLst xmlns:a="http://schemas.openxmlformats.org/drawingml/2006/main">
               <a:ext uri="{FF2B5EF4-FFF2-40B4-BE49-F238E27FC236}">
-                <a16:creationId xmlns:a16="http://schemas.microsoft.com/office/drawing/2014/main" id="{25C40173-9D97-4544-A088-B238423257C2}"/>
+                <a16:creationId xmlns:a16="http://schemas.microsoft.com/office/drawing/2014/main" id="{E984B7EB-0677-40E3-9935-9C13CBE6A52C}"/>
               </a:ext>
             </a:extLst>
           </p:cNvPr>
@@ -18614,7 +18614,7 @@
           <p:cNvPr id="9" name="">
             <a:extLst xmlns:a="http://schemas.openxmlformats.org/drawingml/2006/main">
               <a:ext uri="{FF2B5EF4-FFF2-40B4-BE49-F238E27FC236}">
-                <a16:creationId xmlns:a16="http://schemas.microsoft.com/office/drawing/2014/main" id="{D1E84ECD-A526-4C0F-B797-34CD34BB1FD1}"/>
+                <a16:creationId xmlns:a16="http://schemas.microsoft.com/office/drawing/2014/main" id="{A860AE16-56A2-4930-95DA-349C5BD55C98}"/>
               </a:ext>
             </a:extLst>
           </p:cNvPr>
@@ -18678,7 +18678,7 @@
           <p:cNvPr id="10" name="">
             <a:extLst xmlns:a="http://schemas.openxmlformats.org/drawingml/2006/main">
               <a:ext uri="{FF2B5EF4-FFF2-40B4-BE49-F238E27FC236}">
-                <a16:creationId xmlns:a16="http://schemas.microsoft.com/office/drawing/2014/main" id="{B9D0C8C1-F60F-4AA2-BBBA-455D918CF901}"/>
+                <a16:creationId xmlns:a16="http://schemas.microsoft.com/office/drawing/2014/main" id="{22D5D4D8-92C4-4AE6-89CC-8D90A85986A8}"/>
               </a:ext>
             </a:extLst>
           </p:cNvPr>
@@ -18742,7 +18742,7 @@
           <p:cNvPr id="11" name="">
             <a:extLst xmlns:a="http://schemas.openxmlformats.org/drawingml/2006/main">
               <a:ext uri="{FF2B5EF4-FFF2-40B4-BE49-F238E27FC236}">
-                <a16:creationId xmlns:a16="http://schemas.microsoft.com/office/drawing/2014/main" id="{2EF321F7-315A-4A37-84C0-C01C8E55F4C8}"/>
+                <a16:creationId xmlns:a16="http://schemas.microsoft.com/office/drawing/2014/main" id="{E0C4D23C-8345-4A9D-B7A5-A84F30956D3D}"/>
               </a:ext>
             </a:extLst>
           </p:cNvPr>
@@ -18775,7 +18775,7 @@
           <p:cNvPr id="12" name="">
             <a:extLst xmlns:a="http://schemas.openxmlformats.org/drawingml/2006/main">
               <a:ext uri="{FF2B5EF4-FFF2-40B4-BE49-F238E27FC236}">
-                <a16:creationId xmlns:a16="http://schemas.microsoft.com/office/drawing/2014/main" id="{B0EB9B42-A8C1-422D-8EF9-ABC03A3A9674}"/>
+                <a16:creationId xmlns:a16="http://schemas.microsoft.com/office/drawing/2014/main" id="{DAC4EF7E-6107-4C67-83D4-7D8EF09AD3D0}"/>
               </a:ext>
             </a:extLst>
           </p:cNvPr>
@@ -18839,7 +18839,7 @@
           <p:cNvPr id="13" name="">
             <a:extLst xmlns:a="http://schemas.openxmlformats.org/drawingml/2006/main">
               <a:ext uri="{FF2B5EF4-FFF2-40B4-BE49-F238E27FC236}">
-                <a16:creationId xmlns:a16="http://schemas.microsoft.com/office/drawing/2014/main" id="{170B7AE5-F869-4D68-8404-4035B3A287F7}"/>
+                <a16:creationId xmlns:a16="http://schemas.microsoft.com/office/drawing/2014/main" id="{CD69628A-E9BC-4D40-B49E-D6B1469E95A5}"/>
               </a:ext>
             </a:extLst>
           </p:cNvPr>
@@ -18903,7 +18903,7 @@
           <p:cNvPr id="14" name="">
             <a:extLst xmlns:a="http://schemas.openxmlformats.org/drawingml/2006/main">
               <a:ext uri="{FF2B5EF4-FFF2-40B4-BE49-F238E27FC236}">
-                <a16:creationId xmlns:a16="http://schemas.microsoft.com/office/drawing/2014/main" id="{51200D25-2E38-4B0C-8A94-90B9A8063205}"/>
+                <a16:creationId xmlns:a16="http://schemas.microsoft.com/office/drawing/2014/main" id="{D5B9808A-A5A0-40F8-892C-8A90C58B8314}"/>
               </a:ext>
             </a:extLst>
           </p:cNvPr>
@@ -18936,7 +18936,7 @@
           <p:cNvPr id="15" name="">
             <a:extLst xmlns:a="http://schemas.openxmlformats.org/drawingml/2006/main">
               <a:ext uri="{FF2B5EF4-FFF2-40B4-BE49-F238E27FC236}">
-                <a16:creationId xmlns:a16="http://schemas.microsoft.com/office/drawing/2014/main" id="{55EA2AC8-59B8-4883-8256-5DF6547AEDFD}"/>
+                <a16:creationId xmlns:a16="http://schemas.microsoft.com/office/drawing/2014/main" id="{57BB92EB-353B-4AFE-BA4B-72A9CA7FB7BE}"/>
               </a:ext>
             </a:extLst>
           </p:cNvPr>
@@ -19000,7 +19000,7 @@
           <p:cNvPr id="16" name="">
             <a:extLst xmlns:a="http://schemas.openxmlformats.org/drawingml/2006/main">
               <a:ext uri="{FF2B5EF4-FFF2-40B4-BE49-F238E27FC236}">
-                <a16:creationId xmlns:a16="http://schemas.microsoft.com/office/drawing/2014/main" id="{60BD1D32-7D82-4831-BFAB-F850E35D448B}"/>
+                <a16:creationId xmlns:a16="http://schemas.microsoft.com/office/drawing/2014/main" id="{061430C8-3742-46CA-B8C4-0A8BB50019BE}"/>
               </a:ext>
             </a:extLst>
           </p:cNvPr>
@@ -19064,7 +19064,7 @@
           <p:cNvPr id="17" name="">
             <a:extLst xmlns:a="http://schemas.openxmlformats.org/drawingml/2006/main">
               <a:ext uri="{FF2B5EF4-FFF2-40B4-BE49-F238E27FC236}">
-                <a16:creationId xmlns:a16="http://schemas.microsoft.com/office/drawing/2014/main" id="{225ED50F-87F4-419D-9E9D-30AE2CC0625E}"/>
+                <a16:creationId xmlns:a16="http://schemas.microsoft.com/office/drawing/2014/main" id="{4B095E47-B2A9-4FF6-BBBC-FEF7102808C6}"/>
               </a:ext>
             </a:extLst>
           </p:cNvPr>
@@ -19097,7 +19097,7 @@
           <p:cNvPr id="18" name="">
             <a:extLst xmlns:a="http://schemas.openxmlformats.org/drawingml/2006/main">
               <a:ext uri="{FF2B5EF4-FFF2-40B4-BE49-F238E27FC236}">
-                <a16:creationId xmlns:a16="http://schemas.microsoft.com/office/drawing/2014/main" id="{12185A89-29D1-4C37-9994-F9C6BDB5E61A}"/>
+                <a16:creationId xmlns:a16="http://schemas.microsoft.com/office/drawing/2014/main" id="{9D01B01D-181B-4AA6-A900-30ED5FDBEEAD}"/>
               </a:ext>
             </a:extLst>
           </p:cNvPr>
@@ -19130,7 +19130,7 @@
           <p:cNvPr id="19" name="">
             <a:extLst xmlns:a="http://schemas.openxmlformats.org/drawingml/2006/main">
               <a:ext uri="{FF2B5EF4-FFF2-40B4-BE49-F238E27FC236}">
-                <a16:creationId xmlns:a16="http://schemas.microsoft.com/office/drawing/2014/main" id="{043AA918-941D-45CE-A93F-17D0E9B377F2}"/>
+                <a16:creationId xmlns:a16="http://schemas.microsoft.com/office/drawing/2014/main" id="{EF64D284-CC29-47B2-AD16-A4341DA36F59}"/>
               </a:ext>
             </a:extLst>
           </p:cNvPr>
@@ -19194,7 +19194,7 @@
           <p:cNvPr id="20" name="">
             <a:extLst xmlns:a="http://schemas.openxmlformats.org/drawingml/2006/main">
               <a:ext uri="{FF2B5EF4-FFF2-40B4-BE49-F238E27FC236}">
-                <a16:creationId xmlns:a16="http://schemas.microsoft.com/office/drawing/2014/main" id="{009E8903-E150-4EDF-B801-25AB87FB2910}"/>
+                <a16:creationId xmlns:a16="http://schemas.microsoft.com/office/drawing/2014/main" id="{2AB6CA17-30B7-48A4-99B1-2F59C25C3247}"/>
               </a:ext>
             </a:extLst>
           </p:cNvPr>
@@ -19258,7 +19258,7 @@
           <p:cNvPr id="21" name="">
             <a:extLst xmlns:a="http://schemas.openxmlformats.org/drawingml/2006/main">
               <a:ext uri="{FF2B5EF4-FFF2-40B4-BE49-F238E27FC236}">
-                <a16:creationId xmlns:a16="http://schemas.microsoft.com/office/drawing/2014/main" id="{8A817C0E-E5E8-42DE-83E7-C6C4453C0E5C}"/>
+                <a16:creationId xmlns:a16="http://schemas.microsoft.com/office/drawing/2014/main" id="{08B4D84F-95B3-4EF5-BA16-DC7FD7FCF443}"/>
               </a:ext>
             </a:extLst>
           </p:cNvPr>
@@ -19322,7 +19322,7 @@
           <p:cNvPr id="22" name="">
             <a:extLst xmlns:a="http://schemas.openxmlformats.org/drawingml/2006/main">
               <a:ext uri="{FF2B5EF4-FFF2-40B4-BE49-F238E27FC236}">
-                <a16:creationId xmlns:a16="http://schemas.microsoft.com/office/drawing/2014/main" id="{92456D1D-85EE-4552-A884-CC90CCB8D9D4}"/>
+                <a16:creationId xmlns:a16="http://schemas.microsoft.com/office/drawing/2014/main" id="{DF6812CA-5940-4716-A1E2-EF6120F23FEF}"/>
               </a:ext>
             </a:extLst>
           </p:cNvPr>
@@ -19386,7 +19386,7 @@
           <p:cNvPr id="23" name="">
             <a:extLst xmlns:a="http://schemas.openxmlformats.org/drawingml/2006/main">
               <a:ext uri="{FF2B5EF4-FFF2-40B4-BE49-F238E27FC236}">
-                <a16:creationId xmlns:a16="http://schemas.microsoft.com/office/drawing/2014/main" id="{AD621911-D388-4235-B837-5E9BD1C19546}"/>
+                <a16:creationId xmlns:a16="http://schemas.microsoft.com/office/drawing/2014/main" id="{FEC9A108-F93C-427D-B9F5-C3A349D7A381}"/>
               </a:ext>
             </a:extLst>
           </p:cNvPr>
@@ -19450,7 +19450,7 @@
           <p:cNvPr id="24" name="">
             <a:extLst xmlns:a="http://schemas.openxmlformats.org/drawingml/2006/main">
               <a:ext uri="{FF2B5EF4-FFF2-40B4-BE49-F238E27FC236}">
-                <a16:creationId xmlns:a16="http://schemas.microsoft.com/office/drawing/2014/main" id="{3A135C78-98A0-4612-A237-07C6B9910095}"/>
+                <a16:creationId xmlns:a16="http://schemas.microsoft.com/office/drawing/2014/main" id="{13CF3262-C10F-40D8-AD6D-8D84C201FE9B}"/>
               </a:ext>
             </a:extLst>
           </p:cNvPr>
@@ -19514,7 +19514,7 @@
           <p:cNvPr id="25" name="">
             <a:extLst xmlns:a="http://schemas.openxmlformats.org/drawingml/2006/main">
               <a:ext uri="{FF2B5EF4-FFF2-40B4-BE49-F238E27FC236}">
-                <a16:creationId xmlns:a16="http://schemas.microsoft.com/office/drawing/2014/main" id="{327A0498-ACF3-4037-9B3A-DD2B952D969E}"/>
+                <a16:creationId xmlns:a16="http://schemas.microsoft.com/office/drawing/2014/main" id="{2C0E31AC-0F41-4370-8813-507EAC9342E3}"/>
               </a:ext>
             </a:extLst>
           </p:cNvPr>
@@ -19578,7 +19578,7 @@
           <p:cNvPr id="26" name="">
             <a:extLst xmlns:a="http://schemas.openxmlformats.org/drawingml/2006/main">
               <a:ext uri="{FF2B5EF4-FFF2-40B4-BE49-F238E27FC236}">
-                <a16:creationId xmlns:a16="http://schemas.microsoft.com/office/drawing/2014/main" id="{2B8BC4CA-F899-44B4-8D78-B56F55EF8DD5}"/>
+                <a16:creationId xmlns:a16="http://schemas.microsoft.com/office/drawing/2014/main" id="{76D93312-D8F9-40A9-AD01-E5DD3B1F7C16}"/>
               </a:ext>
             </a:extLst>
           </p:cNvPr>
@@ -19642,7 +19642,7 @@
           <p:cNvPr id="27" name="">
             <a:extLst xmlns:a="http://schemas.openxmlformats.org/drawingml/2006/main">
               <a:ext uri="{FF2B5EF4-FFF2-40B4-BE49-F238E27FC236}">
-                <a16:creationId xmlns:a16="http://schemas.microsoft.com/office/drawing/2014/main" id="{B474344B-35A9-435E-9329-A1EF568758A0}"/>
+                <a16:creationId xmlns:a16="http://schemas.microsoft.com/office/drawing/2014/main" id="{43532F29-3EC0-46DA-9971-A74C20E2B717}"/>
               </a:ext>
             </a:extLst>
           </p:cNvPr>
@@ -19706,7 +19706,7 @@
           <p:cNvPr id="28" name="">
             <a:extLst xmlns:a="http://schemas.openxmlformats.org/drawingml/2006/main">
               <a:ext uri="{FF2B5EF4-FFF2-40B4-BE49-F238E27FC236}">
-                <a16:creationId xmlns:a16="http://schemas.microsoft.com/office/drawing/2014/main" id="{08FC427D-47E1-4106-B594-36D30DF16497}"/>
+                <a16:creationId xmlns:a16="http://schemas.microsoft.com/office/drawing/2014/main" id="{05216B0E-5B1D-4F34-AFF9-6274F7FE22B2}"/>
               </a:ext>
             </a:extLst>
           </p:cNvPr>
@@ -19770,7 +19770,7 @@
           <p:cNvPr id="29" name="">
             <a:extLst xmlns:a="http://schemas.openxmlformats.org/drawingml/2006/main">
               <a:ext uri="{FF2B5EF4-FFF2-40B4-BE49-F238E27FC236}">
-                <a16:creationId xmlns:a16="http://schemas.microsoft.com/office/drawing/2014/main" id="{508AA813-6A20-45D8-A3C6-C35D06D34722}"/>
+                <a16:creationId xmlns:a16="http://schemas.microsoft.com/office/drawing/2014/main" id="{2A2E4899-179B-4292-951B-EF7F004E04C9}"/>
               </a:ext>
             </a:extLst>
           </p:cNvPr>
@@ -19834,7 +19834,7 @@
           <p:cNvPr id="30" name="">
             <a:extLst xmlns:a="http://schemas.openxmlformats.org/drawingml/2006/main">
               <a:ext uri="{FF2B5EF4-FFF2-40B4-BE49-F238E27FC236}">
-                <a16:creationId xmlns:a16="http://schemas.microsoft.com/office/drawing/2014/main" id="{F8CCE92B-0EAA-410A-A7AD-FED896E14080}"/>
+                <a16:creationId xmlns:a16="http://schemas.microsoft.com/office/drawing/2014/main" id="{99295743-3A4F-403D-A0B2-19FD49198E90}"/>
               </a:ext>
             </a:extLst>
           </p:cNvPr>
@@ -19898,7 +19898,7 @@
           <p:cNvPr id="31" name="">
             <a:extLst xmlns:a="http://schemas.openxmlformats.org/drawingml/2006/main">
               <a:ext uri="{FF2B5EF4-FFF2-40B4-BE49-F238E27FC236}">
-                <a16:creationId xmlns:a16="http://schemas.microsoft.com/office/drawing/2014/main" id="{6523BBC0-085E-4EEF-890B-D7A5AF893059}"/>
+                <a16:creationId xmlns:a16="http://schemas.microsoft.com/office/drawing/2014/main" id="{736BADA5-636B-4403-B012-D3C6C2CBF882}"/>
               </a:ext>
             </a:extLst>
           </p:cNvPr>
@@ -19962,7 +19962,7 @@
           <p:cNvPr id="32" name="">
             <a:extLst xmlns:a="http://schemas.openxmlformats.org/drawingml/2006/main">
               <a:ext uri="{FF2B5EF4-FFF2-40B4-BE49-F238E27FC236}">
-                <a16:creationId xmlns:a16="http://schemas.microsoft.com/office/drawing/2014/main" id="{DB94C78D-92B9-4928-8AF1-8C54CE949B8C}"/>
+                <a16:creationId xmlns:a16="http://schemas.microsoft.com/office/drawing/2014/main" id="{364ED42C-1A51-445D-BF9F-66F14D44046C}"/>
               </a:ext>
             </a:extLst>
           </p:cNvPr>
@@ -20026,7 +20026,7 @@
           <p:cNvPr id="33" name="">
             <a:extLst xmlns:a="http://schemas.openxmlformats.org/drawingml/2006/main">
               <a:ext uri="{FF2B5EF4-FFF2-40B4-BE49-F238E27FC236}">
-                <a16:creationId xmlns:a16="http://schemas.microsoft.com/office/drawing/2014/main" id="{1C06FCAF-BAA4-42AB-8B5C-B631CF1B6A38}"/>
+                <a16:creationId xmlns:a16="http://schemas.microsoft.com/office/drawing/2014/main" id="{161155FE-D544-483C-94FD-BA423FC619BD}"/>
               </a:ext>
             </a:extLst>
           </p:cNvPr>
@@ -20090,7 +20090,7 @@
           <p:cNvPr id="34" name="">
             <a:extLst xmlns:a="http://schemas.openxmlformats.org/drawingml/2006/main">
               <a:ext uri="{FF2B5EF4-FFF2-40B4-BE49-F238E27FC236}">
-                <a16:creationId xmlns:a16="http://schemas.microsoft.com/office/drawing/2014/main" id="{22005B60-038A-4FE7-B7C0-9CF6D2AAFFFB}"/>
+                <a16:creationId xmlns:a16="http://schemas.microsoft.com/office/drawing/2014/main" id="{39188163-E6EB-4A2A-A868-CAADC72EA231}"/>
               </a:ext>
             </a:extLst>
           </p:cNvPr>
@@ -20154,7 +20154,7 @@
           <p:cNvPr id="35" name="">
             <a:extLst xmlns:a="http://schemas.openxmlformats.org/drawingml/2006/main">
               <a:ext uri="{FF2B5EF4-FFF2-40B4-BE49-F238E27FC236}">
-                <a16:creationId xmlns:a16="http://schemas.microsoft.com/office/drawing/2014/main" id="{F88F1813-4D98-4135-8202-93685C079C0E}"/>
+                <a16:creationId xmlns:a16="http://schemas.microsoft.com/office/drawing/2014/main" id="{CE337CD7-0EEA-4ADB-AA11-1AD3E4657207}"/>
               </a:ext>
             </a:extLst>
           </p:cNvPr>
@@ -20218,7 +20218,7 @@
           <p:cNvPr id="36" name="">
             <a:extLst xmlns:a="http://schemas.openxmlformats.org/drawingml/2006/main">
               <a:ext uri="{FF2B5EF4-FFF2-40B4-BE49-F238E27FC236}">
-                <a16:creationId xmlns:a16="http://schemas.microsoft.com/office/drawing/2014/main" id="{5AD2D1C9-7E39-4813-8E35-69E2FD5DE47D}"/>
+                <a16:creationId xmlns:a16="http://schemas.microsoft.com/office/drawing/2014/main" id="{A5B45F29-750F-41A6-A727-5EDDA43B5523}"/>
               </a:ext>
             </a:extLst>
           </p:cNvPr>
@@ -20282,7 +20282,7 @@
           <p:cNvPr id="37" name="">
             <a:extLst xmlns:a="http://schemas.openxmlformats.org/drawingml/2006/main">
               <a:ext uri="{FF2B5EF4-FFF2-40B4-BE49-F238E27FC236}">
-                <a16:creationId xmlns:a16="http://schemas.microsoft.com/office/drawing/2014/main" id="{DA073C35-6170-4769-A70B-6DA08677F8C4}"/>
+                <a16:creationId xmlns:a16="http://schemas.microsoft.com/office/drawing/2014/main" id="{792B7776-120D-4E67-9C21-10C700A9CAB3}"/>
               </a:ext>
             </a:extLst>
           </p:cNvPr>
@@ -20346,7 +20346,7 @@
           <p:cNvPr id="38" name="">
             <a:extLst xmlns:a="http://schemas.openxmlformats.org/drawingml/2006/main">
               <a:ext uri="{FF2B5EF4-FFF2-40B4-BE49-F238E27FC236}">
-                <a16:creationId xmlns:a16="http://schemas.microsoft.com/office/drawing/2014/main" id="{6D87CFF9-5007-4627-BF2B-56192F84611E}"/>
+                <a16:creationId xmlns:a16="http://schemas.microsoft.com/office/drawing/2014/main" id="{E9A187D8-077C-4191-9035-7B1D9514848E}"/>
               </a:ext>
             </a:extLst>
           </p:cNvPr>
@@ -20410,7 +20410,7 @@
           <p:cNvPr id="39" name="">
             <a:extLst xmlns:a="http://schemas.openxmlformats.org/drawingml/2006/main">
               <a:ext uri="{FF2B5EF4-FFF2-40B4-BE49-F238E27FC236}">
-                <a16:creationId xmlns:a16="http://schemas.microsoft.com/office/drawing/2014/main" id="{5D2EC493-A2D0-461A-8146-50C53ADB3447}"/>
+                <a16:creationId xmlns:a16="http://schemas.microsoft.com/office/drawing/2014/main" id="{7BDF63CB-C401-42F8-A41F-4191147BEBFE}"/>
               </a:ext>
             </a:extLst>
           </p:cNvPr>
@@ -20474,7 +20474,7 @@
           <p:cNvPr id="40" name="">
             <a:extLst xmlns:a="http://schemas.openxmlformats.org/drawingml/2006/main">
               <a:ext uri="{FF2B5EF4-FFF2-40B4-BE49-F238E27FC236}">
-                <a16:creationId xmlns:a16="http://schemas.microsoft.com/office/drawing/2014/main" id="{13A47F20-D09B-4A5D-8CF6-39748C85ACED}"/>
+                <a16:creationId xmlns:a16="http://schemas.microsoft.com/office/drawing/2014/main" id="{DE26B2E6-332E-4777-8525-86523C677E90}"/>
               </a:ext>
             </a:extLst>
           </p:cNvPr>
@@ -20538,7 +20538,7 @@
           <p:cNvPr id="41" name="">
             <a:extLst xmlns:a="http://schemas.openxmlformats.org/drawingml/2006/main">
               <a:ext uri="{FF2B5EF4-FFF2-40B4-BE49-F238E27FC236}">
-                <a16:creationId xmlns:a16="http://schemas.microsoft.com/office/drawing/2014/main" id="{B62CE8C4-8405-43FF-B71B-3204573F897C}"/>
+                <a16:creationId xmlns:a16="http://schemas.microsoft.com/office/drawing/2014/main" id="{22C347FF-187B-4BEF-84EA-BCBAD1C92CFE}"/>
               </a:ext>
             </a:extLst>
           </p:cNvPr>
@@ -20602,7 +20602,7 @@
           <p:cNvPr id="42" name="">
             <a:extLst xmlns:a="http://schemas.openxmlformats.org/drawingml/2006/main">
               <a:ext uri="{FF2B5EF4-FFF2-40B4-BE49-F238E27FC236}">
-                <a16:creationId xmlns:a16="http://schemas.microsoft.com/office/drawing/2014/main" id="{8A8A5F08-EBEC-49EF-866B-74683E8911A9}"/>
+                <a16:creationId xmlns:a16="http://schemas.microsoft.com/office/drawing/2014/main" id="{7754F4A2-6ABB-4C82-97E4-8DCEC4B506B5}"/>
               </a:ext>
             </a:extLst>
           </p:cNvPr>
@@ -20666,7 +20666,7 @@
           <p:cNvPr id="43" name="">
             <a:extLst xmlns:a="http://schemas.openxmlformats.org/drawingml/2006/main">
               <a:ext uri="{FF2B5EF4-FFF2-40B4-BE49-F238E27FC236}">
-                <a16:creationId xmlns:a16="http://schemas.microsoft.com/office/drawing/2014/main" id="{E9ED4CD5-B107-45F0-9DA4-6140390A544D}"/>
+                <a16:creationId xmlns:a16="http://schemas.microsoft.com/office/drawing/2014/main" id="{BFD8DC06-B965-4153-AE33-6933D66C26BF}"/>
               </a:ext>
             </a:extLst>
           </p:cNvPr>
@@ -20730,7 +20730,7 @@
           <p:cNvPr id="44" name="">
             <a:extLst xmlns:a="http://schemas.openxmlformats.org/drawingml/2006/main">
               <a:ext uri="{FF2B5EF4-FFF2-40B4-BE49-F238E27FC236}">
-                <a16:creationId xmlns:a16="http://schemas.microsoft.com/office/drawing/2014/main" id="{0345C83F-C122-4AC8-BF30-C1B546C53C8B}"/>
+                <a16:creationId xmlns:a16="http://schemas.microsoft.com/office/drawing/2014/main" id="{98D436A8-C07C-48F9-843F-7259B6C52FD7}"/>
               </a:ext>
             </a:extLst>
           </p:cNvPr>
@@ -20794,7 +20794,7 @@
           <p:cNvPr id="45" name="">
             <a:extLst xmlns:a="http://schemas.openxmlformats.org/drawingml/2006/main">
               <a:ext uri="{FF2B5EF4-FFF2-40B4-BE49-F238E27FC236}">
-                <a16:creationId xmlns:a16="http://schemas.microsoft.com/office/drawing/2014/main" id="{ACCA801B-5919-454A-BBA2-F4637202DE35}"/>
+                <a16:creationId xmlns:a16="http://schemas.microsoft.com/office/drawing/2014/main" id="{B5CCEF5B-845E-42E3-8230-E95B31A4A9E4}"/>
               </a:ext>
             </a:extLst>
           </p:cNvPr>
@@ -20858,7 +20858,7 @@
           <p:cNvPr id="46" name="">
             <a:extLst xmlns:a="http://schemas.openxmlformats.org/drawingml/2006/main">
               <a:ext uri="{FF2B5EF4-FFF2-40B4-BE49-F238E27FC236}">
-                <a16:creationId xmlns:a16="http://schemas.microsoft.com/office/drawing/2014/main" id="{55187AA5-B18D-4233-919C-5E44709F2B88}"/>
+                <a16:creationId xmlns:a16="http://schemas.microsoft.com/office/drawing/2014/main" id="{ACB6A072-0BA1-4BA3-9BF8-4438A5D2CD78}"/>
               </a:ext>
             </a:extLst>
           </p:cNvPr>
@@ -20893,7 +20893,7 @@
           <p:cNvPr id="47" name="">
             <a:extLst xmlns:a="http://schemas.openxmlformats.org/drawingml/2006/main">
               <a:ext uri="{FF2B5EF4-FFF2-40B4-BE49-F238E27FC236}">
-                <a16:creationId xmlns:a16="http://schemas.microsoft.com/office/drawing/2014/main" id="{B0D6A678-AA91-442F-885E-DEA213F256C9}"/>
+                <a16:creationId xmlns:a16="http://schemas.microsoft.com/office/drawing/2014/main" id="{30783529-DA7B-4EAD-A8D9-DE5FA5B31E7B}"/>
               </a:ext>
             </a:extLst>
           </p:cNvPr>
@@ -20957,7 +20957,7 @@
           <p:cNvPr id="48" name="">
             <a:extLst xmlns:a="http://schemas.openxmlformats.org/drawingml/2006/main">
               <a:ext uri="{FF2B5EF4-FFF2-40B4-BE49-F238E27FC236}">
-                <a16:creationId xmlns:a16="http://schemas.microsoft.com/office/drawing/2014/main" id="{66508A22-7AC3-45C0-BD4D-B6CCFD464526}"/>
+                <a16:creationId xmlns:a16="http://schemas.microsoft.com/office/drawing/2014/main" id="{5599964A-FB7E-422D-BEBB-BFD7539A0479}"/>
               </a:ext>
             </a:extLst>
           </p:cNvPr>
@@ -21019,7 +21019,7 @@
     </p:spTree>
     <p:extLst>
       <p:ext uri="{BB962C8B-B14F-4D97-AF65-F5344CB8AC3E}">
-        <p14:creationId xmlns:p14="http://schemas.microsoft.com/office/powerpoint/2010/main" val="346818655"/>
+        <p14:creationId xmlns:p14="http://schemas.microsoft.com/office/powerpoint/2010/main" val="362956315"/>
       </p:ext>
     </p:extLst>
   </p:cSld>
